--- a/source/Instructor Progress Test 2 Grams_Updated/Instructor Progress Test 2 Grams_Updated.pptx
+++ b/source/Instructor Progress Test 2 Grams_Updated/Instructor Progress Test 2 Grams_Updated.pptx
@@ -3142,11 +3142,11 @@
       </p:sp>
       <p:sp>
         <p:nvSpPr>
-          <p:cNvPr id="3" name="Rounded Rectangle 2"/>
+          <p:cNvPr id="3" name="Rounded Rectangle 2">
+            <a:hlinkClick r:id="rId2"/>
+          </p:cNvPr>
           <p:cNvSpPr/>
-          <p:nvPr>
-            <a:hlinkClick r:id="rId2"/>
-          </p:nvPr>
+          <p:nvPr/>
         </p:nvSpPr>
         <p:spPr>
           <a:xfrm>
@@ -3252,11 +3252,11 @@
       </p:sp>
       <p:sp>
         <p:nvSpPr>
-          <p:cNvPr id="5" name="Rounded Rectangle 4"/>
+          <p:cNvPr id="5" name="Rounded Rectangle 4">
+            <a:hlinkClick r:id="rId7"/>
+          </p:cNvPr>
           <p:cNvSpPr/>
-          <p:nvPr>
-            <a:hlinkClick r:id="rId7"/>
-          </p:nvPr>
+          <p:nvPr/>
         </p:nvSpPr>
         <p:spPr>
           <a:xfrm>
@@ -3354,11 +3354,11 @@
       </p:sp>
       <p:sp>
         <p:nvSpPr>
-          <p:cNvPr id="7" name="Rounded Rectangle 6"/>
+          <p:cNvPr id="7" name="Rounded Rectangle 6">
+            <a:hlinkClick r:id="rId11"/>
+          </p:cNvPr>
           <p:cNvSpPr/>
-          <p:nvPr>
-            <a:hlinkClick r:id="rId11"/>
-          </p:nvPr>
+          <p:nvPr/>
         </p:nvSpPr>
         <p:spPr>
           <a:xfrm>
@@ -3440,11 +3440,11 @@
       </p:sp>
       <p:sp>
         <p:nvSpPr>
-          <p:cNvPr id="9" name="Rounded Rectangle 8"/>
+          <p:cNvPr id="9" name="Rounded Rectangle 8">
+            <a:hlinkClick r:id="rId13"/>
+          </p:cNvPr>
           <p:cNvSpPr/>
-          <p:nvPr>
-            <a:hlinkClick r:id="rId13"/>
-          </p:nvPr>
+          <p:nvPr/>
         </p:nvSpPr>
         <p:spPr>
           <a:xfrm>
@@ -3526,11 +3526,11 @@
       </p:sp>
       <p:sp>
         <p:nvSpPr>
-          <p:cNvPr id="11" name="Rounded Rectangle 10"/>
+          <p:cNvPr id="11" name="Rounded Rectangle 10">
+            <a:hlinkClick r:id="rId15"/>
+          </p:cNvPr>
           <p:cNvSpPr/>
-          <p:nvPr>
-            <a:hlinkClick r:id="rId15"/>
-          </p:nvPr>
+          <p:nvPr/>
         </p:nvSpPr>
         <p:spPr>
           <a:xfrm>
@@ -3612,11 +3612,11 @@
       </p:sp>
       <p:sp>
         <p:nvSpPr>
-          <p:cNvPr id="13" name="Rounded Rectangle 12"/>
+          <p:cNvPr id="13" name="Rounded Rectangle 12">
+            <a:hlinkClick r:id="rId17"/>
+          </p:cNvPr>
           <p:cNvSpPr/>
-          <p:nvPr>
-            <a:hlinkClick r:id="rId17"/>
-          </p:nvPr>
+          <p:nvPr/>
         </p:nvSpPr>
         <p:spPr>
           <a:xfrm>
@@ -3722,11 +3722,11 @@
       </p:sp>
       <p:sp>
         <p:nvSpPr>
-          <p:cNvPr id="15" name="Rounded Rectangle 14"/>
+          <p:cNvPr id="15" name="Rounded Rectangle 14">
+            <a:hlinkClick r:id="rId22"/>
+          </p:cNvPr>
           <p:cNvSpPr/>
-          <p:nvPr>
-            <a:hlinkClick r:id="rId22"/>
-          </p:nvPr>
+          <p:nvPr/>
         </p:nvSpPr>
         <p:spPr>
           <a:xfrm>
@@ -3832,11 +3832,11 @@
       </p:sp>
       <p:sp>
         <p:nvSpPr>
-          <p:cNvPr id="17" name="Rounded Rectangle 16"/>
+          <p:cNvPr id="17" name="Rounded Rectangle 16">
+            <a:hlinkClick r:id="rId27"/>
+          </p:cNvPr>
           <p:cNvSpPr/>
-          <p:nvPr>
-            <a:hlinkClick r:id="rId27"/>
-          </p:nvPr>
+          <p:nvPr/>
         </p:nvSpPr>
         <p:spPr>
           <a:xfrm>
@@ -3934,11 +3934,11 @@
       </p:sp>
       <p:sp>
         <p:nvSpPr>
-          <p:cNvPr id="19" name="Rounded Rectangle 18"/>
+          <p:cNvPr id="19" name="Rounded Rectangle 18">
+            <a:hlinkClick r:id="rId31"/>
+          </p:cNvPr>
           <p:cNvSpPr/>
-          <p:nvPr>
-            <a:hlinkClick r:id="rId31"/>
-          </p:nvPr>
+          <p:nvPr/>
         </p:nvSpPr>
         <p:spPr>
           <a:xfrm>
@@ -4036,11 +4036,11 @@
       </p:sp>
       <p:sp>
         <p:nvSpPr>
-          <p:cNvPr id="21" name="Rounded Rectangle 20"/>
+          <p:cNvPr id="21" name="Rounded Rectangle 20">
+            <a:hlinkClick r:id="rId35"/>
+          </p:cNvPr>
           <p:cNvSpPr/>
-          <p:nvPr>
-            <a:hlinkClick r:id="rId35"/>
-          </p:nvPr>
+          <p:nvPr/>
         </p:nvSpPr>
         <p:spPr>
           <a:xfrm>
@@ -4122,11 +4122,11 @@
       </p:sp>
       <p:sp>
         <p:nvSpPr>
-          <p:cNvPr id="23" name="Rounded Rectangle 22"/>
+          <p:cNvPr id="23" name="Rounded Rectangle 22">
+            <a:hlinkClick r:id="rId37"/>
+          </p:cNvPr>
           <p:cNvSpPr/>
-          <p:nvPr>
-            <a:hlinkClick r:id="rId37"/>
-          </p:nvPr>
+          <p:nvPr/>
         </p:nvSpPr>
         <p:spPr>
           <a:xfrm>
@@ -4224,11 +4224,11 @@
       </p:sp>
       <p:sp>
         <p:nvSpPr>
-          <p:cNvPr id="25" name="Rounded Rectangle 24"/>
+          <p:cNvPr id="25" name="Rounded Rectangle 24">
+            <a:hlinkClick r:id="rId41"/>
+          </p:cNvPr>
           <p:cNvSpPr/>
-          <p:nvPr>
-            <a:hlinkClick r:id="rId41"/>
-          </p:nvPr>
+          <p:nvPr/>
         </p:nvSpPr>
         <p:spPr>
           <a:xfrm>
@@ -4326,11 +4326,11 @@
       </p:sp>
       <p:sp>
         <p:nvSpPr>
-          <p:cNvPr id="27" name="Rounded Rectangle 26"/>
+          <p:cNvPr id="27" name="Rounded Rectangle 26">
+            <a:hlinkClick r:id="rId45"/>
+          </p:cNvPr>
           <p:cNvSpPr/>
-          <p:nvPr>
-            <a:hlinkClick r:id="rId45"/>
-          </p:nvPr>
+          <p:nvPr/>
         </p:nvSpPr>
         <p:spPr>
           <a:xfrm>
@@ -4412,11 +4412,11 @@
       </p:sp>
       <p:sp>
         <p:nvSpPr>
-          <p:cNvPr id="29" name="Rounded Rectangle 28"/>
+          <p:cNvPr id="29" name="Rounded Rectangle 28">
+            <a:hlinkClick r:id="rId47"/>
+          </p:cNvPr>
           <p:cNvSpPr/>
-          <p:nvPr>
-            <a:hlinkClick r:id="rId47"/>
-          </p:nvPr>
+          <p:nvPr/>
         </p:nvSpPr>
         <p:spPr>
           <a:xfrm>
@@ -4506,11 +4506,11 @@
       </p:sp>
       <p:sp>
         <p:nvSpPr>
-          <p:cNvPr id="31" name="Rounded Rectangle 30"/>
+          <p:cNvPr id="31" name="Rounded Rectangle 30">
+            <a:hlinkClick r:id="rId50"/>
+          </p:cNvPr>
           <p:cNvSpPr/>
-          <p:nvPr>
-            <a:hlinkClick r:id="rId50"/>
-          </p:nvPr>
+          <p:nvPr/>
         </p:nvSpPr>
         <p:spPr>
           <a:xfrm>
@@ -4677,11 +4677,11 @@
       </p:sp>
       <p:sp>
         <p:nvSpPr>
-          <p:cNvPr id="3" name="Rounded Rectangle 2"/>
+          <p:cNvPr id="3" name="Rounded Rectangle 2">
+            <a:hlinkClick r:id="rId2"/>
+          </p:cNvPr>
           <p:cNvSpPr/>
-          <p:nvPr>
-            <a:hlinkClick r:id="rId2"/>
-          </p:nvPr>
+          <p:nvPr/>
         </p:nvSpPr>
         <p:spPr>
           <a:xfrm>
@@ -4787,11 +4787,11 @@
       </p:sp>
       <p:sp>
         <p:nvSpPr>
-          <p:cNvPr id="5" name="Rounded Rectangle 4"/>
+          <p:cNvPr id="5" name="Rounded Rectangle 4">
+            <a:hlinkClick r:id="rId7"/>
+          </p:cNvPr>
           <p:cNvSpPr/>
-          <p:nvPr>
-            <a:hlinkClick r:id="rId7"/>
-          </p:nvPr>
+          <p:nvPr/>
         </p:nvSpPr>
         <p:spPr>
           <a:xfrm>
@@ -4873,11 +4873,11 @@
       </p:sp>
       <p:sp>
         <p:nvSpPr>
-          <p:cNvPr id="7" name="Rounded Rectangle 6"/>
+          <p:cNvPr id="7" name="Rounded Rectangle 6">
+            <a:hlinkClick r:id="rId9"/>
+          </p:cNvPr>
           <p:cNvSpPr/>
-          <p:nvPr>
-            <a:hlinkClick r:id="rId9"/>
-          </p:nvPr>
+          <p:nvPr/>
         </p:nvSpPr>
         <p:spPr>
           <a:xfrm>
@@ -4983,11 +4983,11 @@
       </p:sp>
       <p:sp>
         <p:nvSpPr>
-          <p:cNvPr id="9" name="Rounded Rectangle 8"/>
+          <p:cNvPr id="9" name="Rounded Rectangle 8">
+            <a:hlinkClick r:id="rId14"/>
+          </p:cNvPr>
           <p:cNvSpPr/>
-          <p:nvPr>
-            <a:hlinkClick r:id="rId14"/>
-          </p:nvPr>
+          <p:nvPr/>
         </p:nvSpPr>
         <p:spPr>
           <a:xfrm>
@@ -5077,11 +5077,11 @@
       </p:sp>
       <p:sp>
         <p:nvSpPr>
-          <p:cNvPr id="11" name="Rounded Rectangle 10"/>
+          <p:cNvPr id="11" name="Rounded Rectangle 10">
+            <a:hlinkClick r:id="rId17"/>
+          </p:cNvPr>
           <p:cNvSpPr/>
-          <p:nvPr>
-            <a:hlinkClick r:id="rId17"/>
-          </p:nvPr>
+          <p:nvPr/>
         </p:nvSpPr>
         <p:spPr>
           <a:xfrm>
@@ -5179,11 +5179,11 @@
       </p:sp>
       <p:sp>
         <p:nvSpPr>
-          <p:cNvPr id="13" name="Rounded Rectangle 12"/>
+          <p:cNvPr id="13" name="Rounded Rectangle 12">
+            <a:hlinkClick r:id="rId21"/>
+          </p:cNvPr>
           <p:cNvSpPr/>
-          <p:nvPr>
-            <a:hlinkClick r:id="rId21"/>
-          </p:nvPr>
+          <p:nvPr/>
         </p:nvSpPr>
         <p:spPr>
           <a:xfrm>
@@ -5265,11 +5265,11 @@
       </p:sp>
       <p:sp>
         <p:nvSpPr>
-          <p:cNvPr id="15" name="Rounded Rectangle 14"/>
+          <p:cNvPr id="15" name="Rounded Rectangle 14">
+            <a:hlinkClick r:id="rId23"/>
+          </p:cNvPr>
           <p:cNvSpPr/>
-          <p:nvPr>
-            <a:hlinkClick r:id="rId23"/>
-          </p:nvPr>
+          <p:nvPr/>
         </p:nvSpPr>
         <p:spPr>
           <a:xfrm>
@@ -5375,11 +5375,11 @@
       </p:sp>
       <p:sp>
         <p:nvSpPr>
-          <p:cNvPr id="17" name="Rounded Rectangle 16"/>
+          <p:cNvPr id="17" name="Rounded Rectangle 16">
+            <a:hlinkClick r:id="rId28"/>
+          </p:cNvPr>
           <p:cNvSpPr/>
-          <p:nvPr>
-            <a:hlinkClick r:id="rId28"/>
-          </p:nvPr>
+          <p:nvPr/>
         </p:nvSpPr>
         <p:spPr>
           <a:xfrm>
@@ -5461,11 +5461,11 @@
       </p:sp>
       <p:sp>
         <p:nvSpPr>
-          <p:cNvPr id="19" name="Rounded Rectangle 18"/>
+          <p:cNvPr id="19" name="Rounded Rectangle 18">
+            <a:hlinkClick r:id="rId30"/>
+          </p:cNvPr>
           <p:cNvSpPr/>
-          <p:nvPr>
-            <a:hlinkClick r:id="rId30"/>
-          </p:nvPr>
+          <p:nvPr/>
         </p:nvSpPr>
         <p:spPr>
           <a:xfrm>
@@ -5571,11 +5571,11 @@
       </p:sp>
       <p:sp>
         <p:nvSpPr>
-          <p:cNvPr id="21" name="Rounded Rectangle 20"/>
+          <p:cNvPr id="21" name="Rounded Rectangle 20">
+            <a:hlinkClick r:id="rId35"/>
+          </p:cNvPr>
           <p:cNvSpPr/>
-          <p:nvPr>
-            <a:hlinkClick r:id="rId35"/>
-          </p:nvPr>
+          <p:nvPr/>
         </p:nvSpPr>
         <p:spPr>
           <a:xfrm>
@@ -5665,11 +5665,11 @@
       </p:sp>
       <p:sp>
         <p:nvSpPr>
-          <p:cNvPr id="23" name="Rounded Rectangle 22"/>
+          <p:cNvPr id="23" name="Rounded Rectangle 22">
+            <a:hlinkClick r:id="rId38"/>
+          </p:cNvPr>
           <p:cNvSpPr/>
-          <p:nvPr>
-            <a:hlinkClick r:id="rId38"/>
-          </p:nvPr>
+          <p:nvPr/>
         </p:nvSpPr>
         <p:spPr>
           <a:xfrm>
@@ -5767,11 +5767,11 @@
       </p:sp>
       <p:sp>
         <p:nvSpPr>
-          <p:cNvPr id="25" name="Rounded Rectangle 24"/>
+          <p:cNvPr id="25" name="Rounded Rectangle 24">
+            <a:hlinkClick r:id="rId42"/>
+          </p:cNvPr>
           <p:cNvSpPr/>
-          <p:nvPr>
-            <a:hlinkClick r:id="rId42"/>
-          </p:nvPr>
+          <p:nvPr/>
         </p:nvSpPr>
         <p:spPr>
           <a:xfrm>
@@ -5861,11 +5861,11 @@
       </p:sp>
       <p:sp>
         <p:nvSpPr>
-          <p:cNvPr id="27" name="Rounded Rectangle 26"/>
+          <p:cNvPr id="27" name="Rounded Rectangle 26">
+            <a:hlinkClick r:id="rId45"/>
+          </p:cNvPr>
           <p:cNvSpPr/>
-          <p:nvPr>
-            <a:hlinkClick r:id="rId45"/>
-          </p:nvPr>
+          <p:nvPr/>
         </p:nvSpPr>
         <p:spPr>
           <a:xfrm>
@@ -5971,11 +5971,11 @@
       </p:sp>
       <p:sp>
         <p:nvSpPr>
-          <p:cNvPr id="29" name="Rounded Rectangle 28"/>
+          <p:cNvPr id="29" name="Rounded Rectangle 28">
+            <a:hlinkClick r:id="rId50"/>
+          </p:cNvPr>
           <p:cNvSpPr/>
-          <p:nvPr>
-            <a:hlinkClick r:id="rId50"/>
-          </p:nvPr>
+          <p:nvPr/>
         </p:nvSpPr>
         <p:spPr>
           <a:xfrm>
@@ -6065,11 +6065,11 @@
       </p:sp>
       <p:sp>
         <p:nvSpPr>
-          <p:cNvPr id="31" name="Rounded Rectangle 30"/>
+          <p:cNvPr id="31" name="Rounded Rectangle 30">
+            <a:hlinkClick r:id="rId53"/>
+          </p:cNvPr>
           <p:cNvSpPr/>
-          <p:nvPr>
-            <a:hlinkClick r:id="rId53"/>
-          </p:nvPr>
+          <p:nvPr/>
         </p:nvSpPr>
         <p:spPr>
           <a:xfrm>

--- a/source/Instructor Progress Test 2 Grams_Updated/Instructor Progress Test 2 Grams_Updated.pptx
+++ b/source/Instructor Progress Test 2 Grams_Updated/Instructor Progress Test 2 Grams_Updated.pptx
@@ -7,6 +7,8 @@
   <p:sldIdLst>
     <p:sldId id="256" r:id="rId7"/>
     <p:sldId id="257" r:id="rId8"/>
+    <p:sldId id="258" r:id="rId9"/>
+    <p:sldId id="259" r:id="rId10"/>
   </p:sldIdLst>
   <p:sldSz cx="12188952" cy="6858000" type="screen4x3"/>
   <p:notesSz cx="6858000" cy="9144000"/>
@@ -3091,120 +3093,48 @@
       <p:grpSpPr/>
       <p:sp>
         <p:nvSpPr>
-          <p:cNvPr id="2" name="Rectangle 1"/>
-          <p:cNvSpPr/>
+          <p:cNvPr id="2" name="TextBox 1"/>
+          <p:cNvSpPr txBox="1"/>
           <p:nvPr/>
         </p:nvSpPr>
         <p:spPr>
           <a:xfrm>
-            <a:off x="0" y="0"/>
-            <a:ext cx="12188952" cy="548640"/>
+            <a:off x="914400" y="2377440"/>
+            <a:ext cx="10360152" cy="1280160"/>
           </a:xfrm>
           <a:prstGeom prst="rect">
             <a:avLst/>
           </a:prstGeom>
-          <a:solidFill>
-            <a:srgbClr val="1F3A5F"/>
-          </a:solidFill>
-          <a:ln>
-            <a:noFill/>
-          </a:ln>
-        </p:spPr>
-        <p:style>
-          <a:lnRef idx="1">
-            <a:schemeClr val="accent1"/>
-          </a:lnRef>
-          <a:fillRef idx="3">
-            <a:schemeClr val="accent1"/>
-          </a:fillRef>
-          <a:effectRef idx="2">
-            <a:schemeClr val="accent1"/>
-          </a:effectRef>
-          <a:fontRef idx="minor">
-            <a:schemeClr val="lt1"/>
-          </a:fontRef>
-        </p:style>
-        <p:txBody>
-          <a:bodyPr rtlCol="0" anchor="ctr" lIns="182880" rIns="182880"/>
+          <a:noFill/>
+        </p:spPr>
+        <p:txBody>
+          <a:bodyPr wrap="square">
+            <a:spAutoFit/>
+          </a:bodyPr>
           <a:lstStyle/>
           <a:p>
             <a:pPr algn="ctr"/>
             <a:r>
-              <a:rPr sz="2000" b="1">
-                <a:solidFill>
-                  <a:srgbClr val="FFFFFF"/>
-                </a:solidFill>
-              </a:rPr>
-              <a:t>Instructor Progress Test 2 Grams_Updated — Page 1 of 2</a:t>
-            </a:r>
-          </a:p>
-        </p:txBody>
-      </p:sp>
-      <p:sp>
-        <p:nvSpPr>
-          <p:cNvPr id="3" name="Rounded Rectangle 2"/>
-          <p:cNvSpPr/>
-          <p:nvPr>
-            <a:hlinkClick r:id="rId2"/>
-          </p:nvPr>
-        </p:nvSpPr>
-        <p:spPr>
-          <a:xfrm>
-            <a:off x="365760" y="731520"/>
-            <a:ext cx="2200046" cy="365760"/>
-          </a:xfrm>
-          <a:prstGeom prst="roundRect">
-            <a:avLst/>
-          </a:prstGeom>
-          <a:solidFill>
-            <a:srgbClr val="E8EEF7"/>
-          </a:solidFill>
-          <a:ln>
-            <a:solidFill>
-              <a:srgbClr val="1F3A5F"/>
-            </a:solidFill>
-          </a:ln>
-        </p:spPr>
-        <p:style>
-          <a:lnRef idx="1">
-            <a:schemeClr val="accent1"/>
-          </a:lnRef>
-          <a:fillRef idx="3">
-            <a:schemeClr val="accent1"/>
-          </a:fillRef>
-          <a:effectRef idx="2">
-            <a:schemeClr val="accent1"/>
-          </a:effectRef>
-          <a:fontRef idx="minor">
-            <a:schemeClr val="lt1"/>
-          </a:fontRef>
-        </p:style>
-        <p:txBody>
-          <a:bodyPr rtlCol="0" anchor="ctr" lIns="45720" rIns="45720"/>
-          <a:lstStyle/>
-          <a:p>
-            <a:pPr algn="ctr"/>
-            <a:r>
-              <a:rPr sz="900">
+              <a:rPr sz="4000" b="1">
                 <a:solidFill>
                   <a:srgbClr val="1F3A5F"/>
                 </a:solidFill>
               </a:rPr>
-              <a:t>Gram 1: FR Intrepid-class, Category 3, Dank</a:t>
-            </a:r>
-          </a:p>
-        </p:txBody>
-      </p:sp>
-      <p:sp>
-        <p:nvSpPr>
-          <p:cNvPr id="4" name="TextBox 3"/>
+              <a:t>Welcome to Instructor Progress Test 2 Grams_Updated</a:t>
+            </a:r>
+          </a:p>
+        </p:txBody>
+      </p:sp>
+      <p:sp>
+        <p:nvSpPr>
+          <p:cNvPr id="3" name="TextBox 2"/>
           <p:cNvSpPr txBox="1"/>
           <p:nvPr/>
         </p:nvSpPr>
         <p:spPr>
           <a:xfrm>
-            <a:off x="365760" y="1115568"/>
-            <a:ext cx="2200046" cy="1447800"/>
+            <a:off x="914400" y="3840480"/>
+            <a:ext cx="10360152" cy="731520"/>
           </a:xfrm>
           <a:prstGeom prst="rect">
             <a:avLst/>
@@ -3212,1396 +3142,19 @@
           <a:noFill/>
         </p:spPr>
         <p:txBody>
-          <a:bodyPr wrap="square">
+          <a:bodyPr wrap="none">
             <a:spAutoFit/>
           </a:bodyPr>
           <a:lstStyle/>
           <a:p>
-            <a:r>
-              <a:rPr sz="800">
-                <a:hlinkClick r:id="rId3"/>
-              </a:rPr>
-              <a:t>Lofar 1</a:t>
-            </a:r>
-          </a:p>
-          <a:p>
-            <a:r>
-              <a:rPr sz="800">
-                <a:hlinkClick r:id="rId4"/>
-              </a:rPr>
-              <a:t>Lofar 2</a:t>
-            </a:r>
-          </a:p>
-          <a:p>
-            <a:r>
-              <a:rPr sz="800">
-                <a:hlinkClick r:id="rId5"/>
-              </a:rPr>
-              <a:t>Lofar 3</a:t>
-            </a:r>
-          </a:p>
-          <a:p>
-            <a:r>
-              <a:rPr sz="800">
-                <a:hlinkClick r:id="rId6"/>
-              </a:rPr>
-              <a:t>Lofar 4</a:t>
-            </a:r>
-          </a:p>
-        </p:txBody>
-      </p:sp>
-      <p:sp>
-        <p:nvSpPr>
-          <p:cNvPr id="5" name="Rounded Rectangle 4"/>
-          <p:cNvSpPr/>
-          <p:nvPr>
-            <a:hlinkClick r:id="rId7"/>
-          </p:nvPr>
-        </p:nvSpPr>
-        <p:spPr>
-          <a:xfrm>
-            <a:off x="2657246" y="731520"/>
-            <a:ext cx="2200046" cy="365760"/>
-          </a:xfrm>
-          <a:prstGeom prst="roundRect">
-            <a:avLst/>
-          </a:prstGeom>
-          <a:solidFill>
-            <a:srgbClr val="E8EEF7"/>
-          </a:solidFill>
-          <a:ln>
-            <a:solidFill>
-              <a:srgbClr val="1F3A5F"/>
-            </a:solidFill>
-          </a:ln>
-        </p:spPr>
-        <p:style>
-          <a:lnRef idx="1">
-            <a:schemeClr val="accent1"/>
-          </a:lnRef>
-          <a:fillRef idx="3">
-            <a:schemeClr val="accent1"/>
-          </a:fillRef>
-          <a:effectRef idx="2">
-            <a:schemeClr val="accent1"/>
-          </a:effectRef>
-          <a:fontRef idx="minor">
-            <a:schemeClr val="lt1"/>
-          </a:fontRef>
-        </p:style>
-        <p:txBody>
-          <a:bodyPr rtlCol="0" anchor="ctr" lIns="45720" rIns="45720"/>
-          <a:lstStyle/>
-          <a:p>
             <a:pPr algn="ctr"/>
             <a:r>
-              <a:rPr sz="900">
+              <a:rPr sz="2400">
                 <a:solidFill>
                   <a:srgbClr val="1F3A5F"/>
                 </a:solidFill>
               </a:rPr>
-              <a:t>Gram 2: FR Venator-class, Category 3, Betazed</a:t>
-            </a:r>
-          </a:p>
-        </p:txBody>
-      </p:sp>
-      <p:sp>
-        <p:nvSpPr>
-          <p:cNvPr id="6" name="TextBox 5"/>
-          <p:cNvSpPr txBox="1"/>
-          <p:nvPr/>
-        </p:nvSpPr>
-        <p:spPr>
-          <a:xfrm>
-            <a:off x="2657246" y="1115568"/>
-            <a:ext cx="2200046" cy="1447800"/>
-          </a:xfrm>
-          <a:prstGeom prst="rect">
-            <a:avLst/>
-          </a:prstGeom>
-          <a:noFill/>
-        </p:spPr>
-        <p:txBody>
-          <a:bodyPr wrap="square">
-            <a:spAutoFit/>
-          </a:bodyPr>
-          <a:lstStyle/>
-          <a:p>
-            <a:r>
-              <a:rPr sz="800">
-                <a:hlinkClick r:id="rId8"/>
-              </a:rPr>
-              <a:t>Lofar 1</a:t>
-            </a:r>
-          </a:p>
-          <a:p>
-            <a:r>
-              <a:rPr sz="800">
-                <a:hlinkClick r:id="rId9"/>
-              </a:rPr>
-              <a:t>Lofar 2</a:t>
-            </a:r>
-          </a:p>
-          <a:p>
-            <a:r>
-              <a:rPr sz="800">
-                <a:hlinkClick r:id="rId10"/>
-              </a:rPr>
-              <a:t>Lofar 3</a:t>
-            </a:r>
-          </a:p>
-        </p:txBody>
-      </p:sp>
-      <p:sp>
-        <p:nvSpPr>
-          <p:cNvPr id="7" name="Rounded Rectangle 6"/>
-          <p:cNvSpPr/>
-          <p:nvPr>
-            <a:hlinkClick r:id="rId11"/>
-          </p:nvPr>
-        </p:nvSpPr>
-        <p:spPr>
-          <a:xfrm>
-            <a:off x="4948732" y="731520"/>
-            <a:ext cx="2200046" cy="365760"/>
-          </a:xfrm>
-          <a:prstGeom prst="roundRect">
-            <a:avLst/>
-          </a:prstGeom>
-          <a:solidFill>
-            <a:srgbClr val="E8EEF7"/>
-          </a:solidFill>
-          <a:ln>
-            <a:solidFill>
-              <a:srgbClr val="1F3A5F"/>
-            </a:solidFill>
-          </a:ln>
-        </p:spPr>
-        <p:style>
-          <a:lnRef idx="1">
-            <a:schemeClr val="accent1"/>
-          </a:lnRef>
-          <a:fillRef idx="3">
-            <a:schemeClr val="accent1"/>
-          </a:fillRef>
-          <a:effectRef idx="2">
-            <a:schemeClr val="accent1"/>
-          </a:effectRef>
-          <a:fontRef idx="minor">
-            <a:schemeClr val="lt1"/>
-          </a:fontRef>
-        </p:style>
-        <p:txBody>
-          <a:bodyPr rtlCol="0" anchor="ctr" lIns="45720" rIns="45720"/>
-          <a:lstStyle/>
-          <a:p>
-            <a:pPr algn="ctr"/>
-            <a:r>
-              <a:rPr sz="900">
-                <a:solidFill>
-                  <a:srgbClr val="1F3A5F"/>
-                </a:solidFill>
-              </a:rPr>
-              <a:t>Gram 3: Lambda Shuttle contact bearing 096, codename Mustafar</a:t>
-            </a:r>
-          </a:p>
-        </p:txBody>
-      </p:sp>
-      <p:sp>
-        <p:nvSpPr>
-          <p:cNvPr id="8" name="TextBox 7"/>
-          <p:cNvSpPr txBox="1"/>
-          <p:nvPr/>
-        </p:nvSpPr>
-        <p:spPr>
-          <a:xfrm>
-            <a:off x="4948732" y="1115568"/>
-            <a:ext cx="2200046" cy="1447800"/>
-          </a:xfrm>
-          <a:prstGeom prst="rect">
-            <a:avLst/>
-          </a:prstGeom>
-          <a:noFill/>
-        </p:spPr>
-        <p:txBody>
-          <a:bodyPr wrap="square">
-            <a:spAutoFit/>
-          </a:bodyPr>
-          <a:lstStyle/>
-          <a:p>
-            <a:r>
-              <a:rPr sz="800">
-                <a:hlinkClick r:id="rId12"/>
-              </a:rPr>
-              <a:t>Lofar 1</a:t>
-            </a:r>
-          </a:p>
-        </p:txBody>
-      </p:sp>
-      <p:sp>
-        <p:nvSpPr>
-          <p:cNvPr id="9" name="Rounded Rectangle 8"/>
-          <p:cNvSpPr/>
-          <p:nvPr>
-            <a:hlinkClick r:id="rId13"/>
-          </p:nvPr>
-        </p:nvSpPr>
-        <p:spPr>
-          <a:xfrm>
-            <a:off x="7240219" y="731520"/>
-            <a:ext cx="2200046" cy="365760"/>
-          </a:xfrm>
-          <a:prstGeom prst="roundRect">
-            <a:avLst/>
-          </a:prstGeom>
-          <a:solidFill>
-            <a:srgbClr val="E8EEF7"/>
-          </a:solidFill>
-          <a:ln>
-            <a:solidFill>
-              <a:srgbClr val="1F3A5F"/>
-            </a:solidFill>
-          </a:ln>
-        </p:spPr>
-        <p:style>
-          <a:lnRef idx="1">
-            <a:schemeClr val="accent1"/>
-          </a:lnRef>
-          <a:fillRef idx="3">
-            <a:schemeClr val="accent1"/>
-          </a:fillRef>
-          <a:effectRef idx="2">
-            <a:schemeClr val="accent1"/>
-          </a:effectRef>
-          <a:fontRef idx="minor">
-            <a:schemeClr val="lt1"/>
-          </a:fontRef>
-        </p:style>
-        <p:txBody>
-          <a:bodyPr rtlCol="0" anchor="ctr" lIns="45720" rIns="45720"/>
-          <a:lstStyle/>
-          <a:p>
-            <a:pPr algn="ctr"/>
-            <a:r>
-              <a:rPr sz="900">
-                <a:solidFill>
-                  <a:srgbClr val="1F3A5F"/>
-                </a:solidFill>
-              </a:rPr>
-              <a:t>Gram 4: FR Galaxy-class, Category 3, Dank</a:t>
-            </a:r>
-          </a:p>
-        </p:txBody>
-      </p:sp>
-      <p:sp>
-        <p:nvSpPr>
-          <p:cNvPr id="10" name="TextBox 9"/>
-          <p:cNvSpPr txBox="1"/>
-          <p:nvPr/>
-        </p:nvSpPr>
-        <p:spPr>
-          <a:xfrm>
-            <a:off x="7240219" y="1115568"/>
-            <a:ext cx="2200046" cy="1447800"/>
-          </a:xfrm>
-          <a:prstGeom prst="rect">
-            <a:avLst/>
-          </a:prstGeom>
-          <a:noFill/>
-        </p:spPr>
-        <p:txBody>
-          <a:bodyPr wrap="square">
-            <a:spAutoFit/>
-          </a:bodyPr>
-          <a:lstStyle/>
-          <a:p>
-            <a:r>
-              <a:rPr sz="800">
-                <a:hlinkClick r:id="rId14"/>
-              </a:rPr>
-              <a:t>Lofar 1</a:t>
-            </a:r>
-          </a:p>
-        </p:txBody>
-      </p:sp>
-      <p:sp>
-        <p:nvSpPr>
-          <p:cNvPr id="11" name="Rounded Rectangle 10"/>
-          <p:cNvSpPr/>
-          <p:nvPr>
-            <a:hlinkClick r:id="rId15"/>
-          </p:nvPr>
-        </p:nvSpPr>
-        <p:spPr>
-          <a:xfrm>
-            <a:off x="9531705" y="731520"/>
-            <a:ext cx="2200046" cy="365760"/>
-          </a:xfrm>
-          <a:prstGeom prst="roundRect">
-            <a:avLst/>
-          </a:prstGeom>
-          <a:solidFill>
-            <a:srgbClr val="E8EEF7"/>
-          </a:solidFill>
-          <a:ln>
-            <a:solidFill>
-              <a:srgbClr val="1F3A5F"/>
-            </a:solidFill>
-          </a:ln>
-        </p:spPr>
-        <p:style>
-          <a:lnRef idx="1">
-            <a:schemeClr val="accent1"/>
-          </a:lnRef>
-          <a:fillRef idx="3">
-            <a:schemeClr val="accent1"/>
-          </a:fillRef>
-          <a:effectRef idx="2">
-            <a:schemeClr val="accent1"/>
-          </a:effectRef>
-          <a:fontRef idx="minor">
-            <a:schemeClr val="lt1"/>
-          </a:fontRef>
-        </p:style>
-        <p:txBody>
-          <a:bodyPr rtlCol="0" anchor="ctr" lIns="45720" rIns="45720"/>
-          <a:lstStyle/>
-          <a:p>
-            <a:pPr algn="ctr"/>
-            <a:r>
-              <a:rPr sz="900">
-                <a:solidFill>
-                  <a:srgbClr val="1F3A5F"/>
-                </a:solidFill>
-              </a:rPr>
-              <a:t>Gram 5: FR Constitution-class, Category 3, Yavin</a:t>
-            </a:r>
-          </a:p>
-        </p:txBody>
-      </p:sp>
-      <p:sp>
-        <p:nvSpPr>
-          <p:cNvPr id="12" name="TextBox 11"/>
-          <p:cNvSpPr txBox="1"/>
-          <p:nvPr/>
-        </p:nvSpPr>
-        <p:spPr>
-          <a:xfrm>
-            <a:off x="9531705" y="1115568"/>
-            <a:ext cx="2200046" cy="1447800"/>
-          </a:xfrm>
-          <a:prstGeom prst="rect">
-            <a:avLst/>
-          </a:prstGeom>
-          <a:noFill/>
-        </p:spPr>
-        <p:txBody>
-          <a:bodyPr wrap="square">
-            <a:spAutoFit/>
-          </a:bodyPr>
-          <a:lstStyle/>
-          <a:p>
-            <a:r>
-              <a:rPr sz="800">
-                <a:hlinkClick r:id="rId16"/>
-              </a:rPr>
-              <a:t>Lofar 1</a:t>
-            </a:r>
-          </a:p>
-        </p:txBody>
-      </p:sp>
-      <p:sp>
-        <p:nvSpPr>
-          <p:cNvPr id="13" name="Rounded Rectangle 12"/>
-          <p:cNvSpPr/>
-          <p:nvPr>
-            <a:hlinkClick r:id="rId17"/>
-          </p:nvPr>
-        </p:nvSpPr>
-        <p:spPr>
-          <a:xfrm>
-            <a:off x="365760" y="2682240"/>
-            <a:ext cx="2200046" cy="365760"/>
-          </a:xfrm>
-          <a:prstGeom prst="roundRect">
-            <a:avLst/>
-          </a:prstGeom>
-          <a:solidFill>
-            <a:srgbClr val="E8EEF7"/>
-          </a:solidFill>
-          <a:ln>
-            <a:solidFill>
-              <a:srgbClr val="1F3A5F"/>
-            </a:solidFill>
-          </a:ln>
-        </p:spPr>
-        <p:style>
-          <a:lnRef idx="1">
-            <a:schemeClr val="accent1"/>
-          </a:lnRef>
-          <a:fillRef idx="3">
-            <a:schemeClr val="accent1"/>
-          </a:fillRef>
-          <a:effectRef idx="2">
-            <a:schemeClr val="accent1"/>
-          </a:effectRef>
-          <a:fontRef idx="minor">
-            <a:schemeClr val="lt1"/>
-          </a:fontRef>
-        </p:style>
-        <p:txBody>
-          <a:bodyPr rtlCol="0" anchor="ctr" lIns="45720" rIns="45720"/>
-          <a:lstStyle/>
-          <a:p>
-            <a:pPr algn="ctr"/>
-            <a:r>
-              <a:rPr sz="900">
-                <a:solidFill>
-                  <a:srgbClr val="1F3A5F"/>
-                </a:solidFill>
-              </a:rPr>
-              <a:t>Gram 6: FR Corellian Corvette, Category 2, Tantive</a:t>
-            </a:r>
-          </a:p>
-        </p:txBody>
-      </p:sp>
-      <p:sp>
-        <p:nvSpPr>
-          <p:cNvPr id="14" name="TextBox 13"/>
-          <p:cNvSpPr txBox="1"/>
-          <p:nvPr/>
-        </p:nvSpPr>
-        <p:spPr>
-          <a:xfrm>
-            <a:off x="365760" y="3066288"/>
-            <a:ext cx="2200046" cy="1447800"/>
-          </a:xfrm>
-          <a:prstGeom prst="rect">
-            <a:avLst/>
-          </a:prstGeom>
-          <a:noFill/>
-        </p:spPr>
-        <p:txBody>
-          <a:bodyPr wrap="square">
-            <a:spAutoFit/>
-          </a:bodyPr>
-          <a:lstStyle/>
-          <a:p>
-            <a:r>
-              <a:rPr sz="800">
-                <a:hlinkClick r:id="rId18"/>
-              </a:rPr>
-              <a:t>Lofar 1</a:t>
-            </a:r>
-          </a:p>
-          <a:p>
-            <a:r>
-              <a:rPr sz="800">
-                <a:hlinkClick r:id="rId19"/>
-              </a:rPr>
-              <a:t>Lofar 2</a:t>
-            </a:r>
-          </a:p>
-          <a:p>
-            <a:r>
-              <a:rPr sz="800">
-                <a:hlinkClick r:id="rId20"/>
-              </a:rPr>
-              <a:t>Lofar 3</a:t>
-            </a:r>
-          </a:p>
-          <a:p>
-            <a:r>
-              <a:rPr sz="800">
-                <a:hlinkClick r:id="rId21"/>
-              </a:rPr>
-              <a:t>Lofar 4</a:t>
-            </a:r>
-          </a:p>
-        </p:txBody>
-      </p:sp>
-      <p:sp>
-        <p:nvSpPr>
-          <p:cNvPr id="15" name="Rounded Rectangle 14"/>
-          <p:cNvSpPr/>
-          <p:nvPr>
-            <a:hlinkClick r:id="rId22"/>
-          </p:nvPr>
-        </p:nvSpPr>
-        <p:spPr>
-          <a:xfrm>
-            <a:off x="2657246" y="2682240"/>
-            <a:ext cx="2200046" cy="365760"/>
-          </a:xfrm>
-          <a:prstGeom prst="roundRect">
-            <a:avLst/>
-          </a:prstGeom>
-          <a:solidFill>
-            <a:srgbClr val="E8EEF7"/>
-          </a:solidFill>
-          <a:ln>
-            <a:solidFill>
-              <a:srgbClr val="1F3A5F"/>
-            </a:solidFill>
-          </a:ln>
-        </p:spPr>
-        <p:style>
-          <a:lnRef idx="1">
-            <a:schemeClr val="accent1"/>
-          </a:lnRef>
-          <a:fillRef idx="3">
-            <a:schemeClr val="accent1"/>
-          </a:fillRef>
-          <a:effectRef idx="2">
-            <a:schemeClr val="accent1"/>
-          </a:effectRef>
-          <a:fontRef idx="minor">
-            <a:schemeClr val="lt1"/>
-          </a:fontRef>
-        </p:style>
-        <p:txBody>
-          <a:bodyPr rtlCol="0" anchor="ctr" lIns="45720" rIns="45720"/>
-          <a:lstStyle/>
-          <a:p>
-            <a:pPr algn="ctr"/>
-            <a:r>
-              <a:rPr sz="900">
-                <a:solidFill>
-                  <a:srgbClr val="1F3A5F"/>
-                </a:solidFill>
-              </a:rPr>
-              <a:t>Gram 7: FR Millennium Falcon, Category 4, Romulus</a:t>
-            </a:r>
-          </a:p>
-        </p:txBody>
-      </p:sp>
-      <p:sp>
-        <p:nvSpPr>
-          <p:cNvPr id="16" name="TextBox 15"/>
-          <p:cNvSpPr txBox="1"/>
-          <p:nvPr/>
-        </p:nvSpPr>
-        <p:spPr>
-          <a:xfrm>
-            <a:off x="2657246" y="3066288"/>
-            <a:ext cx="2200046" cy="1447800"/>
-          </a:xfrm>
-          <a:prstGeom prst="rect">
-            <a:avLst/>
-          </a:prstGeom>
-          <a:noFill/>
-        </p:spPr>
-        <p:txBody>
-          <a:bodyPr wrap="square">
-            <a:spAutoFit/>
-          </a:bodyPr>
-          <a:lstStyle/>
-          <a:p>
-            <a:r>
-              <a:rPr sz="800">
-                <a:hlinkClick r:id="rId23"/>
-              </a:rPr>
-              <a:t>Lofar 1</a:t>
-            </a:r>
-          </a:p>
-          <a:p>
-            <a:r>
-              <a:rPr sz="800">
-                <a:hlinkClick r:id="rId24"/>
-              </a:rPr>
-              <a:t>Lofar 2</a:t>
-            </a:r>
-          </a:p>
-          <a:p>
-            <a:r>
-              <a:rPr sz="800">
-                <a:hlinkClick r:id="rId25"/>
-              </a:rPr>
-              <a:t>Lofar 3</a:t>
-            </a:r>
-          </a:p>
-          <a:p>
-            <a:r>
-              <a:rPr sz="800">
-                <a:hlinkClick r:id="rId26"/>
-              </a:rPr>
-              <a:t>Lofar 4</a:t>
-            </a:r>
-          </a:p>
-        </p:txBody>
-      </p:sp>
-      <p:sp>
-        <p:nvSpPr>
-          <p:cNvPr id="17" name="Rounded Rectangle 16"/>
-          <p:cNvSpPr/>
-          <p:nvPr>
-            <a:hlinkClick r:id="rId27"/>
-          </p:nvPr>
-        </p:nvSpPr>
-        <p:spPr>
-          <a:xfrm>
-            <a:off x="4948732" y="2682240"/>
-            <a:ext cx="2200046" cy="365760"/>
-          </a:xfrm>
-          <a:prstGeom prst="roundRect">
-            <a:avLst/>
-          </a:prstGeom>
-          <a:solidFill>
-            <a:srgbClr val="E8EEF7"/>
-          </a:solidFill>
-          <a:ln>
-            <a:solidFill>
-              <a:srgbClr val="1F3A5F"/>
-            </a:solidFill>
-          </a:ln>
-        </p:spPr>
-        <p:style>
-          <a:lnRef idx="1">
-            <a:schemeClr val="accent1"/>
-          </a:lnRef>
-          <a:fillRef idx="3">
-            <a:schemeClr val="accent1"/>
-          </a:fillRef>
-          <a:effectRef idx="2">
-            <a:schemeClr val="accent1"/>
-          </a:effectRef>
-          <a:fontRef idx="minor">
-            <a:schemeClr val="lt1"/>
-          </a:fontRef>
-        </p:style>
-        <p:txBody>
-          <a:bodyPr rtlCol="0" anchor="ctr" lIns="45720" rIns="45720"/>
-          <a:lstStyle/>
-          <a:p>
-            <a:pPr algn="ctr"/>
-            <a:r>
-              <a:rPr sz="900">
-                <a:solidFill>
-                  <a:srgbClr val="1F3A5F"/>
-                </a:solidFill>
-              </a:rPr>
-              <a:t>Gram 8: Nebulon-B contact bearing 297, codename Cardassia</a:t>
-            </a:r>
-          </a:p>
-        </p:txBody>
-      </p:sp>
-      <p:sp>
-        <p:nvSpPr>
-          <p:cNvPr id="18" name="TextBox 17"/>
-          <p:cNvSpPr txBox="1"/>
-          <p:nvPr/>
-        </p:nvSpPr>
-        <p:spPr>
-          <a:xfrm>
-            <a:off x="4948732" y="3066288"/>
-            <a:ext cx="2200046" cy="1447800"/>
-          </a:xfrm>
-          <a:prstGeom prst="rect">
-            <a:avLst/>
-          </a:prstGeom>
-          <a:noFill/>
-        </p:spPr>
-        <p:txBody>
-          <a:bodyPr wrap="square">
-            <a:spAutoFit/>
-          </a:bodyPr>
-          <a:lstStyle/>
-          <a:p>
-            <a:r>
-              <a:rPr sz="800">
-                <a:hlinkClick r:id="rId28"/>
-              </a:rPr>
-              <a:t>Lofar 1</a:t>
-            </a:r>
-          </a:p>
-          <a:p>
-            <a:r>
-              <a:rPr sz="800">
-                <a:hlinkClick r:id="rId29"/>
-              </a:rPr>
-              <a:t>Lofar 2</a:t>
-            </a:r>
-          </a:p>
-          <a:p>
-            <a:r>
-              <a:rPr sz="800">
-                <a:hlinkClick r:id="rId30"/>
-              </a:rPr>
-              <a:t>Lofar 3</a:t>
-            </a:r>
-          </a:p>
-        </p:txBody>
-      </p:sp>
-      <p:sp>
-        <p:nvSpPr>
-          <p:cNvPr id="19" name="Rounded Rectangle 18"/>
-          <p:cNvSpPr/>
-          <p:nvPr>
-            <a:hlinkClick r:id="rId31"/>
-          </p:nvPr>
-        </p:nvSpPr>
-        <p:spPr>
-          <a:xfrm>
-            <a:off x="7240219" y="2682240"/>
-            <a:ext cx="2200046" cy="365760"/>
-          </a:xfrm>
-          <a:prstGeom prst="roundRect">
-            <a:avLst/>
-          </a:prstGeom>
-          <a:solidFill>
-            <a:srgbClr val="E8EEF7"/>
-          </a:solidFill>
-          <a:ln>
-            <a:solidFill>
-              <a:srgbClr val="1F3A5F"/>
-            </a:solidFill>
-          </a:ln>
-        </p:spPr>
-        <p:style>
-          <a:lnRef idx="1">
-            <a:schemeClr val="accent1"/>
-          </a:lnRef>
-          <a:fillRef idx="3">
-            <a:schemeClr val="accent1"/>
-          </a:fillRef>
-          <a:effectRef idx="2">
-            <a:schemeClr val="accent1"/>
-          </a:effectRef>
-          <a:fontRef idx="minor">
-            <a:schemeClr val="lt1"/>
-          </a:fontRef>
-        </p:style>
-        <p:txBody>
-          <a:bodyPr rtlCol="0" anchor="ctr" lIns="45720" rIns="45720"/>
-          <a:lstStyle/>
-          <a:p>
-            <a:pPr algn="ctr"/>
-            <a:r>
-              <a:rPr sz="900">
-                <a:solidFill>
-                  <a:srgbClr val="1F3A5F"/>
-                </a:solidFill>
-              </a:rPr>
-              <a:t>Gram 9: FR A-wing, Category 1, Romulus</a:t>
-            </a:r>
-          </a:p>
-        </p:txBody>
-      </p:sp>
-      <p:sp>
-        <p:nvSpPr>
-          <p:cNvPr id="20" name="TextBox 19"/>
-          <p:cNvSpPr txBox="1"/>
-          <p:nvPr/>
-        </p:nvSpPr>
-        <p:spPr>
-          <a:xfrm>
-            <a:off x="7240219" y="3066288"/>
-            <a:ext cx="2200046" cy="1447800"/>
-          </a:xfrm>
-          <a:prstGeom prst="rect">
-            <a:avLst/>
-          </a:prstGeom>
-          <a:noFill/>
-        </p:spPr>
-        <p:txBody>
-          <a:bodyPr wrap="square">
-            <a:spAutoFit/>
-          </a:bodyPr>
-          <a:lstStyle/>
-          <a:p>
-            <a:r>
-              <a:rPr sz="800">
-                <a:hlinkClick r:id="rId32"/>
-              </a:rPr>
-              <a:t>Lofar 1</a:t>
-            </a:r>
-          </a:p>
-          <a:p>
-            <a:r>
-              <a:rPr sz="800">
-                <a:hlinkClick r:id="rId33"/>
-              </a:rPr>
-              <a:t>Lofar 2</a:t>
-            </a:r>
-          </a:p>
-          <a:p>
-            <a:r>
-              <a:rPr sz="800">
-                <a:hlinkClick r:id="rId34"/>
-              </a:rPr>
-              <a:t>Lofar 3</a:t>
-            </a:r>
-          </a:p>
-        </p:txBody>
-      </p:sp>
-      <p:sp>
-        <p:nvSpPr>
-          <p:cNvPr id="21" name="Rounded Rectangle 20"/>
-          <p:cNvSpPr/>
-          <p:nvPr>
-            <a:hlinkClick r:id="rId35"/>
-          </p:nvPr>
-        </p:nvSpPr>
-        <p:spPr>
-          <a:xfrm>
-            <a:off x="9531705" y="2682240"/>
-            <a:ext cx="2200046" cy="365760"/>
-          </a:xfrm>
-          <a:prstGeom prst="roundRect">
-            <a:avLst/>
-          </a:prstGeom>
-          <a:solidFill>
-            <a:srgbClr val="E8EEF7"/>
-          </a:solidFill>
-          <a:ln>
-            <a:solidFill>
-              <a:srgbClr val="1F3A5F"/>
-            </a:solidFill>
-          </a:ln>
-        </p:spPr>
-        <p:style>
-          <a:lnRef idx="1">
-            <a:schemeClr val="accent1"/>
-          </a:lnRef>
-          <a:fillRef idx="3">
-            <a:schemeClr val="accent1"/>
-          </a:fillRef>
-          <a:effectRef idx="2">
-            <a:schemeClr val="accent1"/>
-          </a:effectRef>
-          <a:fontRef idx="minor">
-            <a:schemeClr val="lt1"/>
-          </a:fontRef>
-        </p:style>
-        <p:txBody>
-          <a:bodyPr rtlCol="0" anchor="ctr" lIns="45720" rIns="45720"/>
-          <a:lstStyle/>
-          <a:p>
-            <a:pPr algn="ctr"/>
-            <a:r>
-              <a:rPr sz="900">
-                <a:solidFill>
-                  <a:srgbClr val="1F3A5F"/>
-                </a:solidFill>
-              </a:rPr>
-              <a:t>Gram 10: FR Tantive IV, Category 4, Gandalf</a:t>
-            </a:r>
-          </a:p>
-        </p:txBody>
-      </p:sp>
-      <p:sp>
-        <p:nvSpPr>
-          <p:cNvPr id="22" name="TextBox 21"/>
-          <p:cNvSpPr txBox="1"/>
-          <p:nvPr/>
-        </p:nvSpPr>
-        <p:spPr>
-          <a:xfrm>
-            <a:off x="9531705" y="3066288"/>
-            <a:ext cx="2200046" cy="1447800"/>
-          </a:xfrm>
-          <a:prstGeom prst="rect">
-            <a:avLst/>
-          </a:prstGeom>
-          <a:noFill/>
-        </p:spPr>
-        <p:txBody>
-          <a:bodyPr wrap="square">
-            <a:spAutoFit/>
-          </a:bodyPr>
-          <a:lstStyle/>
-          <a:p>
-            <a:r>
-              <a:rPr sz="800">
-                <a:hlinkClick r:id="rId36"/>
-              </a:rPr>
-              <a:t>Lofar 1</a:t>
-            </a:r>
-          </a:p>
-        </p:txBody>
-      </p:sp>
-      <p:sp>
-        <p:nvSpPr>
-          <p:cNvPr id="23" name="Rounded Rectangle 22"/>
-          <p:cNvSpPr/>
-          <p:nvPr>
-            <a:hlinkClick r:id="rId37"/>
-          </p:nvPr>
-        </p:nvSpPr>
-        <p:spPr>
-          <a:xfrm>
-            <a:off x="365760" y="4632960"/>
-            <a:ext cx="2200046" cy="365760"/>
-          </a:xfrm>
-          <a:prstGeom prst="roundRect">
-            <a:avLst/>
-          </a:prstGeom>
-          <a:solidFill>
-            <a:srgbClr val="E8EEF7"/>
-          </a:solidFill>
-          <a:ln>
-            <a:solidFill>
-              <a:srgbClr val="1F3A5F"/>
-            </a:solidFill>
-          </a:ln>
-        </p:spPr>
-        <p:style>
-          <a:lnRef idx="1">
-            <a:schemeClr val="accent1"/>
-          </a:lnRef>
-          <a:fillRef idx="3">
-            <a:schemeClr val="accent1"/>
-          </a:fillRef>
-          <a:effectRef idx="2">
-            <a:schemeClr val="accent1"/>
-          </a:effectRef>
-          <a:fontRef idx="minor">
-            <a:schemeClr val="lt1"/>
-          </a:fontRef>
-        </p:style>
-        <p:txBody>
-          <a:bodyPr rtlCol="0" anchor="ctr" lIns="45720" rIns="45720"/>
-          <a:lstStyle/>
-          <a:p>
-            <a:pPr algn="ctr"/>
-            <a:r>
-              <a:rPr sz="900">
-                <a:solidFill>
-                  <a:srgbClr val="1F3A5F"/>
-                </a:solidFill>
-              </a:rPr>
-              <a:t>Gram 11: FR Razor Crest, Category 1, Betazed</a:t>
-            </a:r>
-          </a:p>
-        </p:txBody>
-      </p:sp>
-      <p:sp>
-        <p:nvSpPr>
-          <p:cNvPr id="24" name="TextBox 23"/>
-          <p:cNvSpPr txBox="1"/>
-          <p:nvPr/>
-        </p:nvSpPr>
-        <p:spPr>
-          <a:xfrm>
-            <a:off x="365760" y="5017008"/>
-            <a:ext cx="2200046" cy="1447800"/>
-          </a:xfrm>
-          <a:prstGeom prst="rect">
-            <a:avLst/>
-          </a:prstGeom>
-          <a:noFill/>
-        </p:spPr>
-        <p:txBody>
-          <a:bodyPr wrap="square">
-            <a:spAutoFit/>
-          </a:bodyPr>
-          <a:lstStyle/>
-          <a:p>
-            <a:r>
-              <a:rPr sz="800">
-                <a:hlinkClick r:id="rId38"/>
-              </a:rPr>
-              <a:t>Lofar 1</a:t>
-            </a:r>
-          </a:p>
-          <a:p>
-            <a:r>
-              <a:rPr sz="800">
-                <a:hlinkClick r:id="rId39"/>
-              </a:rPr>
-              <a:t>Lofar 2</a:t>
-            </a:r>
-          </a:p>
-          <a:p>
-            <a:r>
-              <a:rPr sz="800">
-                <a:hlinkClick r:id="rId40"/>
-              </a:rPr>
-              <a:t>Lofar 3</a:t>
-            </a:r>
-          </a:p>
-        </p:txBody>
-      </p:sp>
-      <p:sp>
-        <p:nvSpPr>
-          <p:cNvPr id="25" name="Rounded Rectangle 24"/>
-          <p:cNvSpPr/>
-          <p:nvPr>
-            <a:hlinkClick r:id="rId41"/>
-          </p:nvPr>
-        </p:nvSpPr>
-        <p:spPr>
-          <a:xfrm>
-            <a:off x="2657246" y="4632960"/>
-            <a:ext cx="2200046" cy="365760"/>
-          </a:xfrm>
-          <a:prstGeom prst="roundRect">
-            <a:avLst/>
-          </a:prstGeom>
-          <a:solidFill>
-            <a:srgbClr val="E8EEF7"/>
-          </a:solidFill>
-          <a:ln>
-            <a:solidFill>
-              <a:srgbClr val="1F3A5F"/>
-            </a:solidFill>
-          </a:ln>
-        </p:spPr>
-        <p:style>
-          <a:lnRef idx="1">
-            <a:schemeClr val="accent1"/>
-          </a:lnRef>
-          <a:fillRef idx="3">
-            <a:schemeClr val="accent1"/>
-          </a:fillRef>
-          <a:effectRef idx="2">
-            <a:schemeClr val="accent1"/>
-          </a:effectRef>
-          <a:fontRef idx="minor">
-            <a:schemeClr val="lt1"/>
-          </a:fontRef>
-        </p:style>
-        <p:txBody>
-          <a:bodyPr rtlCol="0" anchor="ctr" lIns="45720" rIns="45720"/>
-          <a:lstStyle/>
-          <a:p>
-            <a:pPr algn="ctr"/>
-            <a:r>
-              <a:rPr sz="900">
-                <a:solidFill>
-                  <a:srgbClr val="1F3A5F"/>
-                </a:solidFill>
-              </a:rPr>
-              <a:t>Gram 12: FR Constitution-class, Category 1, Tatooine</a:t>
-            </a:r>
-          </a:p>
-        </p:txBody>
-      </p:sp>
-      <p:sp>
-        <p:nvSpPr>
-          <p:cNvPr id="26" name="TextBox 25"/>
-          <p:cNvSpPr txBox="1"/>
-          <p:nvPr/>
-        </p:nvSpPr>
-        <p:spPr>
-          <a:xfrm>
-            <a:off x="2657246" y="5017008"/>
-            <a:ext cx="2200046" cy="1447800"/>
-          </a:xfrm>
-          <a:prstGeom prst="rect">
-            <a:avLst/>
-          </a:prstGeom>
-          <a:noFill/>
-        </p:spPr>
-        <p:txBody>
-          <a:bodyPr wrap="square">
-            <a:spAutoFit/>
-          </a:bodyPr>
-          <a:lstStyle/>
-          <a:p>
-            <a:r>
-              <a:rPr sz="800">
-                <a:hlinkClick r:id="rId42"/>
-              </a:rPr>
-              <a:t>Lofar 1</a:t>
-            </a:r>
-          </a:p>
-          <a:p>
-            <a:r>
-              <a:rPr sz="800">
-                <a:hlinkClick r:id="rId43"/>
-              </a:rPr>
-              <a:t>Lofar 2</a:t>
-            </a:r>
-          </a:p>
-          <a:p>
-            <a:r>
-              <a:rPr sz="800">
-                <a:hlinkClick r:id="rId44"/>
-              </a:rPr>
-              <a:t>Lofar 3</a:t>
-            </a:r>
-          </a:p>
-        </p:txBody>
-      </p:sp>
-      <p:sp>
-        <p:nvSpPr>
-          <p:cNvPr id="27" name="Rounded Rectangle 26"/>
-          <p:cNvSpPr/>
-          <p:nvPr>
-            <a:hlinkClick r:id="rId45"/>
-          </p:nvPr>
-        </p:nvSpPr>
-        <p:spPr>
-          <a:xfrm>
-            <a:off x="4948732" y="4632960"/>
-            <a:ext cx="2200046" cy="365760"/>
-          </a:xfrm>
-          <a:prstGeom prst="roundRect">
-            <a:avLst/>
-          </a:prstGeom>
-          <a:solidFill>
-            <a:srgbClr val="E8EEF7"/>
-          </a:solidFill>
-          <a:ln>
-            <a:solidFill>
-              <a:srgbClr val="1F3A5F"/>
-            </a:solidFill>
-          </a:ln>
-        </p:spPr>
-        <p:style>
-          <a:lnRef idx="1">
-            <a:schemeClr val="accent1"/>
-          </a:lnRef>
-          <a:fillRef idx="3">
-            <a:schemeClr val="accent1"/>
-          </a:fillRef>
-          <a:effectRef idx="2">
-            <a:schemeClr val="accent1"/>
-          </a:effectRef>
-          <a:fontRef idx="minor">
-            <a:schemeClr val="lt1"/>
-          </a:fontRef>
-        </p:style>
-        <p:txBody>
-          <a:bodyPr rtlCol="0" anchor="ctr" lIns="45720" rIns="45720"/>
-          <a:lstStyle/>
-          <a:p>
-            <a:pPr algn="ctr"/>
-            <a:r>
-              <a:rPr sz="900">
-                <a:solidFill>
-                  <a:srgbClr val="1F3A5F"/>
-                </a:solidFill>
-              </a:rPr>
-              <a:t>Gram 13: FR Reliant, Category 2, Caprica</a:t>
-            </a:r>
-          </a:p>
-        </p:txBody>
-      </p:sp>
-      <p:sp>
-        <p:nvSpPr>
-          <p:cNvPr id="28" name="TextBox 27"/>
-          <p:cNvSpPr txBox="1"/>
-          <p:nvPr/>
-        </p:nvSpPr>
-        <p:spPr>
-          <a:xfrm>
-            <a:off x="4948732" y="5017008"/>
-            <a:ext cx="2200046" cy="1447800"/>
-          </a:xfrm>
-          <a:prstGeom prst="rect">
-            <a:avLst/>
-          </a:prstGeom>
-          <a:noFill/>
-        </p:spPr>
-        <p:txBody>
-          <a:bodyPr wrap="square">
-            <a:spAutoFit/>
-          </a:bodyPr>
-          <a:lstStyle/>
-          <a:p>
-            <a:r>
-              <a:rPr sz="800">
-                <a:hlinkClick r:id="rId46"/>
-              </a:rPr>
-              <a:t>Lofar 1</a:t>
-            </a:r>
-          </a:p>
-        </p:txBody>
-      </p:sp>
-      <p:sp>
-        <p:nvSpPr>
-          <p:cNvPr id="29" name="Rounded Rectangle 28"/>
-          <p:cNvSpPr/>
-          <p:nvPr>
-            <a:hlinkClick r:id="rId47"/>
-          </p:nvPr>
-        </p:nvSpPr>
-        <p:spPr>
-          <a:xfrm>
-            <a:off x="7240219" y="4632960"/>
-            <a:ext cx="2200046" cy="365760"/>
-          </a:xfrm>
-          <a:prstGeom prst="roundRect">
-            <a:avLst/>
-          </a:prstGeom>
-          <a:solidFill>
-            <a:srgbClr val="E8EEF7"/>
-          </a:solidFill>
-          <a:ln>
-            <a:solidFill>
-              <a:srgbClr val="1F3A5F"/>
-            </a:solidFill>
-          </a:ln>
-        </p:spPr>
-        <p:style>
-          <a:lnRef idx="1">
-            <a:schemeClr val="accent1"/>
-          </a:lnRef>
-          <a:fillRef idx="3">
-            <a:schemeClr val="accent1"/>
-          </a:fillRef>
-          <a:effectRef idx="2">
-            <a:schemeClr val="accent1"/>
-          </a:effectRef>
-          <a:fontRef idx="minor">
-            <a:schemeClr val="lt1"/>
-          </a:fontRef>
-        </p:style>
-        <p:txBody>
-          <a:bodyPr rtlCol="0" anchor="ctr" lIns="45720" rIns="45720"/>
-          <a:lstStyle/>
-          <a:p>
-            <a:pPr algn="ctr"/>
-            <a:r>
-              <a:rPr sz="900">
-                <a:solidFill>
-                  <a:srgbClr val="1F3A5F"/>
-                </a:solidFill>
-              </a:rPr>
-              <a:t>Gram 14: FR TIE Fighter, Category 4, Tantive</a:t>
-            </a:r>
-          </a:p>
-        </p:txBody>
-      </p:sp>
-      <p:sp>
-        <p:nvSpPr>
-          <p:cNvPr id="30" name="TextBox 29"/>
-          <p:cNvSpPr txBox="1"/>
-          <p:nvPr/>
-        </p:nvSpPr>
-        <p:spPr>
-          <a:xfrm>
-            <a:off x="7240219" y="5017008"/>
-            <a:ext cx="2200046" cy="1447800"/>
-          </a:xfrm>
-          <a:prstGeom prst="rect">
-            <a:avLst/>
-          </a:prstGeom>
-          <a:noFill/>
-        </p:spPr>
-        <p:txBody>
-          <a:bodyPr wrap="square">
-            <a:spAutoFit/>
-          </a:bodyPr>
-          <a:lstStyle/>
-          <a:p>
-            <a:r>
-              <a:rPr sz="800">
-                <a:hlinkClick r:id="rId48"/>
-              </a:rPr>
-              <a:t>Lofar 1</a:t>
-            </a:r>
-          </a:p>
-          <a:p>
-            <a:r>
-              <a:rPr sz="800">
-                <a:hlinkClick r:id="rId49"/>
-              </a:rPr>
-              <a:t>Lofar 2</a:t>
-            </a:r>
-          </a:p>
-        </p:txBody>
-      </p:sp>
-      <p:sp>
-        <p:nvSpPr>
-          <p:cNvPr id="31" name="Rounded Rectangle 30"/>
-          <p:cNvSpPr/>
-          <p:nvPr>
-            <a:hlinkClick r:id="rId50"/>
-          </p:nvPr>
-        </p:nvSpPr>
-        <p:spPr>
-          <a:xfrm>
-            <a:off x="9531705" y="4632960"/>
-            <a:ext cx="2200046" cy="365760"/>
-          </a:xfrm>
-          <a:prstGeom prst="roundRect">
-            <a:avLst/>
-          </a:prstGeom>
-          <a:solidFill>
-            <a:srgbClr val="E8EEF7"/>
-          </a:solidFill>
-          <a:ln>
-            <a:solidFill>
-              <a:srgbClr val="1F3A5F"/>
-            </a:solidFill>
-          </a:ln>
-        </p:spPr>
-        <p:style>
-          <a:lnRef idx="1">
-            <a:schemeClr val="accent1"/>
-          </a:lnRef>
-          <a:fillRef idx="3">
-            <a:schemeClr val="accent1"/>
-          </a:fillRef>
-          <a:effectRef idx="2">
-            <a:schemeClr val="accent1"/>
-          </a:effectRef>
-          <a:fontRef idx="minor">
-            <a:schemeClr val="lt1"/>
-          </a:fontRef>
-        </p:style>
-        <p:txBody>
-          <a:bodyPr rtlCol="0" anchor="ctr" lIns="45720" rIns="45720"/>
-          <a:lstStyle/>
-          <a:p>
-            <a:pPr algn="ctr"/>
-            <a:r>
-              <a:rPr sz="900">
-                <a:solidFill>
-                  <a:srgbClr val="1F3A5F"/>
-                </a:solidFill>
-              </a:rPr>
-              <a:t>Gram 15: FR Prometheus, Category 1, Caprica</a:t>
-            </a:r>
-          </a:p>
-        </p:txBody>
-      </p:sp>
-      <p:sp>
-        <p:nvSpPr>
-          <p:cNvPr id="32" name="TextBox 31"/>
-          <p:cNvSpPr txBox="1"/>
-          <p:nvPr/>
-        </p:nvSpPr>
-        <p:spPr>
-          <a:xfrm>
-            <a:off x="9531705" y="5017008"/>
-            <a:ext cx="2200046" cy="1447800"/>
-          </a:xfrm>
-          <a:prstGeom prst="rect">
-            <a:avLst/>
-          </a:prstGeom>
-          <a:noFill/>
-        </p:spPr>
-        <p:txBody>
-          <a:bodyPr wrap="square">
-            <a:spAutoFit/>
-          </a:bodyPr>
-          <a:lstStyle/>
-          <a:p>
-            <a:r>
-              <a:rPr sz="800">
-                <a:hlinkClick r:id="rId51"/>
-              </a:rPr>
-              <a:t>Lofar 1</a:t>
-            </a:r>
-          </a:p>
-          <a:p>
-            <a:r>
-              <a:rPr sz="800">
-                <a:hlinkClick r:id="rId52"/>
-              </a:rPr>
-              <a:t>Lofar 2</a:t>
-            </a:r>
-          </a:p>
-          <a:p>
-            <a:r>
-              <a:rPr sz="800">
-                <a:hlinkClick r:id="rId53"/>
-              </a:rPr>
-              <a:t>Lofar 3</a:t>
+              <a:t>Instructor Version</a:t>
             </a:r>
           </a:p>
         </p:txBody>
@@ -4670,7 +3223,7 @@
                   <a:srgbClr val="FFFFFF"/>
                 </a:solidFill>
               </a:rPr>
-              <a:t>Instructor Progress Test 2 Grams_Updated — Page 2 of 2</a:t>
+              <a:t>Instructor Progress Test 2 Grams_Updated — Page 1 of 2</a:t>
             </a:r>
           </a:p>
         </p:txBody>
@@ -4725,7 +3278,7 @@
                   <a:srgbClr val="1F3A5F"/>
                 </a:solidFill>
               </a:rPr>
-              <a:t>Gram 16: FR Intrepid-class, Category 1, Gandalf</a:t>
+              <a:t>Gram 1: FR Intrepid-class, Category 3, Dank</a:t>
             </a:r>
           </a:p>
         </p:txBody>
@@ -4835,7 +3388,7 @@
                   <a:srgbClr val="1F3A5F"/>
                 </a:solidFill>
               </a:rPr>
-              <a:t>Gram 17: FR Devastator, Category 3, Cardassia</a:t>
+              <a:t>Gram 2: FR Venator-class, Category 3, Betazed</a:t>
             </a:r>
           </a:p>
         </p:txBody>
@@ -4869,6 +3422,22 @@
               <a:t>Lofar 1</a:t>
             </a:r>
           </a:p>
+          <a:p>
+            <a:r>
+              <a:rPr sz="800">
+                <a:hlinkClick r:id="rId9"/>
+              </a:rPr>
+              <a:t>Lofar 2</a:t>
+            </a:r>
+          </a:p>
+          <a:p>
+            <a:r>
+              <a:rPr sz="800">
+                <a:hlinkClick r:id="rId10"/>
+              </a:rPr>
+              <a:t>Lofar 3</a:t>
+            </a:r>
+          </a:p>
         </p:txBody>
       </p:sp>
       <p:sp>
@@ -4876,7 +3445,7 @@
           <p:cNvPr id="7" name="Rounded Rectangle 6"/>
           <p:cNvSpPr/>
           <p:nvPr>
-            <a:hlinkClick r:id="rId9"/>
+            <a:hlinkClick r:id="rId11"/>
           </p:nvPr>
         </p:nvSpPr>
         <p:spPr>
@@ -4921,7 +3490,7 @@
                   <a:srgbClr val="1F3A5F"/>
                 </a:solidFill>
               </a:rPr>
-              <a:t>Gram 18: FR Prometheus, Category 3, Dagobah</a:t>
+              <a:t>Gram 3: Lambda Shuttle contact bearing 096, codename Mustafar</a:t>
             </a:r>
           </a:p>
         </p:txBody>
@@ -4950,33 +3519,9 @@
           <a:p>
             <a:r>
               <a:rPr sz="800">
-                <a:hlinkClick r:id="rId10"/>
+                <a:hlinkClick r:id="rId12"/>
               </a:rPr>
               <a:t>Lofar 1</a:t>
-            </a:r>
-          </a:p>
-          <a:p>
-            <a:r>
-              <a:rPr sz="800">
-                <a:hlinkClick r:id="rId11"/>
-              </a:rPr>
-              <a:t>Lofar 2</a:t>
-            </a:r>
-          </a:p>
-          <a:p>
-            <a:r>
-              <a:rPr sz="800">
-                <a:hlinkClick r:id="rId12"/>
-              </a:rPr>
-              <a:t>Lofar 3</a:t>
-            </a:r>
-          </a:p>
-          <a:p>
-            <a:r>
-              <a:rPr sz="800">
-                <a:hlinkClick r:id="rId13"/>
-              </a:rPr>
-              <a:t>Lofar 4</a:t>
             </a:r>
           </a:p>
         </p:txBody>
@@ -4986,7 +3531,7 @@
           <p:cNvPr id="9" name="Rounded Rectangle 8"/>
           <p:cNvSpPr/>
           <p:nvPr>
-            <a:hlinkClick r:id="rId14"/>
+            <a:hlinkClick r:id="rId13"/>
           </p:nvPr>
         </p:nvSpPr>
         <p:spPr>
@@ -5031,7 +3576,7 @@
                   <a:srgbClr val="1F3A5F"/>
                 </a:solidFill>
               </a:rPr>
-              <a:t>Gram 20: FR Nebulon-B, Category 4, Romulus</a:t>
+              <a:t>Gram 4: FR Galaxy-class, Category 3, Dank</a:t>
             </a:r>
           </a:p>
         </p:txBody>
@@ -5060,17 +3605,9 @@
           <a:p>
             <a:r>
               <a:rPr sz="800">
-                <a:hlinkClick r:id="rId15"/>
+                <a:hlinkClick r:id="rId14"/>
               </a:rPr>
               <a:t>Lofar 1</a:t>
-            </a:r>
-          </a:p>
-          <a:p>
-            <a:r>
-              <a:rPr sz="800">
-                <a:hlinkClick r:id="rId16"/>
-              </a:rPr>
-              <a:t>Lofar 2</a:t>
             </a:r>
           </a:p>
         </p:txBody>
@@ -5080,7 +3617,7 @@
           <p:cNvPr id="11" name="Rounded Rectangle 10"/>
           <p:cNvSpPr/>
           <p:nvPr>
-            <a:hlinkClick r:id="rId17"/>
+            <a:hlinkClick r:id="rId15"/>
           </p:nvPr>
         </p:nvSpPr>
         <p:spPr>
@@ -5125,7 +3662,7 @@
                   <a:srgbClr val="1F3A5F"/>
                 </a:solidFill>
               </a:rPr>
-              <a:t>Gram 22: Nebulon-B contact bearing 283, codename Endor</a:t>
+              <a:t>Gram 5: FR Constitution-class, Category 3, Yavin</a:t>
             </a:r>
           </a:p>
         </p:txBody>
@@ -5154,25 +3691,9 @@
           <a:p>
             <a:r>
               <a:rPr sz="800">
-                <a:hlinkClick r:id="rId18"/>
+                <a:hlinkClick r:id="rId16"/>
               </a:rPr>
               <a:t>Lofar 1</a:t>
-            </a:r>
-          </a:p>
-          <a:p>
-            <a:r>
-              <a:rPr sz="800">
-                <a:hlinkClick r:id="rId19"/>
-              </a:rPr>
-              <a:t>Lofar 2</a:t>
-            </a:r>
-          </a:p>
-          <a:p>
-            <a:r>
-              <a:rPr sz="800">
-                <a:hlinkClick r:id="rId20"/>
-              </a:rPr>
-              <a:t>Lofar 3</a:t>
             </a:r>
           </a:p>
         </p:txBody>
@@ -5182,7 +3703,7 @@
           <p:cNvPr id="13" name="Rounded Rectangle 12"/>
           <p:cNvSpPr/>
           <p:nvPr>
-            <a:hlinkClick r:id="rId21"/>
+            <a:hlinkClick r:id="rId17"/>
           </p:nvPr>
         </p:nvSpPr>
         <p:spPr>
@@ -5227,7 +3748,7 @@
                   <a:srgbClr val="1F3A5F"/>
                 </a:solidFill>
               </a:rPr>
-              <a:t>Gram 23: FR Equinox, Category 4, Hoth</a:t>
+              <a:t>Gram 6: FR Corellian Corvette, Category 2, Tantive</a:t>
             </a:r>
           </a:p>
         </p:txBody>
@@ -5256,9 +3777,33 @@
           <a:p>
             <a:r>
               <a:rPr sz="800">
-                <a:hlinkClick r:id="rId22"/>
+                <a:hlinkClick r:id="rId18"/>
               </a:rPr>
               <a:t>Lofar 1</a:t>
+            </a:r>
+          </a:p>
+          <a:p>
+            <a:r>
+              <a:rPr sz="800">
+                <a:hlinkClick r:id="rId19"/>
+              </a:rPr>
+              <a:t>Lofar 2</a:t>
+            </a:r>
+          </a:p>
+          <a:p>
+            <a:r>
+              <a:rPr sz="800">
+                <a:hlinkClick r:id="rId20"/>
+              </a:rPr>
+              <a:t>Lofar 3</a:t>
+            </a:r>
+          </a:p>
+          <a:p>
+            <a:r>
+              <a:rPr sz="800">
+                <a:hlinkClick r:id="rId21"/>
+              </a:rPr>
+              <a:t>Lofar 4</a:t>
             </a:r>
           </a:p>
         </p:txBody>
@@ -5268,7 +3813,7 @@
           <p:cNvPr id="15" name="Rounded Rectangle 14"/>
           <p:cNvSpPr/>
           <p:nvPr>
-            <a:hlinkClick r:id="rId23"/>
+            <a:hlinkClick r:id="rId22"/>
           </p:nvPr>
         </p:nvSpPr>
         <p:spPr>
@@ -5313,7 +3858,7 @@
                   <a:srgbClr val="1F3A5F"/>
                 </a:solidFill>
               </a:rPr>
-              <a:t>Gram 24: FR Equinox, Category 1, Tantive</a:t>
+              <a:t>Gram 7: FR Millennium Falcon, Category 4, Romulus</a:t>
             </a:r>
           </a:p>
         </p:txBody>
@@ -5342,9 +3887,17 @@
           <a:p>
             <a:r>
               <a:rPr sz="800">
+                <a:hlinkClick r:id="rId23"/>
+              </a:rPr>
+              <a:t>Lofar 1</a:t>
+            </a:r>
+          </a:p>
+          <a:p>
+            <a:r>
+              <a:rPr sz="800">
                 <a:hlinkClick r:id="rId24"/>
               </a:rPr>
-              <a:t>Lofar 1</a:t>
+              <a:t>Lofar 2</a:t>
             </a:r>
           </a:p>
           <a:p>
@@ -5352,21 +3905,13 @@
               <a:rPr sz="800">
                 <a:hlinkClick r:id="rId25"/>
               </a:rPr>
-              <a:t>Lofar 2</a:t>
+              <a:t>Lofar 3</a:t>
             </a:r>
           </a:p>
           <a:p>
             <a:r>
               <a:rPr sz="800">
                 <a:hlinkClick r:id="rId26"/>
-              </a:rPr>
-              <a:t>Lofar 3</a:t>
-            </a:r>
-          </a:p>
-          <a:p>
-            <a:r>
-              <a:rPr sz="800">
-                <a:hlinkClick r:id="rId27"/>
               </a:rPr>
               <a:t>Lofar 4</a:t>
             </a:r>
@@ -5378,7 +3923,7 @@
           <p:cNvPr id="17" name="Rounded Rectangle 16"/>
           <p:cNvSpPr/>
           <p:nvPr>
-            <a:hlinkClick r:id="rId28"/>
+            <a:hlinkClick r:id="rId27"/>
           </p:nvPr>
         </p:nvSpPr>
         <p:spPr>
@@ -5423,7 +3968,7 @@
                   <a:srgbClr val="1F3A5F"/>
                 </a:solidFill>
               </a:rPr>
-              <a:t>Gram 25: FR Galaxy-class, Category 4, Betazed</a:t>
+              <a:t>Gram 8: Nebulon-B contact bearing 297, codename Cardassia</a:t>
             </a:r>
           </a:p>
         </p:txBody>
@@ -5452,9 +3997,25 @@
           <a:p>
             <a:r>
               <a:rPr sz="800">
+                <a:hlinkClick r:id="rId28"/>
+              </a:rPr>
+              <a:t>Lofar 1</a:t>
+            </a:r>
+          </a:p>
+          <a:p>
+            <a:r>
+              <a:rPr sz="800">
                 <a:hlinkClick r:id="rId29"/>
               </a:rPr>
-              <a:t>Lofar 1</a:t>
+              <a:t>Lofar 2</a:t>
+            </a:r>
+          </a:p>
+          <a:p>
+            <a:r>
+              <a:rPr sz="800">
+                <a:hlinkClick r:id="rId30"/>
+              </a:rPr>
+              <a:t>Lofar 3</a:t>
             </a:r>
           </a:p>
         </p:txBody>
@@ -5464,7 +4025,7 @@
           <p:cNvPr id="19" name="Rounded Rectangle 18"/>
           <p:cNvSpPr/>
           <p:nvPr>
-            <a:hlinkClick r:id="rId30"/>
+            <a:hlinkClick r:id="rId31"/>
           </p:nvPr>
         </p:nvSpPr>
         <p:spPr>
@@ -5509,7 +4070,7 @@
                   <a:srgbClr val="1F3A5F"/>
                 </a:solidFill>
               </a:rPr>
-              <a:t>Gram 26: FR Discovery, Category 4, Tantive</a:t>
+              <a:t>Gram 9: FR A-wing, Category 1, Romulus</a:t>
             </a:r>
           </a:p>
         </p:txBody>
@@ -5538,7 +4099,7 @@
           <a:p>
             <a:r>
               <a:rPr sz="800">
-                <a:hlinkClick r:id="rId31"/>
+                <a:hlinkClick r:id="rId32"/>
               </a:rPr>
               <a:t>Lofar 1</a:t>
             </a:r>
@@ -5546,7 +4107,7 @@
           <a:p>
             <a:r>
               <a:rPr sz="800">
-                <a:hlinkClick r:id="rId32"/>
+                <a:hlinkClick r:id="rId33"/>
               </a:rPr>
               <a:t>Lofar 2</a:t>
             </a:r>
@@ -5554,17 +4115,9 @@
           <a:p>
             <a:r>
               <a:rPr sz="800">
-                <a:hlinkClick r:id="rId33"/>
+                <a:hlinkClick r:id="rId34"/>
               </a:rPr>
               <a:t>Lofar 3</a:t>
-            </a:r>
-          </a:p>
-          <a:p>
-            <a:r>
-              <a:rPr sz="800">
-                <a:hlinkClick r:id="rId34"/>
-              </a:rPr>
-              <a:t>Lofar 4</a:t>
             </a:r>
           </a:p>
         </p:txBody>
@@ -5619,7 +4172,7 @@
                   <a:srgbClr val="1F3A5F"/>
                 </a:solidFill>
               </a:rPr>
-              <a:t>Gram 28: FR Voyager, Category 4, Romulus</a:t>
+              <a:t>Gram 10: FR Tantive IV, Category 4, Gandalf</a:t>
             </a:r>
           </a:p>
         </p:txBody>
@@ -5653,14 +4206,6 @@
               <a:t>Lofar 1</a:t>
             </a:r>
           </a:p>
-          <a:p>
-            <a:r>
-              <a:rPr sz="800">
-                <a:hlinkClick r:id="rId37"/>
-              </a:rPr>
-              <a:t>Lofar 2</a:t>
-            </a:r>
-          </a:p>
         </p:txBody>
       </p:sp>
       <p:sp>
@@ -5668,7 +4213,7 @@
           <p:cNvPr id="23" name="Rounded Rectangle 22"/>
           <p:cNvSpPr/>
           <p:nvPr>
-            <a:hlinkClick r:id="rId38"/>
+            <a:hlinkClick r:id="rId37"/>
           </p:nvPr>
         </p:nvSpPr>
         <p:spPr>
@@ -5713,7 +4258,7 @@
                   <a:srgbClr val="1F3A5F"/>
                 </a:solidFill>
               </a:rPr>
-              <a:t>Gram 30: FR Akira-class, Category 2, Kobol</a:t>
+              <a:t>Gram 11: FR Razor Crest, Category 1, Betazed</a:t>
             </a:r>
           </a:p>
         </p:txBody>
@@ -5742,23 +4287,23 @@
           <a:p>
             <a:r>
               <a:rPr sz="800">
+                <a:hlinkClick r:id="rId38"/>
+              </a:rPr>
+              <a:t>Lofar 1</a:t>
+            </a:r>
+          </a:p>
+          <a:p>
+            <a:r>
+              <a:rPr sz="800">
                 <a:hlinkClick r:id="rId39"/>
               </a:rPr>
-              <a:t>Lofar 1</a:t>
+              <a:t>Lofar 2</a:t>
             </a:r>
           </a:p>
           <a:p>
             <a:r>
               <a:rPr sz="800">
                 <a:hlinkClick r:id="rId40"/>
-              </a:rPr>
-              <a:t>Lofar 2</a:t>
-            </a:r>
-          </a:p>
-          <a:p>
-            <a:r>
-              <a:rPr sz="800">
-                <a:hlinkClick r:id="rId41"/>
               </a:rPr>
               <a:t>Lofar 3</a:t>
             </a:r>
@@ -5770,7 +4315,7 @@
           <p:cNvPr id="25" name="Rounded Rectangle 24"/>
           <p:cNvSpPr/>
           <p:nvPr>
-            <a:hlinkClick r:id="rId42"/>
+            <a:hlinkClick r:id="rId41"/>
           </p:nvPr>
         </p:nvSpPr>
         <p:spPr>
@@ -5815,7 +4360,7 @@
                   <a:srgbClr val="1F3A5F"/>
                 </a:solidFill>
               </a:rPr>
-              <a:t>Gram 31: X-wing contact bearing 051, codename Mustafar</a:t>
+              <a:t>Gram 12: FR Constitution-class, Category 1, Tatooine</a:t>
             </a:r>
           </a:p>
         </p:txBody>
@@ -5844,9 +4389,17 @@
           <a:p>
             <a:r>
               <a:rPr sz="800">
+                <a:hlinkClick r:id="rId42"/>
+              </a:rPr>
+              <a:t>Lofar 1</a:t>
+            </a:r>
+          </a:p>
+          <a:p>
+            <a:r>
+              <a:rPr sz="800">
                 <a:hlinkClick r:id="rId43"/>
               </a:rPr>
-              <a:t>Lofar 1</a:t>
+              <a:t>Lofar 2</a:t>
             </a:r>
           </a:p>
           <a:p>
@@ -5854,7 +4407,7 @@
               <a:rPr sz="800">
                 <a:hlinkClick r:id="rId44"/>
               </a:rPr>
-              <a:t>Lofar 2</a:t>
+              <a:t>Lofar 3</a:t>
             </a:r>
           </a:p>
         </p:txBody>
@@ -5909,7 +4462,7 @@
                   <a:srgbClr val="1F3A5F"/>
                 </a:solidFill>
               </a:rPr>
-              <a:t>Gram 32: FR Sovereign-class, Category 4, Naboo</a:t>
+              <a:t>Gram 13: FR Reliant, Category 2, Caprica</a:t>
             </a:r>
           </a:p>
         </p:txBody>
@@ -5943,30 +4496,6 @@
               <a:t>Lofar 1</a:t>
             </a:r>
           </a:p>
-          <a:p>
-            <a:r>
-              <a:rPr sz="800">
-                <a:hlinkClick r:id="rId47"/>
-              </a:rPr>
-              <a:t>Lofar 2</a:t>
-            </a:r>
-          </a:p>
-          <a:p>
-            <a:r>
-              <a:rPr sz="800">
-                <a:hlinkClick r:id="rId48"/>
-              </a:rPr>
-              <a:t>Lofar 3</a:t>
-            </a:r>
-          </a:p>
-          <a:p>
-            <a:r>
-              <a:rPr sz="800">
-                <a:hlinkClick r:id="rId49"/>
-              </a:rPr>
-              <a:t>Lofar 4</a:t>
-            </a:r>
-          </a:p>
         </p:txBody>
       </p:sp>
       <p:sp>
@@ -5974,7 +4503,7 @@
           <p:cNvPr id="29" name="Rounded Rectangle 28"/>
           <p:cNvSpPr/>
           <p:nvPr>
-            <a:hlinkClick r:id="rId50"/>
+            <a:hlinkClick r:id="rId47"/>
           </p:nvPr>
         </p:nvSpPr>
         <p:spPr>
@@ -6019,7 +4548,7 @@
                   <a:srgbClr val="1F3A5F"/>
                 </a:solidFill>
               </a:rPr>
-              <a:t>Gram 34: FR Equinox, Category 2, Cardassia</a:t>
+              <a:t>Gram 14: FR TIE Fighter, Category 4, Tantive</a:t>
             </a:r>
           </a:p>
         </p:txBody>
@@ -6048,7 +4577,7 @@
           <a:p>
             <a:r>
               <a:rPr sz="800">
-                <a:hlinkClick r:id="rId51"/>
+                <a:hlinkClick r:id="rId48"/>
               </a:rPr>
               <a:t>Lofar 1</a:t>
             </a:r>
@@ -6056,7 +4585,7 @@
           <a:p>
             <a:r>
               <a:rPr sz="800">
-                <a:hlinkClick r:id="rId52"/>
+                <a:hlinkClick r:id="rId49"/>
               </a:rPr>
               <a:t>Lofar 2</a:t>
             </a:r>
@@ -6068,7 +4597,7 @@
           <p:cNvPr id="31" name="Rounded Rectangle 30"/>
           <p:cNvSpPr/>
           <p:nvPr>
-            <a:hlinkClick r:id="rId53"/>
+            <a:hlinkClick r:id="rId50"/>
           </p:nvPr>
         </p:nvSpPr>
         <p:spPr>
@@ -6113,7 +4642,7 @@
                   <a:srgbClr val="1F3A5F"/>
                 </a:solidFill>
               </a:rPr>
-              <a:t>Gram 36: FR Cerritos, Category 3, Bajor</a:t>
+              <a:t>Gram 15: FR Prometheus, Category 1, Caprica</a:t>
             </a:r>
           </a:p>
         </p:txBody>
@@ -6142,9 +4671,1654 @@
           <a:p>
             <a:r>
               <a:rPr sz="800">
+                <a:hlinkClick r:id="rId51"/>
+              </a:rPr>
+              <a:t>Lofar 1</a:t>
+            </a:r>
+          </a:p>
+          <a:p>
+            <a:r>
+              <a:rPr sz="800">
+                <a:hlinkClick r:id="rId52"/>
+              </a:rPr>
+              <a:t>Lofar 2</a:t>
+            </a:r>
+          </a:p>
+          <a:p>
+            <a:r>
+              <a:rPr sz="800">
+                <a:hlinkClick r:id="rId53"/>
+              </a:rPr>
+              <a:t>Lofar 3</a:t>
+            </a:r>
+          </a:p>
+        </p:txBody>
+      </p:sp>
+    </p:spTree>
+  </p:cSld>
+  <p:clrMapOvr>
+    <a:masterClrMapping/>
+  </p:clrMapOvr>
+</p:sld>
+</file>
+
+<file path=ppt/slides/slide3.xml><?xml version="1.0" encoding="utf-8"?>
+<p:sld xmlns:a="http://schemas.openxmlformats.org/drawingml/2006/main" xmlns:p="http://schemas.openxmlformats.org/presentationml/2006/main" xmlns:r="http://schemas.openxmlformats.org/officeDocument/2006/relationships">
+  <p:cSld>
+    <p:spTree>
+      <p:nvGrpSpPr>
+        <p:cNvPr id="1" name=""/>
+        <p:cNvGrpSpPr/>
+        <p:nvPr/>
+      </p:nvGrpSpPr>
+      <p:grpSpPr/>
+      <p:sp>
+        <p:nvSpPr>
+          <p:cNvPr id="2" name="Rectangle 1"/>
+          <p:cNvSpPr/>
+          <p:nvPr/>
+        </p:nvSpPr>
+        <p:spPr>
+          <a:xfrm>
+            <a:off x="0" y="0"/>
+            <a:ext cx="12188952" cy="548640"/>
+          </a:xfrm>
+          <a:prstGeom prst="rect">
+            <a:avLst/>
+          </a:prstGeom>
+          <a:solidFill>
+            <a:srgbClr val="1F3A5F"/>
+          </a:solidFill>
+          <a:ln>
+            <a:noFill/>
+          </a:ln>
+        </p:spPr>
+        <p:style>
+          <a:lnRef idx="1">
+            <a:schemeClr val="accent1"/>
+          </a:lnRef>
+          <a:fillRef idx="3">
+            <a:schemeClr val="accent1"/>
+          </a:fillRef>
+          <a:effectRef idx="2">
+            <a:schemeClr val="accent1"/>
+          </a:effectRef>
+          <a:fontRef idx="minor">
+            <a:schemeClr val="lt1"/>
+          </a:fontRef>
+        </p:style>
+        <p:txBody>
+          <a:bodyPr rtlCol="0" anchor="ctr" lIns="182880" rIns="182880"/>
+          <a:lstStyle/>
+          <a:p>
+            <a:pPr algn="ctr"/>
+            <a:r>
+              <a:rPr sz="2000" b="1">
+                <a:solidFill>
+                  <a:srgbClr val="FFFFFF"/>
+                </a:solidFill>
+              </a:rPr>
+              <a:t>Instructor Progress Test 2 Grams_Updated — Page 2 of 2</a:t>
+            </a:r>
+          </a:p>
+        </p:txBody>
+      </p:sp>
+      <p:sp>
+        <p:nvSpPr>
+          <p:cNvPr id="3" name="Rounded Rectangle 2"/>
+          <p:cNvSpPr/>
+          <p:nvPr>
+            <a:hlinkClick r:id="rId2"/>
+          </p:nvPr>
+        </p:nvSpPr>
+        <p:spPr>
+          <a:xfrm>
+            <a:off x="365760" y="731520"/>
+            <a:ext cx="2200046" cy="365760"/>
+          </a:xfrm>
+          <a:prstGeom prst="roundRect">
+            <a:avLst/>
+          </a:prstGeom>
+          <a:solidFill>
+            <a:srgbClr val="E8EEF7"/>
+          </a:solidFill>
+          <a:ln>
+            <a:solidFill>
+              <a:srgbClr val="1F3A5F"/>
+            </a:solidFill>
+          </a:ln>
+        </p:spPr>
+        <p:style>
+          <a:lnRef idx="1">
+            <a:schemeClr val="accent1"/>
+          </a:lnRef>
+          <a:fillRef idx="3">
+            <a:schemeClr val="accent1"/>
+          </a:fillRef>
+          <a:effectRef idx="2">
+            <a:schemeClr val="accent1"/>
+          </a:effectRef>
+          <a:fontRef idx="minor">
+            <a:schemeClr val="lt1"/>
+          </a:fontRef>
+        </p:style>
+        <p:txBody>
+          <a:bodyPr rtlCol="0" anchor="ctr" lIns="45720" rIns="45720"/>
+          <a:lstStyle/>
+          <a:p>
+            <a:pPr algn="ctr"/>
+            <a:r>
+              <a:rPr sz="900">
+                <a:solidFill>
+                  <a:srgbClr val="1F3A5F"/>
+                </a:solidFill>
+              </a:rPr>
+              <a:t>Gram 16: FR Intrepid-class, Category 1, Gandalf</a:t>
+            </a:r>
+          </a:p>
+        </p:txBody>
+      </p:sp>
+      <p:sp>
+        <p:nvSpPr>
+          <p:cNvPr id="4" name="TextBox 3"/>
+          <p:cNvSpPr txBox="1"/>
+          <p:nvPr/>
+        </p:nvSpPr>
+        <p:spPr>
+          <a:xfrm>
+            <a:off x="365760" y="1115568"/>
+            <a:ext cx="2200046" cy="1447800"/>
+          </a:xfrm>
+          <a:prstGeom prst="rect">
+            <a:avLst/>
+          </a:prstGeom>
+          <a:noFill/>
+        </p:spPr>
+        <p:txBody>
+          <a:bodyPr wrap="square">
+            <a:spAutoFit/>
+          </a:bodyPr>
+          <a:lstStyle/>
+          <a:p>
+            <a:r>
+              <a:rPr sz="800">
+                <a:hlinkClick r:id="rId3"/>
+              </a:rPr>
+              <a:t>Lofar 1</a:t>
+            </a:r>
+          </a:p>
+          <a:p>
+            <a:r>
+              <a:rPr sz="800">
+                <a:hlinkClick r:id="rId4"/>
+              </a:rPr>
+              <a:t>Lofar 2</a:t>
+            </a:r>
+          </a:p>
+          <a:p>
+            <a:r>
+              <a:rPr sz="800">
+                <a:hlinkClick r:id="rId5"/>
+              </a:rPr>
+              <a:t>Lofar 3</a:t>
+            </a:r>
+          </a:p>
+          <a:p>
+            <a:r>
+              <a:rPr sz="800">
+                <a:hlinkClick r:id="rId6"/>
+              </a:rPr>
+              <a:t>Lofar 4</a:t>
+            </a:r>
+          </a:p>
+        </p:txBody>
+      </p:sp>
+      <p:sp>
+        <p:nvSpPr>
+          <p:cNvPr id="5" name="Rounded Rectangle 4"/>
+          <p:cNvSpPr/>
+          <p:nvPr>
+            <a:hlinkClick r:id="rId7"/>
+          </p:nvPr>
+        </p:nvSpPr>
+        <p:spPr>
+          <a:xfrm>
+            <a:off x="2657246" y="731520"/>
+            <a:ext cx="2200046" cy="365760"/>
+          </a:xfrm>
+          <a:prstGeom prst="roundRect">
+            <a:avLst/>
+          </a:prstGeom>
+          <a:solidFill>
+            <a:srgbClr val="E8EEF7"/>
+          </a:solidFill>
+          <a:ln>
+            <a:solidFill>
+              <a:srgbClr val="1F3A5F"/>
+            </a:solidFill>
+          </a:ln>
+        </p:spPr>
+        <p:style>
+          <a:lnRef idx="1">
+            <a:schemeClr val="accent1"/>
+          </a:lnRef>
+          <a:fillRef idx="3">
+            <a:schemeClr val="accent1"/>
+          </a:fillRef>
+          <a:effectRef idx="2">
+            <a:schemeClr val="accent1"/>
+          </a:effectRef>
+          <a:fontRef idx="minor">
+            <a:schemeClr val="lt1"/>
+          </a:fontRef>
+        </p:style>
+        <p:txBody>
+          <a:bodyPr rtlCol="0" anchor="ctr" lIns="45720" rIns="45720"/>
+          <a:lstStyle/>
+          <a:p>
+            <a:pPr algn="ctr"/>
+            <a:r>
+              <a:rPr sz="900">
+                <a:solidFill>
+                  <a:srgbClr val="1F3A5F"/>
+                </a:solidFill>
+              </a:rPr>
+              <a:t>Gram 17: FR Devastator, Category 3, Cardassia</a:t>
+            </a:r>
+          </a:p>
+        </p:txBody>
+      </p:sp>
+      <p:sp>
+        <p:nvSpPr>
+          <p:cNvPr id="6" name="TextBox 5"/>
+          <p:cNvSpPr txBox="1"/>
+          <p:nvPr/>
+        </p:nvSpPr>
+        <p:spPr>
+          <a:xfrm>
+            <a:off x="2657246" y="1115568"/>
+            <a:ext cx="2200046" cy="1447800"/>
+          </a:xfrm>
+          <a:prstGeom prst="rect">
+            <a:avLst/>
+          </a:prstGeom>
+          <a:noFill/>
+        </p:spPr>
+        <p:txBody>
+          <a:bodyPr wrap="square">
+            <a:spAutoFit/>
+          </a:bodyPr>
+          <a:lstStyle/>
+          <a:p>
+            <a:r>
+              <a:rPr sz="800">
+                <a:hlinkClick r:id="rId8"/>
+              </a:rPr>
+              <a:t>Lofar 1</a:t>
+            </a:r>
+          </a:p>
+        </p:txBody>
+      </p:sp>
+      <p:sp>
+        <p:nvSpPr>
+          <p:cNvPr id="7" name="Rounded Rectangle 6"/>
+          <p:cNvSpPr/>
+          <p:nvPr>
+            <a:hlinkClick r:id="rId9"/>
+          </p:nvPr>
+        </p:nvSpPr>
+        <p:spPr>
+          <a:xfrm>
+            <a:off x="4948732" y="731520"/>
+            <a:ext cx="2200046" cy="365760"/>
+          </a:xfrm>
+          <a:prstGeom prst="roundRect">
+            <a:avLst/>
+          </a:prstGeom>
+          <a:solidFill>
+            <a:srgbClr val="E8EEF7"/>
+          </a:solidFill>
+          <a:ln>
+            <a:solidFill>
+              <a:srgbClr val="1F3A5F"/>
+            </a:solidFill>
+          </a:ln>
+        </p:spPr>
+        <p:style>
+          <a:lnRef idx="1">
+            <a:schemeClr val="accent1"/>
+          </a:lnRef>
+          <a:fillRef idx="3">
+            <a:schemeClr val="accent1"/>
+          </a:fillRef>
+          <a:effectRef idx="2">
+            <a:schemeClr val="accent1"/>
+          </a:effectRef>
+          <a:fontRef idx="minor">
+            <a:schemeClr val="lt1"/>
+          </a:fontRef>
+        </p:style>
+        <p:txBody>
+          <a:bodyPr rtlCol="0" anchor="ctr" lIns="45720" rIns="45720"/>
+          <a:lstStyle/>
+          <a:p>
+            <a:pPr algn="ctr"/>
+            <a:r>
+              <a:rPr sz="900">
+                <a:solidFill>
+                  <a:srgbClr val="1F3A5F"/>
+                </a:solidFill>
+              </a:rPr>
+              <a:t>Gram 18: FR Prometheus, Category 3, Dagobah</a:t>
+            </a:r>
+          </a:p>
+        </p:txBody>
+      </p:sp>
+      <p:sp>
+        <p:nvSpPr>
+          <p:cNvPr id="8" name="TextBox 7"/>
+          <p:cNvSpPr txBox="1"/>
+          <p:nvPr/>
+        </p:nvSpPr>
+        <p:spPr>
+          <a:xfrm>
+            <a:off x="4948732" y="1115568"/>
+            <a:ext cx="2200046" cy="1447800"/>
+          </a:xfrm>
+          <a:prstGeom prst="rect">
+            <a:avLst/>
+          </a:prstGeom>
+          <a:noFill/>
+        </p:spPr>
+        <p:txBody>
+          <a:bodyPr wrap="square">
+            <a:spAutoFit/>
+          </a:bodyPr>
+          <a:lstStyle/>
+          <a:p>
+            <a:r>
+              <a:rPr sz="800">
+                <a:hlinkClick r:id="rId10"/>
+              </a:rPr>
+              <a:t>Lofar 1</a:t>
+            </a:r>
+          </a:p>
+          <a:p>
+            <a:r>
+              <a:rPr sz="800">
+                <a:hlinkClick r:id="rId11"/>
+              </a:rPr>
+              <a:t>Lofar 2</a:t>
+            </a:r>
+          </a:p>
+          <a:p>
+            <a:r>
+              <a:rPr sz="800">
+                <a:hlinkClick r:id="rId12"/>
+              </a:rPr>
+              <a:t>Lofar 3</a:t>
+            </a:r>
+          </a:p>
+          <a:p>
+            <a:r>
+              <a:rPr sz="800">
+                <a:hlinkClick r:id="rId13"/>
+              </a:rPr>
+              <a:t>Lofar 4</a:t>
+            </a:r>
+          </a:p>
+        </p:txBody>
+      </p:sp>
+      <p:sp>
+        <p:nvSpPr>
+          <p:cNvPr id="9" name="Rounded Rectangle 8"/>
+          <p:cNvSpPr/>
+          <p:nvPr>
+            <a:hlinkClick r:id="rId14"/>
+          </p:nvPr>
+        </p:nvSpPr>
+        <p:spPr>
+          <a:xfrm>
+            <a:off x="7240219" y="731520"/>
+            <a:ext cx="2200046" cy="365760"/>
+          </a:xfrm>
+          <a:prstGeom prst="roundRect">
+            <a:avLst/>
+          </a:prstGeom>
+          <a:solidFill>
+            <a:srgbClr val="E8EEF7"/>
+          </a:solidFill>
+          <a:ln>
+            <a:solidFill>
+              <a:srgbClr val="1F3A5F"/>
+            </a:solidFill>
+          </a:ln>
+        </p:spPr>
+        <p:style>
+          <a:lnRef idx="1">
+            <a:schemeClr val="accent1"/>
+          </a:lnRef>
+          <a:fillRef idx="3">
+            <a:schemeClr val="accent1"/>
+          </a:fillRef>
+          <a:effectRef idx="2">
+            <a:schemeClr val="accent1"/>
+          </a:effectRef>
+          <a:fontRef idx="minor">
+            <a:schemeClr val="lt1"/>
+          </a:fontRef>
+        </p:style>
+        <p:txBody>
+          <a:bodyPr rtlCol="0" anchor="ctr" lIns="45720" rIns="45720"/>
+          <a:lstStyle/>
+          <a:p>
+            <a:pPr algn="ctr"/>
+            <a:r>
+              <a:rPr sz="900">
+                <a:solidFill>
+                  <a:srgbClr val="1F3A5F"/>
+                </a:solidFill>
+              </a:rPr>
+              <a:t>Gram 20: FR Nebulon-B, Category 4, Romulus</a:t>
+            </a:r>
+          </a:p>
+        </p:txBody>
+      </p:sp>
+      <p:sp>
+        <p:nvSpPr>
+          <p:cNvPr id="10" name="TextBox 9"/>
+          <p:cNvSpPr txBox="1"/>
+          <p:nvPr/>
+        </p:nvSpPr>
+        <p:spPr>
+          <a:xfrm>
+            <a:off x="7240219" y="1115568"/>
+            <a:ext cx="2200046" cy="1447800"/>
+          </a:xfrm>
+          <a:prstGeom prst="rect">
+            <a:avLst/>
+          </a:prstGeom>
+          <a:noFill/>
+        </p:spPr>
+        <p:txBody>
+          <a:bodyPr wrap="square">
+            <a:spAutoFit/>
+          </a:bodyPr>
+          <a:lstStyle/>
+          <a:p>
+            <a:r>
+              <a:rPr sz="800">
+                <a:hlinkClick r:id="rId15"/>
+              </a:rPr>
+              <a:t>Lofar 1</a:t>
+            </a:r>
+          </a:p>
+          <a:p>
+            <a:r>
+              <a:rPr sz="800">
+                <a:hlinkClick r:id="rId16"/>
+              </a:rPr>
+              <a:t>Lofar 2</a:t>
+            </a:r>
+          </a:p>
+        </p:txBody>
+      </p:sp>
+      <p:sp>
+        <p:nvSpPr>
+          <p:cNvPr id="11" name="Rounded Rectangle 10"/>
+          <p:cNvSpPr/>
+          <p:nvPr>
+            <a:hlinkClick r:id="rId17"/>
+          </p:nvPr>
+        </p:nvSpPr>
+        <p:spPr>
+          <a:xfrm>
+            <a:off x="9531705" y="731520"/>
+            <a:ext cx="2200046" cy="365760"/>
+          </a:xfrm>
+          <a:prstGeom prst="roundRect">
+            <a:avLst/>
+          </a:prstGeom>
+          <a:solidFill>
+            <a:srgbClr val="E8EEF7"/>
+          </a:solidFill>
+          <a:ln>
+            <a:solidFill>
+              <a:srgbClr val="1F3A5F"/>
+            </a:solidFill>
+          </a:ln>
+        </p:spPr>
+        <p:style>
+          <a:lnRef idx="1">
+            <a:schemeClr val="accent1"/>
+          </a:lnRef>
+          <a:fillRef idx="3">
+            <a:schemeClr val="accent1"/>
+          </a:fillRef>
+          <a:effectRef idx="2">
+            <a:schemeClr val="accent1"/>
+          </a:effectRef>
+          <a:fontRef idx="minor">
+            <a:schemeClr val="lt1"/>
+          </a:fontRef>
+        </p:style>
+        <p:txBody>
+          <a:bodyPr rtlCol="0" anchor="ctr" lIns="45720" rIns="45720"/>
+          <a:lstStyle/>
+          <a:p>
+            <a:pPr algn="ctr"/>
+            <a:r>
+              <a:rPr sz="900">
+                <a:solidFill>
+                  <a:srgbClr val="1F3A5F"/>
+                </a:solidFill>
+              </a:rPr>
+              <a:t>Gram 22: Nebulon-B contact bearing 283, codename Endor</a:t>
+            </a:r>
+          </a:p>
+        </p:txBody>
+      </p:sp>
+      <p:sp>
+        <p:nvSpPr>
+          <p:cNvPr id="12" name="TextBox 11"/>
+          <p:cNvSpPr txBox="1"/>
+          <p:nvPr/>
+        </p:nvSpPr>
+        <p:spPr>
+          <a:xfrm>
+            <a:off x="9531705" y="1115568"/>
+            <a:ext cx="2200046" cy="1447800"/>
+          </a:xfrm>
+          <a:prstGeom prst="rect">
+            <a:avLst/>
+          </a:prstGeom>
+          <a:noFill/>
+        </p:spPr>
+        <p:txBody>
+          <a:bodyPr wrap="square">
+            <a:spAutoFit/>
+          </a:bodyPr>
+          <a:lstStyle/>
+          <a:p>
+            <a:r>
+              <a:rPr sz="800">
+                <a:hlinkClick r:id="rId18"/>
+              </a:rPr>
+              <a:t>Lofar 1</a:t>
+            </a:r>
+          </a:p>
+          <a:p>
+            <a:r>
+              <a:rPr sz="800">
+                <a:hlinkClick r:id="rId19"/>
+              </a:rPr>
+              <a:t>Lofar 2</a:t>
+            </a:r>
+          </a:p>
+          <a:p>
+            <a:r>
+              <a:rPr sz="800">
+                <a:hlinkClick r:id="rId20"/>
+              </a:rPr>
+              <a:t>Lofar 3</a:t>
+            </a:r>
+          </a:p>
+        </p:txBody>
+      </p:sp>
+      <p:sp>
+        <p:nvSpPr>
+          <p:cNvPr id="13" name="Rounded Rectangle 12"/>
+          <p:cNvSpPr/>
+          <p:nvPr>
+            <a:hlinkClick r:id="rId21"/>
+          </p:nvPr>
+        </p:nvSpPr>
+        <p:spPr>
+          <a:xfrm>
+            <a:off x="365760" y="2682240"/>
+            <a:ext cx="2200046" cy="365760"/>
+          </a:xfrm>
+          <a:prstGeom prst="roundRect">
+            <a:avLst/>
+          </a:prstGeom>
+          <a:solidFill>
+            <a:srgbClr val="E8EEF7"/>
+          </a:solidFill>
+          <a:ln>
+            <a:solidFill>
+              <a:srgbClr val="1F3A5F"/>
+            </a:solidFill>
+          </a:ln>
+        </p:spPr>
+        <p:style>
+          <a:lnRef idx="1">
+            <a:schemeClr val="accent1"/>
+          </a:lnRef>
+          <a:fillRef idx="3">
+            <a:schemeClr val="accent1"/>
+          </a:fillRef>
+          <a:effectRef idx="2">
+            <a:schemeClr val="accent1"/>
+          </a:effectRef>
+          <a:fontRef idx="minor">
+            <a:schemeClr val="lt1"/>
+          </a:fontRef>
+        </p:style>
+        <p:txBody>
+          <a:bodyPr rtlCol="0" anchor="ctr" lIns="45720" rIns="45720"/>
+          <a:lstStyle/>
+          <a:p>
+            <a:pPr algn="ctr"/>
+            <a:r>
+              <a:rPr sz="900">
+                <a:solidFill>
+                  <a:srgbClr val="1F3A5F"/>
+                </a:solidFill>
+              </a:rPr>
+              <a:t>Gram 23: FR Equinox, Category 4, Hoth</a:t>
+            </a:r>
+          </a:p>
+        </p:txBody>
+      </p:sp>
+      <p:sp>
+        <p:nvSpPr>
+          <p:cNvPr id="14" name="TextBox 13"/>
+          <p:cNvSpPr txBox="1"/>
+          <p:nvPr/>
+        </p:nvSpPr>
+        <p:spPr>
+          <a:xfrm>
+            <a:off x="365760" y="3066288"/>
+            <a:ext cx="2200046" cy="1447800"/>
+          </a:xfrm>
+          <a:prstGeom prst="rect">
+            <a:avLst/>
+          </a:prstGeom>
+          <a:noFill/>
+        </p:spPr>
+        <p:txBody>
+          <a:bodyPr wrap="square">
+            <a:spAutoFit/>
+          </a:bodyPr>
+          <a:lstStyle/>
+          <a:p>
+            <a:r>
+              <a:rPr sz="800">
+                <a:hlinkClick r:id="rId22"/>
+              </a:rPr>
+              <a:t>Lofar 1</a:t>
+            </a:r>
+          </a:p>
+        </p:txBody>
+      </p:sp>
+      <p:sp>
+        <p:nvSpPr>
+          <p:cNvPr id="15" name="Rounded Rectangle 14"/>
+          <p:cNvSpPr/>
+          <p:nvPr>
+            <a:hlinkClick r:id="rId23"/>
+          </p:nvPr>
+        </p:nvSpPr>
+        <p:spPr>
+          <a:xfrm>
+            <a:off x="2657246" y="2682240"/>
+            <a:ext cx="2200046" cy="365760"/>
+          </a:xfrm>
+          <a:prstGeom prst="roundRect">
+            <a:avLst/>
+          </a:prstGeom>
+          <a:solidFill>
+            <a:srgbClr val="E8EEF7"/>
+          </a:solidFill>
+          <a:ln>
+            <a:solidFill>
+              <a:srgbClr val="1F3A5F"/>
+            </a:solidFill>
+          </a:ln>
+        </p:spPr>
+        <p:style>
+          <a:lnRef idx="1">
+            <a:schemeClr val="accent1"/>
+          </a:lnRef>
+          <a:fillRef idx="3">
+            <a:schemeClr val="accent1"/>
+          </a:fillRef>
+          <a:effectRef idx="2">
+            <a:schemeClr val="accent1"/>
+          </a:effectRef>
+          <a:fontRef idx="minor">
+            <a:schemeClr val="lt1"/>
+          </a:fontRef>
+        </p:style>
+        <p:txBody>
+          <a:bodyPr rtlCol="0" anchor="ctr" lIns="45720" rIns="45720"/>
+          <a:lstStyle/>
+          <a:p>
+            <a:pPr algn="ctr"/>
+            <a:r>
+              <a:rPr sz="900">
+                <a:solidFill>
+                  <a:srgbClr val="1F3A5F"/>
+                </a:solidFill>
+              </a:rPr>
+              <a:t>Gram 24: FR Equinox, Category 1, Tantive</a:t>
+            </a:r>
+          </a:p>
+        </p:txBody>
+      </p:sp>
+      <p:sp>
+        <p:nvSpPr>
+          <p:cNvPr id="16" name="TextBox 15"/>
+          <p:cNvSpPr txBox="1"/>
+          <p:nvPr/>
+        </p:nvSpPr>
+        <p:spPr>
+          <a:xfrm>
+            <a:off x="2657246" y="3066288"/>
+            <a:ext cx="2200046" cy="1447800"/>
+          </a:xfrm>
+          <a:prstGeom prst="rect">
+            <a:avLst/>
+          </a:prstGeom>
+          <a:noFill/>
+        </p:spPr>
+        <p:txBody>
+          <a:bodyPr wrap="square">
+            <a:spAutoFit/>
+          </a:bodyPr>
+          <a:lstStyle/>
+          <a:p>
+            <a:r>
+              <a:rPr sz="800">
+                <a:hlinkClick r:id="rId24"/>
+              </a:rPr>
+              <a:t>Lofar 1</a:t>
+            </a:r>
+          </a:p>
+          <a:p>
+            <a:r>
+              <a:rPr sz="800">
+                <a:hlinkClick r:id="rId25"/>
+              </a:rPr>
+              <a:t>Lofar 2</a:t>
+            </a:r>
+          </a:p>
+          <a:p>
+            <a:r>
+              <a:rPr sz="800">
+                <a:hlinkClick r:id="rId26"/>
+              </a:rPr>
+              <a:t>Lofar 3</a:t>
+            </a:r>
+          </a:p>
+          <a:p>
+            <a:r>
+              <a:rPr sz="800">
+                <a:hlinkClick r:id="rId27"/>
+              </a:rPr>
+              <a:t>Lofar 4</a:t>
+            </a:r>
+          </a:p>
+        </p:txBody>
+      </p:sp>
+      <p:sp>
+        <p:nvSpPr>
+          <p:cNvPr id="17" name="Rounded Rectangle 16"/>
+          <p:cNvSpPr/>
+          <p:nvPr>
+            <a:hlinkClick r:id="rId28"/>
+          </p:nvPr>
+        </p:nvSpPr>
+        <p:spPr>
+          <a:xfrm>
+            <a:off x="4948732" y="2682240"/>
+            <a:ext cx="2200046" cy="365760"/>
+          </a:xfrm>
+          <a:prstGeom prst="roundRect">
+            <a:avLst/>
+          </a:prstGeom>
+          <a:solidFill>
+            <a:srgbClr val="E8EEF7"/>
+          </a:solidFill>
+          <a:ln>
+            <a:solidFill>
+              <a:srgbClr val="1F3A5F"/>
+            </a:solidFill>
+          </a:ln>
+        </p:spPr>
+        <p:style>
+          <a:lnRef idx="1">
+            <a:schemeClr val="accent1"/>
+          </a:lnRef>
+          <a:fillRef idx="3">
+            <a:schemeClr val="accent1"/>
+          </a:fillRef>
+          <a:effectRef idx="2">
+            <a:schemeClr val="accent1"/>
+          </a:effectRef>
+          <a:fontRef idx="minor">
+            <a:schemeClr val="lt1"/>
+          </a:fontRef>
+        </p:style>
+        <p:txBody>
+          <a:bodyPr rtlCol="0" anchor="ctr" lIns="45720" rIns="45720"/>
+          <a:lstStyle/>
+          <a:p>
+            <a:pPr algn="ctr"/>
+            <a:r>
+              <a:rPr sz="900">
+                <a:solidFill>
+                  <a:srgbClr val="1F3A5F"/>
+                </a:solidFill>
+              </a:rPr>
+              <a:t>Gram 25: FR Galaxy-class, Category 4, Betazed</a:t>
+            </a:r>
+          </a:p>
+        </p:txBody>
+      </p:sp>
+      <p:sp>
+        <p:nvSpPr>
+          <p:cNvPr id="18" name="TextBox 17"/>
+          <p:cNvSpPr txBox="1"/>
+          <p:nvPr/>
+        </p:nvSpPr>
+        <p:spPr>
+          <a:xfrm>
+            <a:off x="4948732" y="3066288"/>
+            <a:ext cx="2200046" cy="1447800"/>
+          </a:xfrm>
+          <a:prstGeom prst="rect">
+            <a:avLst/>
+          </a:prstGeom>
+          <a:noFill/>
+        </p:spPr>
+        <p:txBody>
+          <a:bodyPr wrap="square">
+            <a:spAutoFit/>
+          </a:bodyPr>
+          <a:lstStyle/>
+          <a:p>
+            <a:r>
+              <a:rPr sz="800">
+                <a:hlinkClick r:id="rId29"/>
+              </a:rPr>
+              <a:t>Lofar 1</a:t>
+            </a:r>
+          </a:p>
+        </p:txBody>
+      </p:sp>
+      <p:sp>
+        <p:nvSpPr>
+          <p:cNvPr id="19" name="Rounded Rectangle 18"/>
+          <p:cNvSpPr/>
+          <p:nvPr>
+            <a:hlinkClick r:id="rId30"/>
+          </p:nvPr>
+        </p:nvSpPr>
+        <p:spPr>
+          <a:xfrm>
+            <a:off x="7240219" y="2682240"/>
+            <a:ext cx="2200046" cy="365760"/>
+          </a:xfrm>
+          <a:prstGeom prst="roundRect">
+            <a:avLst/>
+          </a:prstGeom>
+          <a:solidFill>
+            <a:srgbClr val="E8EEF7"/>
+          </a:solidFill>
+          <a:ln>
+            <a:solidFill>
+              <a:srgbClr val="1F3A5F"/>
+            </a:solidFill>
+          </a:ln>
+        </p:spPr>
+        <p:style>
+          <a:lnRef idx="1">
+            <a:schemeClr val="accent1"/>
+          </a:lnRef>
+          <a:fillRef idx="3">
+            <a:schemeClr val="accent1"/>
+          </a:fillRef>
+          <a:effectRef idx="2">
+            <a:schemeClr val="accent1"/>
+          </a:effectRef>
+          <a:fontRef idx="minor">
+            <a:schemeClr val="lt1"/>
+          </a:fontRef>
+        </p:style>
+        <p:txBody>
+          <a:bodyPr rtlCol="0" anchor="ctr" lIns="45720" rIns="45720"/>
+          <a:lstStyle/>
+          <a:p>
+            <a:pPr algn="ctr"/>
+            <a:r>
+              <a:rPr sz="900">
+                <a:solidFill>
+                  <a:srgbClr val="1F3A5F"/>
+                </a:solidFill>
+              </a:rPr>
+              <a:t>Gram 26: FR Discovery, Category 4, Tantive</a:t>
+            </a:r>
+          </a:p>
+        </p:txBody>
+      </p:sp>
+      <p:sp>
+        <p:nvSpPr>
+          <p:cNvPr id="20" name="TextBox 19"/>
+          <p:cNvSpPr txBox="1"/>
+          <p:nvPr/>
+        </p:nvSpPr>
+        <p:spPr>
+          <a:xfrm>
+            <a:off x="7240219" y="3066288"/>
+            <a:ext cx="2200046" cy="1447800"/>
+          </a:xfrm>
+          <a:prstGeom prst="rect">
+            <a:avLst/>
+          </a:prstGeom>
+          <a:noFill/>
+        </p:spPr>
+        <p:txBody>
+          <a:bodyPr wrap="square">
+            <a:spAutoFit/>
+          </a:bodyPr>
+          <a:lstStyle/>
+          <a:p>
+            <a:r>
+              <a:rPr sz="800">
+                <a:hlinkClick r:id="rId31"/>
+              </a:rPr>
+              <a:t>Lofar 1</a:t>
+            </a:r>
+          </a:p>
+          <a:p>
+            <a:r>
+              <a:rPr sz="800">
+                <a:hlinkClick r:id="rId32"/>
+              </a:rPr>
+              <a:t>Lofar 2</a:t>
+            </a:r>
+          </a:p>
+          <a:p>
+            <a:r>
+              <a:rPr sz="800">
+                <a:hlinkClick r:id="rId33"/>
+              </a:rPr>
+              <a:t>Lofar 3</a:t>
+            </a:r>
+          </a:p>
+          <a:p>
+            <a:r>
+              <a:rPr sz="800">
+                <a:hlinkClick r:id="rId34"/>
+              </a:rPr>
+              <a:t>Lofar 4</a:t>
+            </a:r>
+          </a:p>
+        </p:txBody>
+      </p:sp>
+      <p:sp>
+        <p:nvSpPr>
+          <p:cNvPr id="21" name="Rounded Rectangle 20"/>
+          <p:cNvSpPr/>
+          <p:nvPr>
+            <a:hlinkClick r:id="rId35"/>
+          </p:nvPr>
+        </p:nvSpPr>
+        <p:spPr>
+          <a:xfrm>
+            <a:off x="9531705" y="2682240"/>
+            <a:ext cx="2200046" cy="365760"/>
+          </a:xfrm>
+          <a:prstGeom prst="roundRect">
+            <a:avLst/>
+          </a:prstGeom>
+          <a:solidFill>
+            <a:srgbClr val="E8EEF7"/>
+          </a:solidFill>
+          <a:ln>
+            <a:solidFill>
+              <a:srgbClr val="1F3A5F"/>
+            </a:solidFill>
+          </a:ln>
+        </p:spPr>
+        <p:style>
+          <a:lnRef idx="1">
+            <a:schemeClr val="accent1"/>
+          </a:lnRef>
+          <a:fillRef idx="3">
+            <a:schemeClr val="accent1"/>
+          </a:fillRef>
+          <a:effectRef idx="2">
+            <a:schemeClr val="accent1"/>
+          </a:effectRef>
+          <a:fontRef idx="minor">
+            <a:schemeClr val="lt1"/>
+          </a:fontRef>
+        </p:style>
+        <p:txBody>
+          <a:bodyPr rtlCol="0" anchor="ctr" lIns="45720" rIns="45720"/>
+          <a:lstStyle/>
+          <a:p>
+            <a:pPr algn="ctr"/>
+            <a:r>
+              <a:rPr sz="900">
+                <a:solidFill>
+                  <a:srgbClr val="1F3A5F"/>
+                </a:solidFill>
+              </a:rPr>
+              <a:t>Gram 28: FR Voyager, Category 4, Romulus</a:t>
+            </a:r>
+          </a:p>
+        </p:txBody>
+      </p:sp>
+      <p:sp>
+        <p:nvSpPr>
+          <p:cNvPr id="22" name="TextBox 21"/>
+          <p:cNvSpPr txBox="1"/>
+          <p:nvPr/>
+        </p:nvSpPr>
+        <p:spPr>
+          <a:xfrm>
+            <a:off x="9531705" y="3066288"/>
+            <a:ext cx="2200046" cy="1447800"/>
+          </a:xfrm>
+          <a:prstGeom prst="rect">
+            <a:avLst/>
+          </a:prstGeom>
+          <a:noFill/>
+        </p:spPr>
+        <p:txBody>
+          <a:bodyPr wrap="square">
+            <a:spAutoFit/>
+          </a:bodyPr>
+          <a:lstStyle/>
+          <a:p>
+            <a:r>
+              <a:rPr sz="800">
+                <a:hlinkClick r:id="rId36"/>
+              </a:rPr>
+              <a:t>Lofar 1</a:t>
+            </a:r>
+          </a:p>
+          <a:p>
+            <a:r>
+              <a:rPr sz="800">
+                <a:hlinkClick r:id="rId37"/>
+              </a:rPr>
+              <a:t>Lofar 2</a:t>
+            </a:r>
+          </a:p>
+        </p:txBody>
+      </p:sp>
+      <p:sp>
+        <p:nvSpPr>
+          <p:cNvPr id="23" name="Rounded Rectangle 22"/>
+          <p:cNvSpPr/>
+          <p:nvPr>
+            <a:hlinkClick r:id="rId38"/>
+          </p:nvPr>
+        </p:nvSpPr>
+        <p:spPr>
+          <a:xfrm>
+            <a:off x="365760" y="4632960"/>
+            <a:ext cx="2200046" cy="365760"/>
+          </a:xfrm>
+          <a:prstGeom prst="roundRect">
+            <a:avLst/>
+          </a:prstGeom>
+          <a:solidFill>
+            <a:srgbClr val="E8EEF7"/>
+          </a:solidFill>
+          <a:ln>
+            <a:solidFill>
+              <a:srgbClr val="1F3A5F"/>
+            </a:solidFill>
+          </a:ln>
+        </p:spPr>
+        <p:style>
+          <a:lnRef idx="1">
+            <a:schemeClr val="accent1"/>
+          </a:lnRef>
+          <a:fillRef idx="3">
+            <a:schemeClr val="accent1"/>
+          </a:fillRef>
+          <a:effectRef idx="2">
+            <a:schemeClr val="accent1"/>
+          </a:effectRef>
+          <a:fontRef idx="minor">
+            <a:schemeClr val="lt1"/>
+          </a:fontRef>
+        </p:style>
+        <p:txBody>
+          <a:bodyPr rtlCol="0" anchor="ctr" lIns="45720" rIns="45720"/>
+          <a:lstStyle/>
+          <a:p>
+            <a:pPr algn="ctr"/>
+            <a:r>
+              <a:rPr sz="900">
+                <a:solidFill>
+                  <a:srgbClr val="1F3A5F"/>
+                </a:solidFill>
+              </a:rPr>
+              <a:t>Gram 30: FR Akira-class, Category 2, Kobol</a:t>
+            </a:r>
+          </a:p>
+        </p:txBody>
+      </p:sp>
+      <p:sp>
+        <p:nvSpPr>
+          <p:cNvPr id="24" name="TextBox 23"/>
+          <p:cNvSpPr txBox="1"/>
+          <p:nvPr/>
+        </p:nvSpPr>
+        <p:spPr>
+          <a:xfrm>
+            <a:off x="365760" y="5017008"/>
+            <a:ext cx="2200046" cy="1447800"/>
+          </a:xfrm>
+          <a:prstGeom prst="rect">
+            <a:avLst/>
+          </a:prstGeom>
+          <a:noFill/>
+        </p:spPr>
+        <p:txBody>
+          <a:bodyPr wrap="square">
+            <a:spAutoFit/>
+          </a:bodyPr>
+          <a:lstStyle/>
+          <a:p>
+            <a:r>
+              <a:rPr sz="800">
+                <a:hlinkClick r:id="rId39"/>
+              </a:rPr>
+              <a:t>Lofar 1</a:t>
+            </a:r>
+          </a:p>
+          <a:p>
+            <a:r>
+              <a:rPr sz="800">
+                <a:hlinkClick r:id="rId40"/>
+              </a:rPr>
+              <a:t>Lofar 2</a:t>
+            </a:r>
+          </a:p>
+          <a:p>
+            <a:r>
+              <a:rPr sz="800">
+                <a:hlinkClick r:id="rId41"/>
+              </a:rPr>
+              <a:t>Lofar 3</a:t>
+            </a:r>
+          </a:p>
+        </p:txBody>
+      </p:sp>
+      <p:sp>
+        <p:nvSpPr>
+          <p:cNvPr id="25" name="Rounded Rectangle 24"/>
+          <p:cNvSpPr/>
+          <p:nvPr>
+            <a:hlinkClick r:id="rId42"/>
+          </p:nvPr>
+        </p:nvSpPr>
+        <p:spPr>
+          <a:xfrm>
+            <a:off x="2657246" y="4632960"/>
+            <a:ext cx="2200046" cy="365760"/>
+          </a:xfrm>
+          <a:prstGeom prst="roundRect">
+            <a:avLst/>
+          </a:prstGeom>
+          <a:solidFill>
+            <a:srgbClr val="E8EEF7"/>
+          </a:solidFill>
+          <a:ln>
+            <a:solidFill>
+              <a:srgbClr val="1F3A5F"/>
+            </a:solidFill>
+          </a:ln>
+        </p:spPr>
+        <p:style>
+          <a:lnRef idx="1">
+            <a:schemeClr val="accent1"/>
+          </a:lnRef>
+          <a:fillRef idx="3">
+            <a:schemeClr val="accent1"/>
+          </a:fillRef>
+          <a:effectRef idx="2">
+            <a:schemeClr val="accent1"/>
+          </a:effectRef>
+          <a:fontRef idx="minor">
+            <a:schemeClr val="lt1"/>
+          </a:fontRef>
+        </p:style>
+        <p:txBody>
+          <a:bodyPr rtlCol="0" anchor="ctr" lIns="45720" rIns="45720"/>
+          <a:lstStyle/>
+          <a:p>
+            <a:pPr algn="ctr"/>
+            <a:r>
+              <a:rPr sz="900">
+                <a:solidFill>
+                  <a:srgbClr val="1F3A5F"/>
+                </a:solidFill>
+              </a:rPr>
+              <a:t>Gram 31: X-wing contact bearing 051, codename Mustafar</a:t>
+            </a:r>
+          </a:p>
+        </p:txBody>
+      </p:sp>
+      <p:sp>
+        <p:nvSpPr>
+          <p:cNvPr id="26" name="TextBox 25"/>
+          <p:cNvSpPr txBox="1"/>
+          <p:nvPr/>
+        </p:nvSpPr>
+        <p:spPr>
+          <a:xfrm>
+            <a:off x="2657246" y="5017008"/>
+            <a:ext cx="2200046" cy="1447800"/>
+          </a:xfrm>
+          <a:prstGeom prst="rect">
+            <a:avLst/>
+          </a:prstGeom>
+          <a:noFill/>
+        </p:spPr>
+        <p:txBody>
+          <a:bodyPr wrap="square">
+            <a:spAutoFit/>
+          </a:bodyPr>
+          <a:lstStyle/>
+          <a:p>
+            <a:r>
+              <a:rPr sz="800">
+                <a:hlinkClick r:id="rId43"/>
+              </a:rPr>
+              <a:t>Lofar 1</a:t>
+            </a:r>
+          </a:p>
+          <a:p>
+            <a:r>
+              <a:rPr sz="800">
+                <a:hlinkClick r:id="rId44"/>
+              </a:rPr>
+              <a:t>Lofar 2</a:t>
+            </a:r>
+          </a:p>
+        </p:txBody>
+      </p:sp>
+      <p:sp>
+        <p:nvSpPr>
+          <p:cNvPr id="27" name="Rounded Rectangle 26"/>
+          <p:cNvSpPr/>
+          <p:nvPr>
+            <a:hlinkClick r:id="rId45"/>
+          </p:nvPr>
+        </p:nvSpPr>
+        <p:spPr>
+          <a:xfrm>
+            <a:off x="4948732" y="4632960"/>
+            <a:ext cx="2200046" cy="365760"/>
+          </a:xfrm>
+          <a:prstGeom prst="roundRect">
+            <a:avLst/>
+          </a:prstGeom>
+          <a:solidFill>
+            <a:srgbClr val="E8EEF7"/>
+          </a:solidFill>
+          <a:ln>
+            <a:solidFill>
+              <a:srgbClr val="1F3A5F"/>
+            </a:solidFill>
+          </a:ln>
+        </p:spPr>
+        <p:style>
+          <a:lnRef idx="1">
+            <a:schemeClr val="accent1"/>
+          </a:lnRef>
+          <a:fillRef idx="3">
+            <a:schemeClr val="accent1"/>
+          </a:fillRef>
+          <a:effectRef idx="2">
+            <a:schemeClr val="accent1"/>
+          </a:effectRef>
+          <a:fontRef idx="minor">
+            <a:schemeClr val="lt1"/>
+          </a:fontRef>
+        </p:style>
+        <p:txBody>
+          <a:bodyPr rtlCol="0" anchor="ctr" lIns="45720" rIns="45720"/>
+          <a:lstStyle/>
+          <a:p>
+            <a:pPr algn="ctr"/>
+            <a:r>
+              <a:rPr sz="900">
+                <a:solidFill>
+                  <a:srgbClr val="1F3A5F"/>
+                </a:solidFill>
+              </a:rPr>
+              <a:t>Gram 32: FR Sovereign-class, Category 4, Naboo</a:t>
+            </a:r>
+          </a:p>
+        </p:txBody>
+      </p:sp>
+      <p:sp>
+        <p:nvSpPr>
+          <p:cNvPr id="28" name="TextBox 27"/>
+          <p:cNvSpPr txBox="1"/>
+          <p:nvPr/>
+        </p:nvSpPr>
+        <p:spPr>
+          <a:xfrm>
+            <a:off x="4948732" y="5017008"/>
+            <a:ext cx="2200046" cy="1447800"/>
+          </a:xfrm>
+          <a:prstGeom prst="rect">
+            <a:avLst/>
+          </a:prstGeom>
+          <a:noFill/>
+        </p:spPr>
+        <p:txBody>
+          <a:bodyPr wrap="square">
+            <a:spAutoFit/>
+          </a:bodyPr>
+          <a:lstStyle/>
+          <a:p>
+            <a:r>
+              <a:rPr sz="800">
+                <a:hlinkClick r:id="rId46"/>
+              </a:rPr>
+              <a:t>Lofar 1</a:t>
+            </a:r>
+          </a:p>
+          <a:p>
+            <a:r>
+              <a:rPr sz="800">
+                <a:hlinkClick r:id="rId47"/>
+              </a:rPr>
+              <a:t>Lofar 2</a:t>
+            </a:r>
+          </a:p>
+          <a:p>
+            <a:r>
+              <a:rPr sz="800">
+                <a:hlinkClick r:id="rId48"/>
+              </a:rPr>
+              <a:t>Lofar 3</a:t>
+            </a:r>
+          </a:p>
+          <a:p>
+            <a:r>
+              <a:rPr sz="800">
+                <a:hlinkClick r:id="rId49"/>
+              </a:rPr>
+              <a:t>Lofar 4</a:t>
+            </a:r>
+          </a:p>
+        </p:txBody>
+      </p:sp>
+      <p:sp>
+        <p:nvSpPr>
+          <p:cNvPr id="29" name="Rounded Rectangle 28"/>
+          <p:cNvSpPr/>
+          <p:nvPr>
+            <a:hlinkClick r:id="rId50"/>
+          </p:nvPr>
+        </p:nvSpPr>
+        <p:spPr>
+          <a:xfrm>
+            <a:off x="7240219" y="4632960"/>
+            <a:ext cx="2200046" cy="365760"/>
+          </a:xfrm>
+          <a:prstGeom prst="roundRect">
+            <a:avLst/>
+          </a:prstGeom>
+          <a:solidFill>
+            <a:srgbClr val="E8EEF7"/>
+          </a:solidFill>
+          <a:ln>
+            <a:solidFill>
+              <a:srgbClr val="1F3A5F"/>
+            </a:solidFill>
+          </a:ln>
+        </p:spPr>
+        <p:style>
+          <a:lnRef idx="1">
+            <a:schemeClr val="accent1"/>
+          </a:lnRef>
+          <a:fillRef idx="3">
+            <a:schemeClr val="accent1"/>
+          </a:fillRef>
+          <a:effectRef idx="2">
+            <a:schemeClr val="accent1"/>
+          </a:effectRef>
+          <a:fontRef idx="minor">
+            <a:schemeClr val="lt1"/>
+          </a:fontRef>
+        </p:style>
+        <p:txBody>
+          <a:bodyPr rtlCol="0" anchor="ctr" lIns="45720" rIns="45720"/>
+          <a:lstStyle/>
+          <a:p>
+            <a:pPr algn="ctr"/>
+            <a:r>
+              <a:rPr sz="900">
+                <a:solidFill>
+                  <a:srgbClr val="1F3A5F"/>
+                </a:solidFill>
+              </a:rPr>
+              <a:t>Gram 34: FR Equinox, Category 2, Cardassia</a:t>
+            </a:r>
+          </a:p>
+        </p:txBody>
+      </p:sp>
+      <p:sp>
+        <p:nvSpPr>
+          <p:cNvPr id="30" name="TextBox 29"/>
+          <p:cNvSpPr txBox="1"/>
+          <p:nvPr/>
+        </p:nvSpPr>
+        <p:spPr>
+          <a:xfrm>
+            <a:off x="7240219" y="5017008"/>
+            <a:ext cx="2200046" cy="1447800"/>
+          </a:xfrm>
+          <a:prstGeom prst="rect">
+            <a:avLst/>
+          </a:prstGeom>
+          <a:noFill/>
+        </p:spPr>
+        <p:txBody>
+          <a:bodyPr wrap="square">
+            <a:spAutoFit/>
+          </a:bodyPr>
+          <a:lstStyle/>
+          <a:p>
+            <a:r>
+              <a:rPr sz="800">
+                <a:hlinkClick r:id="rId51"/>
+              </a:rPr>
+              <a:t>Lofar 1</a:t>
+            </a:r>
+          </a:p>
+          <a:p>
+            <a:r>
+              <a:rPr sz="800">
+                <a:hlinkClick r:id="rId52"/>
+              </a:rPr>
+              <a:t>Lofar 2</a:t>
+            </a:r>
+          </a:p>
+        </p:txBody>
+      </p:sp>
+      <p:sp>
+        <p:nvSpPr>
+          <p:cNvPr id="31" name="Rounded Rectangle 30"/>
+          <p:cNvSpPr/>
+          <p:nvPr>
+            <a:hlinkClick r:id="rId53"/>
+          </p:nvPr>
+        </p:nvSpPr>
+        <p:spPr>
+          <a:xfrm>
+            <a:off x="9531705" y="4632960"/>
+            <a:ext cx="2200046" cy="365760"/>
+          </a:xfrm>
+          <a:prstGeom prst="roundRect">
+            <a:avLst/>
+          </a:prstGeom>
+          <a:solidFill>
+            <a:srgbClr val="E8EEF7"/>
+          </a:solidFill>
+          <a:ln>
+            <a:solidFill>
+              <a:srgbClr val="1F3A5F"/>
+            </a:solidFill>
+          </a:ln>
+        </p:spPr>
+        <p:style>
+          <a:lnRef idx="1">
+            <a:schemeClr val="accent1"/>
+          </a:lnRef>
+          <a:fillRef idx="3">
+            <a:schemeClr val="accent1"/>
+          </a:fillRef>
+          <a:effectRef idx="2">
+            <a:schemeClr val="accent1"/>
+          </a:effectRef>
+          <a:fontRef idx="minor">
+            <a:schemeClr val="lt1"/>
+          </a:fontRef>
+        </p:style>
+        <p:txBody>
+          <a:bodyPr rtlCol="0" anchor="ctr" lIns="45720" rIns="45720"/>
+          <a:lstStyle/>
+          <a:p>
+            <a:pPr algn="ctr"/>
+            <a:r>
+              <a:rPr sz="900">
+                <a:solidFill>
+                  <a:srgbClr val="1F3A5F"/>
+                </a:solidFill>
+              </a:rPr>
+              <a:t>Gram 36: FR Cerritos, Category 3, Bajor</a:t>
+            </a:r>
+          </a:p>
+        </p:txBody>
+      </p:sp>
+      <p:sp>
+        <p:nvSpPr>
+          <p:cNvPr id="32" name="TextBox 31"/>
+          <p:cNvSpPr txBox="1"/>
+          <p:nvPr/>
+        </p:nvSpPr>
+        <p:spPr>
+          <a:xfrm>
+            <a:off x="9531705" y="5017008"/>
+            <a:ext cx="2200046" cy="1447800"/>
+          </a:xfrm>
+          <a:prstGeom prst="rect">
+            <a:avLst/>
+          </a:prstGeom>
+          <a:noFill/>
+        </p:spPr>
+        <p:txBody>
+          <a:bodyPr wrap="square">
+            <a:spAutoFit/>
+          </a:bodyPr>
+          <a:lstStyle/>
+          <a:p>
+            <a:r>
+              <a:rPr sz="800">
                 <a:hlinkClick r:id="rId54"/>
               </a:rPr>
               <a:t>Lofar 1</a:t>
+            </a:r>
+          </a:p>
+        </p:txBody>
+      </p:sp>
+    </p:spTree>
+  </p:cSld>
+  <p:clrMapOvr>
+    <a:masterClrMapping/>
+  </p:clrMapOvr>
+</p:sld>
+</file>
+
+<file path=ppt/slides/slide4.xml><?xml version="1.0" encoding="utf-8"?>
+<p:sld xmlns:a="http://schemas.openxmlformats.org/drawingml/2006/main" xmlns:p="http://schemas.openxmlformats.org/presentationml/2006/main" xmlns:r="http://schemas.openxmlformats.org/officeDocument/2006/relationships">
+  <p:cSld>
+    <p:spTree>
+      <p:nvGrpSpPr>
+        <p:cNvPr id="1" name=""/>
+        <p:cNvGrpSpPr/>
+        <p:nvPr/>
+      </p:nvGrpSpPr>
+      <p:grpSpPr/>
+      <p:sp>
+        <p:nvSpPr>
+          <p:cNvPr id="2" name="TextBox 1"/>
+          <p:cNvSpPr txBox="1"/>
+          <p:nvPr/>
+        </p:nvSpPr>
+        <p:spPr>
+          <a:xfrm>
+            <a:off x="914400" y="2377440"/>
+            <a:ext cx="10360152" cy="1280160"/>
+          </a:xfrm>
+          <a:prstGeom prst="rect">
+            <a:avLst/>
+          </a:prstGeom>
+          <a:noFill/>
+        </p:spPr>
+        <p:txBody>
+          <a:bodyPr wrap="square">
+            <a:spAutoFit/>
+          </a:bodyPr>
+          <a:lstStyle/>
+          <a:p>
+            <a:pPr algn="ctr"/>
+            <a:r>
+              <a:rPr sz="4000" b="1">
+                <a:solidFill>
+                  <a:srgbClr val="1F3A5F"/>
+                </a:solidFill>
+              </a:rPr>
+              <a:t>End of Instructor Progress Test 2 Grams_Updated</a:t>
+            </a:r>
+          </a:p>
+        </p:txBody>
+      </p:sp>
+      <p:sp>
+        <p:nvSpPr>
+          <p:cNvPr id="3" name="TextBox 2"/>
+          <p:cNvSpPr txBox="1"/>
+          <p:nvPr/>
+        </p:nvSpPr>
+        <p:spPr>
+          <a:xfrm>
+            <a:off x="914400" y="3840480"/>
+            <a:ext cx="10360152" cy="731520"/>
+          </a:xfrm>
+          <a:prstGeom prst="rect">
+            <a:avLst/>
+          </a:prstGeom>
+          <a:noFill/>
+        </p:spPr>
+        <p:txBody>
+          <a:bodyPr wrap="none">
+            <a:spAutoFit/>
+          </a:bodyPr>
+          <a:lstStyle/>
+          <a:p>
+            <a:pPr algn="ctr"/>
+            <a:r>
+              <a:rPr sz="2400">
+                <a:solidFill>
+                  <a:srgbClr val="1F3A5F"/>
+                </a:solidFill>
+              </a:rPr>
+              <a:t>Instructor Version</a:t>
             </a:r>
           </a:p>
         </p:txBody>

--- a/source/Instructor Progress Test 2 Grams_Updated/Instructor Progress Test 2 Grams_Updated.pptx
+++ b/source/Instructor Progress Test 2 Grams_Updated/Instructor Progress Test 2 Grams_Updated.pptx
@@ -7,8 +7,6 @@
   <p:sldIdLst>
     <p:sldId id="256" r:id="rId7"/>
     <p:sldId id="257" r:id="rId8"/>
-    <p:sldId id="258" r:id="rId9"/>
-    <p:sldId id="259" r:id="rId10"/>
   </p:sldIdLst>
   <p:sldSz cx="12188952" cy="6858000" type="screen4x3"/>
   <p:notesSz cx="6858000" cy="9144000"/>
@@ -3093,14 +3091,120 @@
       <p:grpSpPr/>
       <p:sp>
         <p:nvSpPr>
-          <p:cNvPr id="2" name="TextBox 1"/>
+          <p:cNvPr id="2" name="Rectangle 1"/>
+          <p:cNvSpPr/>
+          <p:nvPr/>
+        </p:nvSpPr>
+        <p:spPr>
+          <a:xfrm>
+            <a:off x="0" y="0"/>
+            <a:ext cx="12188952" cy="548640"/>
+          </a:xfrm>
+          <a:prstGeom prst="rect">
+            <a:avLst/>
+          </a:prstGeom>
+          <a:solidFill>
+            <a:srgbClr val="1F3A5F"/>
+          </a:solidFill>
+          <a:ln>
+            <a:noFill/>
+          </a:ln>
+        </p:spPr>
+        <p:style>
+          <a:lnRef idx="1">
+            <a:schemeClr val="accent1"/>
+          </a:lnRef>
+          <a:fillRef idx="3">
+            <a:schemeClr val="accent1"/>
+          </a:fillRef>
+          <a:effectRef idx="2">
+            <a:schemeClr val="accent1"/>
+          </a:effectRef>
+          <a:fontRef idx="minor">
+            <a:schemeClr val="lt1"/>
+          </a:fontRef>
+        </p:style>
+        <p:txBody>
+          <a:bodyPr rtlCol="0" anchor="ctr" lIns="182880" rIns="182880"/>
+          <a:lstStyle/>
+          <a:p>
+            <a:pPr algn="ctr"/>
+            <a:r>
+              <a:rPr sz="2000" b="1">
+                <a:solidFill>
+                  <a:srgbClr val="FFFFFF"/>
+                </a:solidFill>
+              </a:rPr>
+              <a:t>Instructor Progress Test 2 Grams_Updated — Page 1 of 2</a:t>
+            </a:r>
+          </a:p>
+        </p:txBody>
+      </p:sp>
+      <p:sp>
+        <p:nvSpPr>
+          <p:cNvPr id="3" name="Rounded Rectangle 2">
+            <a:hlinkClick r:id="rId2"/>
+          </p:cNvPr>
+          <p:cNvSpPr/>
+          <p:nvPr/>
+        </p:nvSpPr>
+        <p:spPr>
+          <a:xfrm>
+            <a:off x="365760" y="731520"/>
+            <a:ext cx="2200046" cy="365760"/>
+          </a:xfrm>
+          <a:prstGeom prst="roundRect">
+            <a:avLst/>
+          </a:prstGeom>
+          <a:solidFill>
+            <a:srgbClr val="E8EEF7"/>
+          </a:solidFill>
+          <a:ln>
+            <a:solidFill>
+              <a:srgbClr val="1F3A5F"/>
+            </a:solidFill>
+          </a:ln>
+        </p:spPr>
+        <p:style>
+          <a:lnRef idx="1">
+            <a:schemeClr val="accent1"/>
+          </a:lnRef>
+          <a:fillRef idx="3">
+            <a:schemeClr val="accent1"/>
+          </a:fillRef>
+          <a:effectRef idx="2">
+            <a:schemeClr val="accent1"/>
+          </a:effectRef>
+          <a:fontRef idx="minor">
+            <a:schemeClr val="lt1"/>
+          </a:fontRef>
+        </p:style>
+        <p:txBody>
+          <a:bodyPr rtlCol="0" anchor="ctr" lIns="45720" rIns="45720"/>
+          <a:lstStyle/>
+          <a:p>
+            <a:pPr algn="ctr"/>
+            <a:r>
+              <a:rPr sz="900">
+                <a:solidFill>
+                  <a:srgbClr val="1F3A5F"/>
+                </a:solidFill>
+              </a:rPr>
+              <a:t>Gram 1: FR Intrepid-class, Category 3, Dank</a:t>
+            </a:r>
+          </a:p>
+        </p:txBody>
+      </p:sp>
+      <p:sp>
+        <p:nvSpPr>
+          <p:cNvPr id="4" name="TextBox 3"/>
           <p:cNvSpPr txBox="1"/>
           <p:nvPr/>
         </p:nvSpPr>
         <p:spPr>
           <a:xfrm>
-            <a:off x="914400" y="2377440"/>
-            <a:ext cx="10360152" cy="1280160"/>
+            <a:off x="365760" y="1115568"/>
+            <a:ext cx="2200046" cy="1447800"/>
           </a:xfrm>
           <a:prstGeom prst="rect">
             <a:avLst/>
@@ -3113,28 +3217,104 @@
           </a:bodyPr>
           <a:lstStyle/>
           <a:p>
+            <a:r>
+              <a:rPr sz="800">
+                <a:hlinkClick r:id="rId3"/>
+              </a:rPr>
+              <a:t>Lofar 1</a:t>
+            </a:r>
+          </a:p>
+          <a:p>
+            <a:r>
+              <a:rPr sz="800">
+                <a:hlinkClick r:id="rId4"/>
+              </a:rPr>
+              <a:t>Lofar 2</a:t>
+            </a:r>
+          </a:p>
+          <a:p>
+            <a:r>
+              <a:rPr sz="800">
+                <a:hlinkClick r:id="rId5"/>
+              </a:rPr>
+              <a:t>Lofar 3</a:t>
+            </a:r>
+          </a:p>
+          <a:p>
+            <a:r>
+              <a:rPr sz="800">
+                <a:hlinkClick r:id="rId6"/>
+              </a:rPr>
+              <a:t>Lofar 4</a:t>
+            </a:r>
+          </a:p>
+        </p:txBody>
+      </p:sp>
+      <p:sp>
+        <p:nvSpPr>
+          <p:cNvPr id="5" name="Rounded Rectangle 4">
+            <a:hlinkClick r:id="rId7"/>
+          </p:cNvPr>
+          <p:cNvSpPr/>
+          <p:nvPr/>
+        </p:nvSpPr>
+        <p:spPr>
+          <a:xfrm>
+            <a:off x="2657246" y="731520"/>
+            <a:ext cx="2200046" cy="365760"/>
+          </a:xfrm>
+          <a:prstGeom prst="roundRect">
+            <a:avLst/>
+          </a:prstGeom>
+          <a:solidFill>
+            <a:srgbClr val="E8EEF7"/>
+          </a:solidFill>
+          <a:ln>
+            <a:solidFill>
+              <a:srgbClr val="1F3A5F"/>
+            </a:solidFill>
+          </a:ln>
+        </p:spPr>
+        <p:style>
+          <a:lnRef idx="1">
+            <a:schemeClr val="accent1"/>
+          </a:lnRef>
+          <a:fillRef idx="3">
+            <a:schemeClr val="accent1"/>
+          </a:fillRef>
+          <a:effectRef idx="2">
+            <a:schemeClr val="accent1"/>
+          </a:effectRef>
+          <a:fontRef idx="minor">
+            <a:schemeClr val="lt1"/>
+          </a:fontRef>
+        </p:style>
+        <p:txBody>
+          <a:bodyPr rtlCol="0" anchor="ctr" lIns="45720" rIns="45720"/>
+          <a:lstStyle/>
+          <a:p>
             <a:pPr algn="ctr"/>
             <a:r>
-              <a:rPr sz="4000" b="1">
+              <a:rPr sz="900">
                 <a:solidFill>
                   <a:srgbClr val="1F3A5F"/>
                 </a:solidFill>
               </a:rPr>
-              <a:t>Welcome to Instructor Progress Test 2 Grams_Updated</a:t>
-            </a:r>
-          </a:p>
-        </p:txBody>
-      </p:sp>
-      <p:sp>
-        <p:nvSpPr>
-          <p:cNvPr id="3" name="TextBox 2"/>
+              <a:t>Gram 2: FR Venator-class, Category 3, Betazed</a:t>
+            </a:r>
+          </a:p>
+        </p:txBody>
+      </p:sp>
+      <p:sp>
+        <p:nvSpPr>
+          <p:cNvPr id="6" name="TextBox 5"/>
           <p:cNvSpPr txBox="1"/>
           <p:nvPr/>
         </p:nvSpPr>
         <p:spPr>
           <a:xfrm>
-            <a:off x="914400" y="3840480"/>
-            <a:ext cx="10360152" cy="731520"/>
+            <a:off x="2657246" y="1115568"/>
+            <a:ext cx="2200046" cy="1447800"/>
           </a:xfrm>
           <a:prstGeom prst="rect">
             <a:avLst/>
@@ -3142,19 +3322,1286 @@
           <a:noFill/>
         </p:spPr>
         <p:txBody>
-          <a:bodyPr wrap="none">
+          <a:bodyPr wrap="square">
             <a:spAutoFit/>
           </a:bodyPr>
           <a:lstStyle/>
           <a:p>
+            <a:r>
+              <a:rPr sz="800">
+                <a:hlinkClick r:id="rId8"/>
+              </a:rPr>
+              <a:t>Lofar 1</a:t>
+            </a:r>
+          </a:p>
+          <a:p>
+            <a:r>
+              <a:rPr sz="800">
+                <a:hlinkClick r:id="rId9"/>
+              </a:rPr>
+              <a:t>Lofar 2</a:t>
+            </a:r>
+          </a:p>
+          <a:p>
+            <a:r>
+              <a:rPr sz="800">
+                <a:hlinkClick r:id="rId10"/>
+              </a:rPr>
+              <a:t>Lofar 3</a:t>
+            </a:r>
+          </a:p>
+        </p:txBody>
+      </p:sp>
+      <p:sp>
+        <p:nvSpPr>
+          <p:cNvPr id="7" name="Rounded Rectangle 6">
+            <a:hlinkClick r:id="rId11"/>
+          </p:cNvPr>
+          <p:cNvSpPr/>
+          <p:nvPr/>
+        </p:nvSpPr>
+        <p:spPr>
+          <a:xfrm>
+            <a:off x="4948732" y="731520"/>
+            <a:ext cx="2200046" cy="365760"/>
+          </a:xfrm>
+          <a:prstGeom prst="roundRect">
+            <a:avLst/>
+          </a:prstGeom>
+          <a:solidFill>
+            <a:srgbClr val="E8EEF7"/>
+          </a:solidFill>
+          <a:ln>
+            <a:solidFill>
+              <a:srgbClr val="1F3A5F"/>
+            </a:solidFill>
+          </a:ln>
+        </p:spPr>
+        <p:style>
+          <a:lnRef idx="1">
+            <a:schemeClr val="accent1"/>
+          </a:lnRef>
+          <a:fillRef idx="3">
+            <a:schemeClr val="accent1"/>
+          </a:fillRef>
+          <a:effectRef idx="2">
+            <a:schemeClr val="accent1"/>
+          </a:effectRef>
+          <a:fontRef idx="minor">
+            <a:schemeClr val="lt1"/>
+          </a:fontRef>
+        </p:style>
+        <p:txBody>
+          <a:bodyPr rtlCol="0" anchor="ctr" lIns="45720" rIns="45720"/>
+          <a:lstStyle/>
+          <a:p>
             <a:pPr algn="ctr"/>
             <a:r>
-              <a:rPr sz="2400">
+              <a:rPr sz="900">
                 <a:solidFill>
                   <a:srgbClr val="1F3A5F"/>
                 </a:solidFill>
               </a:rPr>
-              <a:t>Instructor Version</a:t>
+              <a:t>Gram 3: Lambda Shuttle contact bearing 096, codename Mustafar</a:t>
+            </a:r>
+          </a:p>
+        </p:txBody>
+      </p:sp>
+      <p:sp>
+        <p:nvSpPr>
+          <p:cNvPr id="8" name="TextBox 7"/>
+          <p:cNvSpPr txBox="1"/>
+          <p:nvPr/>
+        </p:nvSpPr>
+        <p:spPr>
+          <a:xfrm>
+            <a:off x="4948732" y="1115568"/>
+            <a:ext cx="2200046" cy="1447800"/>
+          </a:xfrm>
+          <a:prstGeom prst="rect">
+            <a:avLst/>
+          </a:prstGeom>
+          <a:noFill/>
+        </p:spPr>
+        <p:txBody>
+          <a:bodyPr wrap="square">
+            <a:spAutoFit/>
+          </a:bodyPr>
+          <a:lstStyle/>
+          <a:p>
+            <a:r>
+              <a:rPr sz="800">
+                <a:hlinkClick r:id="rId12"/>
+              </a:rPr>
+              <a:t>Lofar 1</a:t>
+            </a:r>
+          </a:p>
+        </p:txBody>
+      </p:sp>
+      <p:sp>
+        <p:nvSpPr>
+          <p:cNvPr id="9" name="Rounded Rectangle 8">
+            <a:hlinkClick r:id="rId13"/>
+          </p:cNvPr>
+          <p:cNvSpPr/>
+          <p:nvPr/>
+        </p:nvSpPr>
+        <p:spPr>
+          <a:xfrm>
+            <a:off x="7240219" y="731520"/>
+            <a:ext cx="2200046" cy="365760"/>
+          </a:xfrm>
+          <a:prstGeom prst="roundRect">
+            <a:avLst/>
+          </a:prstGeom>
+          <a:solidFill>
+            <a:srgbClr val="E8EEF7"/>
+          </a:solidFill>
+          <a:ln>
+            <a:solidFill>
+              <a:srgbClr val="1F3A5F"/>
+            </a:solidFill>
+          </a:ln>
+        </p:spPr>
+        <p:style>
+          <a:lnRef idx="1">
+            <a:schemeClr val="accent1"/>
+          </a:lnRef>
+          <a:fillRef idx="3">
+            <a:schemeClr val="accent1"/>
+          </a:fillRef>
+          <a:effectRef idx="2">
+            <a:schemeClr val="accent1"/>
+          </a:effectRef>
+          <a:fontRef idx="minor">
+            <a:schemeClr val="lt1"/>
+          </a:fontRef>
+        </p:style>
+        <p:txBody>
+          <a:bodyPr rtlCol="0" anchor="ctr" lIns="45720" rIns="45720"/>
+          <a:lstStyle/>
+          <a:p>
+            <a:pPr algn="ctr"/>
+            <a:r>
+              <a:rPr sz="900">
+                <a:solidFill>
+                  <a:srgbClr val="1F3A5F"/>
+                </a:solidFill>
+              </a:rPr>
+              <a:t>Gram 4: FR Galaxy-class, Category 3, Dank</a:t>
+            </a:r>
+          </a:p>
+        </p:txBody>
+      </p:sp>
+      <p:sp>
+        <p:nvSpPr>
+          <p:cNvPr id="10" name="TextBox 9"/>
+          <p:cNvSpPr txBox="1"/>
+          <p:nvPr/>
+        </p:nvSpPr>
+        <p:spPr>
+          <a:xfrm>
+            <a:off x="7240219" y="1115568"/>
+            <a:ext cx="2200046" cy="1447800"/>
+          </a:xfrm>
+          <a:prstGeom prst="rect">
+            <a:avLst/>
+          </a:prstGeom>
+          <a:noFill/>
+        </p:spPr>
+        <p:txBody>
+          <a:bodyPr wrap="square">
+            <a:spAutoFit/>
+          </a:bodyPr>
+          <a:lstStyle/>
+          <a:p>
+            <a:r>
+              <a:rPr sz="800">
+                <a:hlinkClick r:id="rId14"/>
+              </a:rPr>
+              <a:t>Lofar 1</a:t>
+            </a:r>
+          </a:p>
+        </p:txBody>
+      </p:sp>
+      <p:sp>
+        <p:nvSpPr>
+          <p:cNvPr id="11" name="Rounded Rectangle 10">
+            <a:hlinkClick r:id="rId15"/>
+          </p:cNvPr>
+          <p:cNvSpPr/>
+          <p:nvPr/>
+        </p:nvSpPr>
+        <p:spPr>
+          <a:xfrm>
+            <a:off x="9531705" y="731520"/>
+            <a:ext cx="2200046" cy="365760"/>
+          </a:xfrm>
+          <a:prstGeom prst="roundRect">
+            <a:avLst/>
+          </a:prstGeom>
+          <a:solidFill>
+            <a:srgbClr val="E8EEF7"/>
+          </a:solidFill>
+          <a:ln>
+            <a:solidFill>
+              <a:srgbClr val="1F3A5F"/>
+            </a:solidFill>
+          </a:ln>
+        </p:spPr>
+        <p:style>
+          <a:lnRef idx="1">
+            <a:schemeClr val="accent1"/>
+          </a:lnRef>
+          <a:fillRef idx="3">
+            <a:schemeClr val="accent1"/>
+          </a:fillRef>
+          <a:effectRef idx="2">
+            <a:schemeClr val="accent1"/>
+          </a:effectRef>
+          <a:fontRef idx="minor">
+            <a:schemeClr val="lt1"/>
+          </a:fontRef>
+        </p:style>
+        <p:txBody>
+          <a:bodyPr rtlCol="0" anchor="ctr" lIns="45720" rIns="45720"/>
+          <a:lstStyle/>
+          <a:p>
+            <a:pPr algn="ctr"/>
+            <a:r>
+              <a:rPr sz="900">
+                <a:solidFill>
+                  <a:srgbClr val="1F3A5F"/>
+                </a:solidFill>
+              </a:rPr>
+              <a:t>Gram 5: FR Constitution-class, Category 3, Yavin</a:t>
+            </a:r>
+          </a:p>
+        </p:txBody>
+      </p:sp>
+      <p:sp>
+        <p:nvSpPr>
+          <p:cNvPr id="12" name="TextBox 11"/>
+          <p:cNvSpPr txBox="1"/>
+          <p:nvPr/>
+        </p:nvSpPr>
+        <p:spPr>
+          <a:xfrm>
+            <a:off x="9531705" y="1115568"/>
+            <a:ext cx="2200046" cy="1447800"/>
+          </a:xfrm>
+          <a:prstGeom prst="rect">
+            <a:avLst/>
+          </a:prstGeom>
+          <a:noFill/>
+        </p:spPr>
+        <p:txBody>
+          <a:bodyPr wrap="square">
+            <a:spAutoFit/>
+          </a:bodyPr>
+          <a:lstStyle/>
+          <a:p>
+            <a:r>
+              <a:rPr sz="800">
+                <a:hlinkClick r:id="rId16"/>
+              </a:rPr>
+              <a:t>Lofar 1</a:t>
+            </a:r>
+          </a:p>
+        </p:txBody>
+      </p:sp>
+      <p:sp>
+        <p:nvSpPr>
+          <p:cNvPr id="13" name="Rounded Rectangle 12">
+            <a:hlinkClick r:id="rId17"/>
+          </p:cNvPr>
+          <p:cNvSpPr/>
+          <p:nvPr/>
+        </p:nvSpPr>
+        <p:spPr>
+          <a:xfrm>
+            <a:off x="365760" y="2682240"/>
+            <a:ext cx="2200046" cy="365760"/>
+          </a:xfrm>
+          <a:prstGeom prst="roundRect">
+            <a:avLst/>
+          </a:prstGeom>
+          <a:solidFill>
+            <a:srgbClr val="E8EEF7"/>
+          </a:solidFill>
+          <a:ln>
+            <a:solidFill>
+              <a:srgbClr val="1F3A5F"/>
+            </a:solidFill>
+          </a:ln>
+        </p:spPr>
+        <p:style>
+          <a:lnRef idx="1">
+            <a:schemeClr val="accent1"/>
+          </a:lnRef>
+          <a:fillRef idx="3">
+            <a:schemeClr val="accent1"/>
+          </a:fillRef>
+          <a:effectRef idx="2">
+            <a:schemeClr val="accent1"/>
+          </a:effectRef>
+          <a:fontRef idx="minor">
+            <a:schemeClr val="lt1"/>
+          </a:fontRef>
+        </p:style>
+        <p:txBody>
+          <a:bodyPr rtlCol="0" anchor="ctr" lIns="45720" rIns="45720"/>
+          <a:lstStyle/>
+          <a:p>
+            <a:pPr algn="ctr"/>
+            <a:r>
+              <a:rPr sz="900">
+                <a:solidFill>
+                  <a:srgbClr val="1F3A5F"/>
+                </a:solidFill>
+              </a:rPr>
+              <a:t>Gram 6: FR Corellian Corvette, Category 2, Tantive</a:t>
+            </a:r>
+          </a:p>
+        </p:txBody>
+      </p:sp>
+      <p:sp>
+        <p:nvSpPr>
+          <p:cNvPr id="14" name="TextBox 13"/>
+          <p:cNvSpPr txBox="1"/>
+          <p:nvPr/>
+        </p:nvSpPr>
+        <p:spPr>
+          <a:xfrm>
+            <a:off x="365760" y="3066288"/>
+            <a:ext cx="2200046" cy="1447800"/>
+          </a:xfrm>
+          <a:prstGeom prst="rect">
+            <a:avLst/>
+          </a:prstGeom>
+          <a:noFill/>
+        </p:spPr>
+        <p:txBody>
+          <a:bodyPr wrap="square">
+            <a:spAutoFit/>
+          </a:bodyPr>
+          <a:lstStyle/>
+          <a:p>
+            <a:r>
+              <a:rPr sz="800">
+                <a:hlinkClick r:id="rId18"/>
+              </a:rPr>
+              <a:t>Lofar 1</a:t>
+            </a:r>
+          </a:p>
+          <a:p>
+            <a:r>
+              <a:rPr sz="800">
+                <a:hlinkClick r:id="rId19"/>
+              </a:rPr>
+              <a:t>Lofar 2</a:t>
+            </a:r>
+          </a:p>
+          <a:p>
+            <a:r>
+              <a:rPr sz="800">
+                <a:hlinkClick r:id="rId20"/>
+              </a:rPr>
+              <a:t>Lofar 3</a:t>
+            </a:r>
+          </a:p>
+          <a:p>
+            <a:r>
+              <a:rPr sz="800">
+                <a:hlinkClick r:id="rId21"/>
+              </a:rPr>
+              <a:t>Lofar 4</a:t>
+            </a:r>
+          </a:p>
+        </p:txBody>
+      </p:sp>
+      <p:sp>
+        <p:nvSpPr>
+          <p:cNvPr id="15" name="Rounded Rectangle 14">
+            <a:hlinkClick r:id="rId22"/>
+          </p:cNvPr>
+          <p:cNvSpPr/>
+          <p:nvPr/>
+        </p:nvSpPr>
+        <p:spPr>
+          <a:xfrm>
+            <a:off x="2657246" y="2682240"/>
+            <a:ext cx="2200046" cy="365760"/>
+          </a:xfrm>
+          <a:prstGeom prst="roundRect">
+            <a:avLst/>
+          </a:prstGeom>
+          <a:solidFill>
+            <a:srgbClr val="E8EEF7"/>
+          </a:solidFill>
+          <a:ln>
+            <a:solidFill>
+              <a:srgbClr val="1F3A5F"/>
+            </a:solidFill>
+          </a:ln>
+        </p:spPr>
+        <p:style>
+          <a:lnRef idx="1">
+            <a:schemeClr val="accent1"/>
+          </a:lnRef>
+          <a:fillRef idx="3">
+            <a:schemeClr val="accent1"/>
+          </a:fillRef>
+          <a:effectRef idx="2">
+            <a:schemeClr val="accent1"/>
+          </a:effectRef>
+          <a:fontRef idx="minor">
+            <a:schemeClr val="lt1"/>
+          </a:fontRef>
+        </p:style>
+        <p:txBody>
+          <a:bodyPr rtlCol="0" anchor="ctr" lIns="45720" rIns="45720"/>
+          <a:lstStyle/>
+          <a:p>
+            <a:pPr algn="ctr"/>
+            <a:r>
+              <a:rPr sz="900">
+                <a:solidFill>
+                  <a:srgbClr val="1F3A5F"/>
+                </a:solidFill>
+              </a:rPr>
+              <a:t>Gram 7: FR Millennium Falcon, Category 4, Romulus</a:t>
+            </a:r>
+          </a:p>
+        </p:txBody>
+      </p:sp>
+      <p:sp>
+        <p:nvSpPr>
+          <p:cNvPr id="16" name="TextBox 15"/>
+          <p:cNvSpPr txBox="1"/>
+          <p:nvPr/>
+        </p:nvSpPr>
+        <p:spPr>
+          <a:xfrm>
+            <a:off x="2657246" y="3066288"/>
+            <a:ext cx="2200046" cy="1447800"/>
+          </a:xfrm>
+          <a:prstGeom prst="rect">
+            <a:avLst/>
+          </a:prstGeom>
+          <a:noFill/>
+        </p:spPr>
+        <p:txBody>
+          <a:bodyPr wrap="square">
+            <a:spAutoFit/>
+          </a:bodyPr>
+          <a:lstStyle/>
+          <a:p>
+            <a:r>
+              <a:rPr sz="800">
+                <a:hlinkClick r:id="rId23"/>
+              </a:rPr>
+              <a:t>Lofar 1</a:t>
+            </a:r>
+          </a:p>
+          <a:p>
+            <a:r>
+              <a:rPr sz="800">
+                <a:hlinkClick r:id="rId24"/>
+              </a:rPr>
+              <a:t>Lofar 2</a:t>
+            </a:r>
+          </a:p>
+          <a:p>
+            <a:r>
+              <a:rPr sz="800">
+                <a:hlinkClick r:id="rId25"/>
+              </a:rPr>
+              <a:t>Lofar 3</a:t>
+            </a:r>
+          </a:p>
+          <a:p>
+            <a:r>
+              <a:rPr sz="800">
+                <a:hlinkClick r:id="rId26"/>
+              </a:rPr>
+              <a:t>Lofar 4</a:t>
+            </a:r>
+          </a:p>
+        </p:txBody>
+      </p:sp>
+      <p:sp>
+        <p:nvSpPr>
+          <p:cNvPr id="17" name="Rounded Rectangle 16">
+            <a:hlinkClick r:id="rId27"/>
+          </p:cNvPr>
+          <p:cNvSpPr/>
+          <p:nvPr/>
+        </p:nvSpPr>
+        <p:spPr>
+          <a:xfrm>
+            <a:off x="4948732" y="2682240"/>
+            <a:ext cx="2200046" cy="365760"/>
+          </a:xfrm>
+          <a:prstGeom prst="roundRect">
+            <a:avLst/>
+          </a:prstGeom>
+          <a:solidFill>
+            <a:srgbClr val="E8EEF7"/>
+          </a:solidFill>
+          <a:ln>
+            <a:solidFill>
+              <a:srgbClr val="1F3A5F"/>
+            </a:solidFill>
+          </a:ln>
+        </p:spPr>
+        <p:style>
+          <a:lnRef idx="1">
+            <a:schemeClr val="accent1"/>
+          </a:lnRef>
+          <a:fillRef idx="3">
+            <a:schemeClr val="accent1"/>
+          </a:fillRef>
+          <a:effectRef idx="2">
+            <a:schemeClr val="accent1"/>
+          </a:effectRef>
+          <a:fontRef idx="minor">
+            <a:schemeClr val="lt1"/>
+          </a:fontRef>
+        </p:style>
+        <p:txBody>
+          <a:bodyPr rtlCol="0" anchor="ctr" lIns="45720" rIns="45720"/>
+          <a:lstStyle/>
+          <a:p>
+            <a:pPr algn="ctr"/>
+            <a:r>
+              <a:rPr sz="900">
+                <a:solidFill>
+                  <a:srgbClr val="1F3A5F"/>
+                </a:solidFill>
+              </a:rPr>
+              <a:t>Gram 8: Nebulon-B contact bearing 297, codename Cardassia</a:t>
+            </a:r>
+          </a:p>
+        </p:txBody>
+      </p:sp>
+      <p:sp>
+        <p:nvSpPr>
+          <p:cNvPr id="18" name="TextBox 17"/>
+          <p:cNvSpPr txBox="1"/>
+          <p:nvPr/>
+        </p:nvSpPr>
+        <p:spPr>
+          <a:xfrm>
+            <a:off x="4948732" y="3066288"/>
+            <a:ext cx="2200046" cy="1447800"/>
+          </a:xfrm>
+          <a:prstGeom prst="rect">
+            <a:avLst/>
+          </a:prstGeom>
+          <a:noFill/>
+        </p:spPr>
+        <p:txBody>
+          <a:bodyPr wrap="square">
+            <a:spAutoFit/>
+          </a:bodyPr>
+          <a:lstStyle/>
+          <a:p>
+            <a:r>
+              <a:rPr sz="800">
+                <a:hlinkClick r:id="rId28"/>
+              </a:rPr>
+              <a:t>Lofar 1</a:t>
+            </a:r>
+          </a:p>
+          <a:p>
+            <a:r>
+              <a:rPr sz="800">
+                <a:hlinkClick r:id="rId29"/>
+              </a:rPr>
+              <a:t>Lofar 2</a:t>
+            </a:r>
+          </a:p>
+          <a:p>
+            <a:r>
+              <a:rPr sz="800">
+                <a:hlinkClick r:id="rId30"/>
+              </a:rPr>
+              <a:t>Lofar 3</a:t>
+            </a:r>
+          </a:p>
+        </p:txBody>
+      </p:sp>
+      <p:sp>
+        <p:nvSpPr>
+          <p:cNvPr id="19" name="Rounded Rectangle 18">
+            <a:hlinkClick r:id="rId31"/>
+          </p:cNvPr>
+          <p:cNvSpPr/>
+          <p:nvPr/>
+        </p:nvSpPr>
+        <p:spPr>
+          <a:xfrm>
+            <a:off x="7240219" y="2682240"/>
+            <a:ext cx="2200046" cy="365760"/>
+          </a:xfrm>
+          <a:prstGeom prst="roundRect">
+            <a:avLst/>
+          </a:prstGeom>
+          <a:solidFill>
+            <a:srgbClr val="E8EEF7"/>
+          </a:solidFill>
+          <a:ln>
+            <a:solidFill>
+              <a:srgbClr val="1F3A5F"/>
+            </a:solidFill>
+          </a:ln>
+        </p:spPr>
+        <p:style>
+          <a:lnRef idx="1">
+            <a:schemeClr val="accent1"/>
+          </a:lnRef>
+          <a:fillRef idx="3">
+            <a:schemeClr val="accent1"/>
+          </a:fillRef>
+          <a:effectRef idx="2">
+            <a:schemeClr val="accent1"/>
+          </a:effectRef>
+          <a:fontRef idx="minor">
+            <a:schemeClr val="lt1"/>
+          </a:fontRef>
+        </p:style>
+        <p:txBody>
+          <a:bodyPr rtlCol="0" anchor="ctr" lIns="45720" rIns="45720"/>
+          <a:lstStyle/>
+          <a:p>
+            <a:pPr algn="ctr"/>
+            <a:r>
+              <a:rPr sz="900">
+                <a:solidFill>
+                  <a:srgbClr val="1F3A5F"/>
+                </a:solidFill>
+              </a:rPr>
+              <a:t>Gram 9: FR A-wing, Category 1, Romulus</a:t>
+            </a:r>
+          </a:p>
+        </p:txBody>
+      </p:sp>
+      <p:sp>
+        <p:nvSpPr>
+          <p:cNvPr id="20" name="TextBox 19"/>
+          <p:cNvSpPr txBox="1"/>
+          <p:nvPr/>
+        </p:nvSpPr>
+        <p:spPr>
+          <a:xfrm>
+            <a:off x="7240219" y="3066288"/>
+            <a:ext cx="2200046" cy="1447800"/>
+          </a:xfrm>
+          <a:prstGeom prst="rect">
+            <a:avLst/>
+          </a:prstGeom>
+          <a:noFill/>
+        </p:spPr>
+        <p:txBody>
+          <a:bodyPr wrap="square">
+            <a:spAutoFit/>
+          </a:bodyPr>
+          <a:lstStyle/>
+          <a:p>
+            <a:r>
+              <a:rPr sz="800">
+                <a:hlinkClick r:id="rId32"/>
+              </a:rPr>
+              <a:t>Lofar 1</a:t>
+            </a:r>
+          </a:p>
+          <a:p>
+            <a:r>
+              <a:rPr sz="800">
+                <a:hlinkClick r:id="rId33"/>
+              </a:rPr>
+              <a:t>Lofar 2</a:t>
+            </a:r>
+          </a:p>
+          <a:p>
+            <a:r>
+              <a:rPr sz="800">
+                <a:hlinkClick r:id="rId34"/>
+              </a:rPr>
+              <a:t>Lofar 3</a:t>
+            </a:r>
+          </a:p>
+        </p:txBody>
+      </p:sp>
+      <p:sp>
+        <p:nvSpPr>
+          <p:cNvPr id="21" name="Rounded Rectangle 20">
+            <a:hlinkClick r:id="rId35"/>
+          </p:cNvPr>
+          <p:cNvSpPr/>
+          <p:nvPr/>
+        </p:nvSpPr>
+        <p:spPr>
+          <a:xfrm>
+            <a:off x="9531705" y="2682240"/>
+            <a:ext cx="2200046" cy="365760"/>
+          </a:xfrm>
+          <a:prstGeom prst="roundRect">
+            <a:avLst/>
+          </a:prstGeom>
+          <a:solidFill>
+            <a:srgbClr val="E8EEF7"/>
+          </a:solidFill>
+          <a:ln>
+            <a:solidFill>
+              <a:srgbClr val="1F3A5F"/>
+            </a:solidFill>
+          </a:ln>
+        </p:spPr>
+        <p:style>
+          <a:lnRef idx="1">
+            <a:schemeClr val="accent1"/>
+          </a:lnRef>
+          <a:fillRef idx="3">
+            <a:schemeClr val="accent1"/>
+          </a:fillRef>
+          <a:effectRef idx="2">
+            <a:schemeClr val="accent1"/>
+          </a:effectRef>
+          <a:fontRef idx="minor">
+            <a:schemeClr val="lt1"/>
+          </a:fontRef>
+        </p:style>
+        <p:txBody>
+          <a:bodyPr rtlCol="0" anchor="ctr" lIns="45720" rIns="45720"/>
+          <a:lstStyle/>
+          <a:p>
+            <a:pPr algn="ctr"/>
+            <a:r>
+              <a:rPr sz="900">
+                <a:solidFill>
+                  <a:srgbClr val="1F3A5F"/>
+                </a:solidFill>
+              </a:rPr>
+              <a:t>Gram 10: FR Tantive IV, Category 4, Gandalf</a:t>
+            </a:r>
+          </a:p>
+        </p:txBody>
+      </p:sp>
+      <p:sp>
+        <p:nvSpPr>
+          <p:cNvPr id="22" name="TextBox 21"/>
+          <p:cNvSpPr txBox="1"/>
+          <p:nvPr/>
+        </p:nvSpPr>
+        <p:spPr>
+          <a:xfrm>
+            <a:off x="9531705" y="3066288"/>
+            <a:ext cx="2200046" cy="1447800"/>
+          </a:xfrm>
+          <a:prstGeom prst="rect">
+            <a:avLst/>
+          </a:prstGeom>
+          <a:noFill/>
+        </p:spPr>
+        <p:txBody>
+          <a:bodyPr wrap="square">
+            <a:spAutoFit/>
+          </a:bodyPr>
+          <a:lstStyle/>
+          <a:p>
+            <a:r>
+              <a:rPr sz="800">
+                <a:hlinkClick r:id="rId36"/>
+              </a:rPr>
+              <a:t>Lofar 1</a:t>
+            </a:r>
+          </a:p>
+        </p:txBody>
+      </p:sp>
+      <p:sp>
+        <p:nvSpPr>
+          <p:cNvPr id="23" name="Rounded Rectangle 22">
+            <a:hlinkClick r:id="rId37"/>
+          </p:cNvPr>
+          <p:cNvSpPr/>
+          <p:nvPr/>
+        </p:nvSpPr>
+        <p:spPr>
+          <a:xfrm>
+            <a:off x="365760" y="4632960"/>
+            <a:ext cx="2200046" cy="365760"/>
+          </a:xfrm>
+          <a:prstGeom prst="roundRect">
+            <a:avLst/>
+          </a:prstGeom>
+          <a:solidFill>
+            <a:srgbClr val="E8EEF7"/>
+          </a:solidFill>
+          <a:ln>
+            <a:solidFill>
+              <a:srgbClr val="1F3A5F"/>
+            </a:solidFill>
+          </a:ln>
+        </p:spPr>
+        <p:style>
+          <a:lnRef idx="1">
+            <a:schemeClr val="accent1"/>
+          </a:lnRef>
+          <a:fillRef idx="3">
+            <a:schemeClr val="accent1"/>
+          </a:fillRef>
+          <a:effectRef idx="2">
+            <a:schemeClr val="accent1"/>
+          </a:effectRef>
+          <a:fontRef idx="minor">
+            <a:schemeClr val="lt1"/>
+          </a:fontRef>
+        </p:style>
+        <p:txBody>
+          <a:bodyPr rtlCol="0" anchor="ctr" lIns="45720" rIns="45720"/>
+          <a:lstStyle/>
+          <a:p>
+            <a:pPr algn="ctr"/>
+            <a:r>
+              <a:rPr sz="900">
+                <a:solidFill>
+                  <a:srgbClr val="1F3A5F"/>
+                </a:solidFill>
+              </a:rPr>
+              <a:t>Gram 11: FR Razor Crest, Category 1, Betazed</a:t>
+            </a:r>
+          </a:p>
+        </p:txBody>
+      </p:sp>
+      <p:sp>
+        <p:nvSpPr>
+          <p:cNvPr id="24" name="TextBox 23"/>
+          <p:cNvSpPr txBox="1"/>
+          <p:nvPr/>
+        </p:nvSpPr>
+        <p:spPr>
+          <a:xfrm>
+            <a:off x="365760" y="5017008"/>
+            <a:ext cx="2200046" cy="1447800"/>
+          </a:xfrm>
+          <a:prstGeom prst="rect">
+            <a:avLst/>
+          </a:prstGeom>
+          <a:noFill/>
+        </p:spPr>
+        <p:txBody>
+          <a:bodyPr wrap="square">
+            <a:spAutoFit/>
+          </a:bodyPr>
+          <a:lstStyle/>
+          <a:p>
+            <a:r>
+              <a:rPr sz="800">
+                <a:hlinkClick r:id="rId38"/>
+              </a:rPr>
+              <a:t>Lofar 1</a:t>
+            </a:r>
+          </a:p>
+          <a:p>
+            <a:r>
+              <a:rPr sz="800">
+                <a:hlinkClick r:id="rId39"/>
+              </a:rPr>
+              <a:t>Lofar 2</a:t>
+            </a:r>
+          </a:p>
+          <a:p>
+            <a:r>
+              <a:rPr sz="800">
+                <a:hlinkClick r:id="rId40"/>
+              </a:rPr>
+              <a:t>Lofar 3</a:t>
+            </a:r>
+          </a:p>
+        </p:txBody>
+      </p:sp>
+      <p:sp>
+        <p:nvSpPr>
+          <p:cNvPr id="25" name="Rounded Rectangle 24">
+            <a:hlinkClick r:id="rId41"/>
+          </p:cNvPr>
+          <p:cNvSpPr/>
+          <p:nvPr/>
+        </p:nvSpPr>
+        <p:spPr>
+          <a:xfrm>
+            <a:off x="2657246" y="4632960"/>
+            <a:ext cx="2200046" cy="365760"/>
+          </a:xfrm>
+          <a:prstGeom prst="roundRect">
+            <a:avLst/>
+          </a:prstGeom>
+          <a:solidFill>
+            <a:srgbClr val="E8EEF7"/>
+          </a:solidFill>
+          <a:ln>
+            <a:solidFill>
+              <a:srgbClr val="1F3A5F"/>
+            </a:solidFill>
+          </a:ln>
+        </p:spPr>
+        <p:style>
+          <a:lnRef idx="1">
+            <a:schemeClr val="accent1"/>
+          </a:lnRef>
+          <a:fillRef idx="3">
+            <a:schemeClr val="accent1"/>
+          </a:fillRef>
+          <a:effectRef idx="2">
+            <a:schemeClr val="accent1"/>
+          </a:effectRef>
+          <a:fontRef idx="minor">
+            <a:schemeClr val="lt1"/>
+          </a:fontRef>
+        </p:style>
+        <p:txBody>
+          <a:bodyPr rtlCol="0" anchor="ctr" lIns="45720" rIns="45720"/>
+          <a:lstStyle/>
+          <a:p>
+            <a:pPr algn="ctr"/>
+            <a:r>
+              <a:rPr sz="900">
+                <a:solidFill>
+                  <a:srgbClr val="1F3A5F"/>
+                </a:solidFill>
+              </a:rPr>
+              <a:t>Gram 12: FR Constitution-class, Category 1, Tatooine</a:t>
+            </a:r>
+          </a:p>
+        </p:txBody>
+      </p:sp>
+      <p:sp>
+        <p:nvSpPr>
+          <p:cNvPr id="26" name="TextBox 25"/>
+          <p:cNvSpPr txBox="1"/>
+          <p:nvPr/>
+        </p:nvSpPr>
+        <p:spPr>
+          <a:xfrm>
+            <a:off x="2657246" y="5017008"/>
+            <a:ext cx="2200046" cy="1447800"/>
+          </a:xfrm>
+          <a:prstGeom prst="rect">
+            <a:avLst/>
+          </a:prstGeom>
+          <a:noFill/>
+        </p:spPr>
+        <p:txBody>
+          <a:bodyPr wrap="square">
+            <a:spAutoFit/>
+          </a:bodyPr>
+          <a:lstStyle/>
+          <a:p>
+            <a:r>
+              <a:rPr sz="800">
+                <a:hlinkClick r:id="rId42"/>
+              </a:rPr>
+              <a:t>Lofar 1</a:t>
+            </a:r>
+          </a:p>
+          <a:p>
+            <a:r>
+              <a:rPr sz="800">
+                <a:hlinkClick r:id="rId43"/>
+              </a:rPr>
+              <a:t>Lofar 2</a:t>
+            </a:r>
+          </a:p>
+          <a:p>
+            <a:r>
+              <a:rPr sz="800">
+                <a:hlinkClick r:id="rId44"/>
+              </a:rPr>
+              <a:t>Lofar 3</a:t>
+            </a:r>
+          </a:p>
+        </p:txBody>
+      </p:sp>
+      <p:sp>
+        <p:nvSpPr>
+          <p:cNvPr id="27" name="Rounded Rectangle 26">
+            <a:hlinkClick r:id="rId45"/>
+          </p:cNvPr>
+          <p:cNvSpPr/>
+          <p:nvPr/>
+        </p:nvSpPr>
+        <p:spPr>
+          <a:xfrm>
+            <a:off x="4948732" y="4632960"/>
+            <a:ext cx="2200046" cy="365760"/>
+          </a:xfrm>
+          <a:prstGeom prst="roundRect">
+            <a:avLst/>
+          </a:prstGeom>
+          <a:solidFill>
+            <a:srgbClr val="E8EEF7"/>
+          </a:solidFill>
+          <a:ln>
+            <a:solidFill>
+              <a:srgbClr val="1F3A5F"/>
+            </a:solidFill>
+          </a:ln>
+        </p:spPr>
+        <p:style>
+          <a:lnRef idx="1">
+            <a:schemeClr val="accent1"/>
+          </a:lnRef>
+          <a:fillRef idx="3">
+            <a:schemeClr val="accent1"/>
+          </a:fillRef>
+          <a:effectRef idx="2">
+            <a:schemeClr val="accent1"/>
+          </a:effectRef>
+          <a:fontRef idx="minor">
+            <a:schemeClr val="lt1"/>
+          </a:fontRef>
+        </p:style>
+        <p:txBody>
+          <a:bodyPr rtlCol="0" anchor="ctr" lIns="45720" rIns="45720"/>
+          <a:lstStyle/>
+          <a:p>
+            <a:pPr algn="ctr"/>
+            <a:r>
+              <a:rPr sz="900">
+                <a:solidFill>
+                  <a:srgbClr val="1F3A5F"/>
+                </a:solidFill>
+              </a:rPr>
+              <a:t>Gram 13: FR Reliant, Category 2, Caprica</a:t>
+            </a:r>
+          </a:p>
+        </p:txBody>
+      </p:sp>
+      <p:sp>
+        <p:nvSpPr>
+          <p:cNvPr id="28" name="TextBox 27"/>
+          <p:cNvSpPr txBox="1"/>
+          <p:nvPr/>
+        </p:nvSpPr>
+        <p:spPr>
+          <a:xfrm>
+            <a:off x="4948732" y="5017008"/>
+            <a:ext cx="2200046" cy="1447800"/>
+          </a:xfrm>
+          <a:prstGeom prst="rect">
+            <a:avLst/>
+          </a:prstGeom>
+          <a:noFill/>
+        </p:spPr>
+        <p:txBody>
+          <a:bodyPr wrap="square">
+            <a:spAutoFit/>
+          </a:bodyPr>
+          <a:lstStyle/>
+          <a:p>
+            <a:r>
+              <a:rPr sz="800">
+                <a:hlinkClick r:id="rId46"/>
+              </a:rPr>
+              <a:t>Lofar 1</a:t>
+            </a:r>
+          </a:p>
+        </p:txBody>
+      </p:sp>
+      <p:sp>
+        <p:nvSpPr>
+          <p:cNvPr id="29" name="Rounded Rectangle 28">
+            <a:hlinkClick r:id="rId47"/>
+          </p:cNvPr>
+          <p:cNvSpPr/>
+          <p:nvPr/>
+        </p:nvSpPr>
+        <p:spPr>
+          <a:xfrm>
+            <a:off x="7240219" y="4632960"/>
+            <a:ext cx="2200046" cy="365760"/>
+          </a:xfrm>
+          <a:prstGeom prst="roundRect">
+            <a:avLst/>
+          </a:prstGeom>
+          <a:solidFill>
+            <a:srgbClr val="E8EEF7"/>
+          </a:solidFill>
+          <a:ln>
+            <a:solidFill>
+              <a:srgbClr val="1F3A5F"/>
+            </a:solidFill>
+          </a:ln>
+        </p:spPr>
+        <p:style>
+          <a:lnRef idx="1">
+            <a:schemeClr val="accent1"/>
+          </a:lnRef>
+          <a:fillRef idx="3">
+            <a:schemeClr val="accent1"/>
+          </a:fillRef>
+          <a:effectRef idx="2">
+            <a:schemeClr val="accent1"/>
+          </a:effectRef>
+          <a:fontRef idx="minor">
+            <a:schemeClr val="lt1"/>
+          </a:fontRef>
+        </p:style>
+        <p:txBody>
+          <a:bodyPr rtlCol="0" anchor="ctr" lIns="45720" rIns="45720"/>
+          <a:lstStyle/>
+          <a:p>
+            <a:pPr algn="ctr"/>
+            <a:r>
+              <a:rPr sz="900">
+                <a:solidFill>
+                  <a:srgbClr val="1F3A5F"/>
+                </a:solidFill>
+              </a:rPr>
+              <a:t>Gram 14: FR TIE Fighter, Category 4, Tantive</a:t>
+            </a:r>
+          </a:p>
+        </p:txBody>
+      </p:sp>
+      <p:sp>
+        <p:nvSpPr>
+          <p:cNvPr id="30" name="TextBox 29"/>
+          <p:cNvSpPr txBox="1"/>
+          <p:nvPr/>
+        </p:nvSpPr>
+        <p:spPr>
+          <a:xfrm>
+            <a:off x="7240219" y="5017008"/>
+            <a:ext cx="2200046" cy="1447800"/>
+          </a:xfrm>
+          <a:prstGeom prst="rect">
+            <a:avLst/>
+          </a:prstGeom>
+          <a:noFill/>
+        </p:spPr>
+        <p:txBody>
+          <a:bodyPr wrap="square">
+            <a:spAutoFit/>
+          </a:bodyPr>
+          <a:lstStyle/>
+          <a:p>
+            <a:r>
+              <a:rPr sz="800">
+                <a:hlinkClick r:id="rId48"/>
+              </a:rPr>
+              <a:t>Lofar 1</a:t>
+            </a:r>
+          </a:p>
+          <a:p>
+            <a:r>
+              <a:rPr sz="800">
+                <a:hlinkClick r:id="rId49"/>
+              </a:rPr>
+              <a:t>Lofar 2</a:t>
+            </a:r>
+          </a:p>
+        </p:txBody>
+      </p:sp>
+      <p:sp>
+        <p:nvSpPr>
+          <p:cNvPr id="31" name="Rounded Rectangle 30">
+            <a:hlinkClick r:id="rId50"/>
+          </p:cNvPr>
+          <p:cNvSpPr/>
+          <p:nvPr/>
+        </p:nvSpPr>
+        <p:spPr>
+          <a:xfrm>
+            <a:off x="9531705" y="4632960"/>
+            <a:ext cx="2200046" cy="365760"/>
+          </a:xfrm>
+          <a:prstGeom prst="roundRect">
+            <a:avLst/>
+          </a:prstGeom>
+          <a:solidFill>
+            <a:srgbClr val="E8EEF7"/>
+          </a:solidFill>
+          <a:ln>
+            <a:solidFill>
+              <a:srgbClr val="1F3A5F"/>
+            </a:solidFill>
+          </a:ln>
+        </p:spPr>
+        <p:style>
+          <a:lnRef idx="1">
+            <a:schemeClr val="accent1"/>
+          </a:lnRef>
+          <a:fillRef idx="3">
+            <a:schemeClr val="accent1"/>
+          </a:fillRef>
+          <a:effectRef idx="2">
+            <a:schemeClr val="accent1"/>
+          </a:effectRef>
+          <a:fontRef idx="minor">
+            <a:schemeClr val="lt1"/>
+          </a:fontRef>
+        </p:style>
+        <p:txBody>
+          <a:bodyPr rtlCol="0" anchor="ctr" lIns="45720" rIns="45720"/>
+          <a:lstStyle/>
+          <a:p>
+            <a:pPr algn="ctr"/>
+            <a:r>
+              <a:rPr sz="900">
+                <a:solidFill>
+                  <a:srgbClr val="1F3A5F"/>
+                </a:solidFill>
+              </a:rPr>
+              <a:t>Gram 15: FR Prometheus, Category 1, Caprica</a:t>
+            </a:r>
+          </a:p>
+        </p:txBody>
+      </p:sp>
+      <p:sp>
+        <p:nvSpPr>
+          <p:cNvPr id="32" name="TextBox 31"/>
+          <p:cNvSpPr txBox="1"/>
+          <p:nvPr/>
+        </p:nvSpPr>
+        <p:spPr>
+          <a:xfrm>
+            <a:off x="9531705" y="5017008"/>
+            <a:ext cx="2200046" cy="1447800"/>
+          </a:xfrm>
+          <a:prstGeom prst="rect">
+            <a:avLst/>
+          </a:prstGeom>
+          <a:noFill/>
+        </p:spPr>
+        <p:txBody>
+          <a:bodyPr wrap="square">
+            <a:spAutoFit/>
+          </a:bodyPr>
+          <a:lstStyle/>
+          <a:p>
+            <a:r>
+              <a:rPr sz="800">
+                <a:hlinkClick r:id="rId51"/>
+              </a:rPr>
+              <a:t>Lofar 1</a:t>
+            </a:r>
+          </a:p>
+          <a:p>
+            <a:r>
+              <a:rPr sz="800">
+                <a:hlinkClick r:id="rId52"/>
+              </a:rPr>
+              <a:t>Lofar 2</a:t>
+            </a:r>
+          </a:p>
+          <a:p>
+            <a:r>
+              <a:rPr sz="800">
+                <a:hlinkClick r:id="rId53"/>
+              </a:rPr>
+              <a:t>Lofar 3</a:t>
             </a:r>
           </a:p>
         </p:txBody>
@@ -3223,18 +4670,18 @@
                   <a:srgbClr val="FFFFFF"/>
                 </a:solidFill>
               </a:rPr>
-              <a:t>Instructor Progress Test 2 Grams_Updated — Page 1 of 2</a:t>
-            </a:r>
-          </a:p>
-        </p:txBody>
-      </p:sp>
-      <p:sp>
-        <p:nvSpPr>
-          <p:cNvPr id="3" name="Rounded Rectangle 2"/>
+              <a:t>Instructor Progress Test 2 Grams_Updated — Page 2 of 2</a:t>
+            </a:r>
+          </a:p>
+        </p:txBody>
+      </p:sp>
+      <p:sp>
+        <p:nvSpPr>
+          <p:cNvPr id="3" name="Rounded Rectangle 2">
+            <a:hlinkClick r:id="rId2"/>
+          </p:cNvPr>
           <p:cNvSpPr/>
-          <p:nvPr>
-            <a:hlinkClick r:id="rId2"/>
-          </p:nvPr>
+          <p:nvPr/>
         </p:nvSpPr>
         <p:spPr>
           <a:xfrm>
@@ -3278,7 +4725,7 @@
                   <a:srgbClr val="1F3A5F"/>
                 </a:solidFill>
               </a:rPr>
-              <a:t>Gram 1: FR Intrepid-class, Category 3, Dank</a:t>
+              <a:t>Gram 16: FR Intrepid-class, Category 1, Gandalf</a:t>
             </a:r>
           </a:p>
         </p:txBody>
@@ -3340,11 +4787,11 @@
       </p:sp>
       <p:sp>
         <p:nvSpPr>
-          <p:cNvPr id="5" name="Rounded Rectangle 4"/>
+          <p:cNvPr id="5" name="Rounded Rectangle 4">
+            <a:hlinkClick r:id="rId7"/>
+          </p:cNvPr>
           <p:cNvSpPr/>
-          <p:nvPr>
-            <a:hlinkClick r:id="rId7"/>
-          </p:nvPr>
+          <p:nvPr/>
         </p:nvSpPr>
         <p:spPr>
           <a:xfrm>
@@ -3388,7 +4835,7 @@
                   <a:srgbClr val="1F3A5F"/>
                 </a:solidFill>
               </a:rPr>
-              <a:t>Gram 2: FR Venator-class, Category 3, Betazed</a:t>
+              <a:t>Gram 17: FR Devastator, Category 3, Cardassia</a:t>
             </a:r>
           </a:p>
         </p:txBody>
@@ -3422,31 +4869,15 @@
               <a:t>Lofar 1</a:t>
             </a:r>
           </a:p>
-          <a:p>
-            <a:r>
-              <a:rPr sz="800">
-                <a:hlinkClick r:id="rId9"/>
-              </a:rPr>
-              <a:t>Lofar 2</a:t>
-            </a:r>
-          </a:p>
-          <a:p>
-            <a:r>
-              <a:rPr sz="800">
-                <a:hlinkClick r:id="rId10"/>
-              </a:rPr>
-              <a:t>Lofar 3</a:t>
-            </a:r>
-          </a:p>
-        </p:txBody>
-      </p:sp>
-      <p:sp>
-        <p:nvSpPr>
-          <p:cNvPr id="7" name="Rounded Rectangle 6"/>
+        </p:txBody>
+      </p:sp>
+      <p:sp>
+        <p:nvSpPr>
+          <p:cNvPr id="7" name="Rounded Rectangle 6">
+            <a:hlinkClick r:id="rId9"/>
+          </p:cNvPr>
           <p:cNvSpPr/>
-          <p:nvPr>
-            <a:hlinkClick r:id="rId11"/>
-          </p:nvPr>
+          <p:nvPr/>
         </p:nvSpPr>
         <p:spPr>
           <a:xfrm>
@@ -3490,7 +4921,7 @@
                   <a:srgbClr val="1F3A5F"/>
                 </a:solidFill>
               </a:rPr>
-              <a:t>Gram 3: Lambda Shuttle contact bearing 096, codename Mustafar</a:t>
+              <a:t>Gram 18: FR Prometheus, Category 3, Dagobah</a:t>
             </a:r>
           </a:p>
         </p:txBody>
@@ -3519,20 +4950,44 @@
           <a:p>
             <a:r>
               <a:rPr sz="800">
+                <a:hlinkClick r:id="rId10"/>
+              </a:rPr>
+              <a:t>Lofar 1</a:t>
+            </a:r>
+          </a:p>
+          <a:p>
+            <a:r>
+              <a:rPr sz="800">
+                <a:hlinkClick r:id="rId11"/>
+              </a:rPr>
+              <a:t>Lofar 2</a:t>
+            </a:r>
+          </a:p>
+          <a:p>
+            <a:r>
+              <a:rPr sz="800">
                 <a:hlinkClick r:id="rId12"/>
               </a:rPr>
-              <a:t>Lofar 1</a:t>
-            </a:r>
-          </a:p>
-        </p:txBody>
-      </p:sp>
-      <p:sp>
-        <p:nvSpPr>
-          <p:cNvPr id="9" name="Rounded Rectangle 8"/>
+              <a:t>Lofar 3</a:t>
+            </a:r>
+          </a:p>
+          <a:p>
+            <a:r>
+              <a:rPr sz="800">
+                <a:hlinkClick r:id="rId13"/>
+              </a:rPr>
+              <a:t>Lofar 4</a:t>
+            </a:r>
+          </a:p>
+        </p:txBody>
+      </p:sp>
+      <p:sp>
+        <p:nvSpPr>
+          <p:cNvPr id="9" name="Rounded Rectangle 8">
+            <a:hlinkClick r:id="rId14"/>
+          </p:cNvPr>
           <p:cNvSpPr/>
-          <p:nvPr>
-            <a:hlinkClick r:id="rId13"/>
-          </p:nvPr>
+          <p:nvPr/>
         </p:nvSpPr>
         <p:spPr>
           <a:xfrm>
@@ -3576,7 +5031,7 @@
                   <a:srgbClr val="1F3A5F"/>
                 </a:solidFill>
               </a:rPr>
-              <a:t>Gram 4: FR Galaxy-class, Category 3, Dank</a:t>
+              <a:t>Gram 20: FR Nebulon-B, Category 4, Romulus</a:t>
             </a:r>
           </a:p>
         </p:txBody>
@@ -3605,20 +5060,28 @@
           <a:p>
             <a:r>
               <a:rPr sz="800">
-                <a:hlinkClick r:id="rId14"/>
+                <a:hlinkClick r:id="rId15"/>
               </a:rPr>
               <a:t>Lofar 1</a:t>
             </a:r>
           </a:p>
-        </p:txBody>
-      </p:sp>
-      <p:sp>
-        <p:nvSpPr>
-          <p:cNvPr id="11" name="Rounded Rectangle 10"/>
+          <a:p>
+            <a:r>
+              <a:rPr sz="800">
+                <a:hlinkClick r:id="rId16"/>
+              </a:rPr>
+              <a:t>Lofar 2</a:t>
+            </a:r>
+          </a:p>
+        </p:txBody>
+      </p:sp>
+      <p:sp>
+        <p:nvSpPr>
+          <p:cNvPr id="11" name="Rounded Rectangle 10">
+            <a:hlinkClick r:id="rId17"/>
+          </p:cNvPr>
           <p:cNvSpPr/>
-          <p:nvPr>
-            <a:hlinkClick r:id="rId15"/>
-          </p:nvPr>
+          <p:nvPr/>
         </p:nvSpPr>
         <p:spPr>
           <a:xfrm>
@@ -3662,7 +5125,7 @@
                   <a:srgbClr val="1F3A5F"/>
                 </a:solidFill>
               </a:rPr>
-              <a:t>Gram 5: FR Constitution-class, Category 3, Yavin</a:t>
+              <a:t>Gram 22: Nebulon-B contact bearing 283, codename Endor</a:t>
             </a:r>
           </a:p>
         </p:txBody>
@@ -3691,20 +5154,36 @@
           <a:p>
             <a:r>
               <a:rPr sz="800">
-                <a:hlinkClick r:id="rId16"/>
+                <a:hlinkClick r:id="rId18"/>
               </a:rPr>
               <a:t>Lofar 1</a:t>
             </a:r>
           </a:p>
-        </p:txBody>
-      </p:sp>
-      <p:sp>
-        <p:nvSpPr>
-          <p:cNvPr id="13" name="Rounded Rectangle 12"/>
+          <a:p>
+            <a:r>
+              <a:rPr sz="800">
+                <a:hlinkClick r:id="rId19"/>
+              </a:rPr>
+              <a:t>Lofar 2</a:t>
+            </a:r>
+          </a:p>
+          <a:p>
+            <a:r>
+              <a:rPr sz="800">
+                <a:hlinkClick r:id="rId20"/>
+              </a:rPr>
+              <a:t>Lofar 3</a:t>
+            </a:r>
+          </a:p>
+        </p:txBody>
+      </p:sp>
+      <p:sp>
+        <p:nvSpPr>
+          <p:cNvPr id="13" name="Rounded Rectangle 12">
+            <a:hlinkClick r:id="rId21"/>
+          </p:cNvPr>
           <p:cNvSpPr/>
-          <p:nvPr>
-            <a:hlinkClick r:id="rId17"/>
-          </p:nvPr>
+          <p:nvPr/>
         </p:nvSpPr>
         <p:spPr>
           <a:xfrm>
@@ -3748,7 +5227,7 @@
                   <a:srgbClr val="1F3A5F"/>
                 </a:solidFill>
               </a:rPr>
-              <a:t>Gram 6: FR Corellian Corvette, Category 2, Tantive</a:t>
+              <a:t>Gram 23: FR Equinox, Category 4, Hoth</a:t>
             </a:r>
           </a:p>
         </p:txBody>
@@ -3777,44 +5256,20 @@
           <a:p>
             <a:r>
               <a:rPr sz="800">
-                <a:hlinkClick r:id="rId18"/>
+                <a:hlinkClick r:id="rId22"/>
               </a:rPr>
               <a:t>Lofar 1</a:t>
             </a:r>
           </a:p>
-          <a:p>
-            <a:r>
-              <a:rPr sz="800">
-                <a:hlinkClick r:id="rId19"/>
-              </a:rPr>
-              <a:t>Lofar 2</a:t>
-            </a:r>
-          </a:p>
-          <a:p>
-            <a:r>
-              <a:rPr sz="800">
-                <a:hlinkClick r:id="rId20"/>
-              </a:rPr>
-              <a:t>Lofar 3</a:t>
-            </a:r>
-          </a:p>
-          <a:p>
-            <a:r>
-              <a:rPr sz="800">
-                <a:hlinkClick r:id="rId21"/>
-              </a:rPr>
-              <a:t>Lofar 4</a:t>
-            </a:r>
-          </a:p>
-        </p:txBody>
-      </p:sp>
-      <p:sp>
-        <p:nvSpPr>
-          <p:cNvPr id="15" name="Rounded Rectangle 14"/>
+        </p:txBody>
+      </p:sp>
+      <p:sp>
+        <p:nvSpPr>
+          <p:cNvPr id="15" name="Rounded Rectangle 14">
+            <a:hlinkClick r:id="rId23"/>
+          </p:cNvPr>
           <p:cNvSpPr/>
-          <p:nvPr>
-            <a:hlinkClick r:id="rId22"/>
-          </p:nvPr>
+          <p:nvPr/>
         </p:nvSpPr>
         <p:spPr>
           <a:xfrm>
@@ -3858,7 +5313,7 @@
                   <a:srgbClr val="1F3A5F"/>
                 </a:solidFill>
               </a:rPr>
-              <a:t>Gram 7: FR Millennium Falcon, Category 4, Romulus</a:t>
+              <a:t>Gram 24: FR Equinox, Category 1, Tantive</a:t>
             </a:r>
           </a:p>
         </p:txBody>
@@ -3887,7 +5342,7 @@
           <a:p>
             <a:r>
               <a:rPr sz="800">
-                <a:hlinkClick r:id="rId23"/>
+                <a:hlinkClick r:id="rId24"/>
               </a:rPr>
               <a:t>Lofar 1</a:t>
             </a:r>
@@ -3895,7 +5350,7 @@
           <a:p>
             <a:r>
               <a:rPr sz="800">
-                <a:hlinkClick r:id="rId24"/>
+                <a:hlinkClick r:id="rId25"/>
               </a:rPr>
               <a:t>Lofar 2</a:t>
             </a:r>
@@ -3903,7 +5358,7 @@
           <a:p>
             <a:r>
               <a:rPr sz="800">
-                <a:hlinkClick r:id="rId25"/>
+                <a:hlinkClick r:id="rId26"/>
               </a:rPr>
               <a:t>Lofar 3</a:t>
             </a:r>
@@ -3911,7 +5366,7 @@
           <a:p>
             <a:r>
               <a:rPr sz="800">
-                <a:hlinkClick r:id="rId26"/>
+                <a:hlinkClick r:id="rId27"/>
               </a:rPr>
               <a:t>Lofar 4</a:t>
             </a:r>
@@ -3920,11 +5375,11 @@
       </p:sp>
       <p:sp>
         <p:nvSpPr>
-          <p:cNvPr id="17" name="Rounded Rectangle 16"/>
+          <p:cNvPr id="17" name="Rounded Rectangle 16">
+            <a:hlinkClick r:id="rId28"/>
+          </p:cNvPr>
           <p:cNvSpPr/>
-          <p:nvPr>
-            <a:hlinkClick r:id="rId27"/>
-          </p:nvPr>
+          <p:nvPr/>
         </p:nvSpPr>
         <p:spPr>
           <a:xfrm>
@@ -3968,7 +5423,7 @@
                   <a:srgbClr val="1F3A5F"/>
                 </a:solidFill>
               </a:rPr>
-              <a:t>Gram 8: Nebulon-B contact bearing 297, codename Cardassia</a:t>
+              <a:t>Gram 25: FR Galaxy-class, Category 4, Betazed</a:t>
             </a:r>
           </a:p>
         </p:txBody>
@@ -3997,36 +5452,20 @@
           <a:p>
             <a:r>
               <a:rPr sz="800">
-                <a:hlinkClick r:id="rId28"/>
+                <a:hlinkClick r:id="rId29"/>
               </a:rPr>
               <a:t>Lofar 1</a:t>
             </a:r>
           </a:p>
-          <a:p>
-            <a:r>
-              <a:rPr sz="800">
-                <a:hlinkClick r:id="rId29"/>
-              </a:rPr>
-              <a:t>Lofar 2</a:t>
-            </a:r>
-          </a:p>
-          <a:p>
-            <a:r>
-              <a:rPr sz="800">
-                <a:hlinkClick r:id="rId30"/>
-              </a:rPr>
-              <a:t>Lofar 3</a:t>
-            </a:r>
-          </a:p>
-        </p:txBody>
-      </p:sp>
-      <p:sp>
-        <p:nvSpPr>
-          <p:cNvPr id="19" name="Rounded Rectangle 18"/>
+        </p:txBody>
+      </p:sp>
+      <p:sp>
+        <p:nvSpPr>
+          <p:cNvPr id="19" name="Rounded Rectangle 18">
+            <a:hlinkClick r:id="rId30"/>
+          </p:cNvPr>
           <p:cNvSpPr/>
-          <p:nvPr>
-            <a:hlinkClick r:id="rId31"/>
-          </p:nvPr>
+          <p:nvPr/>
         </p:nvSpPr>
         <p:spPr>
           <a:xfrm>
@@ -4070,7 +5509,7 @@
                   <a:srgbClr val="1F3A5F"/>
                 </a:solidFill>
               </a:rPr>
-              <a:t>Gram 9: FR A-wing, Category 1, Romulus</a:t>
+              <a:t>Gram 26: FR Discovery, Category 4, Tantive</a:t>
             </a:r>
           </a:p>
         </p:txBody>
@@ -4099,9 +5538,17 @@
           <a:p>
             <a:r>
               <a:rPr sz="800">
+                <a:hlinkClick r:id="rId31"/>
+              </a:rPr>
+              <a:t>Lofar 1</a:t>
+            </a:r>
+          </a:p>
+          <a:p>
+            <a:r>
+              <a:rPr sz="800">
                 <a:hlinkClick r:id="rId32"/>
               </a:rPr>
-              <a:t>Lofar 1</a:t>
+              <a:t>Lofar 2</a:t>
             </a:r>
           </a:p>
           <a:p>
@@ -4109,7 +5556,7 @@
               <a:rPr sz="800">
                 <a:hlinkClick r:id="rId33"/>
               </a:rPr>
-              <a:t>Lofar 2</a:t>
+              <a:t>Lofar 3</a:t>
             </a:r>
           </a:p>
           <a:p>
@@ -4117,18 +5564,18 @@
               <a:rPr sz="800">
                 <a:hlinkClick r:id="rId34"/>
               </a:rPr>
-              <a:t>Lofar 3</a:t>
-            </a:r>
-          </a:p>
-        </p:txBody>
-      </p:sp>
-      <p:sp>
-        <p:nvSpPr>
-          <p:cNvPr id="21" name="Rounded Rectangle 20"/>
+              <a:t>Lofar 4</a:t>
+            </a:r>
+          </a:p>
+        </p:txBody>
+      </p:sp>
+      <p:sp>
+        <p:nvSpPr>
+          <p:cNvPr id="21" name="Rounded Rectangle 20">
+            <a:hlinkClick r:id="rId35"/>
+          </p:cNvPr>
           <p:cNvSpPr/>
-          <p:nvPr>
-            <a:hlinkClick r:id="rId35"/>
-          </p:nvPr>
+          <p:nvPr/>
         </p:nvSpPr>
         <p:spPr>
           <a:xfrm>
@@ -4172,7 +5619,7 @@
                   <a:srgbClr val="1F3A5F"/>
                 </a:solidFill>
               </a:rPr>
-              <a:t>Gram 10: FR Tantive IV, Category 4, Gandalf</a:t>
+              <a:t>Gram 28: FR Voyager, Category 4, Romulus</a:t>
             </a:r>
           </a:p>
         </p:txBody>
@@ -4206,15 +5653,23 @@
               <a:t>Lofar 1</a:t>
             </a:r>
           </a:p>
-        </p:txBody>
-      </p:sp>
-      <p:sp>
-        <p:nvSpPr>
-          <p:cNvPr id="23" name="Rounded Rectangle 22"/>
+          <a:p>
+            <a:r>
+              <a:rPr sz="800">
+                <a:hlinkClick r:id="rId37"/>
+              </a:rPr>
+              <a:t>Lofar 2</a:t>
+            </a:r>
+          </a:p>
+        </p:txBody>
+      </p:sp>
+      <p:sp>
+        <p:nvSpPr>
+          <p:cNvPr id="23" name="Rounded Rectangle 22">
+            <a:hlinkClick r:id="rId38"/>
+          </p:cNvPr>
           <p:cNvSpPr/>
-          <p:nvPr>
-            <a:hlinkClick r:id="rId37"/>
-          </p:nvPr>
+          <p:nvPr/>
         </p:nvSpPr>
         <p:spPr>
           <a:xfrm>
@@ -4258,7 +5713,7 @@
                   <a:srgbClr val="1F3A5F"/>
                 </a:solidFill>
               </a:rPr>
-              <a:t>Gram 11: FR Razor Crest, Category 1, Betazed</a:t>
+              <a:t>Gram 30: FR Akira-class, Category 2, Kobol</a:t>
             </a:r>
           </a:p>
         </p:txBody>
@@ -4287,7 +5742,7 @@
           <a:p>
             <a:r>
               <a:rPr sz="800">
-                <a:hlinkClick r:id="rId38"/>
+                <a:hlinkClick r:id="rId39"/>
               </a:rPr>
               <a:t>Lofar 1</a:t>
             </a:r>
@@ -4295,7 +5750,7 @@
           <a:p>
             <a:r>
               <a:rPr sz="800">
-                <a:hlinkClick r:id="rId39"/>
+                <a:hlinkClick r:id="rId40"/>
               </a:rPr>
               <a:t>Lofar 2</a:t>
             </a:r>
@@ -4303,7 +5758,7 @@
           <a:p>
             <a:r>
               <a:rPr sz="800">
-                <a:hlinkClick r:id="rId40"/>
+                <a:hlinkClick r:id="rId41"/>
               </a:rPr>
               <a:t>Lofar 3</a:t>
             </a:r>
@@ -4312,11 +5767,11 @@
       </p:sp>
       <p:sp>
         <p:nvSpPr>
-          <p:cNvPr id="25" name="Rounded Rectangle 24"/>
+          <p:cNvPr id="25" name="Rounded Rectangle 24">
+            <a:hlinkClick r:id="rId42"/>
+          </p:cNvPr>
           <p:cNvSpPr/>
-          <p:nvPr>
-            <a:hlinkClick r:id="rId41"/>
-          </p:nvPr>
+          <p:nvPr/>
         </p:nvSpPr>
         <p:spPr>
           <a:xfrm>
@@ -4360,7 +5815,7 @@
                   <a:srgbClr val="1F3A5F"/>
                 </a:solidFill>
               </a:rPr>
-              <a:t>Gram 12: FR Constitution-class, Category 1, Tatooine</a:t>
+              <a:t>Gram 31: X-wing contact bearing 051, codename Mustafar</a:t>
             </a:r>
           </a:p>
         </p:txBody>
@@ -4389,7 +5844,7 @@
           <a:p>
             <a:r>
               <a:rPr sz="800">
-                <a:hlinkClick r:id="rId42"/>
+                <a:hlinkClick r:id="rId43"/>
               </a:rPr>
               <a:t>Lofar 1</a:t>
             </a:r>
@@ -4397,28 +5852,20 @@
           <a:p>
             <a:r>
               <a:rPr sz="800">
-                <a:hlinkClick r:id="rId43"/>
+                <a:hlinkClick r:id="rId44"/>
               </a:rPr>
               <a:t>Lofar 2</a:t>
             </a:r>
           </a:p>
-          <a:p>
-            <a:r>
-              <a:rPr sz="800">
-                <a:hlinkClick r:id="rId44"/>
-              </a:rPr>
-              <a:t>Lofar 3</a:t>
-            </a:r>
-          </a:p>
-        </p:txBody>
-      </p:sp>
-      <p:sp>
-        <p:nvSpPr>
-          <p:cNvPr id="27" name="Rounded Rectangle 26"/>
+        </p:txBody>
+      </p:sp>
+      <p:sp>
+        <p:nvSpPr>
+          <p:cNvPr id="27" name="Rounded Rectangle 26">
+            <a:hlinkClick r:id="rId45"/>
+          </p:cNvPr>
           <p:cNvSpPr/>
-          <p:nvPr>
-            <a:hlinkClick r:id="rId45"/>
-          </p:nvPr>
+          <p:nvPr/>
         </p:nvSpPr>
         <p:spPr>
           <a:xfrm>
@@ -4462,7 +5909,7 @@
                   <a:srgbClr val="1F3A5F"/>
                 </a:solidFill>
               </a:rPr>
-              <a:t>Gram 13: FR Reliant, Category 2, Caprica</a:t>
+              <a:t>Gram 32: FR Sovereign-class, Category 4, Naboo</a:t>
             </a:r>
           </a:p>
         </p:txBody>
@@ -4496,15 +5943,39 @@
               <a:t>Lofar 1</a:t>
             </a:r>
           </a:p>
-        </p:txBody>
-      </p:sp>
-      <p:sp>
-        <p:nvSpPr>
-          <p:cNvPr id="29" name="Rounded Rectangle 28"/>
+          <a:p>
+            <a:r>
+              <a:rPr sz="800">
+                <a:hlinkClick r:id="rId47"/>
+              </a:rPr>
+              <a:t>Lofar 2</a:t>
+            </a:r>
+          </a:p>
+          <a:p>
+            <a:r>
+              <a:rPr sz="800">
+                <a:hlinkClick r:id="rId48"/>
+              </a:rPr>
+              <a:t>Lofar 3</a:t>
+            </a:r>
+          </a:p>
+          <a:p>
+            <a:r>
+              <a:rPr sz="800">
+                <a:hlinkClick r:id="rId49"/>
+              </a:rPr>
+              <a:t>Lofar 4</a:t>
+            </a:r>
+          </a:p>
+        </p:txBody>
+      </p:sp>
+      <p:sp>
+        <p:nvSpPr>
+          <p:cNvPr id="29" name="Rounded Rectangle 28">
+            <a:hlinkClick r:id="rId50"/>
+          </p:cNvPr>
           <p:cNvSpPr/>
-          <p:nvPr>
-            <a:hlinkClick r:id="rId47"/>
-          </p:nvPr>
+          <p:nvPr/>
         </p:nvSpPr>
         <p:spPr>
           <a:xfrm>
@@ -4548,7 +6019,7 @@
                   <a:srgbClr val="1F3A5F"/>
                 </a:solidFill>
               </a:rPr>
-              <a:t>Gram 14: FR TIE Fighter, Category 4, Tantive</a:t>
+              <a:t>Gram 34: FR Equinox, Category 2, Cardassia</a:t>
             </a:r>
           </a:p>
         </p:txBody>
@@ -4577,7 +6048,7 @@
           <a:p>
             <a:r>
               <a:rPr sz="800">
-                <a:hlinkClick r:id="rId48"/>
+                <a:hlinkClick r:id="rId51"/>
               </a:rPr>
               <a:t>Lofar 1</a:t>
             </a:r>
@@ -4585,7 +6056,7 @@
           <a:p>
             <a:r>
               <a:rPr sz="800">
-                <a:hlinkClick r:id="rId49"/>
+                <a:hlinkClick r:id="rId52"/>
               </a:rPr>
               <a:t>Lofar 2</a:t>
             </a:r>
@@ -4594,11 +6065,11 @@
       </p:sp>
       <p:sp>
         <p:nvSpPr>
-          <p:cNvPr id="31" name="Rounded Rectangle 30"/>
+          <p:cNvPr id="31" name="Rounded Rectangle 30">
+            <a:hlinkClick r:id="rId53"/>
+          </p:cNvPr>
           <p:cNvSpPr/>
-          <p:nvPr>
-            <a:hlinkClick r:id="rId50"/>
-          </p:nvPr>
+          <p:nvPr/>
         </p:nvSpPr>
         <p:spPr>
           <a:xfrm>
@@ -4642,7 +6113,7 @@
                   <a:srgbClr val="1F3A5F"/>
                 </a:solidFill>
               </a:rPr>
-              <a:t>Gram 15: FR Prometheus, Category 1, Caprica</a:t>
+              <a:t>Gram 36: FR Cerritos, Category 3, Bajor</a:t>
             </a:r>
           </a:p>
         </p:txBody>
@@ -4671,1654 +6142,9 @@
           <a:p>
             <a:r>
               <a:rPr sz="800">
-                <a:hlinkClick r:id="rId51"/>
+                <a:hlinkClick r:id="rId54"/>
               </a:rPr>
               <a:t>Lofar 1</a:t>
-            </a:r>
-          </a:p>
-          <a:p>
-            <a:r>
-              <a:rPr sz="800">
-                <a:hlinkClick r:id="rId52"/>
-              </a:rPr>
-              <a:t>Lofar 2</a:t>
-            </a:r>
-          </a:p>
-          <a:p>
-            <a:r>
-              <a:rPr sz="800">
-                <a:hlinkClick r:id="rId53"/>
-              </a:rPr>
-              <a:t>Lofar 3</a:t>
-            </a:r>
-          </a:p>
-        </p:txBody>
-      </p:sp>
-    </p:spTree>
-  </p:cSld>
-  <p:clrMapOvr>
-    <a:masterClrMapping/>
-  </p:clrMapOvr>
-</p:sld>
-</file>
-
-<file path=ppt/slides/slide3.xml><?xml version="1.0" encoding="utf-8"?>
-<p:sld xmlns:a="http://schemas.openxmlformats.org/drawingml/2006/main" xmlns:p="http://schemas.openxmlformats.org/presentationml/2006/main" xmlns:r="http://schemas.openxmlformats.org/officeDocument/2006/relationships">
-  <p:cSld>
-    <p:spTree>
-      <p:nvGrpSpPr>
-        <p:cNvPr id="1" name=""/>
-        <p:cNvGrpSpPr/>
-        <p:nvPr/>
-      </p:nvGrpSpPr>
-      <p:grpSpPr/>
-      <p:sp>
-        <p:nvSpPr>
-          <p:cNvPr id="2" name="Rectangle 1"/>
-          <p:cNvSpPr/>
-          <p:nvPr/>
-        </p:nvSpPr>
-        <p:spPr>
-          <a:xfrm>
-            <a:off x="0" y="0"/>
-            <a:ext cx="12188952" cy="548640"/>
-          </a:xfrm>
-          <a:prstGeom prst="rect">
-            <a:avLst/>
-          </a:prstGeom>
-          <a:solidFill>
-            <a:srgbClr val="1F3A5F"/>
-          </a:solidFill>
-          <a:ln>
-            <a:noFill/>
-          </a:ln>
-        </p:spPr>
-        <p:style>
-          <a:lnRef idx="1">
-            <a:schemeClr val="accent1"/>
-          </a:lnRef>
-          <a:fillRef idx="3">
-            <a:schemeClr val="accent1"/>
-          </a:fillRef>
-          <a:effectRef idx="2">
-            <a:schemeClr val="accent1"/>
-          </a:effectRef>
-          <a:fontRef idx="minor">
-            <a:schemeClr val="lt1"/>
-          </a:fontRef>
-        </p:style>
-        <p:txBody>
-          <a:bodyPr rtlCol="0" anchor="ctr" lIns="182880" rIns="182880"/>
-          <a:lstStyle/>
-          <a:p>
-            <a:pPr algn="ctr"/>
-            <a:r>
-              <a:rPr sz="2000" b="1">
-                <a:solidFill>
-                  <a:srgbClr val="FFFFFF"/>
-                </a:solidFill>
-              </a:rPr>
-              <a:t>Instructor Progress Test 2 Grams_Updated — Page 2 of 2</a:t>
-            </a:r>
-          </a:p>
-        </p:txBody>
-      </p:sp>
-      <p:sp>
-        <p:nvSpPr>
-          <p:cNvPr id="3" name="Rounded Rectangle 2"/>
-          <p:cNvSpPr/>
-          <p:nvPr>
-            <a:hlinkClick r:id="rId2"/>
-          </p:nvPr>
-        </p:nvSpPr>
-        <p:spPr>
-          <a:xfrm>
-            <a:off x="365760" y="731520"/>
-            <a:ext cx="2200046" cy="365760"/>
-          </a:xfrm>
-          <a:prstGeom prst="roundRect">
-            <a:avLst/>
-          </a:prstGeom>
-          <a:solidFill>
-            <a:srgbClr val="E8EEF7"/>
-          </a:solidFill>
-          <a:ln>
-            <a:solidFill>
-              <a:srgbClr val="1F3A5F"/>
-            </a:solidFill>
-          </a:ln>
-        </p:spPr>
-        <p:style>
-          <a:lnRef idx="1">
-            <a:schemeClr val="accent1"/>
-          </a:lnRef>
-          <a:fillRef idx="3">
-            <a:schemeClr val="accent1"/>
-          </a:fillRef>
-          <a:effectRef idx="2">
-            <a:schemeClr val="accent1"/>
-          </a:effectRef>
-          <a:fontRef idx="minor">
-            <a:schemeClr val="lt1"/>
-          </a:fontRef>
-        </p:style>
-        <p:txBody>
-          <a:bodyPr rtlCol="0" anchor="ctr" lIns="45720" rIns="45720"/>
-          <a:lstStyle/>
-          <a:p>
-            <a:pPr algn="ctr"/>
-            <a:r>
-              <a:rPr sz="900">
-                <a:solidFill>
-                  <a:srgbClr val="1F3A5F"/>
-                </a:solidFill>
-              </a:rPr>
-              <a:t>Gram 16: FR Intrepid-class, Category 1, Gandalf</a:t>
-            </a:r>
-          </a:p>
-        </p:txBody>
-      </p:sp>
-      <p:sp>
-        <p:nvSpPr>
-          <p:cNvPr id="4" name="TextBox 3"/>
-          <p:cNvSpPr txBox="1"/>
-          <p:nvPr/>
-        </p:nvSpPr>
-        <p:spPr>
-          <a:xfrm>
-            <a:off x="365760" y="1115568"/>
-            <a:ext cx="2200046" cy="1447800"/>
-          </a:xfrm>
-          <a:prstGeom prst="rect">
-            <a:avLst/>
-          </a:prstGeom>
-          <a:noFill/>
-        </p:spPr>
-        <p:txBody>
-          <a:bodyPr wrap="square">
-            <a:spAutoFit/>
-          </a:bodyPr>
-          <a:lstStyle/>
-          <a:p>
-            <a:r>
-              <a:rPr sz="800">
-                <a:hlinkClick r:id="rId3"/>
-              </a:rPr>
-              <a:t>Lofar 1</a:t>
-            </a:r>
-          </a:p>
-          <a:p>
-            <a:r>
-              <a:rPr sz="800">
-                <a:hlinkClick r:id="rId4"/>
-              </a:rPr>
-              <a:t>Lofar 2</a:t>
-            </a:r>
-          </a:p>
-          <a:p>
-            <a:r>
-              <a:rPr sz="800">
-                <a:hlinkClick r:id="rId5"/>
-              </a:rPr>
-              <a:t>Lofar 3</a:t>
-            </a:r>
-          </a:p>
-          <a:p>
-            <a:r>
-              <a:rPr sz="800">
-                <a:hlinkClick r:id="rId6"/>
-              </a:rPr>
-              <a:t>Lofar 4</a:t>
-            </a:r>
-          </a:p>
-        </p:txBody>
-      </p:sp>
-      <p:sp>
-        <p:nvSpPr>
-          <p:cNvPr id="5" name="Rounded Rectangle 4"/>
-          <p:cNvSpPr/>
-          <p:nvPr>
-            <a:hlinkClick r:id="rId7"/>
-          </p:nvPr>
-        </p:nvSpPr>
-        <p:spPr>
-          <a:xfrm>
-            <a:off x="2657246" y="731520"/>
-            <a:ext cx="2200046" cy="365760"/>
-          </a:xfrm>
-          <a:prstGeom prst="roundRect">
-            <a:avLst/>
-          </a:prstGeom>
-          <a:solidFill>
-            <a:srgbClr val="E8EEF7"/>
-          </a:solidFill>
-          <a:ln>
-            <a:solidFill>
-              <a:srgbClr val="1F3A5F"/>
-            </a:solidFill>
-          </a:ln>
-        </p:spPr>
-        <p:style>
-          <a:lnRef idx="1">
-            <a:schemeClr val="accent1"/>
-          </a:lnRef>
-          <a:fillRef idx="3">
-            <a:schemeClr val="accent1"/>
-          </a:fillRef>
-          <a:effectRef idx="2">
-            <a:schemeClr val="accent1"/>
-          </a:effectRef>
-          <a:fontRef idx="minor">
-            <a:schemeClr val="lt1"/>
-          </a:fontRef>
-        </p:style>
-        <p:txBody>
-          <a:bodyPr rtlCol="0" anchor="ctr" lIns="45720" rIns="45720"/>
-          <a:lstStyle/>
-          <a:p>
-            <a:pPr algn="ctr"/>
-            <a:r>
-              <a:rPr sz="900">
-                <a:solidFill>
-                  <a:srgbClr val="1F3A5F"/>
-                </a:solidFill>
-              </a:rPr>
-              <a:t>Gram 17: FR Devastator, Category 3, Cardassia</a:t>
-            </a:r>
-          </a:p>
-        </p:txBody>
-      </p:sp>
-      <p:sp>
-        <p:nvSpPr>
-          <p:cNvPr id="6" name="TextBox 5"/>
-          <p:cNvSpPr txBox="1"/>
-          <p:nvPr/>
-        </p:nvSpPr>
-        <p:spPr>
-          <a:xfrm>
-            <a:off x="2657246" y="1115568"/>
-            <a:ext cx="2200046" cy="1447800"/>
-          </a:xfrm>
-          <a:prstGeom prst="rect">
-            <a:avLst/>
-          </a:prstGeom>
-          <a:noFill/>
-        </p:spPr>
-        <p:txBody>
-          <a:bodyPr wrap="square">
-            <a:spAutoFit/>
-          </a:bodyPr>
-          <a:lstStyle/>
-          <a:p>
-            <a:r>
-              <a:rPr sz="800">
-                <a:hlinkClick r:id="rId8"/>
-              </a:rPr>
-              <a:t>Lofar 1</a:t>
-            </a:r>
-          </a:p>
-        </p:txBody>
-      </p:sp>
-      <p:sp>
-        <p:nvSpPr>
-          <p:cNvPr id="7" name="Rounded Rectangle 6"/>
-          <p:cNvSpPr/>
-          <p:nvPr>
-            <a:hlinkClick r:id="rId9"/>
-          </p:nvPr>
-        </p:nvSpPr>
-        <p:spPr>
-          <a:xfrm>
-            <a:off x="4948732" y="731520"/>
-            <a:ext cx="2200046" cy="365760"/>
-          </a:xfrm>
-          <a:prstGeom prst="roundRect">
-            <a:avLst/>
-          </a:prstGeom>
-          <a:solidFill>
-            <a:srgbClr val="E8EEF7"/>
-          </a:solidFill>
-          <a:ln>
-            <a:solidFill>
-              <a:srgbClr val="1F3A5F"/>
-            </a:solidFill>
-          </a:ln>
-        </p:spPr>
-        <p:style>
-          <a:lnRef idx="1">
-            <a:schemeClr val="accent1"/>
-          </a:lnRef>
-          <a:fillRef idx="3">
-            <a:schemeClr val="accent1"/>
-          </a:fillRef>
-          <a:effectRef idx="2">
-            <a:schemeClr val="accent1"/>
-          </a:effectRef>
-          <a:fontRef idx="minor">
-            <a:schemeClr val="lt1"/>
-          </a:fontRef>
-        </p:style>
-        <p:txBody>
-          <a:bodyPr rtlCol="0" anchor="ctr" lIns="45720" rIns="45720"/>
-          <a:lstStyle/>
-          <a:p>
-            <a:pPr algn="ctr"/>
-            <a:r>
-              <a:rPr sz="900">
-                <a:solidFill>
-                  <a:srgbClr val="1F3A5F"/>
-                </a:solidFill>
-              </a:rPr>
-              <a:t>Gram 18: FR Prometheus, Category 3, Dagobah</a:t>
-            </a:r>
-          </a:p>
-        </p:txBody>
-      </p:sp>
-      <p:sp>
-        <p:nvSpPr>
-          <p:cNvPr id="8" name="TextBox 7"/>
-          <p:cNvSpPr txBox="1"/>
-          <p:nvPr/>
-        </p:nvSpPr>
-        <p:spPr>
-          <a:xfrm>
-            <a:off x="4948732" y="1115568"/>
-            <a:ext cx="2200046" cy="1447800"/>
-          </a:xfrm>
-          <a:prstGeom prst="rect">
-            <a:avLst/>
-          </a:prstGeom>
-          <a:noFill/>
-        </p:spPr>
-        <p:txBody>
-          <a:bodyPr wrap="square">
-            <a:spAutoFit/>
-          </a:bodyPr>
-          <a:lstStyle/>
-          <a:p>
-            <a:r>
-              <a:rPr sz="800">
-                <a:hlinkClick r:id="rId10"/>
-              </a:rPr>
-              <a:t>Lofar 1</a:t>
-            </a:r>
-          </a:p>
-          <a:p>
-            <a:r>
-              <a:rPr sz="800">
-                <a:hlinkClick r:id="rId11"/>
-              </a:rPr>
-              <a:t>Lofar 2</a:t>
-            </a:r>
-          </a:p>
-          <a:p>
-            <a:r>
-              <a:rPr sz="800">
-                <a:hlinkClick r:id="rId12"/>
-              </a:rPr>
-              <a:t>Lofar 3</a:t>
-            </a:r>
-          </a:p>
-          <a:p>
-            <a:r>
-              <a:rPr sz="800">
-                <a:hlinkClick r:id="rId13"/>
-              </a:rPr>
-              <a:t>Lofar 4</a:t>
-            </a:r>
-          </a:p>
-        </p:txBody>
-      </p:sp>
-      <p:sp>
-        <p:nvSpPr>
-          <p:cNvPr id="9" name="Rounded Rectangle 8"/>
-          <p:cNvSpPr/>
-          <p:nvPr>
-            <a:hlinkClick r:id="rId14"/>
-          </p:nvPr>
-        </p:nvSpPr>
-        <p:spPr>
-          <a:xfrm>
-            <a:off x="7240219" y="731520"/>
-            <a:ext cx="2200046" cy="365760"/>
-          </a:xfrm>
-          <a:prstGeom prst="roundRect">
-            <a:avLst/>
-          </a:prstGeom>
-          <a:solidFill>
-            <a:srgbClr val="E8EEF7"/>
-          </a:solidFill>
-          <a:ln>
-            <a:solidFill>
-              <a:srgbClr val="1F3A5F"/>
-            </a:solidFill>
-          </a:ln>
-        </p:spPr>
-        <p:style>
-          <a:lnRef idx="1">
-            <a:schemeClr val="accent1"/>
-          </a:lnRef>
-          <a:fillRef idx="3">
-            <a:schemeClr val="accent1"/>
-          </a:fillRef>
-          <a:effectRef idx="2">
-            <a:schemeClr val="accent1"/>
-          </a:effectRef>
-          <a:fontRef idx="minor">
-            <a:schemeClr val="lt1"/>
-          </a:fontRef>
-        </p:style>
-        <p:txBody>
-          <a:bodyPr rtlCol="0" anchor="ctr" lIns="45720" rIns="45720"/>
-          <a:lstStyle/>
-          <a:p>
-            <a:pPr algn="ctr"/>
-            <a:r>
-              <a:rPr sz="900">
-                <a:solidFill>
-                  <a:srgbClr val="1F3A5F"/>
-                </a:solidFill>
-              </a:rPr>
-              <a:t>Gram 20: FR Nebulon-B, Category 4, Romulus</a:t>
-            </a:r>
-          </a:p>
-        </p:txBody>
-      </p:sp>
-      <p:sp>
-        <p:nvSpPr>
-          <p:cNvPr id="10" name="TextBox 9"/>
-          <p:cNvSpPr txBox="1"/>
-          <p:nvPr/>
-        </p:nvSpPr>
-        <p:spPr>
-          <a:xfrm>
-            <a:off x="7240219" y="1115568"/>
-            <a:ext cx="2200046" cy="1447800"/>
-          </a:xfrm>
-          <a:prstGeom prst="rect">
-            <a:avLst/>
-          </a:prstGeom>
-          <a:noFill/>
-        </p:spPr>
-        <p:txBody>
-          <a:bodyPr wrap="square">
-            <a:spAutoFit/>
-          </a:bodyPr>
-          <a:lstStyle/>
-          <a:p>
-            <a:r>
-              <a:rPr sz="800">
-                <a:hlinkClick r:id="rId15"/>
-              </a:rPr>
-              <a:t>Lofar 1</a:t>
-            </a:r>
-          </a:p>
-          <a:p>
-            <a:r>
-              <a:rPr sz="800">
-                <a:hlinkClick r:id="rId16"/>
-              </a:rPr>
-              <a:t>Lofar 2</a:t>
-            </a:r>
-          </a:p>
-        </p:txBody>
-      </p:sp>
-      <p:sp>
-        <p:nvSpPr>
-          <p:cNvPr id="11" name="Rounded Rectangle 10"/>
-          <p:cNvSpPr/>
-          <p:nvPr>
-            <a:hlinkClick r:id="rId17"/>
-          </p:nvPr>
-        </p:nvSpPr>
-        <p:spPr>
-          <a:xfrm>
-            <a:off x="9531705" y="731520"/>
-            <a:ext cx="2200046" cy="365760"/>
-          </a:xfrm>
-          <a:prstGeom prst="roundRect">
-            <a:avLst/>
-          </a:prstGeom>
-          <a:solidFill>
-            <a:srgbClr val="E8EEF7"/>
-          </a:solidFill>
-          <a:ln>
-            <a:solidFill>
-              <a:srgbClr val="1F3A5F"/>
-            </a:solidFill>
-          </a:ln>
-        </p:spPr>
-        <p:style>
-          <a:lnRef idx="1">
-            <a:schemeClr val="accent1"/>
-          </a:lnRef>
-          <a:fillRef idx="3">
-            <a:schemeClr val="accent1"/>
-          </a:fillRef>
-          <a:effectRef idx="2">
-            <a:schemeClr val="accent1"/>
-          </a:effectRef>
-          <a:fontRef idx="minor">
-            <a:schemeClr val="lt1"/>
-          </a:fontRef>
-        </p:style>
-        <p:txBody>
-          <a:bodyPr rtlCol="0" anchor="ctr" lIns="45720" rIns="45720"/>
-          <a:lstStyle/>
-          <a:p>
-            <a:pPr algn="ctr"/>
-            <a:r>
-              <a:rPr sz="900">
-                <a:solidFill>
-                  <a:srgbClr val="1F3A5F"/>
-                </a:solidFill>
-              </a:rPr>
-              <a:t>Gram 22: Nebulon-B contact bearing 283, codename Endor</a:t>
-            </a:r>
-          </a:p>
-        </p:txBody>
-      </p:sp>
-      <p:sp>
-        <p:nvSpPr>
-          <p:cNvPr id="12" name="TextBox 11"/>
-          <p:cNvSpPr txBox="1"/>
-          <p:nvPr/>
-        </p:nvSpPr>
-        <p:spPr>
-          <a:xfrm>
-            <a:off x="9531705" y="1115568"/>
-            <a:ext cx="2200046" cy="1447800"/>
-          </a:xfrm>
-          <a:prstGeom prst="rect">
-            <a:avLst/>
-          </a:prstGeom>
-          <a:noFill/>
-        </p:spPr>
-        <p:txBody>
-          <a:bodyPr wrap="square">
-            <a:spAutoFit/>
-          </a:bodyPr>
-          <a:lstStyle/>
-          <a:p>
-            <a:r>
-              <a:rPr sz="800">
-                <a:hlinkClick r:id="rId18"/>
-              </a:rPr>
-              <a:t>Lofar 1</a:t>
-            </a:r>
-          </a:p>
-          <a:p>
-            <a:r>
-              <a:rPr sz="800">
-                <a:hlinkClick r:id="rId19"/>
-              </a:rPr>
-              <a:t>Lofar 2</a:t>
-            </a:r>
-          </a:p>
-          <a:p>
-            <a:r>
-              <a:rPr sz="800">
-                <a:hlinkClick r:id="rId20"/>
-              </a:rPr>
-              <a:t>Lofar 3</a:t>
-            </a:r>
-          </a:p>
-        </p:txBody>
-      </p:sp>
-      <p:sp>
-        <p:nvSpPr>
-          <p:cNvPr id="13" name="Rounded Rectangle 12"/>
-          <p:cNvSpPr/>
-          <p:nvPr>
-            <a:hlinkClick r:id="rId21"/>
-          </p:nvPr>
-        </p:nvSpPr>
-        <p:spPr>
-          <a:xfrm>
-            <a:off x="365760" y="2682240"/>
-            <a:ext cx="2200046" cy="365760"/>
-          </a:xfrm>
-          <a:prstGeom prst="roundRect">
-            <a:avLst/>
-          </a:prstGeom>
-          <a:solidFill>
-            <a:srgbClr val="E8EEF7"/>
-          </a:solidFill>
-          <a:ln>
-            <a:solidFill>
-              <a:srgbClr val="1F3A5F"/>
-            </a:solidFill>
-          </a:ln>
-        </p:spPr>
-        <p:style>
-          <a:lnRef idx="1">
-            <a:schemeClr val="accent1"/>
-          </a:lnRef>
-          <a:fillRef idx="3">
-            <a:schemeClr val="accent1"/>
-          </a:fillRef>
-          <a:effectRef idx="2">
-            <a:schemeClr val="accent1"/>
-          </a:effectRef>
-          <a:fontRef idx="minor">
-            <a:schemeClr val="lt1"/>
-          </a:fontRef>
-        </p:style>
-        <p:txBody>
-          <a:bodyPr rtlCol="0" anchor="ctr" lIns="45720" rIns="45720"/>
-          <a:lstStyle/>
-          <a:p>
-            <a:pPr algn="ctr"/>
-            <a:r>
-              <a:rPr sz="900">
-                <a:solidFill>
-                  <a:srgbClr val="1F3A5F"/>
-                </a:solidFill>
-              </a:rPr>
-              <a:t>Gram 23: FR Equinox, Category 4, Hoth</a:t>
-            </a:r>
-          </a:p>
-        </p:txBody>
-      </p:sp>
-      <p:sp>
-        <p:nvSpPr>
-          <p:cNvPr id="14" name="TextBox 13"/>
-          <p:cNvSpPr txBox="1"/>
-          <p:nvPr/>
-        </p:nvSpPr>
-        <p:spPr>
-          <a:xfrm>
-            <a:off x="365760" y="3066288"/>
-            <a:ext cx="2200046" cy="1447800"/>
-          </a:xfrm>
-          <a:prstGeom prst="rect">
-            <a:avLst/>
-          </a:prstGeom>
-          <a:noFill/>
-        </p:spPr>
-        <p:txBody>
-          <a:bodyPr wrap="square">
-            <a:spAutoFit/>
-          </a:bodyPr>
-          <a:lstStyle/>
-          <a:p>
-            <a:r>
-              <a:rPr sz="800">
-                <a:hlinkClick r:id="rId22"/>
-              </a:rPr>
-              <a:t>Lofar 1</a:t>
-            </a:r>
-          </a:p>
-        </p:txBody>
-      </p:sp>
-      <p:sp>
-        <p:nvSpPr>
-          <p:cNvPr id="15" name="Rounded Rectangle 14"/>
-          <p:cNvSpPr/>
-          <p:nvPr>
-            <a:hlinkClick r:id="rId23"/>
-          </p:nvPr>
-        </p:nvSpPr>
-        <p:spPr>
-          <a:xfrm>
-            <a:off x="2657246" y="2682240"/>
-            <a:ext cx="2200046" cy="365760"/>
-          </a:xfrm>
-          <a:prstGeom prst="roundRect">
-            <a:avLst/>
-          </a:prstGeom>
-          <a:solidFill>
-            <a:srgbClr val="E8EEF7"/>
-          </a:solidFill>
-          <a:ln>
-            <a:solidFill>
-              <a:srgbClr val="1F3A5F"/>
-            </a:solidFill>
-          </a:ln>
-        </p:spPr>
-        <p:style>
-          <a:lnRef idx="1">
-            <a:schemeClr val="accent1"/>
-          </a:lnRef>
-          <a:fillRef idx="3">
-            <a:schemeClr val="accent1"/>
-          </a:fillRef>
-          <a:effectRef idx="2">
-            <a:schemeClr val="accent1"/>
-          </a:effectRef>
-          <a:fontRef idx="minor">
-            <a:schemeClr val="lt1"/>
-          </a:fontRef>
-        </p:style>
-        <p:txBody>
-          <a:bodyPr rtlCol="0" anchor="ctr" lIns="45720" rIns="45720"/>
-          <a:lstStyle/>
-          <a:p>
-            <a:pPr algn="ctr"/>
-            <a:r>
-              <a:rPr sz="900">
-                <a:solidFill>
-                  <a:srgbClr val="1F3A5F"/>
-                </a:solidFill>
-              </a:rPr>
-              <a:t>Gram 24: FR Equinox, Category 1, Tantive</a:t>
-            </a:r>
-          </a:p>
-        </p:txBody>
-      </p:sp>
-      <p:sp>
-        <p:nvSpPr>
-          <p:cNvPr id="16" name="TextBox 15"/>
-          <p:cNvSpPr txBox="1"/>
-          <p:nvPr/>
-        </p:nvSpPr>
-        <p:spPr>
-          <a:xfrm>
-            <a:off x="2657246" y="3066288"/>
-            <a:ext cx="2200046" cy="1447800"/>
-          </a:xfrm>
-          <a:prstGeom prst="rect">
-            <a:avLst/>
-          </a:prstGeom>
-          <a:noFill/>
-        </p:spPr>
-        <p:txBody>
-          <a:bodyPr wrap="square">
-            <a:spAutoFit/>
-          </a:bodyPr>
-          <a:lstStyle/>
-          <a:p>
-            <a:r>
-              <a:rPr sz="800">
-                <a:hlinkClick r:id="rId24"/>
-              </a:rPr>
-              <a:t>Lofar 1</a:t>
-            </a:r>
-          </a:p>
-          <a:p>
-            <a:r>
-              <a:rPr sz="800">
-                <a:hlinkClick r:id="rId25"/>
-              </a:rPr>
-              <a:t>Lofar 2</a:t>
-            </a:r>
-          </a:p>
-          <a:p>
-            <a:r>
-              <a:rPr sz="800">
-                <a:hlinkClick r:id="rId26"/>
-              </a:rPr>
-              <a:t>Lofar 3</a:t>
-            </a:r>
-          </a:p>
-          <a:p>
-            <a:r>
-              <a:rPr sz="800">
-                <a:hlinkClick r:id="rId27"/>
-              </a:rPr>
-              <a:t>Lofar 4</a:t>
-            </a:r>
-          </a:p>
-        </p:txBody>
-      </p:sp>
-      <p:sp>
-        <p:nvSpPr>
-          <p:cNvPr id="17" name="Rounded Rectangle 16"/>
-          <p:cNvSpPr/>
-          <p:nvPr>
-            <a:hlinkClick r:id="rId28"/>
-          </p:nvPr>
-        </p:nvSpPr>
-        <p:spPr>
-          <a:xfrm>
-            <a:off x="4948732" y="2682240"/>
-            <a:ext cx="2200046" cy="365760"/>
-          </a:xfrm>
-          <a:prstGeom prst="roundRect">
-            <a:avLst/>
-          </a:prstGeom>
-          <a:solidFill>
-            <a:srgbClr val="E8EEF7"/>
-          </a:solidFill>
-          <a:ln>
-            <a:solidFill>
-              <a:srgbClr val="1F3A5F"/>
-            </a:solidFill>
-          </a:ln>
-        </p:spPr>
-        <p:style>
-          <a:lnRef idx="1">
-            <a:schemeClr val="accent1"/>
-          </a:lnRef>
-          <a:fillRef idx="3">
-            <a:schemeClr val="accent1"/>
-          </a:fillRef>
-          <a:effectRef idx="2">
-            <a:schemeClr val="accent1"/>
-          </a:effectRef>
-          <a:fontRef idx="minor">
-            <a:schemeClr val="lt1"/>
-          </a:fontRef>
-        </p:style>
-        <p:txBody>
-          <a:bodyPr rtlCol="0" anchor="ctr" lIns="45720" rIns="45720"/>
-          <a:lstStyle/>
-          <a:p>
-            <a:pPr algn="ctr"/>
-            <a:r>
-              <a:rPr sz="900">
-                <a:solidFill>
-                  <a:srgbClr val="1F3A5F"/>
-                </a:solidFill>
-              </a:rPr>
-              <a:t>Gram 25: FR Galaxy-class, Category 4, Betazed</a:t>
-            </a:r>
-          </a:p>
-        </p:txBody>
-      </p:sp>
-      <p:sp>
-        <p:nvSpPr>
-          <p:cNvPr id="18" name="TextBox 17"/>
-          <p:cNvSpPr txBox="1"/>
-          <p:nvPr/>
-        </p:nvSpPr>
-        <p:spPr>
-          <a:xfrm>
-            <a:off x="4948732" y="3066288"/>
-            <a:ext cx="2200046" cy="1447800"/>
-          </a:xfrm>
-          <a:prstGeom prst="rect">
-            <a:avLst/>
-          </a:prstGeom>
-          <a:noFill/>
-        </p:spPr>
-        <p:txBody>
-          <a:bodyPr wrap="square">
-            <a:spAutoFit/>
-          </a:bodyPr>
-          <a:lstStyle/>
-          <a:p>
-            <a:r>
-              <a:rPr sz="800">
-                <a:hlinkClick r:id="rId29"/>
-              </a:rPr>
-              <a:t>Lofar 1</a:t>
-            </a:r>
-          </a:p>
-        </p:txBody>
-      </p:sp>
-      <p:sp>
-        <p:nvSpPr>
-          <p:cNvPr id="19" name="Rounded Rectangle 18"/>
-          <p:cNvSpPr/>
-          <p:nvPr>
-            <a:hlinkClick r:id="rId30"/>
-          </p:nvPr>
-        </p:nvSpPr>
-        <p:spPr>
-          <a:xfrm>
-            <a:off x="7240219" y="2682240"/>
-            <a:ext cx="2200046" cy="365760"/>
-          </a:xfrm>
-          <a:prstGeom prst="roundRect">
-            <a:avLst/>
-          </a:prstGeom>
-          <a:solidFill>
-            <a:srgbClr val="E8EEF7"/>
-          </a:solidFill>
-          <a:ln>
-            <a:solidFill>
-              <a:srgbClr val="1F3A5F"/>
-            </a:solidFill>
-          </a:ln>
-        </p:spPr>
-        <p:style>
-          <a:lnRef idx="1">
-            <a:schemeClr val="accent1"/>
-          </a:lnRef>
-          <a:fillRef idx="3">
-            <a:schemeClr val="accent1"/>
-          </a:fillRef>
-          <a:effectRef idx="2">
-            <a:schemeClr val="accent1"/>
-          </a:effectRef>
-          <a:fontRef idx="minor">
-            <a:schemeClr val="lt1"/>
-          </a:fontRef>
-        </p:style>
-        <p:txBody>
-          <a:bodyPr rtlCol="0" anchor="ctr" lIns="45720" rIns="45720"/>
-          <a:lstStyle/>
-          <a:p>
-            <a:pPr algn="ctr"/>
-            <a:r>
-              <a:rPr sz="900">
-                <a:solidFill>
-                  <a:srgbClr val="1F3A5F"/>
-                </a:solidFill>
-              </a:rPr>
-              <a:t>Gram 26: FR Discovery, Category 4, Tantive</a:t>
-            </a:r>
-          </a:p>
-        </p:txBody>
-      </p:sp>
-      <p:sp>
-        <p:nvSpPr>
-          <p:cNvPr id="20" name="TextBox 19"/>
-          <p:cNvSpPr txBox="1"/>
-          <p:nvPr/>
-        </p:nvSpPr>
-        <p:spPr>
-          <a:xfrm>
-            <a:off x="7240219" y="3066288"/>
-            <a:ext cx="2200046" cy="1447800"/>
-          </a:xfrm>
-          <a:prstGeom prst="rect">
-            <a:avLst/>
-          </a:prstGeom>
-          <a:noFill/>
-        </p:spPr>
-        <p:txBody>
-          <a:bodyPr wrap="square">
-            <a:spAutoFit/>
-          </a:bodyPr>
-          <a:lstStyle/>
-          <a:p>
-            <a:r>
-              <a:rPr sz="800">
-                <a:hlinkClick r:id="rId31"/>
-              </a:rPr>
-              <a:t>Lofar 1</a:t>
-            </a:r>
-          </a:p>
-          <a:p>
-            <a:r>
-              <a:rPr sz="800">
-                <a:hlinkClick r:id="rId32"/>
-              </a:rPr>
-              <a:t>Lofar 2</a:t>
-            </a:r>
-          </a:p>
-          <a:p>
-            <a:r>
-              <a:rPr sz="800">
-                <a:hlinkClick r:id="rId33"/>
-              </a:rPr>
-              <a:t>Lofar 3</a:t>
-            </a:r>
-          </a:p>
-          <a:p>
-            <a:r>
-              <a:rPr sz="800">
-                <a:hlinkClick r:id="rId34"/>
-              </a:rPr>
-              <a:t>Lofar 4</a:t>
-            </a:r>
-          </a:p>
-        </p:txBody>
-      </p:sp>
-      <p:sp>
-        <p:nvSpPr>
-          <p:cNvPr id="21" name="Rounded Rectangle 20"/>
-          <p:cNvSpPr/>
-          <p:nvPr>
-            <a:hlinkClick r:id="rId35"/>
-          </p:nvPr>
-        </p:nvSpPr>
-        <p:spPr>
-          <a:xfrm>
-            <a:off x="9531705" y="2682240"/>
-            <a:ext cx="2200046" cy="365760"/>
-          </a:xfrm>
-          <a:prstGeom prst="roundRect">
-            <a:avLst/>
-          </a:prstGeom>
-          <a:solidFill>
-            <a:srgbClr val="E8EEF7"/>
-          </a:solidFill>
-          <a:ln>
-            <a:solidFill>
-              <a:srgbClr val="1F3A5F"/>
-            </a:solidFill>
-          </a:ln>
-        </p:spPr>
-        <p:style>
-          <a:lnRef idx="1">
-            <a:schemeClr val="accent1"/>
-          </a:lnRef>
-          <a:fillRef idx="3">
-            <a:schemeClr val="accent1"/>
-          </a:fillRef>
-          <a:effectRef idx="2">
-            <a:schemeClr val="accent1"/>
-          </a:effectRef>
-          <a:fontRef idx="minor">
-            <a:schemeClr val="lt1"/>
-          </a:fontRef>
-        </p:style>
-        <p:txBody>
-          <a:bodyPr rtlCol="0" anchor="ctr" lIns="45720" rIns="45720"/>
-          <a:lstStyle/>
-          <a:p>
-            <a:pPr algn="ctr"/>
-            <a:r>
-              <a:rPr sz="900">
-                <a:solidFill>
-                  <a:srgbClr val="1F3A5F"/>
-                </a:solidFill>
-              </a:rPr>
-              <a:t>Gram 28: FR Voyager, Category 4, Romulus</a:t>
-            </a:r>
-          </a:p>
-        </p:txBody>
-      </p:sp>
-      <p:sp>
-        <p:nvSpPr>
-          <p:cNvPr id="22" name="TextBox 21"/>
-          <p:cNvSpPr txBox="1"/>
-          <p:nvPr/>
-        </p:nvSpPr>
-        <p:spPr>
-          <a:xfrm>
-            <a:off x="9531705" y="3066288"/>
-            <a:ext cx="2200046" cy="1447800"/>
-          </a:xfrm>
-          <a:prstGeom prst="rect">
-            <a:avLst/>
-          </a:prstGeom>
-          <a:noFill/>
-        </p:spPr>
-        <p:txBody>
-          <a:bodyPr wrap="square">
-            <a:spAutoFit/>
-          </a:bodyPr>
-          <a:lstStyle/>
-          <a:p>
-            <a:r>
-              <a:rPr sz="800">
-                <a:hlinkClick r:id="rId36"/>
-              </a:rPr>
-              <a:t>Lofar 1</a:t>
-            </a:r>
-          </a:p>
-          <a:p>
-            <a:r>
-              <a:rPr sz="800">
-                <a:hlinkClick r:id="rId37"/>
-              </a:rPr>
-              <a:t>Lofar 2</a:t>
-            </a:r>
-          </a:p>
-        </p:txBody>
-      </p:sp>
-      <p:sp>
-        <p:nvSpPr>
-          <p:cNvPr id="23" name="Rounded Rectangle 22"/>
-          <p:cNvSpPr/>
-          <p:nvPr>
-            <a:hlinkClick r:id="rId38"/>
-          </p:nvPr>
-        </p:nvSpPr>
-        <p:spPr>
-          <a:xfrm>
-            <a:off x="365760" y="4632960"/>
-            <a:ext cx="2200046" cy="365760"/>
-          </a:xfrm>
-          <a:prstGeom prst="roundRect">
-            <a:avLst/>
-          </a:prstGeom>
-          <a:solidFill>
-            <a:srgbClr val="E8EEF7"/>
-          </a:solidFill>
-          <a:ln>
-            <a:solidFill>
-              <a:srgbClr val="1F3A5F"/>
-            </a:solidFill>
-          </a:ln>
-        </p:spPr>
-        <p:style>
-          <a:lnRef idx="1">
-            <a:schemeClr val="accent1"/>
-          </a:lnRef>
-          <a:fillRef idx="3">
-            <a:schemeClr val="accent1"/>
-          </a:fillRef>
-          <a:effectRef idx="2">
-            <a:schemeClr val="accent1"/>
-          </a:effectRef>
-          <a:fontRef idx="minor">
-            <a:schemeClr val="lt1"/>
-          </a:fontRef>
-        </p:style>
-        <p:txBody>
-          <a:bodyPr rtlCol="0" anchor="ctr" lIns="45720" rIns="45720"/>
-          <a:lstStyle/>
-          <a:p>
-            <a:pPr algn="ctr"/>
-            <a:r>
-              <a:rPr sz="900">
-                <a:solidFill>
-                  <a:srgbClr val="1F3A5F"/>
-                </a:solidFill>
-              </a:rPr>
-              <a:t>Gram 30: FR Akira-class, Category 2, Kobol</a:t>
-            </a:r>
-          </a:p>
-        </p:txBody>
-      </p:sp>
-      <p:sp>
-        <p:nvSpPr>
-          <p:cNvPr id="24" name="TextBox 23"/>
-          <p:cNvSpPr txBox="1"/>
-          <p:nvPr/>
-        </p:nvSpPr>
-        <p:spPr>
-          <a:xfrm>
-            <a:off x="365760" y="5017008"/>
-            <a:ext cx="2200046" cy="1447800"/>
-          </a:xfrm>
-          <a:prstGeom prst="rect">
-            <a:avLst/>
-          </a:prstGeom>
-          <a:noFill/>
-        </p:spPr>
-        <p:txBody>
-          <a:bodyPr wrap="square">
-            <a:spAutoFit/>
-          </a:bodyPr>
-          <a:lstStyle/>
-          <a:p>
-            <a:r>
-              <a:rPr sz="800">
-                <a:hlinkClick r:id="rId39"/>
-              </a:rPr>
-              <a:t>Lofar 1</a:t>
-            </a:r>
-          </a:p>
-          <a:p>
-            <a:r>
-              <a:rPr sz="800">
-                <a:hlinkClick r:id="rId40"/>
-              </a:rPr>
-              <a:t>Lofar 2</a:t>
-            </a:r>
-          </a:p>
-          <a:p>
-            <a:r>
-              <a:rPr sz="800">
-                <a:hlinkClick r:id="rId41"/>
-              </a:rPr>
-              <a:t>Lofar 3</a:t>
-            </a:r>
-          </a:p>
-        </p:txBody>
-      </p:sp>
-      <p:sp>
-        <p:nvSpPr>
-          <p:cNvPr id="25" name="Rounded Rectangle 24"/>
-          <p:cNvSpPr/>
-          <p:nvPr>
-            <a:hlinkClick r:id="rId42"/>
-          </p:nvPr>
-        </p:nvSpPr>
-        <p:spPr>
-          <a:xfrm>
-            <a:off x="2657246" y="4632960"/>
-            <a:ext cx="2200046" cy="365760"/>
-          </a:xfrm>
-          <a:prstGeom prst="roundRect">
-            <a:avLst/>
-          </a:prstGeom>
-          <a:solidFill>
-            <a:srgbClr val="E8EEF7"/>
-          </a:solidFill>
-          <a:ln>
-            <a:solidFill>
-              <a:srgbClr val="1F3A5F"/>
-            </a:solidFill>
-          </a:ln>
-        </p:spPr>
-        <p:style>
-          <a:lnRef idx="1">
-            <a:schemeClr val="accent1"/>
-          </a:lnRef>
-          <a:fillRef idx="3">
-            <a:schemeClr val="accent1"/>
-          </a:fillRef>
-          <a:effectRef idx="2">
-            <a:schemeClr val="accent1"/>
-          </a:effectRef>
-          <a:fontRef idx="minor">
-            <a:schemeClr val="lt1"/>
-          </a:fontRef>
-        </p:style>
-        <p:txBody>
-          <a:bodyPr rtlCol="0" anchor="ctr" lIns="45720" rIns="45720"/>
-          <a:lstStyle/>
-          <a:p>
-            <a:pPr algn="ctr"/>
-            <a:r>
-              <a:rPr sz="900">
-                <a:solidFill>
-                  <a:srgbClr val="1F3A5F"/>
-                </a:solidFill>
-              </a:rPr>
-              <a:t>Gram 31: X-wing contact bearing 051, codename Mustafar</a:t>
-            </a:r>
-          </a:p>
-        </p:txBody>
-      </p:sp>
-      <p:sp>
-        <p:nvSpPr>
-          <p:cNvPr id="26" name="TextBox 25"/>
-          <p:cNvSpPr txBox="1"/>
-          <p:nvPr/>
-        </p:nvSpPr>
-        <p:spPr>
-          <a:xfrm>
-            <a:off x="2657246" y="5017008"/>
-            <a:ext cx="2200046" cy="1447800"/>
-          </a:xfrm>
-          <a:prstGeom prst="rect">
-            <a:avLst/>
-          </a:prstGeom>
-          <a:noFill/>
-        </p:spPr>
-        <p:txBody>
-          <a:bodyPr wrap="square">
-            <a:spAutoFit/>
-          </a:bodyPr>
-          <a:lstStyle/>
-          <a:p>
-            <a:r>
-              <a:rPr sz="800">
-                <a:hlinkClick r:id="rId43"/>
-              </a:rPr>
-              <a:t>Lofar 1</a:t>
-            </a:r>
-          </a:p>
-          <a:p>
-            <a:r>
-              <a:rPr sz="800">
-                <a:hlinkClick r:id="rId44"/>
-              </a:rPr>
-              <a:t>Lofar 2</a:t>
-            </a:r>
-          </a:p>
-        </p:txBody>
-      </p:sp>
-      <p:sp>
-        <p:nvSpPr>
-          <p:cNvPr id="27" name="Rounded Rectangle 26"/>
-          <p:cNvSpPr/>
-          <p:nvPr>
-            <a:hlinkClick r:id="rId45"/>
-          </p:nvPr>
-        </p:nvSpPr>
-        <p:spPr>
-          <a:xfrm>
-            <a:off x="4948732" y="4632960"/>
-            <a:ext cx="2200046" cy="365760"/>
-          </a:xfrm>
-          <a:prstGeom prst="roundRect">
-            <a:avLst/>
-          </a:prstGeom>
-          <a:solidFill>
-            <a:srgbClr val="E8EEF7"/>
-          </a:solidFill>
-          <a:ln>
-            <a:solidFill>
-              <a:srgbClr val="1F3A5F"/>
-            </a:solidFill>
-          </a:ln>
-        </p:spPr>
-        <p:style>
-          <a:lnRef idx="1">
-            <a:schemeClr val="accent1"/>
-          </a:lnRef>
-          <a:fillRef idx="3">
-            <a:schemeClr val="accent1"/>
-          </a:fillRef>
-          <a:effectRef idx="2">
-            <a:schemeClr val="accent1"/>
-          </a:effectRef>
-          <a:fontRef idx="minor">
-            <a:schemeClr val="lt1"/>
-          </a:fontRef>
-        </p:style>
-        <p:txBody>
-          <a:bodyPr rtlCol="0" anchor="ctr" lIns="45720" rIns="45720"/>
-          <a:lstStyle/>
-          <a:p>
-            <a:pPr algn="ctr"/>
-            <a:r>
-              <a:rPr sz="900">
-                <a:solidFill>
-                  <a:srgbClr val="1F3A5F"/>
-                </a:solidFill>
-              </a:rPr>
-              <a:t>Gram 32: FR Sovereign-class, Category 4, Naboo</a:t>
-            </a:r>
-          </a:p>
-        </p:txBody>
-      </p:sp>
-      <p:sp>
-        <p:nvSpPr>
-          <p:cNvPr id="28" name="TextBox 27"/>
-          <p:cNvSpPr txBox="1"/>
-          <p:nvPr/>
-        </p:nvSpPr>
-        <p:spPr>
-          <a:xfrm>
-            <a:off x="4948732" y="5017008"/>
-            <a:ext cx="2200046" cy="1447800"/>
-          </a:xfrm>
-          <a:prstGeom prst="rect">
-            <a:avLst/>
-          </a:prstGeom>
-          <a:noFill/>
-        </p:spPr>
-        <p:txBody>
-          <a:bodyPr wrap="square">
-            <a:spAutoFit/>
-          </a:bodyPr>
-          <a:lstStyle/>
-          <a:p>
-            <a:r>
-              <a:rPr sz="800">
-                <a:hlinkClick r:id="rId46"/>
-              </a:rPr>
-              <a:t>Lofar 1</a:t>
-            </a:r>
-          </a:p>
-          <a:p>
-            <a:r>
-              <a:rPr sz="800">
-                <a:hlinkClick r:id="rId47"/>
-              </a:rPr>
-              <a:t>Lofar 2</a:t>
-            </a:r>
-          </a:p>
-          <a:p>
-            <a:r>
-              <a:rPr sz="800">
-                <a:hlinkClick r:id="rId48"/>
-              </a:rPr>
-              <a:t>Lofar 3</a:t>
-            </a:r>
-          </a:p>
-          <a:p>
-            <a:r>
-              <a:rPr sz="800">
-                <a:hlinkClick r:id="rId49"/>
-              </a:rPr>
-              <a:t>Lofar 4</a:t>
-            </a:r>
-          </a:p>
-        </p:txBody>
-      </p:sp>
-      <p:sp>
-        <p:nvSpPr>
-          <p:cNvPr id="29" name="Rounded Rectangle 28"/>
-          <p:cNvSpPr/>
-          <p:nvPr>
-            <a:hlinkClick r:id="rId50"/>
-          </p:nvPr>
-        </p:nvSpPr>
-        <p:spPr>
-          <a:xfrm>
-            <a:off x="7240219" y="4632960"/>
-            <a:ext cx="2200046" cy="365760"/>
-          </a:xfrm>
-          <a:prstGeom prst="roundRect">
-            <a:avLst/>
-          </a:prstGeom>
-          <a:solidFill>
-            <a:srgbClr val="E8EEF7"/>
-          </a:solidFill>
-          <a:ln>
-            <a:solidFill>
-              <a:srgbClr val="1F3A5F"/>
-            </a:solidFill>
-          </a:ln>
-        </p:spPr>
-        <p:style>
-          <a:lnRef idx="1">
-            <a:schemeClr val="accent1"/>
-          </a:lnRef>
-          <a:fillRef idx="3">
-            <a:schemeClr val="accent1"/>
-          </a:fillRef>
-          <a:effectRef idx="2">
-            <a:schemeClr val="accent1"/>
-          </a:effectRef>
-          <a:fontRef idx="minor">
-            <a:schemeClr val="lt1"/>
-          </a:fontRef>
-        </p:style>
-        <p:txBody>
-          <a:bodyPr rtlCol="0" anchor="ctr" lIns="45720" rIns="45720"/>
-          <a:lstStyle/>
-          <a:p>
-            <a:pPr algn="ctr"/>
-            <a:r>
-              <a:rPr sz="900">
-                <a:solidFill>
-                  <a:srgbClr val="1F3A5F"/>
-                </a:solidFill>
-              </a:rPr>
-              <a:t>Gram 34: FR Equinox, Category 2, Cardassia</a:t>
-            </a:r>
-          </a:p>
-        </p:txBody>
-      </p:sp>
-      <p:sp>
-        <p:nvSpPr>
-          <p:cNvPr id="30" name="TextBox 29"/>
-          <p:cNvSpPr txBox="1"/>
-          <p:nvPr/>
-        </p:nvSpPr>
-        <p:spPr>
-          <a:xfrm>
-            <a:off x="7240219" y="5017008"/>
-            <a:ext cx="2200046" cy="1447800"/>
-          </a:xfrm>
-          <a:prstGeom prst="rect">
-            <a:avLst/>
-          </a:prstGeom>
-          <a:noFill/>
-        </p:spPr>
-        <p:txBody>
-          <a:bodyPr wrap="square">
-            <a:spAutoFit/>
-          </a:bodyPr>
-          <a:lstStyle/>
-          <a:p>
-            <a:r>
-              <a:rPr sz="800">
-                <a:hlinkClick r:id="rId51"/>
-              </a:rPr>
-              <a:t>Lofar 1</a:t>
-            </a:r>
-          </a:p>
-          <a:p>
-            <a:r>
-              <a:rPr sz="800">
-                <a:hlinkClick r:id="rId52"/>
-              </a:rPr>
-              <a:t>Lofar 2</a:t>
-            </a:r>
-          </a:p>
-        </p:txBody>
-      </p:sp>
-      <p:sp>
-        <p:nvSpPr>
-          <p:cNvPr id="31" name="Rounded Rectangle 30"/>
-          <p:cNvSpPr/>
-          <p:nvPr>
-            <a:hlinkClick r:id="rId53"/>
-          </p:nvPr>
-        </p:nvSpPr>
-        <p:spPr>
-          <a:xfrm>
-            <a:off x="9531705" y="4632960"/>
-            <a:ext cx="2200046" cy="365760"/>
-          </a:xfrm>
-          <a:prstGeom prst="roundRect">
-            <a:avLst/>
-          </a:prstGeom>
-          <a:solidFill>
-            <a:srgbClr val="E8EEF7"/>
-          </a:solidFill>
-          <a:ln>
-            <a:solidFill>
-              <a:srgbClr val="1F3A5F"/>
-            </a:solidFill>
-          </a:ln>
-        </p:spPr>
-        <p:style>
-          <a:lnRef idx="1">
-            <a:schemeClr val="accent1"/>
-          </a:lnRef>
-          <a:fillRef idx="3">
-            <a:schemeClr val="accent1"/>
-          </a:fillRef>
-          <a:effectRef idx="2">
-            <a:schemeClr val="accent1"/>
-          </a:effectRef>
-          <a:fontRef idx="minor">
-            <a:schemeClr val="lt1"/>
-          </a:fontRef>
-        </p:style>
-        <p:txBody>
-          <a:bodyPr rtlCol="0" anchor="ctr" lIns="45720" rIns="45720"/>
-          <a:lstStyle/>
-          <a:p>
-            <a:pPr algn="ctr"/>
-            <a:r>
-              <a:rPr sz="900">
-                <a:solidFill>
-                  <a:srgbClr val="1F3A5F"/>
-                </a:solidFill>
-              </a:rPr>
-              <a:t>Gram 36: FR Cerritos, Category 3, Bajor</a:t>
-            </a:r>
-          </a:p>
-        </p:txBody>
-      </p:sp>
-      <p:sp>
-        <p:nvSpPr>
-          <p:cNvPr id="32" name="TextBox 31"/>
-          <p:cNvSpPr txBox="1"/>
-          <p:nvPr/>
-        </p:nvSpPr>
-        <p:spPr>
-          <a:xfrm>
-            <a:off x="9531705" y="5017008"/>
-            <a:ext cx="2200046" cy="1447800"/>
-          </a:xfrm>
-          <a:prstGeom prst="rect">
-            <a:avLst/>
-          </a:prstGeom>
-          <a:noFill/>
-        </p:spPr>
-        <p:txBody>
-          <a:bodyPr wrap="square">
-            <a:spAutoFit/>
-          </a:bodyPr>
-          <a:lstStyle/>
-          <a:p>
-            <a:r>
-              <a:rPr sz="800">
-                <a:hlinkClick r:id="rId54"/>
-              </a:rPr>
-              <a:t>Lofar 1</a:t>
-            </a:r>
-          </a:p>
-        </p:txBody>
-      </p:sp>
-    </p:spTree>
-  </p:cSld>
-  <p:clrMapOvr>
-    <a:masterClrMapping/>
-  </p:clrMapOvr>
-</p:sld>
-</file>
-
-<file path=ppt/slides/slide4.xml><?xml version="1.0" encoding="utf-8"?>
-<p:sld xmlns:a="http://schemas.openxmlformats.org/drawingml/2006/main" xmlns:p="http://schemas.openxmlformats.org/presentationml/2006/main" xmlns:r="http://schemas.openxmlformats.org/officeDocument/2006/relationships">
-  <p:cSld>
-    <p:spTree>
-      <p:nvGrpSpPr>
-        <p:cNvPr id="1" name=""/>
-        <p:cNvGrpSpPr/>
-        <p:nvPr/>
-      </p:nvGrpSpPr>
-      <p:grpSpPr/>
-      <p:sp>
-        <p:nvSpPr>
-          <p:cNvPr id="2" name="TextBox 1"/>
-          <p:cNvSpPr txBox="1"/>
-          <p:nvPr/>
-        </p:nvSpPr>
-        <p:spPr>
-          <a:xfrm>
-            <a:off x="914400" y="2377440"/>
-            <a:ext cx="10360152" cy="1280160"/>
-          </a:xfrm>
-          <a:prstGeom prst="rect">
-            <a:avLst/>
-          </a:prstGeom>
-          <a:noFill/>
-        </p:spPr>
-        <p:txBody>
-          <a:bodyPr wrap="square">
-            <a:spAutoFit/>
-          </a:bodyPr>
-          <a:lstStyle/>
-          <a:p>
-            <a:pPr algn="ctr"/>
-            <a:r>
-              <a:rPr sz="4000" b="1">
-                <a:solidFill>
-                  <a:srgbClr val="1F3A5F"/>
-                </a:solidFill>
-              </a:rPr>
-              <a:t>End of Instructor Progress Test 2 Grams_Updated</a:t>
-            </a:r>
-          </a:p>
-        </p:txBody>
-      </p:sp>
-      <p:sp>
-        <p:nvSpPr>
-          <p:cNvPr id="3" name="TextBox 2"/>
-          <p:cNvSpPr txBox="1"/>
-          <p:nvPr/>
-        </p:nvSpPr>
-        <p:spPr>
-          <a:xfrm>
-            <a:off x="914400" y="3840480"/>
-            <a:ext cx="10360152" cy="731520"/>
-          </a:xfrm>
-          <a:prstGeom prst="rect">
-            <a:avLst/>
-          </a:prstGeom>
-          <a:noFill/>
-        </p:spPr>
-        <p:txBody>
-          <a:bodyPr wrap="none">
-            <a:spAutoFit/>
-          </a:bodyPr>
-          <a:lstStyle/>
-          <a:p>
-            <a:pPr algn="ctr"/>
-            <a:r>
-              <a:rPr sz="2400">
-                <a:solidFill>
-                  <a:srgbClr val="1F3A5F"/>
-                </a:solidFill>
-              </a:rPr>
-              <a:t>Instructor Version</a:t>
             </a:r>
           </a:p>
         </p:txBody>

--- a/source/Instructor Progress Test 2 Grams_Updated/Instructor Progress Test 2 Grams_Updated.pptx
+++ b/source/Instructor Progress Test 2 Grams_Updated/Instructor Progress Test 2 Grams_Updated.pptx
@@ -7,6 +7,8 @@
   <p:sldIdLst>
     <p:sldId id="256" r:id="rId7"/>
     <p:sldId id="257" r:id="rId8"/>
+    <p:sldId id="258" r:id="rId9"/>
+    <p:sldId id="259" r:id="rId10"/>
   </p:sldIdLst>
   <p:sldSz cx="12188952" cy="6858000" type="screen4x3"/>
   <p:notesSz cx="6858000" cy="9144000"/>
@@ -3091,120 +3093,48 @@
       <p:grpSpPr/>
       <p:sp>
         <p:nvSpPr>
-          <p:cNvPr id="2" name="Rectangle 1"/>
-          <p:cNvSpPr/>
+          <p:cNvPr id="2" name="TextBox 1"/>
+          <p:cNvSpPr txBox="1"/>
           <p:nvPr/>
         </p:nvSpPr>
         <p:spPr>
           <a:xfrm>
-            <a:off x="0" y="0"/>
-            <a:ext cx="12188952" cy="548640"/>
+            <a:off x="914400" y="2377440"/>
+            <a:ext cx="10360152" cy="1280160"/>
           </a:xfrm>
           <a:prstGeom prst="rect">
             <a:avLst/>
           </a:prstGeom>
-          <a:solidFill>
-            <a:srgbClr val="1F3A5F"/>
-          </a:solidFill>
-          <a:ln>
-            <a:noFill/>
-          </a:ln>
-        </p:spPr>
-        <p:style>
-          <a:lnRef idx="1">
-            <a:schemeClr val="accent1"/>
-          </a:lnRef>
-          <a:fillRef idx="3">
-            <a:schemeClr val="accent1"/>
-          </a:fillRef>
-          <a:effectRef idx="2">
-            <a:schemeClr val="accent1"/>
-          </a:effectRef>
-          <a:fontRef idx="minor">
-            <a:schemeClr val="lt1"/>
-          </a:fontRef>
-        </p:style>
-        <p:txBody>
-          <a:bodyPr rtlCol="0" anchor="ctr" lIns="182880" rIns="182880"/>
+          <a:noFill/>
+        </p:spPr>
+        <p:txBody>
+          <a:bodyPr wrap="square">
+            <a:spAutoFit/>
+          </a:bodyPr>
           <a:lstStyle/>
           <a:p>
             <a:pPr algn="ctr"/>
             <a:r>
-              <a:rPr sz="2000" b="1">
-                <a:solidFill>
-                  <a:srgbClr val="FFFFFF"/>
-                </a:solidFill>
-              </a:rPr>
-              <a:t>Instructor Progress Test 2 Grams_Updated — Page 1 of 2</a:t>
-            </a:r>
-          </a:p>
-        </p:txBody>
-      </p:sp>
-      <p:sp>
-        <p:nvSpPr>
-          <p:cNvPr id="3" name="Rounded Rectangle 2">
-            <a:hlinkClick r:id="rId2"/>
-          </p:cNvPr>
-          <p:cNvSpPr/>
-          <p:nvPr/>
-        </p:nvSpPr>
-        <p:spPr>
-          <a:xfrm>
-            <a:off x="365760" y="731520"/>
-            <a:ext cx="2200046" cy="365760"/>
-          </a:xfrm>
-          <a:prstGeom prst="roundRect">
-            <a:avLst/>
-          </a:prstGeom>
-          <a:solidFill>
-            <a:srgbClr val="E8EEF7"/>
-          </a:solidFill>
-          <a:ln>
-            <a:solidFill>
-              <a:srgbClr val="1F3A5F"/>
-            </a:solidFill>
-          </a:ln>
-        </p:spPr>
-        <p:style>
-          <a:lnRef idx="1">
-            <a:schemeClr val="accent1"/>
-          </a:lnRef>
-          <a:fillRef idx="3">
-            <a:schemeClr val="accent1"/>
-          </a:fillRef>
-          <a:effectRef idx="2">
-            <a:schemeClr val="accent1"/>
-          </a:effectRef>
-          <a:fontRef idx="minor">
-            <a:schemeClr val="lt1"/>
-          </a:fontRef>
-        </p:style>
-        <p:txBody>
-          <a:bodyPr rtlCol="0" anchor="ctr" lIns="45720" rIns="45720"/>
-          <a:lstStyle/>
-          <a:p>
-            <a:pPr algn="ctr"/>
-            <a:r>
-              <a:rPr sz="900">
+              <a:rPr sz="4000" b="1">
                 <a:solidFill>
                   <a:srgbClr val="1F3A5F"/>
                 </a:solidFill>
               </a:rPr>
-              <a:t>Gram 1: FR Intrepid-class, Category 3, Dank</a:t>
-            </a:r>
-          </a:p>
-        </p:txBody>
-      </p:sp>
-      <p:sp>
-        <p:nvSpPr>
-          <p:cNvPr id="4" name="TextBox 3"/>
+              <a:t>Welcome to Instructor Progress Test 2 Grams_Updated</a:t>
+            </a:r>
+          </a:p>
+        </p:txBody>
+      </p:sp>
+      <p:sp>
+        <p:nvSpPr>
+          <p:cNvPr id="3" name="TextBox 2"/>
           <p:cNvSpPr txBox="1"/>
           <p:nvPr/>
         </p:nvSpPr>
         <p:spPr>
           <a:xfrm>
-            <a:off x="365760" y="1115568"/>
-            <a:ext cx="2200046" cy="1447800"/>
+            <a:off x="914400" y="3840480"/>
+            <a:ext cx="10360152" cy="731520"/>
           </a:xfrm>
           <a:prstGeom prst="rect">
             <a:avLst/>
@@ -3212,1396 +3142,19 @@
           <a:noFill/>
         </p:spPr>
         <p:txBody>
-          <a:bodyPr wrap="square">
+          <a:bodyPr wrap="none">
             <a:spAutoFit/>
           </a:bodyPr>
           <a:lstStyle/>
           <a:p>
-            <a:r>
-              <a:rPr sz="800">
-                <a:hlinkClick r:id="rId3"/>
-              </a:rPr>
-              <a:t>Lofar 1</a:t>
-            </a:r>
-          </a:p>
-          <a:p>
-            <a:r>
-              <a:rPr sz="800">
-                <a:hlinkClick r:id="rId4"/>
-              </a:rPr>
-              <a:t>Lofar 2</a:t>
-            </a:r>
-          </a:p>
-          <a:p>
-            <a:r>
-              <a:rPr sz="800">
-                <a:hlinkClick r:id="rId5"/>
-              </a:rPr>
-              <a:t>Lofar 3</a:t>
-            </a:r>
-          </a:p>
-          <a:p>
-            <a:r>
-              <a:rPr sz="800">
-                <a:hlinkClick r:id="rId6"/>
-              </a:rPr>
-              <a:t>Lofar 4</a:t>
-            </a:r>
-          </a:p>
-        </p:txBody>
-      </p:sp>
-      <p:sp>
-        <p:nvSpPr>
-          <p:cNvPr id="5" name="Rounded Rectangle 4">
-            <a:hlinkClick r:id="rId7"/>
-          </p:cNvPr>
-          <p:cNvSpPr/>
-          <p:nvPr/>
-        </p:nvSpPr>
-        <p:spPr>
-          <a:xfrm>
-            <a:off x="2657246" y="731520"/>
-            <a:ext cx="2200046" cy="365760"/>
-          </a:xfrm>
-          <a:prstGeom prst="roundRect">
-            <a:avLst/>
-          </a:prstGeom>
-          <a:solidFill>
-            <a:srgbClr val="E8EEF7"/>
-          </a:solidFill>
-          <a:ln>
-            <a:solidFill>
-              <a:srgbClr val="1F3A5F"/>
-            </a:solidFill>
-          </a:ln>
-        </p:spPr>
-        <p:style>
-          <a:lnRef idx="1">
-            <a:schemeClr val="accent1"/>
-          </a:lnRef>
-          <a:fillRef idx="3">
-            <a:schemeClr val="accent1"/>
-          </a:fillRef>
-          <a:effectRef idx="2">
-            <a:schemeClr val="accent1"/>
-          </a:effectRef>
-          <a:fontRef idx="minor">
-            <a:schemeClr val="lt1"/>
-          </a:fontRef>
-        </p:style>
-        <p:txBody>
-          <a:bodyPr rtlCol="0" anchor="ctr" lIns="45720" rIns="45720"/>
-          <a:lstStyle/>
-          <a:p>
             <a:pPr algn="ctr"/>
             <a:r>
-              <a:rPr sz="900">
+              <a:rPr sz="2400">
                 <a:solidFill>
                   <a:srgbClr val="1F3A5F"/>
                 </a:solidFill>
               </a:rPr>
-              <a:t>Gram 2: FR Venator-class, Category 3, Betazed</a:t>
-            </a:r>
-          </a:p>
-        </p:txBody>
-      </p:sp>
-      <p:sp>
-        <p:nvSpPr>
-          <p:cNvPr id="6" name="TextBox 5"/>
-          <p:cNvSpPr txBox="1"/>
-          <p:nvPr/>
-        </p:nvSpPr>
-        <p:spPr>
-          <a:xfrm>
-            <a:off x="2657246" y="1115568"/>
-            <a:ext cx="2200046" cy="1447800"/>
-          </a:xfrm>
-          <a:prstGeom prst="rect">
-            <a:avLst/>
-          </a:prstGeom>
-          <a:noFill/>
-        </p:spPr>
-        <p:txBody>
-          <a:bodyPr wrap="square">
-            <a:spAutoFit/>
-          </a:bodyPr>
-          <a:lstStyle/>
-          <a:p>
-            <a:r>
-              <a:rPr sz="800">
-                <a:hlinkClick r:id="rId8"/>
-              </a:rPr>
-              <a:t>Lofar 1</a:t>
-            </a:r>
-          </a:p>
-          <a:p>
-            <a:r>
-              <a:rPr sz="800">
-                <a:hlinkClick r:id="rId9"/>
-              </a:rPr>
-              <a:t>Lofar 2</a:t>
-            </a:r>
-          </a:p>
-          <a:p>
-            <a:r>
-              <a:rPr sz="800">
-                <a:hlinkClick r:id="rId10"/>
-              </a:rPr>
-              <a:t>Lofar 3</a:t>
-            </a:r>
-          </a:p>
-        </p:txBody>
-      </p:sp>
-      <p:sp>
-        <p:nvSpPr>
-          <p:cNvPr id="7" name="Rounded Rectangle 6">
-            <a:hlinkClick r:id="rId11"/>
-          </p:cNvPr>
-          <p:cNvSpPr/>
-          <p:nvPr/>
-        </p:nvSpPr>
-        <p:spPr>
-          <a:xfrm>
-            <a:off x="4948732" y="731520"/>
-            <a:ext cx="2200046" cy="365760"/>
-          </a:xfrm>
-          <a:prstGeom prst="roundRect">
-            <a:avLst/>
-          </a:prstGeom>
-          <a:solidFill>
-            <a:srgbClr val="E8EEF7"/>
-          </a:solidFill>
-          <a:ln>
-            <a:solidFill>
-              <a:srgbClr val="1F3A5F"/>
-            </a:solidFill>
-          </a:ln>
-        </p:spPr>
-        <p:style>
-          <a:lnRef idx="1">
-            <a:schemeClr val="accent1"/>
-          </a:lnRef>
-          <a:fillRef idx="3">
-            <a:schemeClr val="accent1"/>
-          </a:fillRef>
-          <a:effectRef idx="2">
-            <a:schemeClr val="accent1"/>
-          </a:effectRef>
-          <a:fontRef idx="minor">
-            <a:schemeClr val="lt1"/>
-          </a:fontRef>
-        </p:style>
-        <p:txBody>
-          <a:bodyPr rtlCol="0" anchor="ctr" lIns="45720" rIns="45720"/>
-          <a:lstStyle/>
-          <a:p>
-            <a:pPr algn="ctr"/>
-            <a:r>
-              <a:rPr sz="900">
-                <a:solidFill>
-                  <a:srgbClr val="1F3A5F"/>
-                </a:solidFill>
-              </a:rPr>
-              <a:t>Gram 3: Lambda Shuttle contact bearing 096, codename Mustafar</a:t>
-            </a:r>
-          </a:p>
-        </p:txBody>
-      </p:sp>
-      <p:sp>
-        <p:nvSpPr>
-          <p:cNvPr id="8" name="TextBox 7"/>
-          <p:cNvSpPr txBox="1"/>
-          <p:nvPr/>
-        </p:nvSpPr>
-        <p:spPr>
-          <a:xfrm>
-            <a:off x="4948732" y="1115568"/>
-            <a:ext cx="2200046" cy="1447800"/>
-          </a:xfrm>
-          <a:prstGeom prst="rect">
-            <a:avLst/>
-          </a:prstGeom>
-          <a:noFill/>
-        </p:spPr>
-        <p:txBody>
-          <a:bodyPr wrap="square">
-            <a:spAutoFit/>
-          </a:bodyPr>
-          <a:lstStyle/>
-          <a:p>
-            <a:r>
-              <a:rPr sz="800">
-                <a:hlinkClick r:id="rId12"/>
-              </a:rPr>
-              <a:t>Lofar 1</a:t>
-            </a:r>
-          </a:p>
-        </p:txBody>
-      </p:sp>
-      <p:sp>
-        <p:nvSpPr>
-          <p:cNvPr id="9" name="Rounded Rectangle 8">
-            <a:hlinkClick r:id="rId13"/>
-          </p:cNvPr>
-          <p:cNvSpPr/>
-          <p:nvPr/>
-        </p:nvSpPr>
-        <p:spPr>
-          <a:xfrm>
-            <a:off x="7240219" y="731520"/>
-            <a:ext cx="2200046" cy="365760"/>
-          </a:xfrm>
-          <a:prstGeom prst="roundRect">
-            <a:avLst/>
-          </a:prstGeom>
-          <a:solidFill>
-            <a:srgbClr val="E8EEF7"/>
-          </a:solidFill>
-          <a:ln>
-            <a:solidFill>
-              <a:srgbClr val="1F3A5F"/>
-            </a:solidFill>
-          </a:ln>
-        </p:spPr>
-        <p:style>
-          <a:lnRef idx="1">
-            <a:schemeClr val="accent1"/>
-          </a:lnRef>
-          <a:fillRef idx="3">
-            <a:schemeClr val="accent1"/>
-          </a:fillRef>
-          <a:effectRef idx="2">
-            <a:schemeClr val="accent1"/>
-          </a:effectRef>
-          <a:fontRef idx="minor">
-            <a:schemeClr val="lt1"/>
-          </a:fontRef>
-        </p:style>
-        <p:txBody>
-          <a:bodyPr rtlCol="0" anchor="ctr" lIns="45720" rIns="45720"/>
-          <a:lstStyle/>
-          <a:p>
-            <a:pPr algn="ctr"/>
-            <a:r>
-              <a:rPr sz="900">
-                <a:solidFill>
-                  <a:srgbClr val="1F3A5F"/>
-                </a:solidFill>
-              </a:rPr>
-              <a:t>Gram 4: FR Galaxy-class, Category 3, Dank</a:t>
-            </a:r>
-          </a:p>
-        </p:txBody>
-      </p:sp>
-      <p:sp>
-        <p:nvSpPr>
-          <p:cNvPr id="10" name="TextBox 9"/>
-          <p:cNvSpPr txBox="1"/>
-          <p:nvPr/>
-        </p:nvSpPr>
-        <p:spPr>
-          <a:xfrm>
-            <a:off x="7240219" y="1115568"/>
-            <a:ext cx="2200046" cy="1447800"/>
-          </a:xfrm>
-          <a:prstGeom prst="rect">
-            <a:avLst/>
-          </a:prstGeom>
-          <a:noFill/>
-        </p:spPr>
-        <p:txBody>
-          <a:bodyPr wrap="square">
-            <a:spAutoFit/>
-          </a:bodyPr>
-          <a:lstStyle/>
-          <a:p>
-            <a:r>
-              <a:rPr sz="800">
-                <a:hlinkClick r:id="rId14"/>
-              </a:rPr>
-              <a:t>Lofar 1</a:t>
-            </a:r>
-          </a:p>
-        </p:txBody>
-      </p:sp>
-      <p:sp>
-        <p:nvSpPr>
-          <p:cNvPr id="11" name="Rounded Rectangle 10">
-            <a:hlinkClick r:id="rId15"/>
-          </p:cNvPr>
-          <p:cNvSpPr/>
-          <p:nvPr/>
-        </p:nvSpPr>
-        <p:spPr>
-          <a:xfrm>
-            <a:off x="9531705" y="731520"/>
-            <a:ext cx="2200046" cy="365760"/>
-          </a:xfrm>
-          <a:prstGeom prst="roundRect">
-            <a:avLst/>
-          </a:prstGeom>
-          <a:solidFill>
-            <a:srgbClr val="E8EEF7"/>
-          </a:solidFill>
-          <a:ln>
-            <a:solidFill>
-              <a:srgbClr val="1F3A5F"/>
-            </a:solidFill>
-          </a:ln>
-        </p:spPr>
-        <p:style>
-          <a:lnRef idx="1">
-            <a:schemeClr val="accent1"/>
-          </a:lnRef>
-          <a:fillRef idx="3">
-            <a:schemeClr val="accent1"/>
-          </a:fillRef>
-          <a:effectRef idx="2">
-            <a:schemeClr val="accent1"/>
-          </a:effectRef>
-          <a:fontRef idx="minor">
-            <a:schemeClr val="lt1"/>
-          </a:fontRef>
-        </p:style>
-        <p:txBody>
-          <a:bodyPr rtlCol="0" anchor="ctr" lIns="45720" rIns="45720"/>
-          <a:lstStyle/>
-          <a:p>
-            <a:pPr algn="ctr"/>
-            <a:r>
-              <a:rPr sz="900">
-                <a:solidFill>
-                  <a:srgbClr val="1F3A5F"/>
-                </a:solidFill>
-              </a:rPr>
-              <a:t>Gram 5: FR Constitution-class, Category 3, Yavin</a:t>
-            </a:r>
-          </a:p>
-        </p:txBody>
-      </p:sp>
-      <p:sp>
-        <p:nvSpPr>
-          <p:cNvPr id="12" name="TextBox 11"/>
-          <p:cNvSpPr txBox="1"/>
-          <p:nvPr/>
-        </p:nvSpPr>
-        <p:spPr>
-          <a:xfrm>
-            <a:off x="9531705" y="1115568"/>
-            <a:ext cx="2200046" cy="1447800"/>
-          </a:xfrm>
-          <a:prstGeom prst="rect">
-            <a:avLst/>
-          </a:prstGeom>
-          <a:noFill/>
-        </p:spPr>
-        <p:txBody>
-          <a:bodyPr wrap="square">
-            <a:spAutoFit/>
-          </a:bodyPr>
-          <a:lstStyle/>
-          <a:p>
-            <a:r>
-              <a:rPr sz="800">
-                <a:hlinkClick r:id="rId16"/>
-              </a:rPr>
-              <a:t>Lofar 1</a:t>
-            </a:r>
-          </a:p>
-        </p:txBody>
-      </p:sp>
-      <p:sp>
-        <p:nvSpPr>
-          <p:cNvPr id="13" name="Rounded Rectangle 12">
-            <a:hlinkClick r:id="rId17"/>
-          </p:cNvPr>
-          <p:cNvSpPr/>
-          <p:nvPr/>
-        </p:nvSpPr>
-        <p:spPr>
-          <a:xfrm>
-            <a:off x="365760" y="2682240"/>
-            <a:ext cx="2200046" cy="365760"/>
-          </a:xfrm>
-          <a:prstGeom prst="roundRect">
-            <a:avLst/>
-          </a:prstGeom>
-          <a:solidFill>
-            <a:srgbClr val="E8EEF7"/>
-          </a:solidFill>
-          <a:ln>
-            <a:solidFill>
-              <a:srgbClr val="1F3A5F"/>
-            </a:solidFill>
-          </a:ln>
-        </p:spPr>
-        <p:style>
-          <a:lnRef idx="1">
-            <a:schemeClr val="accent1"/>
-          </a:lnRef>
-          <a:fillRef idx="3">
-            <a:schemeClr val="accent1"/>
-          </a:fillRef>
-          <a:effectRef idx="2">
-            <a:schemeClr val="accent1"/>
-          </a:effectRef>
-          <a:fontRef idx="minor">
-            <a:schemeClr val="lt1"/>
-          </a:fontRef>
-        </p:style>
-        <p:txBody>
-          <a:bodyPr rtlCol="0" anchor="ctr" lIns="45720" rIns="45720"/>
-          <a:lstStyle/>
-          <a:p>
-            <a:pPr algn="ctr"/>
-            <a:r>
-              <a:rPr sz="900">
-                <a:solidFill>
-                  <a:srgbClr val="1F3A5F"/>
-                </a:solidFill>
-              </a:rPr>
-              <a:t>Gram 6: FR Corellian Corvette, Category 2, Tantive</a:t>
-            </a:r>
-          </a:p>
-        </p:txBody>
-      </p:sp>
-      <p:sp>
-        <p:nvSpPr>
-          <p:cNvPr id="14" name="TextBox 13"/>
-          <p:cNvSpPr txBox="1"/>
-          <p:nvPr/>
-        </p:nvSpPr>
-        <p:spPr>
-          <a:xfrm>
-            <a:off x="365760" y="3066288"/>
-            <a:ext cx="2200046" cy="1447800"/>
-          </a:xfrm>
-          <a:prstGeom prst="rect">
-            <a:avLst/>
-          </a:prstGeom>
-          <a:noFill/>
-        </p:spPr>
-        <p:txBody>
-          <a:bodyPr wrap="square">
-            <a:spAutoFit/>
-          </a:bodyPr>
-          <a:lstStyle/>
-          <a:p>
-            <a:r>
-              <a:rPr sz="800">
-                <a:hlinkClick r:id="rId18"/>
-              </a:rPr>
-              <a:t>Lofar 1</a:t>
-            </a:r>
-          </a:p>
-          <a:p>
-            <a:r>
-              <a:rPr sz="800">
-                <a:hlinkClick r:id="rId19"/>
-              </a:rPr>
-              <a:t>Lofar 2</a:t>
-            </a:r>
-          </a:p>
-          <a:p>
-            <a:r>
-              <a:rPr sz="800">
-                <a:hlinkClick r:id="rId20"/>
-              </a:rPr>
-              <a:t>Lofar 3</a:t>
-            </a:r>
-          </a:p>
-          <a:p>
-            <a:r>
-              <a:rPr sz="800">
-                <a:hlinkClick r:id="rId21"/>
-              </a:rPr>
-              <a:t>Lofar 4</a:t>
-            </a:r>
-          </a:p>
-        </p:txBody>
-      </p:sp>
-      <p:sp>
-        <p:nvSpPr>
-          <p:cNvPr id="15" name="Rounded Rectangle 14">
-            <a:hlinkClick r:id="rId22"/>
-          </p:cNvPr>
-          <p:cNvSpPr/>
-          <p:nvPr/>
-        </p:nvSpPr>
-        <p:spPr>
-          <a:xfrm>
-            <a:off x="2657246" y="2682240"/>
-            <a:ext cx="2200046" cy="365760"/>
-          </a:xfrm>
-          <a:prstGeom prst="roundRect">
-            <a:avLst/>
-          </a:prstGeom>
-          <a:solidFill>
-            <a:srgbClr val="E8EEF7"/>
-          </a:solidFill>
-          <a:ln>
-            <a:solidFill>
-              <a:srgbClr val="1F3A5F"/>
-            </a:solidFill>
-          </a:ln>
-        </p:spPr>
-        <p:style>
-          <a:lnRef idx="1">
-            <a:schemeClr val="accent1"/>
-          </a:lnRef>
-          <a:fillRef idx="3">
-            <a:schemeClr val="accent1"/>
-          </a:fillRef>
-          <a:effectRef idx="2">
-            <a:schemeClr val="accent1"/>
-          </a:effectRef>
-          <a:fontRef idx="minor">
-            <a:schemeClr val="lt1"/>
-          </a:fontRef>
-        </p:style>
-        <p:txBody>
-          <a:bodyPr rtlCol="0" anchor="ctr" lIns="45720" rIns="45720"/>
-          <a:lstStyle/>
-          <a:p>
-            <a:pPr algn="ctr"/>
-            <a:r>
-              <a:rPr sz="900">
-                <a:solidFill>
-                  <a:srgbClr val="1F3A5F"/>
-                </a:solidFill>
-              </a:rPr>
-              <a:t>Gram 7: FR Millennium Falcon, Category 4, Romulus</a:t>
-            </a:r>
-          </a:p>
-        </p:txBody>
-      </p:sp>
-      <p:sp>
-        <p:nvSpPr>
-          <p:cNvPr id="16" name="TextBox 15"/>
-          <p:cNvSpPr txBox="1"/>
-          <p:nvPr/>
-        </p:nvSpPr>
-        <p:spPr>
-          <a:xfrm>
-            <a:off x="2657246" y="3066288"/>
-            <a:ext cx="2200046" cy="1447800"/>
-          </a:xfrm>
-          <a:prstGeom prst="rect">
-            <a:avLst/>
-          </a:prstGeom>
-          <a:noFill/>
-        </p:spPr>
-        <p:txBody>
-          <a:bodyPr wrap="square">
-            <a:spAutoFit/>
-          </a:bodyPr>
-          <a:lstStyle/>
-          <a:p>
-            <a:r>
-              <a:rPr sz="800">
-                <a:hlinkClick r:id="rId23"/>
-              </a:rPr>
-              <a:t>Lofar 1</a:t>
-            </a:r>
-          </a:p>
-          <a:p>
-            <a:r>
-              <a:rPr sz="800">
-                <a:hlinkClick r:id="rId24"/>
-              </a:rPr>
-              <a:t>Lofar 2</a:t>
-            </a:r>
-          </a:p>
-          <a:p>
-            <a:r>
-              <a:rPr sz="800">
-                <a:hlinkClick r:id="rId25"/>
-              </a:rPr>
-              <a:t>Lofar 3</a:t>
-            </a:r>
-          </a:p>
-          <a:p>
-            <a:r>
-              <a:rPr sz="800">
-                <a:hlinkClick r:id="rId26"/>
-              </a:rPr>
-              <a:t>Lofar 4</a:t>
-            </a:r>
-          </a:p>
-        </p:txBody>
-      </p:sp>
-      <p:sp>
-        <p:nvSpPr>
-          <p:cNvPr id="17" name="Rounded Rectangle 16">
-            <a:hlinkClick r:id="rId27"/>
-          </p:cNvPr>
-          <p:cNvSpPr/>
-          <p:nvPr/>
-        </p:nvSpPr>
-        <p:spPr>
-          <a:xfrm>
-            <a:off x="4948732" y="2682240"/>
-            <a:ext cx="2200046" cy="365760"/>
-          </a:xfrm>
-          <a:prstGeom prst="roundRect">
-            <a:avLst/>
-          </a:prstGeom>
-          <a:solidFill>
-            <a:srgbClr val="E8EEF7"/>
-          </a:solidFill>
-          <a:ln>
-            <a:solidFill>
-              <a:srgbClr val="1F3A5F"/>
-            </a:solidFill>
-          </a:ln>
-        </p:spPr>
-        <p:style>
-          <a:lnRef idx="1">
-            <a:schemeClr val="accent1"/>
-          </a:lnRef>
-          <a:fillRef idx="3">
-            <a:schemeClr val="accent1"/>
-          </a:fillRef>
-          <a:effectRef idx="2">
-            <a:schemeClr val="accent1"/>
-          </a:effectRef>
-          <a:fontRef idx="minor">
-            <a:schemeClr val="lt1"/>
-          </a:fontRef>
-        </p:style>
-        <p:txBody>
-          <a:bodyPr rtlCol="0" anchor="ctr" lIns="45720" rIns="45720"/>
-          <a:lstStyle/>
-          <a:p>
-            <a:pPr algn="ctr"/>
-            <a:r>
-              <a:rPr sz="900">
-                <a:solidFill>
-                  <a:srgbClr val="1F3A5F"/>
-                </a:solidFill>
-              </a:rPr>
-              <a:t>Gram 8: Nebulon-B contact bearing 297, codename Cardassia</a:t>
-            </a:r>
-          </a:p>
-        </p:txBody>
-      </p:sp>
-      <p:sp>
-        <p:nvSpPr>
-          <p:cNvPr id="18" name="TextBox 17"/>
-          <p:cNvSpPr txBox="1"/>
-          <p:nvPr/>
-        </p:nvSpPr>
-        <p:spPr>
-          <a:xfrm>
-            <a:off x="4948732" y="3066288"/>
-            <a:ext cx="2200046" cy="1447800"/>
-          </a:xfrm>
-          <a:prstGeom prst="rect">
-            <a:avLst/>
-          </a:prstGeom>
-          <a:noFill/>
-        </p:spPr>
-        <p:txBody>
-          <a:bodyPr wrap="square">
-            <a:spAutoFit/>
-          </a:bodyPr>
-          <a:lstStyle/>
-          <a:p>
-            <a:r>
-              <a:rPr sz="800">
-                <a:hlinkClick r:id="rId28"/>
-              </a:rPr>
-              <a:t>Lofar 1</a:t>
-            </a:r>
-          </a:p>
-          <a:p>
-            <a:r>
-              <a:rPr sz="800">
-                <a:hlinkClick r:id="rId29"/>
-              </a:rPr>
-              <a:t>Lofar 2</a:t>
-            </a:r>
-          </a:p>
-          <a:p>
-            <a:r>
-              <a:rPr sz="800">
-                <a:hlinkClick r:id="rId30"/>
-              </a:rPr>
-              <a:t>Lofar 3</a:t>
-            </a:r>
-          </a:p>
-        </p:txBody>
-      </p:sp>
-      <p:sp>
-        <p:nvSpPr>
-          <p:cNvPr id="19" name="Rounded Rectangle 18">
-            <a:hlinkClick r:id="rId31"/>
-          </p:cNvPr>
-          <p:cNvSpPr/>
-          <p:nvPr/>
-        </p:nvSpPr>
-        <p:spPr>
-          <a:xfrm>
-            <a:off x="7240219" y="2682240"/>
-            <a:ext cx="2200046" cy="365760"/>
-          </a:xfrm>
-          <a:prstGeom prst="roundRect">
-            <a:avLst/>
-          </a:prstGeom>
-          <a:solidFill>
-            <a:srgbClr val="E8EEF7"/>
-          </a:solidFill>
-          <a:ln>
-            <a:solidFill>
-              <a:srgbClr val="1F3A5F"/>
-            </a:solidFill>
-          </a:ln>
-        </p:spPr>
-        <p:style>
-          <a:lnRef idx="1">
-            <a:schemeClr val="accent1"/>
-          </a:lnRef>
-          <a:fillRef idx="3">
-            <a:schemeClr val="accent1"/>
-          </a:fillRef>
-          <a:effectRef idx="2">
-            <a:schemeClr val="accent1"/>
-          </a:effectRef>
-          <a:fontRef idx="minor">
-            <a:schemeClr val="lt1"/>
-          </a:fontRef>
-        </p:style>
-        <p:txBody>
-          <a:bodyPr rtlCol="0" anchor="ctr" lIns="45720" rIns="45720"/>
-          <a:lstStyle/>
-          <a:p>
-            <a:pPr algn="ctr"/>
-            <a:r>
-              <a:rPr sz="900">
-                <a:solidFill>
-                  <a:srgbClr val="1F3A5F"/>
-                </a:solidFill>
-              </a:rPr>
-              <a:t>Gram 9: FR A-wing, Category 1, Romulus</a:t>
-            </a:r>
-          </a:p>
-        </p:txBody>
-      </p:sp>
-      <p:sp>
-        <p:nvSpPr>
-          <p:cNvPr id="20" name="TextBox 19"/>
-          <p:cNvSpPr txBox="1"/>
-          <p:nvPr/>
-        </p:nvSpPr>
-        <p:spPr>
-          <a:xfrm>
-            <a:off x="7240219" y="3066288"/>
-            <a:ext cx="2200046" cy="1447800"/>
-          </a:xfrm>
-          <a:prstGeom prst="rect">
-            <a:avLst/>
-          </a:prstGeom>
-          <a:noFill/>
-        </p:spPr>
-        <p:txBody>
-          <a:bodyPr wrap="square">
-            <a:spAutoFit/>
-          </a:bodyPr>
-          <a:lstStyle/>
-          <a:p>
-            <a:r>
-              <a:rPr sz="800">
-                <a:hlinkClick r:id="rId32"/>
-              </a:rPr>
-              <a:t>Lofar 1</a:t>
-            </a:r>
-          </a:p>
-          <a:p>
-            <a:r>
-              <a:rPr sz="800">
-                <a:hlinkClick r:id="rId33"/>
-              </a:rPr>
-              <a:t>Lofar 2</a:t>
-            </a:r>
-          </a:p>
-          <a:p>
-            <a:r>
-              <a:rPr sz="800">
-                <a:hlinkClick r:id="rId34"/>
-              </a:rPr>
-              <a:t>Lofar 3</a:t>
-            </a:r>
-          </a:p>
-        </p:txBody>
-      </p:sp>
-      <p:sp>
-        <p:nvSpPr>
-          <p:cNvPr id="21" name="Rounded Rectangle 20">
-            <a:hlinkClick r:id="rId35"/>
-          </p:cNvPr>
-          <p:cNvSpPr/>
-          <p:nvPr/>
-        </p:nvSpPr>
-        <p:spPr>
-          <a:xfrm>
-            <a:off x="9531705" y="2682240"/>
-            <a:ext cx="2200046" cy="365760"/>
-          </a:xfrm>
-          <a:prstGeom prst="roundRect">
-            <a:avLst/>
-          </a:prstGeom>
-          <a:solidFill>
-            <a:srgbClr val="E8EEF7"/>
-          </a:solidFill>
-          <a:ln>
-            <a:solidFill>
-              <a:srgbClr val="1F3A5F"/>
-            </a:solidFill>
-          </a:ln>
-        </p:spPr>
-        <p:style>
-          <a:lnRef idx="1">
-            <a:schemeClr val="accent1"/>
-          </a:lnRef>
-          <a:fillRef idx="3">
-            <a:schemeClr val="accent1"/>
-          </a:fillRef>
-          <a:effectRef idx="2">
-            <a:schemeClr val="accent1"/>
-          </a:effectRef>
-          <a:fontRef idx="minor">
-            <a:schemeClr val="lt1"/>
-          </a:fontRef>
-        </p:style>
-        <p:txBody>
-          <a:bodyPr rtlCol="0" anchor="ctr" lIns="45720" rIns="45720"/>
-          <a:lstStyle/>
-          <a:p>
-            <a:pPr algn="ctr"/>
-            <a:r>
-              <a:rPr sz="900">
-                <a:solidFill>
-                  <a:srgbClr val="1F3A5F"/>
-                </a:solidFill>
-              </a:rPr>
-              <a:t>Gram 10: FR Tantive IV, Category 4, Gandalf</a:t>
-            </a:r>
-          </a:p>
-        </p:txBody>
-      </p:sp>
-      <p:sp>
-        <p:nvSpPr>
-          <p:cNvPr id="22" name="TextBox 21"/>
-          <p:cNvSpPr txBox="1"/>
-          <p:nvPr/>
-        </p:nvSpPr>
-        <p:spPr>
-          <a:xfrm>
-            <a:off x="9531705" y="3066288"/>
-            <a:ext cx="2200046" cy="1447800"/>
-          </a:xfrm>
-          <a:prstGeom prst="rect">
-            <a:avLst/>
-          </a:prstGeom>
-          <a:noFill/>
-        </p:spPr>
-        <p:txBody>
-          <a:bodyPr wrap="square">
-            <a:spAutoFit/>
-          </a:bodyPr>
-          <a:lstStyle/>
-          <a:p>
-            <a:r>
-              <a:rPr sz="800">
-                <a:hlinkClick r:id="rId36"/>
-              </a:rPr>
-              <a:t>Lofar 1</a:t>
-            </a:r>
-          </a:p>
-        </p:txBody>
-      </p:sp>
-      <p:sp>
-        <p:nvSpPr>
-          <p:cNvPr id="23" name="Rounded Rectangle 22">
-            <a:hlinkClick r:id="rId37"/>
-          </p:cNvPr>
-          <p:cNvSpPr/>
-          <p:nvPr/>
-        </p:nvSpPr>
-        <p:spPr>
-          <a:xfrm>
-            <a:off x="365760" y="4632960"/>
-            <a:ext cx="2200046" cy="365760"/>
-          </a:xfrm>
-          <a:prstGeom prst="roundRect">
-            <a:avLst/>
-          </a:prstGeom>
-          <a:solidFill>
-            <a:srgbClr val="E8EEF7"/>
-          </a:solidFill>
-          <a:ln>
-            <a:solidFill>
-              <a:srgbClr val="1F3A5F"/>
-            </a:solidFill>
-          </a:ln>
-        </p:spPr>
-        <p:style>
-          <a:lnRef idx="1">
-            <a:schemeClr val="accent1"/>
-          </a:lnRef>
-          <a:fillRef idx="3">
-            <a:schemeClr val="accent1"/>
-          </a:fillRef>
-          <a:effectRef idx="2">
-            <a:schemeClr val="accent1"/>
-          </a:effectRef>
-          <a:fontRef idx="minor">
-            <a:schemeClr val="lt1"/>
-          </a:fontRef>
-        </p:style>
-        <p:txBody>
-          <a:bodyPr rtlCol="0" anchor="ctr" lIns="45720" rIns="45720"/>
-          <a:lstStyle/>
-          <a:p>
-            <a:pPr algn="ctr"/>
-            <a:r>
-              <a:rPr sz="900">
-                <a:solidFill>
-                  <a:srgbClr val="1F3A5F"/>
-                </a:solidFill>
-              </a:rPr>
-              <a:t>Gram 11: FR Razor Crest, Category 1, Betazed</a:t>
-            </a:r>
-          </a:p>
-        </p:txBody>
-      </p:sp>
-      <p:sp>
-        <p:nvSpPr>
-          <p:cNvPr id="24" name="TextBox 23"/>
-          <p:cNvSpPr txBox="1"/>
-          <p:nvPr/>
-        </p:nvSpPr>
-        <p:spPr>
-          <a:xfrm>
-            <a:off x="365760" y="5017008"/>
-            <a:ext cx="2200046" cy="1447800"/>
-          </a:xfrm>
-          <a:prstGeom prst="rect">
-            <a:avLst/>
-          </a:prstGeom>
-          <a:noFill/>
-        </p:spPr>
-        <p:txBody>
-          <a:bodyPr wrap="square">
-            <a:spAutoFit/>
-          </a:bodyPr>
-          <a:lstStyle/>
-          <a:p>
-            <a:r>
-              <a:rPr sz="800">
-                <a:hlinkClick r:id="rId38"/>
-              </a:rPr>
-              <a:t>Lofar 1</a:t>
-            </a:r>
-          </a:p>
-          <a:p>
-            <a:r>
-              <a:rPr sz="800">
-                <a:hlinkClick r:id="rId39"/>
-              </a:rPr>
-              <a:t>Lofar 2</a:t>
-            </a:r>
-          </a:p>
-          <a:p>
-            <a:r>
-              <a:rPr sz="800">
-                <a:hlinkClick r:id="rId40"/>
-              </a:rPr>
-              <a:t>Lofar 3</a:t>
-            </a:r>
-          </a:p>
-        </p:txBody>
-      </p:sp>
-      <p:sp>
-        <p:nvSpPr>
-          <p:cNvPr id="25" name="Rounded Rectangle 24">
-            <a:hlinkClick r:id="rId41"/>
-          </p:cNvPr>
-          <p:cNvSpPr/>
-          <p:nvPr/>
-        </p:nvSpPr>
-        <p:spPr>
-          <a:xfrm>
-            <a:off x="2657246" y="4632960"/>
-            <a:ext cx="2200046" cy="365760"/>
-          </a:xfrm>
-          <a:prstGeom prst="roundRect">
-            <a:avLst/>
-          </a:prstGeom>
-          <a:solidFill>
-            <a:srgbClr val="E8EEF7"/>
-          </a:solidFill>
-          <a:ln>
-            <a:solidFill>
-              <a:srgbClr val="1F3A5F"/>
-            </a:solidFill>
-          </a:ln>
-        </p:spPr>
-        <p:style>
-          <a:lnRef idx="1">
-            <a:schemeClr val="accent1"/>
-          </a:lnRef>
-          <a:fillRef idx="3">
-            <a:schemeClr val="accent1"/>
-          </a:fillRef>
-          <a:effectRef idx="2">
-            <a:schemeClr val="accent1"/>
-          </a:effectRef>
-          <a:fontRef idx="minor">
-            <a:schemeClr val="lt1"/>
-          </a:fontRef>
-        </p:style>
-        <p:txBody>
-          <a:bodyPr rtlCol="0" anchor="ctr" lIns="45720" rIns="45720"/>
-          <a:lstStyle/>
-          <a:p>
-            <a:pPr algn="ctr"/>
-            <a:r>
-              <a:rPr sz="900">
-                <a:solidFill>
-                  <a:srgbClr val="1F3A5F"/>
-                </a:solidFill>
-              </a:rPr>
-              <a:t>Gram 12: FR Constitution-class, Category 1, Tatooine</a:t>
-            </a:r>
-          </a:p>
-        </p:txBody>
-      </p:sp>
-      <p:sp>
-        <p:nvSpPr>
-          <p:cNvPr id="26" name="TextBox 25"/>
-          <p:cNvSpPr txBox="1"/>
-          <p:nvPr/>
-        </p:nvSpPr>
-        <p:spPr>
-          <a:xfrm>
-            <a:off x="2657246" y="5017008"/>
-            <a:ext cx="2200046" cy="1447800"/>
-          </a:xfrm>
-          <a:prstGeom prst="rect">
-            <a:avLst/>
-          </a:prstGeom>
-          <a:noFill/>
-        </p:spPr>
-        <p:txBody>
-          <a:bodyPr wrap="square">
-            <a:spAutoFit/>
-          </a:bodyPr>
-          <a:lstStyle/>
-          <a:p>
-            <a:r>
-              <a:rPr sz="800">
-                <a:hlinkClick r:id="rId42"/>
-              </a:rPr>
-              <a:t>Lofar 1</a:t>
-            </a:r>
-          </a:p>
-          <a:p>
-            <a:r>
-              <a:rPr sz="800">
-                <a:hlinkClick r:id="rId43"/>
-              </a:rPr>
-              <a:t>Lofar 2</a:t>
-            </a:r>
-          </a:p>
-          <a:p>
-            <a:r>
-              <a:rPr sz="800">
-                <a:hlinkClick r:id="rId44"/>
-              </a:rPr>
-              <a:t>Lofar 3</a:t>
-            </a:r>
-          </a:p>
-        </p:txBody>
-      </p:sp>
-      <p:sp>
-        <p:nvSpPr>
-          <p:cNvPr id="27" name="Rounded Rectangle 26">
-            <a:hlinkClick r:id="rId45"/>
-          </p:cNvPr>
-          <p:cNvSpPr/>
-          <p:nvPr/>
-        </p:nvSpPr>
-        <p:spPr>
-          <a:xfrm>
-            <a:off x="4948732" y="4632960"/>
-            <a:ext cx="2200046" cy="365760"/>
-          </a:xfrm>
-          <a:prstGeom prst="roundRect">
-            <a:avLst/>
-          </a:prstGeom>
-          <a:solidFill>
-            <a:srgbClr val="E8EEF7"/>
-          </a:solidFill>
-          <a:ln>
-            <a:solidFill>
-              <a:srgbClr val="1F3A5F"/>
-            </a:solidFill>
-          </a:ln>
-        </p:spPr>
-        <p:style>
-          <a:lnRef idx="1">
-            <a:schemeClr val="accent1"/>
-          </a:lnRef>
-          <a:fillRef idx="3">
-            <a:schemeClr val="accent1"/>
-          </a:fillRef>
-          <a:effectRef idx="2">
-            <a:schemeClr val="accent1"/>
-          </a:effectRef>
-          <a:fontRef idx="minor">
-            <a:schemeClr val="lt1"/>
-          </a:fontRef>
-        </p:style>
-        <p:txBody>
-          <a:bodyPr rtlCol="0" anchor="ctr" lIns="45720" rIns="45720"/>
-          <a:lstStyle/>
-          <a:p>
-            <a:pPr algn="ctr"/>
-            <a:r>
-              <a:rPr sz="900">
-                <a:solidFill>
-                  <a:srgbClr val="1F3A5F"/>
-                </a:solidFill>
-              </a:rPr>
-              <a:t>Gram 13: FR Reliant, Category 2, Caprica</a:t>
-            </a:r>
-          </a:p>
-        </p:txBody>
-      </p:sp>
-      <p:sp>
-        <p:nvSpPr>
-          <p:cNvPr id="28" name="TextBox 27"/>
-          <p:cNvSpPr txBox="1"/>
-          <p:nvPr/>
-        </p:nvSpPr>
-        <p:spPr>
-          <a:xfrm>
-            <a:off x="4948732" y="5017008"/>
-            <a:ext cx="2200046" cy="1447800"/>
-          </a:xfrm>
-          <a:prstGeom prst="rect">
-            <a:avLst/>
-          </a:prstGeom>
-          <a:noFill/>
-        </p:spPr>
-        <p:txBody>
-          <a:bodyPr wrap="square">
-            <a:spAutoFit/>
-          </a:bodyPr>
-          <a:lstStyle/>
-          <a:p>
-            <a:r>
-              <a:rPr sz="800">
-                <a:hlinkClick r:id="rId46"/>
-              </a:rPr>
-              <a:t>Lofar 1</a:t>
-            </a:r>
-          </a:p>
-        </p:txBody>
-      </p:sp>
-      <p:sp>
-        <p:nvSpPr>
-          <p:cNvPr id="29" name="Rounded Rectangle 28">
-            <a:hlinkClick r:id="rId47"/>
-          </p:cNvPr>
-          <p:cNvSpPr/>
-          <p:nvPr/>
-        </p:nvSpPr>
-        <p:spPr>
-          <a:xfrm>
-            <a:off x="7240219" y="4632960"/>
-            <a:ext cx="2200046" cy="365760"/>
-          </a:xfrm>
-          <a:prstGeom prst="roundRect">
-            <a:avLst/>
-          </a:prstGeom>
-          <a:solidFill>
-            <a:srgbClr val="E8EEF7"/>
-          </a:solidFill>
-          <a:ln>
-            <a:solidFill>
-              <a:srgbClr val="1F3A5F"/>
-            </a:solidFill>
-          </a:ln>
-        </p:spPr>
-        <p:style>
-          <a:lnRef idx="1">
-            <a:schemeClr val="accent1"/>
-          </a:lnRef>
-          <a:fillRef idx="3">
-            <a:schemeClr val="accent1"/>
-          </a:fillRef>
-          <a:effectRef idx="2">
-            <a:schemeClr val="accent1"/>
-          </a:effectRef>
-          <a:fontRef idx="minor">
-            <a:schemeClr val="lt1"/>
-          </a:fontRef>
-        </p:style>
-        <p:txBody>
-          <a:bodyPr rtlCol="0" anchor="ctr" lIns="45720" rIns="45720"/>
-          <a:lstStyle/>
-          <a:p>
-            <a:pPr algn="ctr"/>
-            <a:r>
-              <a:rPr sz="900">
-                <a:solidFill>
-                  <a:srgbClr val="1F3A5F"/>
-                </a:solidFill>
-              </a:rPr>
-              <a:t>Gram 14: FR TIE Fighter, Category 4, Tantive</a:t>
-            </a:r>
-          </a:p>
-        </p:txBody>
-      </p:sp>
-      <p:sp>
-        <p:nvSpPr>
-          <p:cNvPr id="30" name="TextBox 29"/>
-          <p:cNvSpPr txBox="1"/>
-          <p:nvPr/>
-        </p:nvSpPr>
-        <p:spPr>
-          <a:xfrm>
-            <a:off x="7240219" y="5017008"/>
-            <a:ext cx="2200046" cy="1447800"/>
-          </a:xfrm>
-          <a:prstGeom prst="rect">
-            <a:avLst/>
-          </a:prstGeom>
-          <a:noFill/>
-        </p:spPr>
-        <p:txBody>
-          <a:bodyPr wrap="square">
-            <a:spAutoFit/>
-          </a:bodyPr>
-          <a:lstStyle/>
-          <a:p>
-            <a:r>
-              <a:rPr sz="800">
-                <a:hlinkClick r:id="rId48"/>
-              </a:rPr>
-              <a:t>Lofar 1</a:t>
-            </a:r>
-          </a:p>
-          <a:p>
-            <a:r>
-              <a:rPr sz="800">
-                <a:hlinkClick r:id="rId49"/>
-              </a:rPr>
-              <a:t>Lofar 2</a:t>
-            </a:r>
-          </a:p>
-        </p:txBody>
-      </p:sp>
-      <p:sp>
-        <p:nvSpPr>
-          <p:cNvPr id="31" name="Rounded Rectangle 30">
-            <a:hlinkClick r:id="rId50"/>
-          </p:cNvPr>
-          <p:cNvSpPr/>
-          <p:nvPr/>
-        </p:nvSpPr>
-        <p:spPr>
-          <a:xfrm>
-            <a:off x="9531705" y="4632960"/>
-            <a:ext cx="2200046" cy="365760"/>
-          </a:xfrm>
-          <a:prstGeom prst="roundRect">
-            <a:avLst/>
-          </a:prstGeom>
-          <a:solidFill>
-            <a:srgbClr val="E8EEF7"/>
-          </a:solidFill>
-          <a:ln>
-            <a:solidFill>
-              <a:srgbClr val="1F3A5F"/>
-            </a:solidFill>
-          </a:ln>
-        </p:spPr>
-        <p:style>
-          <a:lnRef idx="1">
-            <a:schemeClr val="accent1"/>
-          </a:lnRef>
-          <a:fillRef idx="3">
-            <a:schemeClr val="accent1"/>
-          </a:fillRef>
-          <a:effectRef idx="2">
-            <a:schemeClr val="accent1"/>
-          </a:effectRef>
-          <a:fontRef idx="minor">
-            <a:schemeClr val="lt1"/>
-          </a:fontRef>
-        </p:style>
-        <p:txBody>
-          <a:bodyPr rtlCol="0" anchor="ctr" lIns="45720" rIns="45720"/>
-          <a:lstStyle/>
-          <a:p>
-            <a:pPr algn="ctr"/>
-            <a:r>
-              <a:rPr sz="900">
-                <a:solidFill>
-                  <a:srgbClr val="1F3A5F"/>
-                </a:solidFill>
-              </a:rPr>
-              <a:t>Gram 15: FR Prometheus, Category 1, Caprica</a:t>
-            </a:r>
-          </a:p>
-        </p:txBody>
-      </p:sp>
-      <p:sp>
-        <p:nvSpPr>
-          <p:cNvPr id="32" name="TextBox 31"/>
-          <p:cNvSpPr txBox="1"/>
-          <p:nvPr/>
-        </p:nvSpPr>
-        <p:spPr>
-          <a:xfrm>
-            <a:off x="9531705" y="5017008"/>
-            <a:ext cx="2200046" cy="1447800"/>
-          </a:xfrm>
-          <a:prstGeom prst="rect">
-            <a:avLst/>
-          </a:prstGeom>
-          <a:noFill/>
-        </p:spPr>
-        <p:txBody>
-          <a:bodyPr wrap="square">
-            <a:spAutoFit/>
-          </a:bodyPr>
-          <a:lstStyle/>
-          <a:p>
-            <a:r>
-              <a:rPr sz="800">
-                <a:hlinkClick r:id="rId51"/>
-              </a:rPr>
-              <a:t>Lofar 1</a:t>
-            </a:r>
-          </a:p>
-          <a:p>
-            <a:r>
-              <a:rPr sz="800">
-                <a:hlinkClick r:id="rId52"/>
-              </a:rPr>
-              <a:t>Lofar 2</a:t>
-            </a:r>
-          </a:p>
-          <a:p>
-            <a:r>
-              <a:rPr sz="800">
-                <a:hlinkClick r:id="rId53"/>
-              </a:rPr>
-              <a:t>Lofar 3</a:t>
+              <a:t>Instructor Version</a:t>
             </a:r>
           </a:p>
         </p:txBody>
@@ -4670,7 +3223,7 @@
                   <a:srgbClr val="FFFFFF"/>
                 </a:solidFill>
               </a:rPr>
-              <a:t>Instructor Progress Test 2 Grams_Updated — Page 2 of 2</a:t>
+              <a:t>Instructor Progress Test 2 Grams_Updated — Page 1 of 2</a:t>
             </a:r>
           </a:p>
         </p:txBody>
@@ -4725,7 +3278,7 @@
                   <a:srgbClr val="1F3A5F"/>
                 </a:solidFill>
               </a:rPr>
-              <a:t>Gram 16: FR Intrepid-class, Category 1, Gandalf</a:t>
+              <a:t>Gram 1: FR Intrepid-class, Category 3, Dank</a:t>
             </a:r>
           </a:p>
         </p:txBody>
@@ -4835,7 +3388,7 @@
                   <a:srgbClr val="1F3A5F"/>
                 </a:solidFill>
               </a:rPr>
-              <a:t>Gram 17: FR Devastator, Category 3, Cardassia</a:t>
+              <a:t>Gram 2: FR Venator-class, Category 3, Betazed</a:t>
             </a:r>
           </a:p>
         </p:txBody>
@@ -4869,12 +3422,28 @@
               <a:t>Lofar 1</a:t>
             </a:r>
           </a:p>
+          <a:p>
+            <a:r>
+              <a:rPr sz="800">
+                <a:hlinkClick r:id="rId9"/>
+              </a:rPr>
+              <a:t>Lofar 2</a:t>
+            </a:r>
+          </a:p>
+          <a:p>
+            <a:r>
+              <a:rPr sz="800">
+                <a:hlinkClick r:id="rId10"/>
+              </a:rPr>
+              <a:t>Lofar 3</a:t>
+            </a:r>
+          </a:p>
         </p:txBody>
       </p:sp>
       <p:sp>
         <p:nvSpPr>
           <p:cNvPr id="7" name="Rounded Rectangle 6">
-            <a:hlinkClick r:id="rId9"/>
+            <a:hlinkClick r:id="rId11"/>
           </p:cNvPr>
           <p:cNvSpPr/>
           <p:nvPr/>
@@ -4921,7 +3490,7 @@
                   <a:srgbClr val="1F3A5F"/>
                 </a:solidFill>
               </a:rPr>
-              <a:t>Gram 18: FR Prometheus, Category 3, Dagobah</a:t>
+              <a:t>Gram 3: Lambda Shuttle contact bearing 096, codename Mustafar</a:t>
             </a:r>
           </a:p>
         </p:txBody>
@@ -4950,41 +3519,17 @@
           <a:p>
             <a:r>
               <a:rPr sz="800">
-                <a:hlinkClick r:id="rId10"/>
+                <a:hlinkClick r:id="rId12"/>
               </a:rPr>
               <a:t>Lofar 1</a:t>
             </a:r>
           </a:p>
-          <a:p>
-            <a:r>
-              <a:rPr sz="800">
-                <a:hlinkClick r:id="rId11"/>
-              </a:rPr>
-              <a:t>Lofar 2</a:t>
-            </a:r>
-          </a:p>
-          <a:p>
-            <a:r>
-              <a:rPr sz="800">
-                <a:hlinkClick r:id="rId12"/>
-              </a:rPr>
-              <a:t>Lofar 3</a:t>
-            </a:r>
-          </a:p>
-          <a:p>
-            <a:r>
-              <a:rPr sz="800">
-                <a:hlinkClick r:id="rId13"/>
-              </a:rPr>
-              <a:t>Lofar 4</a:t>
-            </a:r>
-          </a:p>
         </p:txBody>
       </p:sp>
       <p:sp>
         <p:nvSpPr>
           <p:cNvPr id="9" name="Rounded Rectangle 8">
-            <a:hlinkClick r:id="rId14"/>
+            <a:hlinkClick r:id="rId13"/>
           </p:cNvPr>
           <p:cNvSpPr/>
           <p:nvPr/>
@@ -5031,7 +3576,7 @@
                   <a:srgbClr val="1F3A5F"/>
                 </a:solidFill>
               </a:rPr>
-              <a:t>Gram 20: FR Nebulon-B, Category 4, Romulus</a:t>
+              <a:t>Gram 4: FR Galaxy-class, Category 3, Dank</a:t>
             </a:r>
           </a:p>
         </p:txBody>
@@ -5060,25 +3605,17 @@
           <a:p>
             <a:r>
               <a:rPr sz="800">
-                <a:hlinkClick r:id="rId15"/>
+                <a:hlinkClick r:id="rId14"/>
               </a:rPr>
               <a:t>Lofar 1</a:t>
             </a:r>
           </a:p>
-          <a:p>
-            <a:r>
-              <a:rPr sz="800">
-                <a:hlinkClick r:id="rId16"/>
-              </a:rPr>
-              <a:t>Lofar 2</a:t>
-            </a:r>
-          </a:p>
         </p:txBody>
       </p:sp>
       <p:sp>
         <p:nvSpPr>
           <p:cNvPr id="11" name="Rounded Rectangle 10">
-            <a:hlinkClick r:id="rId17"/>
+            <a:hlinkClick r:id="rId15"/>
           </p:cNvPr>
           <p:cNvSpPr/>
           <p:nvPr/>
@@ -5125,7 +3662,7 @@
                   <a:srgbClr val="1F3A5F"/>
                 </a:solidFill>
               </a:rPr>
-              <a:t>Gram 22: Nebulon-B contact bearing 283, codename Endor</a:t>
+              <a:t>Gram 5: FR Constitution-class, Category 3, Yavin</a:t>
             </a:r>
           </a:p>
         </p:txBody>
@@ -5154,33 +3691,17 @@
           <a:p>
             <a:r>
               <a:rPr sz="800">
-                <a:hlinkClick r:id="rId18"/>
+                <a:hlinkClick r:id="rId16"/>
               </a:rPr>
               <a:t>Lofar 1</a:t>
             </a:r>
           </a:p>
-          <a:p>
-            <a:r>
-              <a:rPr sz="800">
-                <a:hlinkClick r:id="rId19"/>
-              </a:rPr>
-              <a:t>Lofar 2</a:t>
-            </a:r>
-          </a:p>
-          <a:p>
-            <a:r>
-              <a:rPr sz="800">
-                <a:hlinkClick r:id="rId20"/>
-              </a:rPr>
-              <a:t>Lofar 3</a:t>
-            </a:r>
-          </a:p>
         </p:txBody>
       </p:sp>
       <p:sp>
         <p:nvSpPr>
           <p:cNvPr id="13" name="Rounded Rectangle 12">
-            <a:hlinkClick r:id="rId21"/>
+            <a:hlinkClick r:id="rId17"/>
           </p:cNvPr>
           <p:cNvSpPr/>
           <p:nvPr/>
@@ -5227,7 +3748,7 @@
                   <a:srgbClr val="1F3A5F"/>
                 </a:solidFill>
               </a:rPr>
-              <a:t>Gram 23: FR Equinox, Category 4, Hoth</a:t>
+              <a:t>Gram 6: FR Corellian Corvette, Category 2, Tantive</a:t>
             </a:r>
           </a:p>
         </p:txBody>
@@ -5256,17 +3777,41 @@
           <a:p>
             <a:r>
               <a:rPr sz="800">
-                <a:hlinkClick r:id="rId22"/>
+                <a:hlinkClick r:id="rId18"/>
               </a:rPr>
               <a:t>Lofar 1</a:t>
             </a:r>
           </a:p>
+          <a:p>
+            <a:r>
+              <a:rPr sz="800">
+                <a:hlinkClick r:id="rId19"/>
+              </a:rPr>
+              <a:t>Lofar 2</a:t>
+            </a:r>
+          </a:p>
+          <a:p>
+            <a:r>
+              <a:rPr sz="800">
+                <a:hlinkClick r:id="rId20"/>
+              </a:rPr>
+              <a:t>Lofar 3</a:t>
+            </a:r>
+          </a:p>
+          <a:p>
+            <a:r>
+              <a:rPr sz="800">
+                <a:hlinkClick r:id="rId21"/>
+              </a:rPr>
+              <a:t>Lofar 4</a:t>
+            </a:r>
+          </a:p>
         </p:txBody>
       </p:sp>
       <p:sp>
         <p:nvSpPr>
           <p:cNvPr id="15" name="Rounded Rectangle 14">
-            <a:hlinkClick r:id="rId23"/>
+            <a:hlinkClick r:id="rId22"/>
           </p:cNvPr>
           <p:cNvSpPr/>
           <p:nvPr/>
@@ -5313,7 +3858,7 @@
                   <a:srgbClr val="1F3A5F"/>
                 </a:solidFill>
               </a:rPr>
-              <a:t>Gram 24: FR Equinox, Category 1, Tantive</a:t>
+              <a:t>Gram 7: FR Millennium Falcon, Category 4, Romulus</a:t>
             </a:r>
           </a:p>
         </p:txBody>
@@ -5342,9 +3887,17 @@
           <a:p>
             <a:r>
               <a:rPr sz="800">
+                <a:hlinkClick r:id="rId23"/>
+              </a:rPr>
+              <a:t>Lofar 1</a:t>
+            </a:r>
+          </a:p>
+          <a:p>
+            <a:r>
+              <a:rPr sz="800">
                 <a:hlinkClick r:id="rId24"/>
               </a:rPr>
-              <a:t>Lofar 1</a:t>
+              <a:t>Lofar 2</a:t>
             </a:r>
           </a:p>
           <a:p>
@@ -5352,7 +3905,7 @@
               <a:rPr sz="800">
                 <a:hlinkClick r:id="rId25"/>
               </a:rPr>
-              <a:t>Lofar 2</a:t>
+              <a:t>Lofar 3</a:t>
             </a:r>
           </a:p>
           <a:p>
@@ -5360,14 +3913,6 @@
               <a:rPr sz="800">
                 <a:hlinkClick r:id="rId26"/>
               </a:rPr>
-              <a:t>Lofar 3</a:t>
-            </a:r>
-          </a:p>
-          <a:p>
-            <a:r>
-              <a:rPr sz="800">
-                <a:hlinkClick r:id="rId27"/>
-              </a:rPr>
               <a:t>Lofar 4</a:t>
             </a:r>
           </a:p>
@@ -5376,7 +3921,7 @@
       <p:sp>
         <p:nvSpPr>
           <p:cNvPr id="17" name="Rounded Rectangle 16">
-            <a:hlinkClick r:id="rId28"/>
+            <a:hlinkClick r:id="rId27"/>
           </p:cNvPr>
           <p:cNvSpPr/>
           <p:nvPr/>
@@ -5423,7 +3968,7 @@
                   <a:srgbClr val="1F3A5F"/>
                 </a:solidFill>
               </a:rPr>
-              <a:t>Gram 25: FR Galaxy-class, Category 4, Betazed</a:t>
+              <a:t>Gram 8: Nebulon-B contact bearing 297, codename Cardassia</a:t>
             </a:r>
           </a:p>
         </p:txBody>
@@ -5452,9 +3997,25 @@
           <a:p>
             <a:r>
               <a:rPr sz="800">
+                <a:hlinkClick r:id="rId28"/>
+              </a:rPr>
+              <a:t>Lofar 1</a:t>
+            </a:r>
+          </a:p>
+          <a:p>
+            <a:r>
+              <a:rPr sz="800">
                 <a:hlinkClick r:id="rId29"/>
               </a:rPr>
-              <a:t>Lofar 1</a:t>
+              <a:t>Lofar 2</a:t>
+            </a:r>
+          </a:p>
+          <a:p>
+            <a:r>
+              <a:rPr sz="800">
+                <a:hlinkClick r:id="rId30"/>
+              </a:rPr>
+              <a:t>Lofar 3</a:t>
             </a:r>
           </a:p>
         </p:txBody>
@@ -5462,7 +4023,7 @@
       <p:sp>
         <p:nvSpPr>
           <p:cNvPr id="19" name="Rounded Rectangle 18">
-            <a:hlinkClick r:id="rId30"/>
+            <a:hlinkClick r:id="rId31"/>
           </p:cNvPr>
           <p:cNvSpPr/>
           <p:nvPr/>
@@ -5509,7 +4070,7 @@
                   <a:srgbClr val="1F3A5F"/>
                 </a:solidFill>
               </a:rPr>
-              <a:t>Gram 26: FR Discovery, Category 4, Tantive</a:t>
+              <a:t>Gram 9: FR A-wing, Category 1, Romulus</a:t>
             </a:r>
           </a:p>
         </p:txBody>
@@ -5538,7 +4099,7 @@
           <a:p>
             <a:r>
               <a:rPr sz="800">
-                <a:hlinkClick r:id="rId31"/>
+                <a:hlinkClick r:id="rId32"/>
               </a:rPr>
               <a:t>Lofar 1</a:t>
             </a:r>
@@ -5546,7 +4107,7 @@
           <a:p>
             <a:r>
               <a:rPr sz="800">
-                <a:hlinkClick r:id="rId32"/>
+                <a:hlinkClick r:id="rId33"/>
               </a:rPr>
               <a:t>Lofar 2</a:t>
             </a:r>
@@ -5554,17 +4115,9 @@
           <a:p>
             <a:r>
               <a:rPr sz="800">
-                <a:hlinkClick r:id="rId33"/>
+                <a:hlinkClick r:id="rId34"/>
               </a:rPr>
               <a:t>Lofar 3</a:t>
-            </a:r>
-          </a:p>
-          <a:p>
-            <a:r>
-              <a:rPr sz="800">
-                <a:hlinkClick r:id="rId34"/>
-              </a:rPr>
-              <a:t>Lofar 4</a:t>
             </a:r>
           </a:p>
         </p:txBody>
@@ -5619,7 +4172,7 @@
                   <a:srgbClr val="1F3A5F"/>
                 </a:solidFill>
               </a:rPr>
-              <a:t>Gram 28: FR Voyager, Category 4, Romulus</a:t>
+              <a:t>Gram 10: FR Tantive IV, Category 4, Gandalf</a:t>
             </a:r>
           </a:p>
         </p:txBody>
@@ -5653,20 +4206,12 @@
               <a:t>Lofar 1</a:t>
             </a:r>
           </a:p>
-          <a:p>
-            <a:r>
-              <a:rPr sz="800">
-                <a:hlinkClick r:id="rId37"/>
-              </a:rPr>
-              <a:t>Lofar 2</a:t>
-            </a:r>
-          </a:p>
         </p:txBody>
       </p:sp>
       <p:sp>
         <p:nvSpPr>
           <p:cNvPr id="23" name="Rounded Rectangle 22">
-            <a:hlinkClick r:id="rId38"/>
+            <a:hlinkClick r:id="rId37"/>
           </p:cNvPr>
           <p:cNvSpPr/>
           <p:nvPr/>
@@ -5713,7 +4258,7 @@
                   <a:srgbClr val="1F3A5F"/>
                 </a:solidFill>
               </a:rPr>
-              <a:t>Gram 30: FR Akira-class, Category 2, Kobol</a:t>
+              <a:t>Gram 11: FR Razor Crest, Category 1, Betazed</a:t>
             </a:r>
           </a:p>
         </p:txBody>
@@ -5742,9 +4287,17 @@
           <a:p>
             <a:r>
               <a:rPr sz="800">
+                <a:hlinkClick r:id="rId38"/>
+              </a:rPr>
+              <a:t>Lofar 1</a:t>
+            </a:r>
+          </a:p>
+          <a:p>
+            <a:r>
+              <a:rPr sz="800">
                 <a:hlinkClick r:id="rId39"/>
               </a:rPr>
-              <a:t>Lofar 1</a:t>
+              <a:t>Lofar 2</a:t>
             </a:r>
           </a:p>
           <a:p>
@@ -5752,14 +4305,6 @@
               <a:rPr sz="800">
                 <a:hlinkClick r:id="rId40"/>
               </a:rPr>
-              <a:t>Lofar 2</a:t>
-            </a:r>
-          </a:p>
-          <a:p>
-            <a:r>
-              <a:rPr sz="800">
-                <a:hlinkClick r:id="rId41"/>
-              </a:rPr>
               <a:t>Lofar 3</a:t>
             </a:r>
           </a:p>
@@ -5768,7 +4313,7 @@
       <p:sp>
         <p:nvSpPr>
           <p:cNvPr id="25" name="Rounded Rectangle 24">
-            <a:hlinkClick r:id="rId42"/>
+            <a:hlinkClick r:id="rId41"/>
           </p:cNvPr>
           <p:cNvSpPr/>
           <p:nvPr/>
@@ -5815,7 +4360,7 @@
                   <a:srgbClr val="1F3A5F"/>
                 </a:solidFill>
               </a:rPr>
-              <a:t>Gram 31: X-wing contact bearing 051, codename Mustafar</a:t>
+              <a:t>Gram 12: FR Constitution-class, Category 1, Tatooine</a:t>
             </a:r>
           </a:p>
         </p:txBody>
@@ -5844,9 +4389,17 @@
           <a:p>
             <a:r>
               <a:rPr sz="800">
+                <a:hlinkClick r:id="rId42"/>
+              </a:rPr>
+              <a:t>Lofar 1</a:t>
+            </a:r>
+          </a:p>
+          <a:p>
+            <a:r>
+              <a:rPr sz="800">
                 <a:hlinkClick r:id="rId43"/>
               </a:rPr>
-              <a:t>Lofar 1</a:t>
+              <a:t>Lofar 2</a:t>
             </a:r>
           </a:p>
           <a:p>
@@ -5854,7 +4407,7 @@
               <a:rPr sz="800">
                 <a:hlinkClick r:id="rId44"/>
               </a:rPr>
-              <a:t>Lofar 2</a:t>
+              <a:t>Lofar 3</a:t>
             </a:r>
           </a:p>
         </p:txBody>
@@ -5909,7 +4462,7 @@
                   <a:srgbClr val="1F3A5F"/>
                 </a:solidFill>
               </a:rPr>
-              <a:t>Gram 32: FR Sovereign-class, Category 4, Naboo</a:t>
+              <a:t>Gram 13: FR Reliant, Category 2, Caprica</a:t>
             </a:r>
           </a:p>
         </p:txBody>
@@ -5943,36 +4496,12 @@
               <a:t>Lofar 1</a:t>
             </a:r>
           </a:p>
-          <a:p>
-            <a:r>
-              <a:rPr sz="800">
-                <a:hlinkClick r:id="rId47"/>
-              </a:rPr>
-              <a:t>Lofar 2</a:t>
-            </a:r>
-          </a:p>
-          <a:p>
-            <a:r>
-              <a:rPr sz="800">
-                <a:hlinkClick r:id="rId48"/>
-              </a:rPr>
-              <a:t>Lofar 3</a:t>
-            </a:r>
-          </a:p>
-          <a:p>
-            <a:r>
-              <a:rPr sz="800">
-                <a:hlinkClick r:id="rId49"/>
-              </a:rPr>
-              <a:t>Lofar 4</a:t>
-            </a:r>
-          </a:p>
         </p:txBody>
       </p:sp>
       <p:sp>
         <p:nvSpPr>
           <p:cNvPr id="29" name="Rounded Rectangle 28">
-            <a:hlinkClick r:id="rId50"/>
+            <a:hlinkClick r:id="rId47"/>
           </p:cNvPr>
           <p:cNvSpPr/>
           <p:nvPr/>
@@ -6019,7 +4548,7 @@
                   <a:srgbClr val="1F3A5F"/>
                 </a:solidFill>
               </a:rPr>
-              <a:t>Gram 34: FR Equinox, Category 2, Cardassia</a:t>
+              <a:t>Gram 14: FR TIE Fighter, Category 4, Tantive</a:t>
             </a:r>
           </a:p>
         </p:txBody>
@@ -6048,7 +4577,7 @@
           <a:p>
             <a:r>
               <a:rPr sz="800">
-                <a:hlinkClick r:id="rId51"/>
+                <a:hlinkClick r:id="rId48"/>
               </a:rPr>
               <a:t>Lofar 1</a:t>
             </a:r>
@@ -6056,7 +4585,7 @@
           <a:p>
             <a:r>
               <a:rPr sz="800">
-                <a:hlinkClick r:id="rId52"/>
+                <a:hlinkClick r:id="rId49"/>
               </a:rPr>
               <a:t>Lofar 2</a:t>
             </a:r>
@@ -6066,7 +4595,7 @@
       <p:sp>
         <p:nvSpPr>
           <p:cNvPr id="31" name="Rounded Rectangle 30">
-            <a:hlinkClick r:id="rId53"/>
+            <a:hlinkClick r:id="rId50"/>
           </p:cNvPr>
           <p:cNvSpPr/>
           <p:nvPr/>
@@ -6113,7 +4642,7 @@
                   <a:srgbClr val="1F3A5F"/>
                 </a:solidFill>
               </a:rPr>
-              <a:t>Gram 36: FR Cerritos, Category 3, Bajor</a:t>
+              <a:t>Gram 15: FR Prometheus, Category 1, Caprica</a:t>
             </a:r>
           </a:p>
         </p:txBody>
@@ -6142,9 +4671,1654 @@
           <a:p>
             <a:r>
               <a:rPr sz="800">
+                <a:hlinkClick r:id="rId51"/>
+              </a:rPr>
+              <a:t>Lofar 1</a:t>
+            </a:r>
+          </a:p>
+          <a:p>
+            <a:r>
+              <a:rPr sz="800">
+                <a:hlinkClick r:id="rId52"/>
+              </a:rPr>
+              <a:t>Lofar 2</a:t>
+            </a:r>
+          </a:p>
+          <a:p>
+            <a:r>
+              <a:rPr sz="800">
+                <a:hlinkClick r:id="rId53"/>
+              </a:rPr>
+              <a:t>Lofar 3</a:t>
+            </a:r>
+          </a:p>
+        </p:txBody>
+      </p:sp>
+    </p:spTree>
+  </p:cSld>
+  <p:clrMapOvr>
+    <a:masterClrMapping/>
+  </p:clrMapOvr>
+</p:sld>
+</file>
+
+<file path=ppt/slides/slide3.xml><?xml version="1.0" encoding="utf-8"?>
+<p:sld xmlns:a="http://schemas.openxmlformats.org/drawingml/2006/main" xmlns:p="http://schemas.openxmlformats.org/presentationml/2006/main" xmlns:r="http://schemas.openxmlformats.org/officeDocument/2006/relationships">
+  <p:cSld>
+    <p:spTree>
+      <p:nvGrpSpPr>
+        <p:cNvPr id="1" name=""/>
+        <p:cNvGrpSpPr/>
+        <p:nvPr/>
+      </p:nvGrpSpPr>
+      <p:grpSpPr/>
+      <p:sp>
+        <p:nvSpPr>
+          <p:cNvPr id="2" name="Rectangle 1"/>
+          <p:cNvSpPr/>
+          <p:nvPr/>
+        </p:nvSpPr>
+        <p:spPr>
+          <a:xfrm>
+            <a:off x="0" y="0"/>
+            <a:ext cx="12188952" cy="548640"/>
+          </a:xfrm>
+          <a:prstGeom prst="rect">
+            <a:avLst/>
+          </a:prstGeom>
+          <a:solidFill>
+            <a:srgbClr val="1F3A5F"/>
+          </a:solidFill>
+          <a:ln>
+            <a:noFill/>
+          </a:ln>
+        </p:spPr>
+        <p:style>
+          <a:lnRef idx="1">
+            <a:schemeClr val="accent1"/>
+          </a:lnRef>
+          <a:fillRef idx="3">
+            <a:schemeClr val="accent1"/>
+          </a:fillRef>
+          <a:effectRef idx="2">
+            <a:schemeClr val="accent1"/>
+          </a:effectRef>
+          <a:fontRef idx="minor">
+            <a:schemeClr val="lt1"/>
+          </a:fontRef>
+        </p:style>
+        <p:txBody>
+          <a:bodyPr rtlCol="0" anchor="ctr" lIns="182880" rIns="182880"/>
+          <a:lstStyle/>
+          <a:p>
+            <a:pPr algn="ctr"/>
+            <a:r>
+              <a:rPr sz="2000" b="1">
+                <a:solidFill>
+                  <a:srgbClr val="FFFFFF"/>
+                </a:solidFill>
+              </a:rPr>
+              <a:t>Instructor Progress Test 2 Grams_Updated — Page 2 of 2</a:t>
+            </a:r>
+          </a:p>
+        </p:txBody>
+      </p:sp>
+      <p:sp>
+        <p:nvSpPr>
+          <p:cNvPr id="3" name="Rounded Rectangle 2">
+            <a:hlinkClick r:id="rId2"/>
+          </p:cNvPr>
+          <p:cNvSpPr/>
+          <p:nvPr/>
+        </p:nvSpPr>
+        <p:spPr>
+          <a:xfrm>
+            <a:off x="365760" y="731520"/>
+            <a:ext cx="2200046" cy="365760"/>
+          </a:xfrm>
+          <a:prstGeom prst="roundRect">
+            <a:avLst/>
+          </a:prstGeom>
+          <a:solidFill>
+            <a:srgbClr val="E8EEF7"/>
+          </a:solidFill>
+          <a:ln>
+            <a:solidFill>
+              <a:srgbClr val="1F3A5F"/>
+            </a:solidFill>
+          </a:ln>
+        </p:spPr>
+        <p:style>
+          <a:lnRef idx="1">
+            <a:schemeClr val="accent1"/>
+          </a:lnRef>
+          <a:fillRef idx="3">
+            <a:schemeClr val="accent1"/>
+          </a:fillRef>
+          <a:effectRef idx="2">
+            <a:schemeClr val="accent1"/>
+          </a:effectRef>
+          <a:fontRef idx="minor">
+            <a:schemeClr val="lt1"/>
+          </a:fontRef>
+        </p:style>
+        <p:txBody>
+          <a:bodyPr rtlCol="0" anchor="ctr" lIns="45720" rIns="45720"/>
+          <a:lstStyle/>
+          <a:p>
+            <a:pPr algn="ctr"/>
+            <a:r>
+              <a:rPr sz="900">
+                <a:solidFill>
+                  <a:srgbClr val="1F3A5F"/>
+                </a:solidFill>
+              </a:rPr>
+              <a:t>Gram 16: FR Intrepid-class, Category 1, Gandalf</a:t>
+            </a:r>
+          </a:p>
+        </p:txBody>
+      </p:sp>
+      <p:sp>
+        <p:nvSpPr>
+          <p:cNvPr id="4" name="TextBox 3"/>
+          <p:cNvSpPr txBox="1"/>
+          <p:nvPr/>
+        </p:nvSpPr>
+        <p:spPr>
+          <a:xfrm>
+            <a:off x="365760" y="1115568"/>
+            <a:ext cx="2200046" cy="1447800"/>
+          </a:xfrm>
+          <a:prstGeom prst="rect">
+            <a:avLst/>
+          </a:prstGeom>
+          <a:noFill/>
+        </p:spPr>
+        <p:txBody>
+          <a:bodyPr wrap="square">
+            <a:spAutoFit/>
+          </a:bodyPr>
+          <a:lstStyle/>
+          <a:p>
+            <a:r>
+              <a:rPr sz="800">
+                <a:hlinkClick r:id="rId3"/>
+              </a:rPr>
+              <a:t>Lofar 1</a:t>
+            </a:r>
+          </a:p>
+          <a:p>
+            <a:r>
+              <a:rPr sz="800">
+                <a:hlinkClick r:id="rId4"/>
+              </a:rPr>
+              <a:t>Lofar 2</a:t>
+            </a:r>
+          </a:p>
+          <a:p>
+            <a:r>
+              <a:rPr sz="800">
+                <a:hlinkClick r:id="rId5"/>
+              </a:rPr>
+              <a:t>Lofar 3</a:t>
+            </a:r>
+          </a:p>
+          <a:p>
+            <a:r>
+              <a:rPr sz="800">
+                <a:hlinkClick r:id="rId6"/>
+              </a:rPr>
+              <a:t>Lofar 4</a:t>
+            </a:r>
+          </a:p>
+        </p:txBody>
+      </p:sp>
+      <p:sp>
+        <p:nvSpPr>
+          <p:cNvPr id="5" name="Rounded Rectangle 4">
+            <a:hlinkClick r:id="rId7"/>
+          </p:cNvPr>
+          <p:cNvSpPr/>
+          <p:nvPr/>
+        </p:nvSpPr>
+        <p:spPr>
+          <a:xfrm>
+            <a:off x="2657246" y="731520"/>
+            <a:ext cx="2200046" cy="365760"/>
+          </a:xfrm>
+          <a:prstGeom prst="roundRect">
+            <a:avLst/>
+          </a:prstGeom>
+          <a:solidFill>
+            <a:srgbClr val="E8EEF7"/>
+          </a:solidFill>
+          <a:ln>
+            <a:solidFill>
+              <a:srgbClr val="1F3A5F"/>
+            </a:solidFill>
+          </a:ln>
+        </p:spPr>
+        <p:style>
+          <a:lnRef idx="1">
+            <a:schemeClr val="accent1"/>
+          </a:lnRef>
+          <a:fillRef idx="3">
+            <a:schemeClr val="accent1"/>
+          </a:fillRef>
+          <a:effectRef idx="2">
+            <a:schemeClr val="accent1"/>
+          </a:effectRef>
+          <a:fontRef idx="minor">
+            <a:schemeClr val="lt1"/>
+          </a:fontRef>
+        </p:style>
+        <p:txBody>
+          <a:bodyPr rtlCol="0" anchor="ctr" lIns="45720" rIns="45720"/>
+          <a:lstStyle/>
+          <a:p>
+            <a:pPr algn="ctr"/>
+            <a:r>
+              <a:rPr sz="900">
+                <a:solidFill>
+                  <a:srgbClr val="1F3A5F"/>
+                </a:solidFill>
+              </a:rPr>
+              <a:t>Gram 17: FR Devastator, Category 3, Cardassia</a:t>
+            </a:r>
+          </a:p>
+        </p:txBody>
+      </p:sp>
+      <p:sp>
+        <p:nvSpPr>
+          <p:cNvPr id="6" name="TextBox 5"/>
+          <p:cNvSpPr txBox="1"/>
+          <p:nvPr/>
+        </p:nvSpPr>
+        <p:spPr>
+          <a:xfrm>
+            <a:off x="2657246" y="1115568"/>
+            <a:ext cx="2200046" cy="1447800"/>
+          </a:xfrm>
+          <a:prstGeom prst="rect">
+            <a:avLst/>
+          </a:prstGeom>
+          <a:noFill/>
+        </p:spPr>
+        <p:txBody>
+          <a:bodyPr wrap="square">
+            <a:spAutoFit/>
+          </a:bodyPr>
+          <a:lstStyle/>
+          <a:p>
+            <a:r>
+              <a:rPr sz="800">
+                <a:hlinkClick r:id="rId8"/>
+              </a:rPr>
+              <a:t>Lofar 1</a:t>
+            </a:r>
+          </a:p>
+        </p:txBody>
+      </p:sp>
+      <p:sp>
+        <p:nvSpPr>
+          <p:cNvPr id="7" name="Rounded Rectangle 6">
+            <a:hlinkClick r:id="rId9"/>
+          </p:cNvPr>
+          <p:cNvSpPr/>
+          <p:nvPr/>
+        </p:nvSpPr>
+        <p:spPr>
+          <a:xfrm>
+            <a:off x="4948732" y="731520"/>
+            <a:ext cx="2200046" cy="365760"/>
+          </a:xfrm>
+          <a:prstGeom prst="roundRect">
+            <a:avLst/>
+          </a:prstGeom>
+          <a:solidFill>
+            <a:srgbClr val="E8EEF7"/>
+          </a:solidFill>
+          <a:ln>
+            <a:solidFill>
+              <a:srgbClr val="1F3A5F"/>
+            </a:solidFill>
+          </a:ln>
+        </p:spPr>
+        <p:style>
+          <a:lnRef idx="1">
+            <a:schemeClr val="accent1"/>
+          </a:lnRef>
+          <a:fillRef idx="3">
+            <a:schemeClr val="accent1"/>
+          </a:fillRef>
+          <a:effectRef idx="2">
+            <a:schemeClr val="accent1"/>
+          </a:effectRef>
+          <a:fontRef idx="minor">
+            <a:schemeClr val="lt1"/>
+          </a:fontRef>
+        </p:style>
+        <p:txBody>
+          <a:bodyPr rtlCol="0" anchor="ctr" lIns="45720" rIns="45720"/>
+          <a:lstStyle/>
+          <a:p>
+            <a:pPr algn="ctr"/>
+            <a:r>
+              <a:rPr sz="900">
+                <a:solidFill>
+                  <a:srgbClr val="1F3A5F"/>
+                </a:solidFill>
+              </a:rPr>
+              <a:t>Gram 18: FR Prometheus, Category 3, Dagobah</a:t>
+            </a:r>
+          </a:p>
+        </p:txBody>
+      </p:sp>
+      <p:sp>
+        <p:nvSpPr>
+          <p:cNvPr id="8" name="TextBox 7"/>
+          <p:cNvSpPr txBox="1"/>
+          <p:nvPr/>
+        </p:nvSpPr>
+        <p:spPr>
+          <a:xfrm>
+            <a:off x="4948732" y="1115568"/>
+            <a:ext cx="2200046" cy="1447800"/>
+          </a:xfrm>
+          <a:prstGeom prst="rect">
+            <a:avLst/>
+          </a:prstGeom>
+          <a:noFill/>
+        </p:spPr>
+        <p:txBody>
+          <a:bodyPr wrap="square">
+            <a:spAutoFit/>
+          </a:bodyPr>
+          <a:lstStyle/>
+          <a:p>
+            <a:r>
+              <a:rPr sz="800">
+                <a:hlinkClick r:id="rId10"/>
+              </a:rPr>
+              <a:t>Lofar 1</a:t>
+            </a:r>
+          </a:p>
+          <a:p>
+            <a:r>
+              <a:rPr sz="800">
+                <a:hlinkClick r:id="rId11"/>
+              </a:rPr>
+              <a:t>Lofar 2</a:t>
+            </a:r>
+          </a:p>
+          <a:p>
+            <a:r>
+              <a:rPr sz="800">
+                <a:hlinkClick r:id="rId12"/>
+              </a:rPr>
+              <a:t>Lofar 3</a:t>
+            </a:r>
+          </a:p>
+          <a:p>
+            <a:r>
+              <a:rPr sz="800">
+                <a:hlinkClick r:id="rId13"/>
+              </a:rPr>
+              <a:t>Lofar 4</a:t>
+            </a:r>
+          </a:p>
+        </p:txBody>
+      </p:sp>
+      <p:sp>
+        <p:nvSpPr>
+          <p:cNvPr id="9" name="Rounded Rectangle 8">
+            <a:hlinkClick r:id="rId14"/>
+          </p:cNvPr>
+          <p:cNvSpPr/>
+          <p:nvPr/>
+        </p:nvSpPr>
+        <p:spPr>
+          <a:xfrm>
+            <a:off x="7240219" y="731520"/>
+            <a:ext cx="2200046" cy="365760"/>
+          </a:xfrm>
+          <a:prstGeom prst="roundRect">
+            <a:avLst/>
+          </a:prstGeom>
+          <a:solidFill>
+            <a:srgbClr val="E8EEF7"/>
+          </a:solidFill>
+          <a:ln>
+            <a:solidFill>
+              <a:srgbClr val="1F3A5F"/>
+            </a:solidFill>
+          </a:ln>
+        </p:spPr>
+        <p:style>
+          <a:lnRef idx="1">
+            <a:schemeClr val="accent1"/>
+          </a:lnRef>
+          <a:fillRef idx="3">
+            <a:schemeClr val="accent1"/>
+          </a:fillRef>
+          <a:effectRef idx="2">
+            <a:schemeClr val="accent1"/>
+          </a:effectRef>
+          <a:fontRef idx="minor">
+            <a:schemeClr val="lt1"/>
+          </a:fontRef>
+        </p:style>
+        <p:txBody>
+          <a:bodyPr rtlCol="0" anchor="ctr" lIns="45720" rIns="45720"/>
+          <a:lstStyle/>
+          <a:p>
+            <a:pPr algn="ctr"/>
+            <a:r>
+              <a:rPr sz="900">
+                <a:solidFill>
+                  <a:srgbClr val="1F3A5F"/>
+                </a:solidFill>
+              </a:rPr>
+              <a:t>Gram 20: FR Nebulon-B, Category 4, Romulus</a:t>
+            </a:r>
+          </a:p>
+        </p:txBody>
+      </p:sp>
+      <p:sp>
+        <p:nvSpPr>
+          <p:cNvPr id="10" name="TextBox 9"/>
+          <p:cNvSpPr txBox="1"/>
+          <p:nvPr/>
+        </p:nvSpPr>
+        <p:spPr>
+          <a:xfrm>
+            <a:off x="7240219" y="1115568"/>
+            <a:ext cx="2200046" cy="1447800"/>
+          </a:xfrm>
+          <a:prstGeom prst="rect">
+            <a:avLst/>
+          </a:prstGeom>
+          <a:noFill/>
+        </p:spPr>
+        <p:txBody>
+          <a:bodyPr wrap="square">
+            <a:spAutoFit/>
+          </a:bodyPr>
+          <a:lstStyle/>
+          <a:p>
+            <a:r>
+              <a:rPr sz="800">
+                <a:hlinkClick r:id="rId15"/>
+              </a:rPr>
+              <a:t>Lofar 1</a:t>
+            </a:r>
+          </a:p>
+          <a:p>
+            <a:r>
+              <a:rPr sz="800">
+                <a:hlinkClick r:id="rId16"/>
+              </a:rPr>
+              <a:t>Lofar 2</a:t>
+            </a:r>
+          </a:p>
+        </p:txBody>
+      </p:sp>
+      <p:sp>
+        <p:nvSpPr>
+          <p:cNvPr id="11" name="Rounded Rectangle 10">
+            <a:hlinkClick r:id="rId17"/>
+          </p:cNvPr>
+          <p:cNvSpPr/>
+          <p:nvPr/>
+        </p:nvSpPr>
+        <p:spPr>
+          <a:xfrm>
+            <a:off x="9531705" y="731520"/>
+            <a:ext cx="2200046" cy="365760"/>
+          </a:xfrm>
+          <a:prstGeom prst="roundRect">
+            <a:avLst/>
+          </a:prstGeom>
+          <a:solidFill>
+            <a:srgbClr val="E8EEF7"/>
+          </a:solidFill>
+          <a:ln>
+            <a:solidFill>
+              <a:srgbClr val="1F3A5F"/>
+            </a:solidFill>
+          </a:ln>
+        </p:spPr>
+        <p:style>
+          <a:lnRef idx="1">
+            <a:schemeClr val="accent1"/>
+          </a:lnRef>
+          <a:fillRef idx="3">
+            <a:schemeClr val="accent1"/>
+          </a:fillRef>
+          <a:effectRef idx="2">
+            <a:schemeClr val="accent1"/>
+          </a:effectRef>
+          <a:fontRef idx="minor">
+            <a:schemeClr val="lt1"/>
+          </a:fontRef>
+        </p:style>
+        <p:txBody>
+          <a:bodyPr rtlCol="0" anchor="ctr" lIns="45720" rIns="45720"/>
+          <a:lstStyle/>
+          <a:p>
+            <a:pPr algn="ctr"/>
+            <a:r>
+              <a:rPr sz="900">
+                <a:solidFill>
+                  <a:srgbClr val="1F3A5F"/>
+                </a:solidFill>
+              </a:rPr>
+              <a:t>Gram 22: Nebulon-B contact bearing 283, codename Endor</a:t>
+            </a:r>
+          </a:p>
+        </p:txBody>
+      </p:sp>
+      <p:sp>
+        <p:nvSpPr>
+          <p:cNvPr id="12" name="TextBox 11"/>
+          <p:cNvSpPr txBox="1"/>
+          <p:nvPr/>
+        </p:nvSpPr>
+        <p:spPr>
+          <a:xfrm>
+            <a:off x="9531705" y="1115568"/>
+            <a:ext cx="2200046" cy="1447800"/>
+          </a:xfrm>
+          <a:prstGeom prst="rect">
+            <a:avLst/>
+          </a:prstGeom>
+          <a:noFill/>
+        </p:spPr>
+        <p:txBody>
+          <a:bodyPr wrap="square">
+            <a:spAutoFit/>
+          </a:bodyPr>
+          <a:lstStyle/>
+          <a:p>
+            <a:r>
+              <a:rPr sz="800">
+                <a:hlinkClick r:id="rId18"/>
+              </a:rPr>
+              <a:t>Lofar 1</a:t>
+            </a:r>
+          </a:p>
+          <a:p>
+            <a:r>
+              <a:rPr sz="800">
+                <a:hlinkClick r:id="rId19"/>
+              </a:rPr>
+              <a:t>Lofar 2</a:t>
+            </a:r>
+          </a:p>
+          <a:p>
+            <a:r>
+              <a:rPr sz="800">
+                <a:hlinkClick r:id="rId20"/>
+              </a:rPr>
+              <a:t>Lofar 3</a:t>
+            </a:r>
+          </a:p>
+        </p:txBody>
+      </p:sp>
+      <p:sp>
+        <p:nvSpPr>
+          <p:cNvPr id="13" name="Rounded Rectangle 12">
+            <a:hlinkClick r:id="rId21"/>
+          </p:cNvPr>
+          <p:cNvSpPr/>
+          <p:nvPr/>
+        </p:nvSpPr>
+        <p:spPr>
+          <a:xfrm>
+            <a:off x="365760" y="2682240"/>
+            <a:ext cx="2200046" cy="365760"/>
+          </a:xfrm>
+          <a:prstGeom prst="roundRect">
+            <a:avLst/>
+          </a:prstGeom>
+          <a:solidFill>
+            <a:srgbClr val="E8EEF7"/>
+          </a:solidFill>
+          <a:ln>
+            <a:solidFill>
+              <a:srgbClr val="1F3A5F"/>
+            </a:solidFill>
+          </a:ln>
+        </p:spPr>
+        <p:style>
+          <a:lnRef idx="1">
+            <a:schemeClr val="accent1"/>
+          </a:lnRef>
+          <a:fillRef idx="3">
+            <a:schemeClr val="accent1"/>
+          </a:fillRef>
+          <a:effectRef idx="2">
+            <a:schemeClr val="accent1"/>
+          </a:effectRef>
+          <a:fontRef idx="minor">
+            <a:schemeClr val="lt1"/>
+          </a:fontRef>
+        </p:style>
+        <p:txBody>
+          <a:bodyPr rtlCol="0" anchor="ctr" lIns="45720" rIns="45720"/>
+          <a:lstStyle/>
+          <a:p>
+            <a:pPr algn="ctr"/>
+            <a:r>
+              <a:rPr sz="900">
+                <a:solidFill>
+                  <a:srgbClr val="1F3A5F"/>
+                </a:solidFill>
+              </a:rPr>
+              <a:t>Gram 23: FR Equinox, Category 4, Hoth</a:t>
+            </a:r>
+          </a:p>
+        </p:txBody>
+      </p:sp>
+      <p:sp>
+        <p:nvSpPr>
+          <p:cNvPr id="14" name="TextBox 13"/>
+          <p:cNvSpPr txBox="1"/>
+          <p:nvPr/>
+        </p:nvSpPr>
+        <p:spPr>
+          <a:xfrm>
+            <a:off x="365760" y="3066288"/>
+            <a:ext cx="2200046" cy="1447800"/>
+          </a:xfrm>
+          <a:prstGeom prst="rect">
+            <a:avLst/>
+          </a:prstGeom>
+          <a:noFill/>
+        </p:spPr>
+        <p:txBody>
+          <a:bodyPr wrap="square">
+            <a:spAutoFit/>
+          </a:bodyPr>
+          <a:lstStyle/>
+          <a:p>
+            <a:r>
+              <a:rPr sz="800">
+                <a:hlinkClick r:id="rId22"/>
+              </a:rPr>
+              <a:t>Lofar 1</a:t>
+            </a:r>
+          </a:p>
+        </p:txBody>
+      </p:sp>
+      <p:sp>
+        <p:nvSpPr>
+          <p:cNvPr id="15" name="Rounded Rectangle 14">
+            <a:hlinkClick r:id="rId23"/>
+          </p:cNvPr>
+          <p:cNvSpPr/>
+          <p:nvPr/>
+        </p:nvSpPr>
+        <p:spPr>
+          <a:xfrm>
+            <a:off x="2657246" y="2682240"/>
+            <a:ext cx="2200046" cy="365760"/>
+          </a:xfrm>
+          <a:prstGeom prst="roundRect">
+            <a:avLst/>
+          </a:prstGeom>
+          <a:solidFill>
+            <a:srgbClr val="E8EEF7"/>
+          </a:solidFill>
+          <a:ln>
+            <a:solidFill>
+              <a:srgbClr val="1F3A5F"/>
+            </a:solidFill>
+          </a:ln>
+        </p:spPr>
+        <p:style>
+          <a:lnRef idx="1">
+            <a:schemeClr val="accent1"/>
+          </a:lnRef>
+          <a:fillRef idx="3">
+            <a:schemeClr val="accent1"/>
+          </a:fillRef>
+          <a:effectRef idx="2">
+            <a:schemeClr val="accent1"/>
+          </a:effectRef>
+          <a:fontRef idx="minor">
+            <a:schemeClr val="lt1"/>
+          </a:fontRef>
+        </p:style>
+        <p:txBody>
+          <a:bodyPr rtlCol="0" anchor="ctr" lIns="45720" rIns="45720"/>
+          <a:lstStyle/>
+          <a:p>
+            <a:pPr algn="ctr"/>
+            <a:r>
+              <a:rPr sz="900">
+                <a:solidFill>
+                  <a:srgbClr val="1F3A5F"/>
+                </a:solidFill>
+              </a:rPr>
+              <a:t>Gram 24: FR Equinox, Category 1, Tantive</a:t>
+            </a:r>
+          </a:p>
+        </p:txBody>
+      </p:sp>
+      <p:sp>
+        <p:nvSpPr>
+          <p:cNvPr id="16" name="TextBox 15"/>
+          <p:cNvSpPr txBox="1"/>
+          <p:nvPr/>
+        </p:nvSpPr>
+        <p:spPr>
+          <a:xfrm>
+            <a:off x="2657246" y="3066288"/>
+            <a:ext cx="2200046" cy="1447800"/>
+          </a:xfrm>
+          <a:prstGeom prst="rect">
+            <a:avLst/>
+          </a:prstGeom>
+          <a:noFill/>
+        </p:spPr>
+        <p:txBody>
+          <a:bodyPr wrap="square">
+            <a:spAutoFit/>
+          </a:bodyPr>
+          <a:lstStyle/>
+          <a:p>
+            <a:r>
+              <a:rPr sz="800">
+                <a:hlinkClick r:id="rId24"/>
+              </a:rPr>
+              <a:t>Lofar 1</a:t>
+            </a:r>
+          </a:p>
+          <a:p>
+            <a:r>
+              <a:rPr sz="800">
+                <a:hlinkClick r:id="rId25"/>
+              </a:rPr>
+              <a:t>Lofar 2</a:t>
+            </a:r>
+          </a:p>
+          <a:p>
+            <a:r>
+              <a:rPr sz="800">
+                <a:hlinkClick r:id="rId26"/>
+              </a:rPr>
+              <a:t>Lofar 3</a:t>
+            </a:r>
+          </a:p>
+          <a:p>
+            <a:r>
+              <a:rPr sz="800">
+                <a:hlinkClick r:id="rId27"/>
+              </a:rPr>
+              <a:t>Lofar 4</a:t>
+            </a:r>
+          </a:p>
+        </p:txBody>
+      </p:sp>
+      <p:sp>
+        <p:nvSpPr>
+          <p:cNvPr id="17" name="Rounded Rectangle 16">
+            <a:hlinkClick r:id="rId28"/>
+          </p:cNvPr>
+          <p:cNvSpPr/>
+          <p:nvPr/>
+        </p:nvSpPr>
+        <p:spPr>
+          <a:xfrm>
+            <a:off x="4948732" y="2682240"/>
+            <a:ext cx="2200046" cy="365760"/>
+          </a:xfrm>
+          <a:prstGeom prst="roundRect">
+            <a:avLst/>
+          </a:prstGeom>
+          <a:solidFill>
+            <a:srgbClr val="E8EEF7"/>
+          </a:solidFill>
+          <a:ln>
+            <a:solidFill>
+              <a:srgbClr val="1F3A5F"/>
+            </a:solidFill>
+          </a:ln>
+        </p:spPr>
+        <p:style>
+          <a:lnRef idx="1">
+            <a:schemeClr val="accent1"/>
+          </a:lnRef>
+          <a:fillRef idx="3">
+            <a:schemeClr val="accent1"/>
+          </a:fillRef>
+          <a:effectRef idx="2">
+            <a:schemeClr val="accent1"/>
+          </a:effectRef>
+          <a:fontRef idx="minor">
+            <a:schemeClr val="lt1"/>
+          </a:fontRef>
+        </p:style>
+        <p:txBody>
+          <a:bodyPr rtlCol="0" anchor="ctr" lIns="45720" rIns="45720"/>
+          <a:lstStyle/>
+          <a:p>
+            <a:pPr algn="ctr"/>
+            <a:r>
+              <a:rPr sz="900">
+                <a:solidFill>
+                  <a:srgbClr val="1F3A5F"/>
+                </a:solidFill>
+              </a:rPr>
+              <a:t>Gram 25: FR Galaxy-class, Category 4, Betazed</a:t>
+            </a:r>
+          </a:p>
+        </p:txBody>
+      </p:sp>
+      <p:sp>
+        <p:nvSpPr>
+          <p:cNvPr id="18" name="TextBox 17"/>
+          <p:cNvSpPr txBox="1"/>
+          <p:nvPr/>
+        </p:nvSpPr>
+        <p:spPr>
+          <a:xfrm>
+            <a:off x="4948732" y="3066288"/>
+            <a:ext cx="2200046" cy="1447800"/>
+          </a:xfrm>
+          <a:prstGeom prst="rect">
+            <a:avLst/>
+          </a:prstGeom>
+          <a:noFill/>
+        </p:spPr>
+        <p:txBody>
+          <a:bodyPr wrap="square">
+            <a:spAutoFit/>
+          </a:bodyPr>
+          <a:lstStyle/>
+          <a:p>
+            <a:r>
+              <a:rPr sz="800">
+                <a:hlinkClick r:id="rId29"/>
+              </a:rPr>
+              <a:t>Lofar 1</a:t>
+            </a:r>
+          </a:p>
+        </p:txBody>
+      </p:sp>
+      <p:sp>
+        <p:nvSpPr>
+          <p:cNvPr id="19" name="Rounded Rectangle 18">
+            <a:hlinkClick r:id="rId30"/>
+          </p:cNvPr>
+          <p:cNvSpPr/>
+          <p:nvPr/>
+        </p:nvSpPr>
+        <p:spPr>
+          <a:xfrm>
+            <a:off x="7240219" y="2682240"/>
+            <a:ext cx="2200046" cy="365760"/>
+          </a:xfrm>
+          <a:prstGeom prst="roundRect">
+            <a:avLst/>
+          </a:prstGeom>
+          <a:solidFill>
+            <a:srgbClr val="E8EEF7"/>
+          </a:solidFill>
+          <a:ln>
+            <a:solidFill>
+              <a:srgbClr val="1F3A5F"/>
+            </a:solidFill>
+          </a:ln>
+        </p:spPr>
+        <p:style>
+          <a:lnRef idx="1">
+            <a:schemeClr val="accent1"/>
+          </a:lnRef>
+          <a:fillRef idx="3">
+            <a:schemeClr val="accent1"/>
+          </a:fillRef>
+          <a:effectRef idx="2">
+            <a:schemeClr val="accent1"/>
+          </a:effectRef>
+          <a:fontRef idx="minor">
+            <a:schemeClr val="lt1"/>
+          </a:fontRef>
+        </p:style>
+        <p:txBody>
+          <a:bodyPr rtlCol="0" anchor="ctr" lIns="45720" rIns="45720"/>
+          <a:lstStyle/>
+          <a:p>
+            <a:pPr algn="ctr"/>
+            <a:r>
+              <a:rPr sz="900">
+                <a:solidFill>
+                  <a:srgbClr val="1F3A5F"/>
+                </a:solidFill>
+              </a:rPr>
+              <a:t>Gram 26: FR Discovery, Category 4, Tantive</a:t>
+            </a:r>
+          </a:p>
+        </p:txBody>
+      </p:sp>
+      <p:sp>
+        <p:nvSpPr>
+          <p:cNvPr id="20" name="TextBox 19"/>
+          <p:cNvSpPr txBox="1"/>
+          <p:nvPr/>
+        </p:nvSpPr>
+        <p:spPr>
+          <a:xfrm>
+            <a:off x="7240219" y="3066288"/>
+            <a:ext cx="2200046" cy="1447800"/>
+          </a:xfrm>
+          <a:prstGeom prst="rect">
+            <a:avLst/>
+          </a:prstGeom>
+          <a:noFill/>
+        </p:spPr>
+        <p:txBody>
+          <a:bodyPr wrap="square">
+            <a:spAutoFit/>
+          </a:bodyPr>
+          <a:lstStyle/>
+          <a:p>
+            <a:r>
+              <a:rPr sz="800">
+                <a:hlinkClick r:id="rId31"/>
+              </a:rPr>
+              <a:t>Lofar 1</a:t>
+            </a:r>
+          </a:p>
+          <a:p>
+            <a:r>
+              <a:rPr sz="800">
+                <a:hlinkClick r:id="rId32"/>
+              </a:rPr>
+              <a:t>Lofar 2</a:t>
+            </a:r>
+          </a:p>
+          <a:p>
+            <a:r>
+              <a:rPr sz="800">
+                <a:hlinkClick r:id="rId33"/>
+              </a:rPr>
+              <a:t>Lofar 3</a:t>
+            </a:r>
+          </a:p>
+          <a:p>
+            <a:r>
+              <a:rPr sz="800">
+                <a:hlinkClick r:id="rId34"/>
+              </a:rPr>
+              <a:t>Lofar 4</a:t>
+            </a:r>
+          </a:p>
+        </p:txBody>
+      </p:sp>
+      <p:sp>
+        <p:nvSpPr>
+          <p:cNvPr id="21" name="Rounded Rectangle 20">
+            <a:hlinkClick r:id="rId35"/>
+          </p:cNvPr>
+          <p:cNvSpPr/>
+          <p:nvPr/>
+        </p:nvSpPr>
+        <p:spPr>
+          <a:xfrm>
+            <a:off x="9531705" y="2682240"/>
+            <a:ext cx="2200046" cy="365760"/>
+          </a:xfrm>
+          <a:prstGeom prst="roundRect">
+            <a:avLst/>
+          </a:prstGeom>
+          <a:solidFill>
+            <a:srgbClr val="E8EEF7"/>
+          </a:solidFill>
+          <a:ln>
+            <a:solidFill>
+              <a:srgbClr val="1F3A5F"/>
+            </a:solidFill>
+          </a:ln>
+        </p:spPr>
+        <p:style>
+          <a:lnRef idx="1">
+            <a:schemeClr val="accent1"/>
+          </a:lnRef>
+          <a:fillRef idx="3">
+            <a:schemeClr val="accent1"/>
+          </a:fillRef>
+          <a:effectRef idx="2">
+            <a:schemeClr val="accent1"/>
+          </a:effectRef>
+          <a:fontRef idx="minor">
+            <a:schemeClr val="lt1"/>
+          </a:fontRef>
+        </p:style>
+        <p:txBody>
+          <a:bodyPr rtlCol="0" anchor="ctr" lIns="45720" rIns="45720"/>
+          <a:lstStyle/>
+          <a:p>
+            <a:pPr algn="ctr"/>
+            <a:r>
+              <a:rPr sz="900">
+                <a:solidFill>
+                  <a:srgbClr val="1F3A5F"/>
+                </a:solidFill>
+              </a:rPr>
+              <a:t>Gram 28: FR Voyager, Category 4, Romulus</a:t>
+            </a:r>
+          </a:p>
+        </p:txBody>
+      </p:sp>
+      <p:sp>
+        <p:nvSpPr>
+          <p:cNvPr id="22" name="TextBox 21"/>
+          <p:cNvSpPr txBox="1"/>
+          <p:nvPr/>
+        </p:nvSpPr>
+        <p:spPr>
+          <a:xfrm>
+            <a:off x="9531705" y="3066288"/>
+            <a:ext cx="2200046" cy="1447800"/>
+          </a:xfrm>
+          <a:prstGeom prst="rect">
+            <a:avLst/>
+          </a:prstGeom>
+          <a:noFill/>
+        </p:spPr>
+        <p:txBody>
+          <a:bodyPr wrap="square">
+            <a:spAutoFit/>
+          </a:bodyPr>
+          <a:lstStyle/>
+          <a:p>
+            <a:r>
+              <a:rPr sz="800">
+                <a:hlinkClick r:id="rId36"/>
+              </a:rPr>
+              <a:t>Lofar 1</a:t>
+            </a:r>
+          </a:p>
+          <a:p>
+            <a:r>
+              <a:rPr sz="800">
+                <a:hlinkClick r:id="rId37"/>
+              </a:rPr>
+              <a:t>Lofar 2</a:t>
+            </a:r>
+          </a:p>
+        </p:txBody>
+      </p:sp>
+      <p:sp>
+        <p:nvSpPr>
+          <p:cNvPr id="23" name="Rounded Rectangle 22">
+            <a:hlinkClick r:id="rId38"/>
+          </p:cNvPr>
+          <p:cNvSpPr/>
+          <p:nvPr/>
+        </p:nvSpPr>
+        <p:spPr>
+          <a:xfrm>
+            <a:off x="365760" y="4632960"/>
+            <a:ext cx="2200046" cy="365760"/>
+          </a:xfrm>
+          <a:prstGeom prst="roundRect">
+            <a:avLst/>
+          </a:prstGeom>
+          <a:solidFill>
+            <a:srgbClr val="E8EEF7"/>
+          </a:solidFill>
+          <a:ln>
+            <a:solidFill>
+              <a:srgbClr val="1F3A5F"/>
+            </a:solidFill>
+          </a:ln>
+        </p:spPr>
+        <p:style>
+          <a:lnRef idx="1">
+            <a:schemeClr val="accent1"/>
+          </a:lnRef>
+          <a:fillRef idx="3">
+            <a:schemeClr val="accent1"/>
+          </a:fillRef>
+          <a:effectRef idx="2">
+            <a:schemeClr val="accent1"/>
+          </a:effectRef>
+          <a:fontRef idx="minor">
+            <a:schemeClr val="lt1"/>
+          </a:fontRef>
+        </p:style>
+        <p:txBody>
+          <a:bodyPr rtlCol="0" anchor="ctr" lIns="45720" rIns="45720"/>
+          <a:lstStyle/>
+          <a:p>
+            <a:pPr algn="ctr"/>
+            <a:r>
+              <a:rPr sz="900">
+                <a:solidFill>
+                  <a:srgbClr val="1F3A5F"/>
+                </a:solidFill>
+              </a:rPr>
+              <a:t>Gram 30: FR Akira-class, Category 2, Kobol</a:t>
+            </a:r>
+          </a:p>
+        </p:txBody>
+      </p:sp>
+      <p:sp>
+        <p:nvSpPr>
+          <p:cNvPr id="24" name="TextBox 23"/>
+          <p:cNvSpPr txBox="1"/>
+          <p:nvPr/>
+        </p:nvSpPr>
+        <p:spPr>
+          <a:xfrm>
+            <a:off x="365760" y="5017008"/>
+            <a:ext cx="2200046" cy="1447800"/>
+          </a:xfrm>
+          <a:prstGeom prst="rect">
+            <a:avLst/>
+          </a:prstGeom>
+          <a:noFill/>
+        </p:spPr>
+        <p:txBody>
+          <a:bodyPr wrap="square">
+            <a:spAutoFit/>
+          </a:bodyPr>
+          <a:lstStyle/>
+          <a:p>
+            <a:r>
+              <a:rPr sz="800">
+                <a:hlinkClick r:id="rId39"/>
+              </a:rPr>
+              <a:t>Lofar 1</a:t>
+            </a:r>
+          </a:p>
+          <a:p>
+            <a:r>
+              <a:rPr sz="800">
+                <a:hlinkClick r:id="rId40"/>
+              </a:rPr>
+              <a:t>Lofar 2</a:t>
+            </a:r>
+          </a:p>
+          <a:p>
+            <a:r>
+              <a:rPr sz="800">
+                <a:hlinkClick r:id="rId41"/>
+              </a:rPr>
+              <a:t>Lofar 3</a:t>
+            </a:r>
+          </a:p>
+        </p:txBody>
+      </p:sp>
+      <p:sp>
+        <p:nvSpPr>
+          <p:cNvPr id="25" name="Rounded Rectangle 24">
+            <a:hlinkClick r:id="rId42"/>
+          </p:cNvPr>
+          <p:cNvSpPr/>
+          <p:nvPr/>
+        </p:nvSpPr>
+        <p:spPr>
+          <a:xfrm>
+            <a:off x="2657246" y="4632960"/>
+            <a:ext cx="2200046" cy="365760"/>
+          </a:xfrm>
+          <a:prstGeom prst="roundRect">
+            <a:avLst/>
+          </a:prstGeom>
+          <a:solidFill>
+            <a:srgbClr val="E8EEF7"/>
+          </a:solidFill>
+          <a:ln>
+            <a:solidFill>
+              <a:srgbClr val="1F3A5F"/>
+            </a:solidFill>
+          </a:ln>
+        </p:spPr>
+        <p:style>
+          <a:lnRef idx="1">
+            <a:schemeClr val="accent1"/>
+          </a:lnRef>
+          <a:fillRef idx="3">
+            <a:schemeClr val="accent1"/>
+          </a:fillRef>
+          <a:effectRef idx="2">
+            <a:schemeClr val="accent1"/>
+          </a:effectRef>
+          <a:fontRef idx="minor">
+            <a:schemeClr val="lt1"/>
+          </a:fontRef>
+        </p:style>
+        <p:txBody>
+          <a:bodyPr rtlCol="0" anchor="ctr" lIns="45720" rIns="45720"/>
+          <a:lstStyle/>
+          <a:p>
+            <a:pPr algn="ctr"/>
+            <a:r>
+              <a:rPr sz="900">
+                <a:solidFill>
+                  <a:srgbClr val="1F3A5F"/>
+                </a:solidFill>
+              </a:rPr>
+              <a:t>Gram 31: X-wing contact bearing 051, codename Mustafar</a:t>
+            </a:r>
+          </a:p>
+        </p:txBody>
+      </p:sp>
+      <p:sp>
+        <p:nvSpPr>
+          <p:cNvPr id="26" name="TextBox 25"/>
+          <p:cNvSpPr txBox="1"/>
+          <p:nvPr/>
+        </p:nvSpPr>
+        <p:spPr>
+          <a:xfrm>
+            <a:off x="2657246" y="5017008"/>
+            <a:ext cx="2200046" cy="1447800"/>
+          </a:xfrm>
+          <a:prstGeom prst="rect">
+            <a:avLst/>
+          </a:prstGeom>
+          <a:noFill/>
+        </p:spPr>
+        <p:txBody>
+          <a:bodyPr wrap="square">
+            <a:spAutoFit/>
+          </a:bodyPr>
+          <a:lstStyle/>
+          <a:p>
+            <a:r>
+              <a:rPr sz="800">
+                <a:hlinkClick r:id="rId43"/>
+              </a:rPr>
+              <a:t>Lofar 1</a:t>
+            </a:r>
+          </a:p>
+          <a:p>
+            <a:r>
+              <a:rPr sz="800">
+                <a:hlinkClick r:id="rId44"/>
+              </a:rPr>
+              <a:t>Lofar 2</a:t>
+            </a:r>
+          </a:p>
+        </p:txBody>
+      </p:sp>
+      <p:sp>
+        <p:nvSpPr>
+          <p:cNvPr id="27" name="Rounded Rectangle 26">
+            <a:hlinkClick r:id="rId45"/>
+          </p:cNvPr>
+          <p:cNvSpPr/>
+          <p:nvPr/>
+        </p:nvSpPr>
+        <p:spPr>
+          <a:xfrm>
+            <a:off x="4948732" y="4632960"/>
+            <a:ext cx="2200046" cy="365760"/>
+          </a:xfrm>
+          <a:prstGeom prst="roundRect">
+            <a:avLst/>
+          </a:prstGeom>
+          <a:solidFill>
+            <a:srgbClr val="E8EEF7"/>
+          </a:solidFill>
+          <a:ln>
+            <a:solidFill>
+              <a:srgbClr val="1F3A5F"/>
+            </a:solidFill>
+          </a:ln>
+        </p:spPr>
+        <p:style>
+          <a:lnRef idx="1">
+            <a:schemeClr val="accent1"/>
+          </a:lnRef>
+          <a:fillRef idx="3">
+            <a:schemeClr val="accent1"/>
+          </a:fillRef>
+          <a:effectRef idx="2">
+            <a:schemeClr val="accent1"/>
+          </a:effectRef>
+          <a:fontRef idx="minor">
+            <a:schemeClr val="lt1"/>
+          </a:fontRef>
+        </p:style>
+        <p:txBody>
+          <a:bodyPr rtlCol="0" anchor="ctr" lIns="45720" rIns="45720"/>
+          <a:lstStyle/>
+          <a:p>
+            <a:pPr algn="ctr"/>
+            <a:r>
+              <a:rPr sz="900">
+                <a:solidFill>
+                  <a:srgbClr val="1F3A5F"/>
+                </a:solidFill>
+              </a:rPr>
+              <a:t>Gram 32: FR Sovereign-class, Category 4, Naboo</a:t>
+            </a:r>
+          </a:p>
+        </p:txBody>
+      </p:sp>
+      <p:sp>
+        <p:nvSpPr>
+          <p:cNvPr id="28" name="TextBox 27"/>
+          <p:cNvSpPr txBox="1"/>
+          <p:nvPr/>
+        </p:nvSpPr>
+        <p:spPr>
+          <a:xfrm>
+            <a:off x="4948732" y="5017008"/>
+            <a:ext cx="2200046" cy="1447800"/>
+          </a:xfrm>
+          <a:prstGeom prst="rect">
+            <a:avLst/>
+          </a:prstGeom>
+          <a:noFill/>
+        </p:spPr>
+        <p:txBody>
+          <a:bodyPr wrap="square">
+            <a:spAutoFit/>
+          </a:bodyPr>
+          <a:lstStyle/>
+          <a:p>
+            <a:r>
+              <a:rPr sz="800">
+                <a:hlinkClick r:id="rId46"/>
+              </a:rPr>
+              <a:t>Lofar 1</a:t>
+            </a:r>
+          </a:p>
+          <a:p>
+            <a:r>
+              <a:rPr sz="800">
+                <a:hlinkClick r:id="rId47"/>
+              </a:rPr>
+              <a:t>Lofar 2</a:t>
+            </a:r>
+          </a:p>
+          <a:p>
+            <a:r>
+              <a:rPr sz="800">
+                <a:hlinkClick r:id="rId48"/>
+              </a:rPr>
+              <a:t>Lofar 3</a:t>
+            </a:r>
+          </a:p>
+          <a:p>
+            <a:r>
+              <a:rPr sz="800">
+                <a:hlinkClick r:id="rId49"/>
+              </a:rPr>
+              <a:t>Lofar 4</a:t>
+            </a:r>
+          </a:p>
+        </p:txBody>
+      </p:sp>
+      <p:sp>
+        <p:nvSpPr>
+          <p:cNvPr id="29" name="Rounded Rectangle 28">
+            <a:hlinkClick r:id="rId50"/>
+          </p:cNvPr>
+          <p:cNvSpPr/>
+          <p:nvPr/>
+        </p:nvSpPr>
+        <p:spPr>
+          <a:xfrm>
+            <a:off x="7240219" y="4632960"/>
+            <a:ext cx="2200046" cy="365760"/>
+          </a:xfrm>
+          <a:prstGeom prst="roundRect">
+            <a:avLst/>
+          </a:prstGeom>
+          <a:solidFill>
+            <a:srgbClr val="E8EEF7"/>
+          </a:solidFill>
+          <a:ln>
+            <a:solidFill>
+              <a:srgbClr val="1F3A5F"/>
+            </a:solidFill>
+          </a:ln>
+        </p:spPr>
+        <p:style>
+          <a:lnRef idx="1">
+            <a:schemeClr val="accent1"/>
+          </a:lnRef>
+          <a:fillRef idx="3">
+            <a:schemeClr val="accent1"/>
+          </a:fillRef>
+          <a:effectRef idx="2">
+            <a:schemeClr val="accent1"/>
+          </a:effectRef>
+          <a:fontRef idx="minor">
+            <a:schemeClr val="lt1"/>
+          </a:fontRef>
+        </p:style>
+        <p:txBody>
+          <a:bodyPr rtlCol="0" anchor="ctr" lIns="45720" rIns="45720"/>
+          <a:lstStyle/>
+          <a:p>
+            <a:pPr algn="ctr"/>
+            <a:r>
+              <a:rPr sz="900">
+                <a:solidFill>
+                  <a:srgbClr val="1F3A5F"/>
+                </a:solidFill>
+              </a:rPr>
+              <a:t>Gram 34: FR Equinox, Category 2, Cardassia</a:t>
+            </a:r>
+          </a:p>
+        </p:txBody>
+      </p:sp>
+      <p:sp>
+        <p:nvSpPr>
+          <p:cNvPr id="30" name="TextBox 29"/>
+          <p:cNvSpPr txBox="1"/>
+          <p:nvPr/>
+        </p:nvSpPr>
+        <p:spPr>
+          <a:xfrm>
+            <a:off x="7240219" y="5017008"/>
+            <a:ext cx="2200046" cy="1447800"/>
+          </a:xfrm>
+          <a:prstGeom prst="rect">
+            <a:avLst/>
+          </a:prstGeom>
+          <a:noFill/>
+        </p:spPr>
+        <p:txBody>
+          <a:bodyPr wrap="square">
+            <a:spAutoFit/>
+          </a:bodyPr>
+          <a:lstStyle/>
+          <a:p>
+            <a:r>
+              <a:rPr sz="800">
+                <a:hlinkClick r:id="rId51"/>
+              </a:rPr>
+              <a:t>Lofar 1</a:t>
+            </a:r>
+          </a:p>
+          <a:p>
+            <a:r>
+              <a:rPr sz="800">
+                <a:hlinkClick r:id="rId52"/>
+              </a:rPr>
+              <a:t>Lofar 2</a:t>
+            </a:r>
+          </a:p>
+        </p:txBody>
+      </p:sp>
+      <p:sp>
+        <p:nvSpPr>
+          <p:cNvPr id="31" name="Rounded Rectangle 30">
+            <a:hlinkClick r:id="rId53"/>
+          </p:cNvPr>
+          <p:cNvSpPr/>
+          <p:nvPr/>
+        </p:nvSpPr>
+        <p:spPr>
+          <a:xfrm>
+            <a:off x="9531705" y="4632960"/>
+            <a:ext cx="2200046" cy="365760"/>
+          </a:xfrm>
+          <a:prstGeom prst="roundRect">
+            <a:avLst/>
+          </a:prstGeom>
+          <a:solidFill>
+            <a:srgbClr val="E8EEF7"/>
+          </a:solidFill>
+          <a:ln>
+            <a:solidFill>
+              <a:srgbClr val="1F3A5F"/>
+            </a:solidFill>
+          </a:ln>
+        </p:spPr>
+        <p:style>
+          <a:lnRef idx="1">
+            <a:schemeClr val="accent1"/>
+          </a:lnRef>
+          <a:fillRef idx="3">
+            <a:schemeClr val="accent1"/>
+          </a:fillRef>
+          <a:effectRef idx="2">
+            <a:schemeClr val="accent1"/>
+          </a:effectRef>
+          <a:fontRef idx="minor">
+            <a:schemeClr val="lt1"/>
+          </a:fontRef>
+        </p:style>
+        <p:txBody>
+          <a:bodyPr rtlCol="0" anchor="ctr" lIns="45720" rIns="45720"/>
+          <a:lstStyle/>
+          <a:p>
+            <a:pPr algn="ctr"/>
+            <a:r>
+              <a:rPr sz="900">
+                <a:solidFill>
+                  <a:srgbClr val="1F3A5F"/>
+                </a:solidFill>
+              </a:rPr>
+              <a:t>Gram 36: FR Cerritos, Category 3, Bajor</a:t>
+            </a:r>
+          </a:p>
+        </p:txBody>
+      </p:sp>
+      <p:sp>
+        <p:nvSpPr>
+          <p:cNvPr id="32" name="TextBox 31"/>
+          <p:cNvSpPr txBox="1"/>
+          <p:nvPr/>
+        </p:nvSpPr>
+        <p:spPr>
+          <a:xfrm>
+            <a:off x="9531705" y="5017008"/>
+            <a:ext cx="2200046" cy="1447800"/>
+          </a:xfrm>
+          <a:prstGeom prst="rect">
+            <a:avLst/>
+          </a:prstGeom>
+          <a:noFill/>
+        </p:spPr>
+        <p:txBody>
+          <a:bodyPr wrap="square">
+            <a:spAutoFit/>
+          </a:bodyPr>
+          <a:lstStyle/>
+          <a:p>
+            <a:r>
+              <a:rPr sz="800">
                 <a:hlinkClick r:id="rId54"/>
               </a:rPr>
               <a:t>Lofar 1</a:t>
+            </a:r>
+          </a:p>
+        </p:txBody>
+      </p:sp>
+    </p:spTree>
+  </p:cSld>
+  <p:clrMapOvr>
+    <a:masterClrMapping/>
+  </p:clrMapOvr>
+</p:sld>
+</file>
+
+<file path=ppt/slides/slide4.xml><?xml version="1.0" encoding="utf-8"?>
+<p:sld xmlns:a="http://schemas.openxmlformats.org/drawingml/2006/main" xmlns:p="http://schemas.openxmlformats.org/presentationml/2006/main" xmlns:r="http://schemas.openxmlformats.org/officeDocument/2006/relationships">
+  <p:cSld>
+    <p:spTree>
+      <p:nvGrpSpPr>
+        <p:cNvPr id="1" name=""/>
+        <p:cNvGrpSpPr/>
+        <p:nvPr/>
+      </p:nvGrpSpPr>
+      <p:grpSpPr/>
+      <p:sp>
+        <p:nvSpPr>
+          <p:cNvPr id="2" name="TextBox 1"/>
+          <p:cNvSpPr txBox="1"/>
+          <p:nvPr/>
+        </p:nvSpPr>
+        <p:spPr>
+          <a:xfrm>
+            <a:off x="914400" y="2377440"/>
+            <a:ext cx="10360152" cy="1280160"/>
+          </a:xfrm>
+          <a:prstGeom prst="rect">
+            <a:avLst/>
+          </a:prstGeom>
+          <a:noFill/>
+        </p:spPr>
+        <p:txBody>
+          <a:bodyPr wrap="square">
+            <a:spAutoFit/>
+          </a:bodyPr>
+          <a:lstStyle/>
+          <a:p>
+            <a:pPr algn="ctr"/>
+            <a:r>
+              <a:rPr sz="4000" b="1">
+                <a:solidFill>
+                  <a:srgbClr val="1F3A5F"/>
+                </a:solidFill>
+              </a:rPr>
+              <a:t>End of Instructor Progress Test 2 Grams_Updated</a:t>
+            </a:r>
+          </a:p>
+        </p:txBody>
+      </p:sp>
+      <p:sp>
+        <p:nvSpPr>
+          <p:cNvPr id="3" name="TextBox 2"/>
+          <p:cNvSpPr txBox="1"/>
+          <p:nvPr/>
+        </p:nvSpPr>
+        <p:spPr>
+          <a:xfrm>
+            <a:off x="914400" y="3840480"/>
+            <a:ext cx="10360152" cy="731520"/>
+          </a:xfrm>
+          <a:prstGeom prst="rect">
+            <a:avLst/>
+          </a:prstGeom>
+          <a:noFill/>
+        </p:spPr>
+        <p:txBody>
+          <a:bodyPr wrap="none">
+            <a:spAutoFit/>
+          </a:bodyPr>
+          <a:lstStyle/>
+          <a:p>
+            <a:pPr algn="ctr"/>
+            <a:r>
+              <a:rPr sz="2400">
+                <a:solidFill>
+                  <a:srgbClr val="1F3A5F"/>
+                </a:solidFill>
+              </a:rPr>
+              <a:t>Instructor Version</a:t>
             </a:r>
           </a:p>
         </p:txBody>
